--- a/就職作品詳細資料.pptx
+++ b/就職作品詳細資料.pptx
@@ -4,17 +4,19 @@
   <p:sldMasterIdLst>
     <p:sldMasterId id="2147483648" r:id="rId1"/>
   </p:sldMasterIdLst>
+  <p:notesMasterIdLst>
+    <p:notesMasterId r:id="rId11"/>
+  </p:notesMasterIdLst>
   <p:sldIdLst>
     <p:sldId id="256" r:id="rId2"/>
     <p:sldId id="257" r:id="rId3"/>
     <p:sldId id="259" r:id="rId4"/>
     <p:sldId id="260" r:id="rId5"/>
-    <p:sldId id="261" r:id="rId6"/>
-    <p:sldId id="262" r:id="rId7"/>
-    <p:sldId id="264" r:id="rId8"/>
-    <p:sldId id="263" r:id="rId9"/>
-    <p:sldId id="265" r:id="rId10"/>
-    <p:sldId id="266" r:id="rId11"/>
+    <p:sldId id="262" r:id="rId6"/>
+    <p:sldId id="264" r:id="rId7"/>
+    <p:sldId id="267" r:id="rId8"/>
+    <p:sldId id="265" r:id="rId9"/>
+    <p:sldId id="266" r:id="rId10"/>
   </p:sldIdLst>
   <p:sldSz cx="12192000" cy="6858000"/>
   <p:notesSz cx="12192000" cy="6858000"/>
@@ -42,6 +44,471 @@
 </p:presentation>
 </file>
 
+<file path=ppt/notesMasters/notesMaster1.xml><?xml version="1.0" encoding="utf-8"?>
+<p:notesMaster xmlns:a="http://schemas.openxmlformats.org/drawingml/2006/main" xmlns:r="http://schemas.openxmlformats.org/officeDocument/2006/relationships" xmlns:p="http://schemas.openxmlformats.org/presentationml/2006/main">
+  <p:cSld>
+    <p:bg>
+      <p:bgRef idx="1001">
+        <a:schemeClr val="bg1"/>
+      </p:bgRef>
+    </p:bg>
+    <p:spTree>
+      <p:nvGrpSpPr>
+        <p:cNvPr id="1" name=""/>
+        <p:cNvGrpSpPr/>
+        <p:nvPr/>
+      </p:nvGrpSpPr>
+      <p:grpSpPr>
+        <a:xfrm>
+          <a:off x="0" y="0"/>
+          <a:ext cx="0" cy="0"/>
+          <a:chOff x="0" y="0"/>
+          <a:chExt cx="0" cy="0"/>
+        </a:xfrm>
+      </p:grpSpPr>
+      <p:sp>
+        <p:nvSpPr>
+          <p:cNvPr id="2" name="ヘッダー プレースホルダー 1"/>
+          <p:cNvSpPr>
+            <a:spLocks noGrp="1"/>
+          </p:cNvSpPr>
+          <p:nvPr>
+            <p:ph type="hdr" sz="quarter"/>
+          </p:nvPr>
+        </p:nvSpPr>
+        <p:spPr>
+          <a:xfrm>
+            <a:off x="0" y="0"/>
+            <a:ext cx="5283200" cy="344488"/>
+          </a:xfrm>
+          <a:prstGeom prst="rect">
+            <a:avLst/>
+          </a:prstGeom>
+        </p:spPr>
+        <p:txBody>
+          <a:bodyPr vert="horz" lIns="91440" tIns="45720" rIns="91440" bIns="45720" rtlCol="0"/>
+          <a:lstStyle>
+            <a:lvl1pPr algn="l">
+              <a:defRPr sz="1200"/>
+            </a:lvl1pPr>
+          </a:lstStyle>
+          <a:p>
+            <a:endParaRPr kumimoji="1" lang="ja-JP" altLang="en-US"/>
+          </a:p>
+        </p:txBody>
+      </p:sp>
+      <p:sp>
+        <p:nvSpPr>
+          <p:cNvPr id="3" name="日付プレースホルダー 2"/>
+          <p:cNvSpPr>
+            <a:spLocks noGrp="1"/>
+          </p:cNvSpPr>
+          <p:nvPr>
+            <p:ph type="dt" idx="1"/>
+          </p:nvPr>
+        </p:nvSpPr>
+        <p:spPr>
+          <a:xfrm>
+            <a:off x="6905625" y="0"/>
+            <a:ext cx="5283200" cy="344488"/>
+          </a:xfrm>
+          <a:prstGeom prst="rect">
+            <a:avLst/>
+          </a:prstGeom>
+        </p:spPr>
+        <p:txBody>
+          <a:bodyPr vert="horz" lIns="91440" tIns="45720" rIns="91440" bIns="45720" rtlCol="0"/>
+          <a:lstStyle>
+            <a:lvl1pPr algn="r">
+              <a:defRPr sz="1200"/>
+            </a:lvl1pPr>
+          </a:lstStyle>
+          <a:p>
+            <a:fld id="{7844CC07-7CCF-4856-941D-F16981C68265}" type="datetimeFigureOut">
+              <a:rPr kumimoji="1" lang="ja-JP" altLang="en-US" smtClean="0"/>
+              <a:t>2026/2/2</a:t>
+            </a:fld>
+            <a:endParaRPr kumimoji="1" lang="ja-JP" altLang="en-US"/>
+          </a:p>
+        </p:txBody>
+      </p:sp>
+      <p:sp>
+        <p:nvSpPr>
+          <p:cNvPr id="4" name="スライド イメージ プレースホルダー 3"/>
+          <p:cNvSpPr>
+            <a:spLocks noGrp="1" noRot="1" noChangeAspect="1"/>
+          </p:cNvSpPr>
+          <p:nvPr>
+            <p:ph type="sldImg" idx="2"/>
+          </p:nvPr>
+        </p:nvSpPr>
+        <p:spPr>
+          <a:xfrm>
+            <a:off x="4038600" y="857250"/>
+            <a:ext cx="4114800" cy="2314575"/>
+          </a:xfrm>
+          <a:prstGeom prst="rect">
+            <a:avLst/>
+          </a:prstGeom>
+          <a:noFill/>
+          <a:ln w="12700">
+            <a:solidFill>
+              <a:prstClr val="black"/>
+            </a:solidFill>
+          </a:ln>
+        </p:spPr>
+        <p:txBody>
+          <a:bodyPr vert="horz" lIns="91440" tIns="45720" rIns="91440" bIns="45720" rtlCol="0" anchor="ctr"/>
+          <a:lstStyle/>
+          <a:p>
+            <a:endParaRPr lang="ja-JP" altLang="en-US"/>
+          </a:p>
+        </p:txBody>
+      </p:sp>
+      <p:sp>
+        <p:nvSpPr>
+          <p:cNvPr id="5" name="ノート プレースホルダー 4"/>
+          <p:cNvSpPr>
+            <a:spLocks noGrp="1"/>
+          </p:cNvSpPr>
+          <p:nvPr>
+            <p:ph type="body" sz="quarter" idx="3"/>
+          </p:nvPr>
+        </p:nvSpPr>
+        <p:spPr>
+          <a:xfrm>
+            <a:off x="1219200" y="3300413"/>
+            <a:ext cx="9753600" cy="2700337"/>
+          </a:xfrm>
+          <a:prstGeom prst="rect">
+            <a:avLst/>
+          </a:prstGeom>
+        </p:spPr>
+        <p:txBody>
+          <a:bodyPr vert="horz" lIns="91440" tIns="45720" rIns="91440" bIns="45720" rtlCol="0"/>
+          <a:lstStyle/>
+          <a:p>
+            <a:pPr lvl="0"/>
+            <a:r>
+              <a:rPr kumimoji="1" lang="ja-JP" altLang="en-US"/>
+              <a:t>マスター テキストの書式設定</a:t>
+            </a:r>
+          </a:p>
+          <a:p>
+            <a:pPr lvl="1"/>
+            <a:r>
+              <a:rPr kumimoji="1" lang="ja-JP" altLang="en-US"/>
+              <a:t>第 </a:t>
+            </a:r>
+            <a:r>
+              <a:rPr kumimoji="1" lang="en-US" altLang="ja-JP"/>
+              <a:t>2 </a:t>
+            </a:r>
+            <a:r>
+              <a:rPr kumimoji="1" lang="ja-JP" altLang="en-US"/>
+              <a:t>レベル</a:t>
+            </a:r>
+          </a:p>
+          <a:p>
+            <a:pPr lvl="2"/>
+            <a:r>
+              <a:rPr kumimoji="1" lang="ja-JP" altLang="en-US"/>
+              <a:t>第 </a:t>
+            </a:r>
+            <a:r>
+              <a:rPr kumimoji="1" lang="en-US" altLang="ja-JP"/>
+              <a:t>3 </a:t>
+            </a:r>
+            <a:r>
+              <a:rPr kumimoji="1" lang="ja-JP" altLang="en-US"/>
+              <a:t>レベル</a:t>
+            </a:r>
+          </a:p>
+          <a:p>
+            <a:pPr lvl="3"/>
+            <a:r>
+              <a:rPr kumimoji="1" lang="ja-JP" altLang="en-US"/>
+              <a:t>第 </a:t>
+            </a:r>
+            <a:r>
+              <a:rPr kumimoji="1" lang="en-US" altLang="ja-JP"/>
+              <a:t>4 </a:t>
+            </a:r>
+            <a:r>
+              <a:rPr kumimoji="1" lang="ja-JP" altLang="en-US"/>
+              <a:t>レベル</a:t>
+            </a:r>
+          </a:p>
+          <a:p>
+            <a:pPr lvl="4"/>
+            <a:r>
+              <a:rPr kumimoji="1" lang="ja-JP" altLang="en-US"/>
+              <a:t>第 </a:t>
+            </a:r>
+            <a:r>
+              <a:rPr kumimoji="1" lang="en-US" altLang="ja-JP"/>
+              <a:t>5 </a:t>
+            </a:r>
+            <a:r>
+              <a:rPr kumimoji="1" lang="ja-JP" altLang="en-US"/>
+              <a:t>レベル</a:t>
+            </a:r>
+          </a:p>
+        </p:txBody>
+      </p:sp>
+      <p:sp>
+        <p:nvSpPr>
+          <p:cNvPr id="6" name="フッター プレースホルダー 5"/>
+          <p:cNvSpPr>
+            <a:spLocks noGrp="1"/>
+          </p:cNvSpPr>
+          <p:nvPr>
+            <p:ph type="ftr" sz="quarter" idx="4"/>
+          </p:nvPr>
+        </p:nvSpPr>
+        <p:spPr>
+          <a:xfrm>
+            <a:off x="0" y="6513513"/>
+            <a:ext cx="5283200" cy="344487"/>
+          </a:xfrm>
+          <a:prstGeom prst="rect">
+            <a:avLst/>
+          </a:prstGeom>
+        </p:spPr>
+        <p:txBody>
+          <a:bodyPr vert="horz" lIns="91440" tIns="45720" rIns="91440" bIns="45720" rtlCol="0" anchor="b"/>
+          <a:lstStyle>
+            <a:lvl1pPr algn="l">
+              <a:defRPr sz="1200"/>
+            </a:lvl1pPr>
+          </a:lstStyle>
+          <a:p>
+            <a:endParaRPr kumimoji="1" lang="ja-JP" altLang="en-US"/>
+          </a:p>
+        </p:txBody>
+      </p:sp>
+      <p:sp>
+        <p:nvSpPr>
+          <p:cNvPr id="7" name="スライド番号プレースホルダー 6"/>
+          <p:cNvSpPr>
+            <a:spLocks noGrp="1"/>
+          </p:cNvSpPr>
+          <p:nvPr>
+            <p:ph type="sldNum" sz="quarter" idx="5"/>
+          </p:nvPr>
+        </p:nvSpPr>
+        <p:spPr>
+          <a:xfrm>
+            <a:off x="6905625" y="6513513"/>
+            <a:ext cx="5283200" cy="344487"/>
+          </a:xfrm>
+          <a:prstGeom prst="rect">
+            <a:avLst/>
+          </a:prstGeom>
+        </p:spPr>
+        <p:txBody>
+          <a:bodyPr vert="horz" lIns="91440" tIns="45720" rIns="91440" bIns="45720" rtlCol="0" anchor="b"/>
+          <a:lstStyle>
+            <a:lvl1pPr algn="r">
+              <a:defRPr sz="1200"/>
+            </a:lvl1pPr>
+          </a:lstStyle>
+          <a:p>
+            <a:fld id="{C0476A4E-7012-4A9C-843C-6443E265FB9C}" type="slidenum">
+              <a:rPr kumimoji="1" lang="ja-JP" altLang="en-US" smtClean="0"/>
+              <a:t>‹#›</a:t>
+            </a:fld>
+            <a:endParaRPr kumimoji="1" lang="ja-JP" altLang="en-US"/>
+          </a:p>
+        </p:txBody>
+      </p:sp>
+    </p:spTree>
+    <p:extLst>
+      <p:ext uri="{BB962C8B-B14F-4D97-AF65-F5344CB8AC3E}">
+        <p14:creationId xmlns:p14="http://schemas.microsoft.com/office/powerpoint/2010/main" val="4229608781"/>
+      </p:ext>
+    </p:extLst>
+  </p:cSld>
+  <p:clrMap bg1="lt1" tx1="dk1" bg2="lt2" tx2="dk2" accent1="accent1" accent2="accent2" accent3="accent3" accent4="accent4" accent5="accent5" accent6="accent6" hlink="hlink" folHlink="folHlink"/>
+  <p:notesStyle>
+    <a:lvl1pPr marL="0" algn="l" defTabSz="914400" rtl="0" eaLnBrk="1" latinLnBrk="0" hangingPunct="1">
+      <a:defRPr kumimoji="1" sz="1200" kern="1200">
+        <a:solidFill>
+          <a:schemeClr val="tx1"/>
+        </a:solidFill>
+        <a:latin typeface="+mn-lt"/>
+        <a:ea typeface="+mn-ea"/>
+        <a:cs typeface="+mn-cs"/>
+      </a:defRPr>
+    </a:lvl1pPr>
+    <a:lvl2pPr marL="457200" algn="l" defTabSz="914400" rtl="0" eaLnBrk="1" latinLnBrk="0" hangingPunct="1">
+      <a:defRPr kumimoji="1" sz="1200" kern="1200">
+        <a:solidFill>
+          <a:schemeClr val="tx1"/>
+        </a:solidFill>
+        <a:latin typeface="+mn-lt"/>
+        <a:ea typeface="+mn-ea"/>
+        <a:cs typeface="+mn-cs"/>
+      </a:defRPr>
+    </a:lvl2pPr>
+    <a:lvl3pPr marL="914400" algn="l" defTabSz="914400" rtl="0" eaLnBrk="1" latinLnBrk="0" hangingPunct="1">
+      <a:defRPr kumimoji="1" sz="1200" kern="1200">
+        <a:solidFill>
+          <a:schemeClr val="tx1"/>
+        </a:solidFill>
+        <a:latin typeface="+mn-lt"/>
+        <a:ea typeface="+mn-ea"/>
+        <a:cs typeface="+mn-cs"/>
+      </a:defRPr>
+    </a:lvl3pPr>
+    <a:lvl4pPr marL="1371600" algn="l" defTabSz="914400" rtl="0" eaLnBrk="1" latinLnBrk="0" hangingPunct="1">
+      <a:defRPr kumimoji="1" sz="1200" kern="1200">
+        <a:solidFill>
+          <a:schemeClr val="tx1"/>
+        </a:solidFill>
+        <a:latin typeface="+mn-lt"/>
+        <a:ea typeface="+mn-ea"/>
+        <a:cs typeface="+mn-cs"/>
+      </a:defRPr>
+    </a:lvl4pPr>
+    <a:lvl5pPr marL="1828800" algn="l" defTabSz="914400" rtl="0" eaLnBrk="1" latinLnBrk="0" hangingPunct="1">
+      <a:defRPr kumimoji="1" sz="1200" kern="1200">
+        <a:solidFill>
+          <a:schemeClr val="tx1"/>
+        </a:solidFill>
+        <a:latin typeface="+mn-lt"/>
+        <a:ea typeface="+mn-ea"/>
+        <a:cs typeface="+mn-cs"/>
+      </a:defRPr>
+    </a:lvl5pPr>
+    <a:lvl6pPr marL="2286000" algn="l" defTabSz="914400" rtl="0" eaLnBrk="1" latinLnBrk="0" hangingPunct="1">
+      <a:defRPr kumimoji="1" sz="1200" kern="1200">
+        <a:solidFill>
+          <a:schemeClr val="tx1"/>
+        </a:solidFill>
+        <a:latin typeface="+mn-lt"/>
+        <a:ea typeface="+mn-ea"/>
+        <a:cs typeface="+mn-cs"/>
+      </a:defRPr>
+    </a:lvl6pPr>
+    <a:lvl7pPr marL="2743200" algn="l" defTabSz="914400" rtl="0" eaLnBrk="1" latinLnBrk="0" hangingPunct="1">
+      <a:defRPr kumimoji="1" sz="1200" kern="1200">
+        <a:solidFill>
+          <a:schemeClr val="tx1"/>
+        </a:solidFill>
+        <a:latin typeface="+mn-lt"/>
+        <a:ea typeface="+mn-ea"/>
+        <a:cs typeface="+mn-cs"/>
+      </a:defRPr>
+    </a:lvl7pPr>
+    <a:lvl8pPr marL="3200400" algn="l" defTabSz="914400" rtl="0" eaLnBrk="1" latinLnBrk="0" hangingPunct="1">
+      <a:defRPr kumimoji="1" sz="1200" kern="1200">
+        <a:solidFill>
+          <a:schemeClr val="tx1"/>
+        </a:solidFill>
+        <a:latin typeface="+mn-lt"/>
+        <a:ea typeface="+mn-ea"/>
+        <a:cs typeface="+mn-cs"/>
+      </a:defRPr>
+    </a:lvl8pPr>
+    <a:lvl9pPr marL="3657600" algn="l" defTabSz="914400" rtl="0" eaLnBrk="1" latinLnBrk="0" hangingPunct="1">
+      <a:defRPr kumimoji="1" sz="1200" kern="1200">
+        <a:solidFill>
+          <a:schemeClr val="tx1"/>
+        </a:solidFill>
+        <a:latin typeface="+mn-lt"/>
+        <a:ea typeface="+mn-ea"/>
+        <a:cs typeface="+mn-cs"/>
+      </a:defRPr>
+    </a:lvl9pPr>
+  </p:notesStyle>
+</p:notesMaster>
+</file>
+
+<file path=ppt/notesSlides/notesSlide1.xml><?xml version="1.0" encoding="utf-8"?>
+<p:notes xmlns:a="http://schemas.openxmlformats.org/drawingml/2006/main" xmlns:r="http://schemas.openxmlformats.org/officeDocument/2006/relationships" xmlns:p="http://schemas.openxmlformats.org/presentationml/2006/main">
+  <p:cSld>
+    <p:spTree>
+      <p:nvGrpSpPr>
+        <p:cNvPr id="1" name=""/>
+        <p:cNvGrpSpPr/>
+        <p:nvPr/>
+      </p:nvGrpSpPr>
+      <p:grpSpPr>
+        <a:xfrm>
+          <a:off x="0" y="0"/>
+          <a:ext cx="0" cy="0"/>
+          <a:chOff x="0" y="0"/>
+          <a:chExt cx="0" cy="0"/>
+        </a:xfrm>
+      </p:grpSpPr>
+      <p:sp>
+        <p:nvSpPr>
+          <p:cNvPr id="2" name="スライド イメージ プレースホルダー 1"/>
+          <p:cNvSpPr>
+            <a:spLocks noGrp="1" noRot="1" noChangeAspect="1"/>
+          </p:cNvSpPr>
+          <p:nvPr>
+            <p:ph type="sldImg"/>
+          </p:nvPr>
+        </p:nvSpPr>
+        <p:spPr/>
+      </p:sp>
+      <p:sp>
+        <p:nvSpPr>
+          <p:cNvPr id="3" name="ノート プレースホルダー 2"/>
+          <p:cNvSpPr>
+            <a:spLocks noGrp="1"/>
+          </p:cNvSpPr>
+          <p:nvPr>
+            <p:ph type="body" idx="1"/>
+          </p:nvPr>
+        </p:nvSpPr>
+        <p:spPr/>
+        <p:txBody>
+          <a:bodyPr/>
+          <a:lstStyle/>
+          <a:p>
+            <a:endParaRPr kumimoji="1" lang="ja-JP" altLang="en-US" dirty="0"/>
+          </a:p>
+        </p:txBody>
+      </p:sp>
+      <p:sp>
+        <p:nvSpPr>
+          <p:cNvPr id="4" name="スライド番号プレースホルダー 3"/>
+          <p:cNvSpPr>
+            <a:spLocks noGrp="1"/>
+          </p:cNvSpPr>
+          <p:nvPr>
+            <p:ph type="sldNum" sz="quarter" idx="5"/>
+          </p:nvPr>
+        </p:nvSpPr>
+        <p:spPr/>
+        <p:txBody>
+          <a:bodyPr/>
+          <a:lstStyle/>
+          <a:p>
+            <a:fld id="{C0476A4E-7012-4A9C-843C-6443E265FB9C}" type="slidenum">
+              <a:rPr kumimoji="1" lang="ja-JP" altLang="en-US" smtClean="0"/>
+              <a:t>7</a:t>
+            </a:fld>
+            <a:endParaRPr kumimoji="1" lang="ja-JP" altLang="en-US"/>
+          </a:p>
+        </p:txBody>
+      </p:sp>
+    </p:spTree>
+    <p:extLst>
+      <p:ext uri="{BB962C8B-B14F-4D97-AF65-F5344CB8AC3E}">
+        <p14:creationId xmlns:p14="http://schemas.microsoft.com/office/powerpoint/2010/main" val="2745496254"/>
+      </p:ext>
+    </p:extLst>
+  </p:cSld>
+  <p:clrMapOvr>
+    <a:masterClrMapping/>
+  </p:clrMapOvr>
+</p:notes>
+</file>
+
 <file path=ppt/slideLayouts/slideLayout1.xml><?xml version="1.0" encoding="utf-8"?>
 <p:sldLayout xmlns:a="http://schemas.openxmlformats.org/drawingml/2006/main" xmlns:r="http://schemas.openxmlformats.org/officeDocument/2006/relationships" xmlns:p="http://schemas.openxmlformats.org/presentationml/2006/main" type="obj" preserve="1">
   <p:cSld name="Title Slide">
@@ -193,7 +660,7 @@
           <a:p>
             <a:fld id="{1D8BD707-D9CF-40AE-B4C6-C98DA3205C09}" type="datetimeFigureOut">
               <a:rPr lang="en-US"/>
-              <a:t>1/31/2026</a:t>
+              <a:t>2/2/2026</a:t>
             </a:fld>
             <a:endParaRPr lang="en-US"/>
           </a:p>
@@ -370,7 +837,7 @@
           <a:p>
             <a:fld id="{1D8BD707-D9CF-40AE-B4C6-C98DA3205C09}" type="datetimeFigureOut">
               <a:rPr lang="en-US"/>
-              <a:t>1/31/2026</a:t>
+              <a:t>2/2/2026</a:t>
             </a:fld>
             <a:endParaRPr lang="en-US"/>
           </a:p>
@@ -584,7 +1051,7 @@
           <a:p>
             <a:fld id="{1D8BD707-D9CF-40AE-B4C6-C98DA3205C09}" type="datetimeFigureOut">
               <a:rPr lang="en-US"/>
-              <a:t>1/31/2026</a:t>
+              <a:t>2/2/2026</a:t>
             </a:fld>
             <a:endParaRPr lang="en-US"/>
           </a:p>
@@ -732,7 +1199,7 @@
           <a:p>
             <a:fld id="{1D8BD707-D9CF-40AE-B4C6-C98DA3205C09}" type="datetimeFigureOut">
               <a:rPr lang="en-US"/>
-              <a:t>1/31/2026</a:t>
+              <a:t>2/2/2026</a:t>
             </a:fld>
             <a:endParaRPr lang="en-US"/>
           </a:p>
@@ -851,7 +1318,7 @@
           <a:p>
             <a:fld id="{1D8BD707-D9CF-40AE-B4C6-C98DA3205C09}" type="datetimeFigureOut">
               <a:rPr lang="en-US"/>
-              <a:t>1/31/2026</a:t>
+              <a:t>2/2/2026</a:t>
             </a:fld>
             <a:endParaRPr lang="en-US"/>
           </a:p>
@@ -1098,7 +1565,7 @@
           <a:p>
             <a:fld id="{1D8BD707-D9CF-40AE-B4C6-C98DA3205C09}" type="datetimeFigureOut">
               <a:rPr lang="en-US"/>
-              <a:t>1/31/2026</a:t>
+              <a:t>2/2/2026</a:t>
             </a:fld>
             <a:endParaRPr lang="en-US"/>
           </a:p>
@@ -1329,8 +1796,8 @@
         </p:nvSpPr>
         <p:spPr>
           <a:xfrm>
-            <a:off x="727710" y="2057400"/>
-            <a:ext cx="10736580" cy="936154"/>
+            <a:off x="2840355" y="1905000"/>
+            <a:ext cx="6511290" cy="936154"/>
           </a:xfrm>
           <a:prstGeom prst="rect">
             <a:avLst/>
@@ -1352,7 +1819,7 @@
             </a:pPr>
             <a:r>
               <a:rPr lang="ja-JP" altLang="en-US" sz="6000" dirty="0"/>
-              <a:t>作品詳細資料</a:t>
+              <a:t>就職作品詳細資料</a:t>
             </a:r>
             <a:endParaRPr sz="6000" dirty="0"/>
           </a:p>
@@ -1366,8 +1833,8 @@
         </p:nvSpPr>
         <p:spPr>
           <a:xfrm>
-            <a:off x="4381500" y="3733800"/>
-            <a:ext cx="3429000" cy="536685"/>
+            <a:off x="2914650" y="5791200"/>
+            <a:ext cx="6362700" cy="536685"/>
           </a:xfrm>
           <a:prstGeom prst="rect">
             <a:avLst/>
@@ -1379,7 +1846,7 @@
           </a:bodyPr>
           <a:lstStyle/>
           <a:p>
-            <a:pPr marL="12700">
+            <a:pPr marL="12700" algn="ctr">
               <a:lnSpc>
                 <a:spcPct val="100000"/>
               </a:lnSpc>
@@ -1405,7 +1872,7 @@
                 <a:latin typeface="MS Gothic"/>
                 <a:cs typeface="MS Gothic"/>
               </a:rPr>
-              <a:t>大阪　　松田 </a:t>
+              <a:t>大阪　ゲーム４年制学科　松田 </a:t>
             </a:r>
             <a:r>
               <a:rPr sz="2800" spc="-125" dirty="0" err="1">
@@ -1424,240 +1891,7 @@
           </a:p>
         </p:txBody>
       </p:sp>
-      <p:sp>
-        <p:nvSpPr>
-          <p:cNvPr id="4" name="object 3">
-            <a:extLst>
-              <a:ext uri="{FF2B5EF4-FFF2-40B4-BE49-F238E27FC236}">
-                <a16:creationId xmlns:a16="http://schemas.microsoft.com/office/drawing/2014/main" id="{521353C4-DEF2-FC66-4268-DA9E1CEAC752}"/>
-              </a:ext>
-            </a:extLst>
-          </p:cNvPr>
-          <p:cNvSpPr txBox="1"/>
-          <p:nvPr/>
-        </p:nvSpPr>
-        <p:spPr>
-          <a:xfrm>
-            <a:off x="4381500" y="4419600"/>
-            <a:ext cx="3429000" cy="536685"/>
-          </a:xfrm>
-          <a:prstGeom prst="rect">
-            <a:avLst/>
-          </a:prstGeom>
-        </p:spPr>
-        <p:txBody>
-          <a:bodyPr vert="horz" wrap="square" lIns="0" tIns="104775" rIns="0" bIns="0" rtlCol="0">
-            <a:spAutoFit/>
-          </a:bodyPr>
-          <a:lstStyle/>
-          <a:p>
-            <a:pPr marL="12700">
-              <a:lnSpc>
-                <a:spcPct val="100000"/>
-              </a:lnSpc>
-              <a:spcBef>
-                <a:spcPts val="735"/>
-              </a:spcBef>
-            </a:pPr>
-            <a:r>
-              <a:rPr lang="en-US" altLang="ja-JP" sz="2800" spc="-125" dirty="0">
-                <a:solidFill>
-                  <a:srgbClr val="FFFFFF"/>
-                </a:solidFill>
-                <a:latin typeface="MS Gothic"/>
-                <a:cs typeface="MS Gothic"/>
-              </a:rPr>
-              <a:t>AT13B529</a:t>
-            </a:r>
-            <a:r>
-              <a:rPr lang="ja-JP" altLang="en-US" sz="2800" spc="-125" dirty="0">
-                <a:solidFill>
-                  <a:srgbClr val="FFFFFF"/>
-                </a:solidFill>
-                <a:latin typeface="MS Gothic"/>
-                <a:cs typeface="MS Gothic"/>
-              </a:rPr>
-              <a:t>　</a:t>
-            </a:r>
-            <a:r>
-              <a:rPr lang="en-US" altLang="ja-JP" sz="2800" spc="-125" dirty="0">
-                <a:solidFill>
-                  <a:srgbClr val="FFFFFF"/>
-                </a:solidFill>
-                <a:latin typeface="MS Gothic"/>
-                <a:cs typeface="MS Gothic"/>
-              </a:rPr>
-              <a:t>32</a:t>
-            </a:r>
-            <a:endParaRPr sz="2800" dirty="0">
-              <a:latin typeface="MS Gothic"/>
-              <a:cs typeface="MS Gothic"/>
-            </a:endParaRPr>
-          </a:p>
-        </p:txBody>
-      </p:sp>
     </p:spTree>
-  </p:cSld>
-  <p:clrMapOvr>
-    <a:masterClrMapping/>
-  </p:clrMapOvr>
-</p:sld>
-</file>
-
-<file path=ppt/slides/slide10.xml><?xml version="1.0" encoding="utf-8"?>
-<p:sld xmlns:a="http://schemas.openxmlformats.org/drawingml/2006/main" xmlns:r="http://schemas.openxmlformats.org/officeDocument/2006/relationships" xmlns:p="http://schemas.openxmlformats.org/presentationml/2006/main">
-  <p:cSld>
-    <p:spTree>
-      <p:nvGrpSpPr>
-        <p:cNvPr id="1" name="">
-          <a:extLst>
-            <a:ext uri="{FF2B5EF4-FFF2-40B4-BE49-F238E27FC236}">
-              <a16:creationId xmlns:a16="http://schemas.microsoft.com/office/drawing/2014/main" id="{5180B81A-2B52-A397-F013-E1D59C17A104}"/>
-            </a:ext>
-          </a:extLst>
-        </p:cNvPr>
-        <p:cNvGrpSpPr/>
-        <p:nvPr/>
-      </p:nvGrpSpPr>
-      <p:grpSpPr>
-        <a:xfrm>
-          <a:off x="0" y="0"/>
-          <a:ext cx="0" cy="0"/>
-          <a:chOff x="0" y="0"/>
-          <a:chExt cx="0" cy="0"/>
-        </a:xfrm>
-      </p:grpSpPr>
-      <p:sp>
-        <p:nvSpPr>
-          <p:cNvPr id="2" name="タイトル 1">
-            <a:extLst>
-              <a:ext uri="{FF2B5EF4-FFF2-40B4-BE49-F238E27FC236}">
-                <a16:creationId xmlns:a16="http://schemas.microsoft.com/office/drawing/2014/main" id="{491EDACF-D60C-FE19-77A7-71118ED88DD2}"/>
-              </a:ext>
-            </a:extLst>
-          </p:cNvPr>
-          <p:cNvSpPr>
-            <a:spLocks noGrp="1"/>
-          </p:cNvSpPr>
-          <p:nvPr>
-            <p:ph type="title"/>
-          </p:nvPr>
-        </p:nvSpPr>
-        <p:spPr>
-          <a:xfrm>
-            <a:off x="371168" y="390833"/>
-            <a:ext cx="7706032" cy="923330"/>
-          </a:xfrm>
-        </p:spPr>
-        <p:txBody>
-          <a:bodyPr/>
-          <a:lstStyle/>
-          <a:p>
-            <a:r>
-              <a:rPr kumimoji="1" lang="ja-JP" altLang="en-US" sz="6000" dirty="0"/>
-              <a:t>今後</a:t>
-            </a:r>
-          </a:p>
-        </p:txBody>
-      </p:sp>
-      <p:sp>
-        <p:nvSpPr>
-          <p:cNvPr id="7" name="テキスト ボックス 6">
-            <a:extLst>
-              <a:ext uri="{FF2B5EF4-FFF2-40B4-BE49-F238E27FC236}">
-                <a16:creationId xmlns:a16="http://schemas.microsoft.com/office/drawing/2014/main" id="{A370E018-015F-6D9B-6B02-3A8BADC61388}"/>
-              </a:ext>
-            </a:extLst>
-          </p:cNvPr>
-          <p:cNvSpPr txBox="1"/>
-          <p:nvPr/>
-        </p:nvSpPr>
-        <p:spPr>
-          <a:xfrm>
-            <a:off x="371168" y="1670339"/>
-            <a:ext cx="5191432" cy="584775"/>
-          </a:xfrm>
-          <a:prstGeom prst="rect">
-            <a:avLst/>
-          </a:prstGeom>
-          <a:noFill/>
-          <a:ln w="19050">
-            <a:solidFill>
-              <a:schemeClr val="bg1"/>
-            </a:solidFill>
-          </a:ln>
-        </p:spPr>
-        <p:txBody>
-          <a:bodyPr wrap="square" rtlCol="0">
-            <a:spAutoFit/>
-          </a:bodyPr>
-          <a:lstStyle/>
-          <a:p>
-            <a:pPr algn="l"/>
-            <a:r>
-              <a:rPr kumimoji="1" lang="ja-JP" altLang="en-US" sz="3200" dirty="0">
-                <a:solidFill>
-                  <a:schemeClr val="bg1"/>
-                </a:solidFill>
-              </a:rPr>
-              <a:t>キャッシュミスの少なさ</a:t>
-            </a:r>
-          </a:p>
-        </p:txBody>
-      </p:sp>
-      <p:sp>
-        <p:nvSpPr>
-          <p:cNvPr id="9" name="テキスト ボックス 8">
-            <a:extLst>
-              <a:ext uri="{FF2B5EF4-FFF2-40B4-BE49-F238E27FC236}">
-                <a16:creationId xmlns:a16="http://schemas.microsoft.com/office/drawing/2014/main" id="{64096C8E-2385-53F6-9578-C01DDB0C8B8C}"/>
-              </a:ext>
-            </a:extLst>
-          </p:cNvPr>
-          <p:cNvSpPr txBox="1"/>
-          <p:nvPr/>
-        </p:nvSpPr>
-        <p:spPr>
-          <a:xfrm>
-            <a:off x="371168" y="2255114"/>
-            <a:ext cx="10754032" cy="461665"/>
-          </a:xfrm>
-          <a:prstGeom prst="rect">
-            <a:avLst/>
-          </a:prstGeom>
-          <a:noFill/>
-          <a:ln>
-            <a:noFill/>
-          </a:ln>
-        </p:spPr>
-        <p:txBody>
-          <a:bodyPr wrap="square" rtlCol="0">
-            <a:spAutoFit/>
-          </a:bodyPr>
-          <a:lstStyle/>
-          <a:p>
-            <a:r>
-              <a:rPr kumimoji="1" lang="ja-JP" altLang="en-US" sz="2400" dirty="0">
-                <a:solidFill>
-                  <a:schemeClr val="bg1"/>
-                </a:solidFill>
-              </a:rPr>
-              <a:t>リソース管理</a:t>
-            </a:r>
-            <a:endParaRPr kumimoji="1" lang="en-US" altLang="ja-JP" sz="2400" dirty="0">
-              <a:solidFill>
-                <a:schemeClr val="bg1"/>
-              </a:solidFill>
-            </a:endParaRPr>
-          </a:p>
-        </p:txBody>
-      </p:sp>
-    </p:spTree>
-    <p:extLst>
-      <p:ext uri="{BB962C8B-B14F-4D97-AF65-F5344CB8AC3E}">
-        <p14:creationId xmlns:p14="http://schemas.microsoft.com/office/powerpoint/2010/main" val="2142884083"/>
-      </p:ext>
-    </p:extLst>
   </p:cSld>
   <p:clrMapOvr>
     <a:masterClrMapping/>
@@ -1751,6 +1985,8 @@
                 <a:solidFill>
                   <a:schemeClr val="bg1"/>
                 </a:solidFill>
+                <a:latin typeface="+mj-ea"/>
+                <a:ea typeface="+mj-ea"/>
               </a:rPr>
               <a:t>① </a:t>
             </a:r>
@@ -1759,6 +1995,8 @@
                 <a:solidFill>
                   <a:schemeClr val="bg1"/>
                 </a:solidFill>
+                <a:latin typeface="+mj-ea"/>
+                <a:ea typeface="+mj-ea"/>
               </a:rPr>
               <a:t>作品概要</a:t>
             </a:r>
@@ -1801,6 +2039,8 @@
                 <a:solidFill>
                   <a:schemeClr val="bg1"/>
                 </a:solidFill>
+                <a:latin typeface="+mj-ea"/>
+                <a:ea typeface="+mj-ea"/>
               </a:rPr>
               <a:t>② </a:t>
             </a:r>
@@ -1809,6 +2049,8 @@
                 <a:solidFill>
                   <a:schemeClr val="bg1"/>
                 </a:solidFill>
+                <a:latin typeface="+mj-ea"/>
+                <a:ea typeface="+mj-ea"/>
               </a:rPr>
               <a:t>コンセプト実現に向けて</a:t>
             </a:r>
@@ -1830,7 +2072,7 @@
         <p:spPr>
           <a:xfrm>
             <a:off x="381000" y="3707250"/>
-            <a:ext cx="5410200" cy="584775"/>
+            <a:ext cx="1752600" cy="584775"/>
           </a:xfrm>
           <a:prstGeom prst="rect">
             <a:avLst/>
@@ -1851,6 +2093,8 @@
                 <a:solidFill>
                   <a:schemeClr val="bg1"/>
                 </a:solidFill>
+                <a:latin typeface="+mj-ea"/>
+                <a:ea typeface="+mj-ea"/>
               </a:rPr>
               <a:t>③ </a:t>
             </a:r>
@@ -1859,6 +2103,8 @@
                 <a:solidFill>
                   <a:schemeClr val="bg1"/>
                 </a:solidFill>
+                <a:latin typeface="+mj-ea"/>
+                <a:ea typeface="+mj-ea"/>
               </a:rPr>
               <a:t>今後</a:t>
             </a:r>
@@ -1919,8 +2165,8 @@
         </p:nvSpPr>
         <p:spPr>
           <a:xfrm>
-            <a:off x="371168" y="390832"/>
-            <a:ext cx="7287259" cy="923330"/>
+            <a:off x="371169" y="390832"/>
+            <a:ext cx="3134032" cy="923330"/>
           </a:xfrm>
         </p:spPr>
         <p:txBody>
@@ -1948,17 +2194,15 @@
         </p:nvSpPr>
         <p:spPr>
           <a:xfrm>
-            <a:off x="371168" y="1600200"/>
-            <a:ext cx="9230032" cy="584775"/>
+            <a:off x="363795" y="1910588"/>
+            <a:ext cx="11053916" cy="523220"/>
           </a:xfrm>
           <a:prstGeom prst="rect">
             <a:avLst/>
           </a:prstGeom>
           <a:noFill/>
-          <a:ln w="19050">
-            <a:solidFill>
-              <a:schemeClr val="bg1"/>
-            </a:solidFill>
+          <a:ln w="12700">
+            <a:noFill/>
           </a:ln>
         </p:spPr>
         <p:txBody>
@@ -1969,15 +2213,31 @@
           <a:p>
             <a:pPr algn="l"/>
             <a:r>
-              <a:rPr kumimoji="1" lang="ja-JP" altLang="en-US" sz="3200" dirty="0">
-                <a:solidFill>
-                  <a:schemeClr val="bg1"/>
-                </a:solidFill>
-              </a:rPr>
-              <a:t>コンセプト </a:t>
-            </a:r>
-            <a:r>
-              <a:rPr kumimoji="1" lang="en-US" altLang="ja-JP" sz="3200" dirty="0">
+              <a:rPr kumimoji="1" lang="ja-JP" altLang="en-US" sz="2800" b="1" u="sng" dirty="0">
+                <a:solidFill>
+                  <a:schemeClr val="bg1"/>
+                </a:solidFill>
+              </a:rPr>
+              <a:t>作品名</a:t>
+            </a:r>
+            <a:r>
+              <a:rPr kumimoji="1" lang="ja-JP" altLang="en-US" sz="2800" b="1" dirty="0">
+                <a:solidFill>
+                  <a:schemeClr val="bg1"/>
+                </a:solidFill>
+              </a:rPr>
+              <a:t>　</a:t>
+            </a:r>
+            <a:r>
+              <a:rPr kumimoji="1" lang="ja-JP" altLang="en-US" sz="2800" dirty="0">
+                <a:solidFill>
+                  <a:schemeClr val="bg1"/>
+                </a:solidFill>
+              </a:rPr>
+              <a:t> </a:t>
+            </a:r>
+            <a:r>
+              <a:rPr kumimoji="1" lang="en-US" altLang="ja-JP" sz="2800" dirty="0">
                 <a:solidFill>
                   <a:schemeClr val="bg1"/>
                 </a:solidFill>
@@ -1985,22 +2245,30 @@
               <a:t>: </a:t>
             </a:r>
             <a:r>
-              <a:rPr kumimoji="1" lang="ja-JP" altLang="en-US" sz="3200" dirty="0">
-                <a:solidFill>
-                  <a:schemeClr val="bg1"/>
-                </a:solidFill>
-              </a:rPr>
-              <a:t>クロスプラットフォーム</a:t>
-            </a:r>
-          </a:p>
-        </p:txBody>
-      </p:sp>
-      <p:sp>
-        <p:nvSpPr>
-          <p:cNvPr id="3" name="テキスト ボックス 2">
+              <a:rPr kumimoji="1" lang="ja-JP" altLang="ja-JP" sz="2800" dirty="0">
+                <a:solidFill>
+                  <a:schemeClr val="bg1"/>
+                </a:solidFill>
+              </a:rPr>
+              <a:t>他のプラットフォーム対応を前提とした</a:t>
+            </a:r>
+            <a:r>
+              <a:rPr kumimoji="1" lang="ja-JP" altLang="en-US" sz="2800" dirty="0">
+                <a:solidFill>
+                  <a:schemeClr val="bg1"/>
+                </a:solidFill>
+              </a:rPr>
+              <a:t>フレームワーク</a:t>
+            </a:r>
+          </a:p>
+        </p:txBody>
+      </p:sp>
+      <p:sp>
+        <p:nvSpPr>
+          <p:cNvPr id="11" name="テキスト ボックス 10">
             <a:extLst>
               <a:ext uri="{FF2B5EF4-FFF2-40B4-BE49-F238E27FC236}">
-                <a16:creationId xmlns:a16="http://schemas.microsoft.com/office/drawing/2014/main" id="{72D9B942-9541-F528-6F28-F3CF955D7AB9}"/>
+                <a16:creationId xmlns:a16="http://schemas.microsoft.com/office/drawing/2014/main" id="{0ED591FF-3C66-76C9-7DB1-C9FD342DC09F}"/>
               </a:ext>
             </a:extLst>
           </p:cNvPr>
@@ -2009,8 +2277,198 @@
         </p:nvSpPr>
         <p:spPr>
           <a:xfrm>
-            <a:off x="838200" y="2362200"/>
-            <a:ext cx="10210800" cy="830997"/>
+            <a:off x="371169" y="3755760"/>
+            <a:ext cx="4734232" cy="523220"/>
+          </a:xfrm>
+          <a:prstGeom prst="rect">
+            <a:avLst/>
+          </a:prstGeom>
+          <a:noFill/>
+          <a:ln w="12700">
+            <a:noFill/>
+          </a:ln>
+        </p:spPr>
+        <p:txBody>
+          <a:bodyPr wrap="square" rtlCol="0">
+            <a:spAutoFit/>
+          </a:bodyPr>
+          <a:lstStyle/>
+          <a:p>
+            <a:pPr algn="l"/>
+            <a:r>
+              <a:rPr kumimoji="1" lang="ja-JP" altLang="en-US" sz="2800" b="1" u="sng" dirty="0">
+                <a:solidFill>
+                  <a:schemeClr val="bg1"/>
+                </a:solidFill>
+              </a:rPr>
+              <a:t>制作期間</a:t>
+            </a:r>
+            <a:r>
+              <a:rPr kumimoji="1" lang="ja-JP" altLang="en-US" sz="2800" b="1" dirty="0">
+                <a:solidFill>
+                  <a:schemeClr val="bg1"/>
+                </a:solidFill>
+              </a:rPr>
+              <a:t> </a:t>
+            </a:r>
+            <a:r>
+              <a:rPr kumimoji="1" lang="en-US" altLang="ja-JP" sz="2800" dirty="0">
+                <a:solidFill>
+                  <a:schemeClr val="bg1"/>
+                </a:solidFill>
+              </a:rPr>
+              <a:t>: </a:t>
+            </a:r>
+            <a:r>
+              <a:rPr kumimoji="1" lang="ja-JP" altLang="en-US" sz="2800" dirty="0">
+                <a:solidFill>
+                  <a:schemeClr val="bg1"/>
+                </a:solidFill>
+              </a:rPr>
+              <a:t>約３～４か月</a:t>
+            </a:r>
+          </a:p>
+        </p:txBody>
+      </p:sp>
+      <p:sp>
+        <p:nvSpPr>
+          <p:cNvPr id="12" name="テキスト ボックス 11">
+            <a:extLst>
+              <a:ext uri="{FF2B5EF4-FFF2-40B4-BE49-F238E27FC236}">
+                <a16:creationId xmlns:a16="http://schemas.microsoft.com/office/drawing/2014/main" id="{4C3ED28E-B2D5-C64C-E143-47076CA1F52A}"/>
+              </a:ext>
+            </a:extLst>
+          </p:cNvPr>
+          <p:cNvSpPr txBox="1"/>
+          <p:nvPr/>
+        </p:nvSpPr>
+        <p:spPr>
+          <a:xfrm>
+            <a:off x="371169" y="2792564"/>
+            <a:ext cx="5877232" cy="523220"/>
+          </a:xfrm>
+          <a:prstGeom prst="rect">
+            <a:avLst/>
+          </a:prstGeom>
+          <a:noFill/>
+          <a:ln w="12700">
+            <a:noFill/>
+          </a:ln>
+        </p:spPr>
+        <p:txBody>
+          <a:bodyPr wrap="square" rtlCol="0">
+            <a:spAutoFit/>
+          </a:bodyPr>
+          <a:lstStyle/>
+          <a:p>
+            <a:pPr algn="l"/>
+            <a:r>
+              <a:rPr kumimoji="1" lang="ja-JP" altLang="en-US" sz="2800" b="1" u="sng" dirty="0">
+                <a:solidFill>
+                  <a:schemeClr val="bg1"/>
+                </a:solidFill>
+              </a:rPr>
+              <a:t>開発環境</a:t>
+            </a:r>
+            <a:r>
+              <a:rPr kumimoji="1" lang="ja-JP" altLang="en-US" sz="2800" b="1" dirty="0">
+                <a:solidFill>
+                  <a:schemeClr val="bg1"/>
+                </a:solidFill>
+              </a:rPr>
+              <a:t> </a:t>
+            </a:r>
+            <a:r>
+              <a:rPr kumimoji="1" lang="en-US" altLang="ja-JP" sz="2800" dirty="0">
+                <a:solidFill>
+                  <a:schemeClr val="bg1"/>
+                </a:solidFill>
+              </a:rPr>
+              <a:t>: C++20 </a:t>
+            </a:r>
+            <a:r>
+              <a:rPr kumimoji="1" lang="ja-JP" altLang="en-US" sz="2800" dirty="0">
+                <a:solidFill>
+                  <a:schemeClr val="bg1"/>
+                </a:solidFill>
+              </a:rPr>
+              <a:t>・ </a:t>
+            </a:r>
+            <a:r>
+              <a:rPr kumimoji="1" lang="en-US" altLang="ja-JP" sz="2800" dirty="0">
+                <a:solidFill>
+                  <a:schemeClr val="bg1"/>
+                </a:solidFill>
+              </a:rPr>
+              <a:t>DirectX11</a:t>
+            </a:r>
+            <a:endParaRPr kumimoji="1" lang="ja-JP" altLang="en-US" sz="2800" dirty="0">
+              <a:solidFill>
+                <a:schemeClr val="bg1"/>
+              </a:solidFill>
+            </a:endParaRPr>
+          </a:p>
+        </p:txBody>
+      </p:sp>
+      <p:sp>
+        <p:nvSpPr>
+          <p:cNvPr id="13" name="テキスト ボックス 12">
+            <a:extLst>
+              <a:ext uri="{FF2B5EF4-FFF2-40B4-BE49-F238E27FC236}">
+                <a16:creationId xmlns:a16="http://schemas.microsoft.com/office/drawing/2014/main" id="{485EB103-E022-71F1-C4DA-50FA9BB056C9}"/>
+              </a:ext>
+            </a:extLst>
+          </p:cNvPr>
+          <p:cNvSpPr txBox="1"/>
+          <p:nvPr/>
+        </p:nvSpPr>
+        <p:spPr>
+          <a:xfrm>
+            <a:off x="373626" y="4640277"/>
+            <a:ext cx="4277032" cy="523220"/>
+          </a:xfrm>
+          <a:prstGeom prst="rect">
+            <a:avLst/>
+          </a:prstGeom>
+          <a:noFill/>
+          <a:ln w="12700">
+            <a:noFill/>
+          </a:ln>
+        </p:spPr>
+        <p:txBody>
+          <a:bodyPr wrap="square" rtlCol="0">
+            <a:spAutoFit/>
+          </a:bodyPr>
+          <a:lstStyle/>
+          <a:p>
+            <a:pPr algn="l"/>
+            <a:r>
+              <a:rPr kumimoji="1" lang="ja-JP" altLang="en-US" sz="2800" b="1" u="sng" dirty="0">
+                <a:solidFill>
+                  <a:schemeClr val="bg1"/>
+                </a:solidFill>
+              </a:rPr>
+              <a:t>使用したライブラリー</a:t>
+            </a:r>
+          </a:p>
+        </p:txBody>
+      </p:sp>
+      <p:sp>
+        <p:nvSpPr>
+          <p:cNvPr id="15" name="テキスト ボックス 14">
+            <a:extLst>
+              <a:ext uri="{FF2B5EF4-FFF2-40B4-BE49-F238E27FC236}">
+                <a16:creationId xmlns:a16="http://schemas.microsoft.com/office/drawing/2014/main" id="{E29686F3-4DCA-0446-F882-162AAF7222AC}"/>
+              </a:ext>
+            </a:extLst>
+          </p:cNvPr>
+          <p:cNvSpPr txBox="1"/>
+          <p:nvPr/>
+        </p:nvSpPr>
+        <p:spPr>
+          <a:xfrm>
+            <a:off x="363794" y="5239635"/>
+            <a:ext cx="2531806" cy="1015663"/>
           </a:xfrm>
           <a:prstGeom prst="rect">
             <a:avLst/>
@@ -2027,21 +2485,67 @@
           <a:lstStyle/>
           <a:p>
             <a:r>
-              <a:rPr kumimoji="1" lang="en-US" altLang="ja-JP" sz="2400" dirty="0">
-                <a:solidFill>
-                  <a:schemeClr val="bg1"/>
-                </a:solidFill>
-              </a:rPr>
-              <a:t>PC(DirectX)</a:t>
-            </a:r>
-            <a:r>
-              <a:rPr kumimoji="1" lang="ja-JP" altLang="en-US" sz="2400" dirty="0">
-                <a:solidFill>
-                  <a:schemeClr val="bg1"/>
-                </a:solidFill>
-              </a:rPr>
-              <a:t>でゲーム開発を行い、ゲーム本編のプログラムを一切変更せずに他のプラットフォームに対応できるように</a:t>
-            </a:r>
+              <a:rPr kumimoji="1" lang="ja-JP" altLang="en-US" sz="2000" dirty="0">
+                <a:solidFill>
+                  <a:schemeClr val="bg1"/>
+                </a:solidFill>
+              </a:rPr>
+              <a:t>・ </a:t>
+            </a:r>
+            <a:r>
+              <a:rPr kumimoji="1" lang="en-US" altLang="ja-JP" sz="2000" dirty="0" err="1">
+                <a:solidFill>
+                  <a:schemeClr val="bg1"/>
+                </a:solidFill>
+              </a:rPr>
+              <a:t>assimp</a:t>
+            </a:r>
+            <a:br>
+              <a:rPr kumimoji="1" lang="en-US" altLang="ja-JP" sz="2000" dirty="0">
+                <a:solidFill>
+                  <a:schemeClr val="bg1"/>
+                </a:solidFill>
+              </a:rPr>
+            </a:br>
+            <a:r>
+              <a:rPr kumimoji="1" lang="ja-JP" altLang="en-US" sz="2000" dirty="0">
+                <a:solidFill>
+                  <a:schemeClr val="bg1"/>
+                </a:solidFill>
+              </a:rPr>
+              <a:t>・ </a:t>
+            </a:r>
+            <a:r>
+              <a:rPr kumimoji="1" lang="en-US" altLang="ja-JP" sz="2000" dirty="0">
+                <a:solidFill>
+                  <a:schemeClr val="bg1"/>
+                </a:solidFill>
+              </a:rPr>
+              <a:t>DirectX Tex</a:t>
+            </a:r>
+          </a:p>
+          <a:p>
+            <a:r>
+              <a:rPr kumimoji="1" lang="ja-JP" altLang="en-US" sz="2000" dirty="0">
+                <a:solidFill>
+                  <a:schemeClr val="bg1"/>
+                </a:solidFill>
+              </a:rPr>
+              <a:t>・ </a:t>
+            </a:r>
+            <a:r>
+              <a:rPr kumimoji="1" lang="en-US" altLang="ja-JP" sz="2000" dirty="0" err="1">
+                <a:solidFill>
+                  <a:schemeClr val="bg1"/>
+                </a:solidFill>
+              </a:rPr>
+              <a:t>imgui</a:t>
+            </a:r>
+            <a:endParaRPr kumimoji="1" lang="ja-JP" altLang="en-US" sz="2000" dirty="0">
+              <a:solidFill>
+                <a:schemeClr val="bg1"/>
+              </a:solidFill>
+            </a:endParaRPr>
           </a:p>
         </p:txBody>
       </p:sp>
@@ -2116,10 +2620,10 @@
       </p:sp>
       <p:sp>
         <p:nvSpPr>
-          <p:cNvPr id="4" name="テキスト ボックス 3">
+          <p:cNvPr id="5" name="テキスト ボックス 4">
             <a:extLst>
               <a:ext uri="{FF2B5EF4-FFF2-40B4-BE49-F238E27FC236}">
-                <a16:creationId xmlns:a16="http://schemas.microsoft.com/office/drawing/2014/main" id="{0ED591FF-3C66-76C9-7DB1-C9FD342DC09F}"/>
+                <a16:creationId xmlns:a16="http://schemas.microsoft.com/office/drawing/2014/main" id="{9566F244-B60D-B801-2968-736AB6FA8A3F}"/>
               </a:ext>
             </a:extLst>
           </p:cNvPr>
@@ -2128,159 +2632,8 @@
         </p:nvSpPr>
         <p:spPr>
           <a:xfrm>
-            <a:off x="371168" y="5715000"/>
-            <a:ext cx="4810432" cy="584775"/>
-          </a:xfrm>
-          <a:prstGeom prst="rect">
-            <a:avLst/>
-          </a:prstGeom>
-          <a:noFill/>
-          <a:ln w="19050">
-            <a:solidFill>
-              <a:schemeClr val="bg1"/>
-            </a:solidFill>
-          </a:ln>
-        </p:spPr>
-        <p:txBody>
-          <a:bodyPr wrap="square" rtlCol="0">
-            <a:spAutoFit/>
-          </a:bodyPr>
-          <a:lstStyle/>
-          <a:p>
-            <a:pPr algn="l"/>
-            <a:r>
-              <a:rPr kumimoji="1" lang="ja-JP" altLang="en-US" sz="3200" dirty="0">
-                <a:solidFill>
-                  <a:schemeClr val="bg1"/>
-                </a:solidFill>
-              </a:rPr>
-              <a:t>制作期間 </a:t>
-            </a:r>
-            <a:r>
-              <a:rPr kumimoji="1" lang="en-US" altLang="ja-JP" sz="3200" dirty="0">
-                <a:solidFill>
-                  <a:schemeClr val="bg1"/>
-                </a:solidFill>
-              </a:rPr>
-              <a:t>:</a:t>
-            </a:r>
-            <a:r>
-              <a:rPr kumimoji="1" lang="ja-JP" altLang="en-US" sz="3200" dirty="0">
-                <a:solidFill>
-                  <a:schemeClr val="bg1"/>
-                </a:solidFill>
-              </a:rPr>
-              <a:t>約３～４か月</a:t>
-            </a:r>
-          </a:p>
-        </p:txBody>
-      </p:sp>
-      <p:sp>
-        <p:nvSpPr>
-          <p:cNvPr id="7" name="テキスト ボックス 6">
-            <a:extLst>
-              <a:ext uri="{FF2B5EF4-FFF2-40B4-BE49-F238E27FC236}">
-                <a16:creationId xmlns:a16="http://schemas.microsoft.com/office/drawing/2014/main" id="{4C3ED28E-B2D5-C64C-E143-47076CA1F52A}"/>
-              </a:ext>
-            </a:extLst>
-          </p:cNvPr>
-          <p:cNvSpPr txBox="1"/>
-          <p:nvPr/>
-        </p:nvSpPr>
-        <p:spPr>
-          <a:xfrm>
-            <a:off x="371168" y="1587824"/>
-            <a:ext cx="1838632" cy="584775"/>
-          </a:xfrm>
-          <a:prstGeom prst="rect">
-            <a:avLst/>
-          </a:prstGeom>
-          <a:noFill/>
-          <a:ln w="19050">
-            <a:solidFill>
-              <a:schemeClr val="bg1"/>
-            </a:solidFill>
-          </a:ln>
-        </p:spPr>
-        <p:txBody>
-          <a:bodyPr wrap="square" rtlCol="0">
-            <a:spAutoFit/>
-          </a:bodyPr>
-          <a:lstStyle/>
-          <a:p>
-            <a:pPr algn="l"/>
-            <a:r>
-              <a:rPr kumimoji="1" lang="ja-JP" altLang="en-US" sz="3200" dirty="0">
-                <a:solidFill>
-                  <a:schemeClr val="bg1"/>
-                </a:solidFill>
-              </a:rPr>
-              <a:t>開発環境 </a:t>
-            </a:r>
-          </a:p>
-        </p:txBody>
-      </p:sp>
-      <p:sp>
-        <p:nvSpPr>
-          <p:cNvPr id="8" name="テキスト ボックス 7">
-            <a:extLst>
-              <a:ext uri="{FF2B5EF4-FFF2-40B4-BE49-F238E27FC236}">
-                <a16:creationId xmlns:a16="http://schemas.microsoft.com/office/drawing/2014/main" id="{485EB103-E022-71F1-C4DA-50FA9BB056C9}"/>
-              </a:ext>
-            </a:extLst>
-          </p:cNvPr>
-          <p:cNvSpPr txBox="1"/>
-          <p:nvPr/>
-        </p:nvSpPr>
-        <p:spPr>
-          <a:xfrm>
-            <a:off x="371168" y="3429000"/>
-            <a:ext cx="4810432" cy="584775"/>
-          </a:xfrm>
-          <a:prstGeom prst="rect">
-            <a:avLst/>
-          </a:prstGeom>
-          <a:noFill/>
-          <a:ln w="19050">
-            <a:solidFill>
-              <a:schemeClr val="bg1"/>
-            </a:solidFill>
-          </a:ln>
-        </p:spPr>
-        <p:txBody>
-          <a:bodyPr wrap="square" rtlCol="0">
-            <a:spAutoFit/>
-          </a:bodyPr>
-          <a:lstStyle/>
-          <a:p>
-            <a:pPr algn="l"/>
-            <a:r>
-              <a:rPr kumimoji="1" lang="ja-JP" altLang="en-US" sz="3200" dirty="0">
-                <a:solidFill>
-                  <a:schemeClr val="bg1"/>
-                </a:solidFill>
-              </a:rPr>
-              <a:t>使用したライブラリー</a:t>
-            </a:r>
-          </a:p>
-        </p:txBody>
-      </p:sp>
-      <p:sp>
-        <p:nvSpPr>
-          <p:cNvPr id="9" name="テキスト ボックス 8">
-            <a:extLst>
-              <a:ext uri="{FF2B5EF4-FFF2-40B4-BE49-F238E27FC236}">
-                <a16:creationId xmlns:a16="http://schemas.microsoft.com/office/drawing/2014/main" id="{2B0496B6-09CE-C597-6AE6-9E4529129B98}"/>
-              </a:ext>
-            </a:extLst>
-          </p:cNvPr>
-          <p:cNvSpPr txBox="1"/>
-          <p:nvPr/>
-        </p:nvSpPr>
-        <p:spPr>
-          <a:xfrm>
-            <a:off x="371168" y="2239108"/>
-            <a:ext cx="2067232" cy="830997"/>
+            <a:off x="371168" y="2187313"/>
+            <a:ext cx="10754032" cy="1569660"/>
           </a:xfrm>
           <a:prstGeom prst="rect">
             <a:avLst/>
@@ -2297,45 +2650,74 @@
           <a:lstStyle/>
           <a:p>
             <a:r>
-              <a:rPr kumimoji="1" lang="ja-JP" altLang="en-US" sz="2400" dirty="0">
-                <a:solidFill>
-                  <a:schemeClr val="bg1"/>
-                </a:solidFill>
-              </a:rPr>
-              <a:t>・ </a:t>
-            </a:r>
-            <a:r>
-              <a:rPr kumimoji="1" lang="en-US" altLang="ja-JP" sz="2400" dirty="0">
-                <a:solidFill>
-                  <a:schemeClr val="bg1"/>
-                </a:solidFill>
-              </a:rPr>
-              <a:t>C++20</a:t>
+              <a:rPr lang="ja-JP" altLang="en-US" sz="2400" dirty="0">
+                <a:solidFill>
+                  <a:schemeClr val="bg1"/>
+                </a:solidFill>
+              </a:rPr>
+              <a:t>ゲーム本体だけでなく、開発現場においてもデザイナーをはじめとした多職種が</a:t>
+            </a:r>
+            <a:r>
+              <a:rPr lang="en-US" altLang="ja-JP" sz="2400" dirty="0">
+                <a:solidFill>
+                  <a:schemeClr val="bg1"/>
+                </a:solidFill>
+              </a:rPr>
+              <a:t>Mac</a:t>
+            </a:r>
+            <a:r>
+              <a:rPr lang="ja-JP" altLang="en-US" sz="2400" dirty="0">
+                <a:solidFill>
+                  <a:schemeClr val="bg1"/>
+                </a:solidFill>
+              </a:rPr>
+              <a:t>など多様な環境を利用することが一般的になっている。</a:t>
             </a:r>
             <a:br>
-              <a:rPr kumimoji="1" lang="en-US" altLang="ja-JP" sz="2400" dirty="0">
+              <a:rPr lang="en-US" altLang="ja-JP" sz="2400" dirty="0">
                 <a:solidFill>
                   <a:schemeClr val="bg1"/>
                 </a:solidFill>
               </a:rPr>
             </a:br>
             <a:r>
-              <a:rPr kumimoji="1" lang="ja-JP" altLang="en-US" sz="2400" dirty="0">
-                <a:solidFill>
-                  <a:schemeClr val="bg1"/>
-                </a:solidFill>
-              </a:rPr>
-              <a:t>・ </a:t>
-            </a:r>
-            <a:r>
-              <a:rPr kumimoji="1" lang="en-US" altLang="ja-JP" sz="2400" dirty="0">
-                <a:solidFill>
-                  <a:schemeClr val="bg1"/>
-                </a:solidFill>
-              </a:rPr>
-              <a:t>DirectX11</a:t>
-            </a:r>
-            <a:endParaRPr kumimoji="1" lang="ja-JP" altLang="en-US" sz="2400" dirty="0">
+              <a:rPr lang="ja-JP" altLang="en-US" sz="2400" dirty="0">
+                <a:solidFill>
+                  <a:schemeClr val="bg1"/>
+                </a:solidFill>
+              </a:rPr>
+              <a:t>このような、</a:t>
+            </a:r>
+            <a:r>
+              <a:rPr lang="ja-JP" altLang="en-US" sz="2400" u="sng" dirty="0">
+                <a:solidFill>
+                  <a:srgbClr val="FF0000"/>
+                </a:solidFill>
+              </a:rPr>
+              <a:t>開発環境の多様化に対応することが、円滑なゲーム開発を行う上で</a:t>
+            </a:r>
+            <a:r>
+              <a:rPr lang="ja-JP" altLang="en-US" sz="2400" b="1" u="sng" dirty="0">
+                <a:ln>
+                  <a:solidFill>
+                    <a:srgbClr val="C00000"/>
+                  </a:solidFill>
+                </a:ln>
+                <a:solidFill>
+                  <a:srgbClr val="FF0000"/>
+                </a:solidFill>
+              </a:rPr>
+              <a:t>重要</a:t>
+            </a:r>
+            <a:r>
+              <a:rPr lang="ja-JP" altLang="en-US" sz="2400" dirty="0">
+                <a:solidFill>
+                  <a:schemeClr val="bg1"/>
+                </a:solidFill>
+              </a:rPr>
+              <a:t>だと考えました。</a:t>
+            </a:r>
+            <a:endParaRPr kumimoji="1" lang="en-US" altLang="ja-JP" sz="2400" dirty="0">
               <a:solidFill>
                 <a:schemeClr val="bg1"/>
               </a:solidFill>
@@ -2345,10 +2727,10 @@
       </p:sp>
       <p:sp>
         <p:nvSpPr>
-          <p:cNvPr id="10" name="テキスト ボックス 9">
+          <p:cNvPr id="6" name="テキスト ボックス 5">
             <a:extLst>
               <a:ext uri="{FF2B5EF4-FFF2-40B4-BE49-F238E27FC236}">
-                <a16:creationId xmlns:a16="http://schemas.microsoft.com/office/drawing/2014/main" id="{E29686F3-4DCA-0446-F882-162AAF7222AC}"/>
+                <a16:creationId xmlns:a16="http://schemas.microsoft.com/office/drawing/2014/main" id="{BF6019FD-93D9-34F8-F4FD-5F32F857CF05}"/>
               </a:ext>
             </a:extLst>
           </p:cNvPr>
@@ -2357,8 +2739,118 @@
         </p:nvSpPr>
         <p:spPr>
           <a:xfrm>
-            <a:off x="371168" y="4114800"/>
-            <a:ext cx="2905432" cy="1200329"/>
+            <a:off x="371168" y="1562972"/>
+            <a:ext cx="11439832" cy="523220"/>
+          </a:xfrm>
+          <a:prstGeom prst="rect">
+            <a:avLst/>
+          </a:prstGeom>
+          <a:noFill/>
+          <a:ln w="12700">
+            <a:noFill/>
+          </a:ln>
+        </p:spPr>
+        <p:txBody>
+          <a:bodyPr wrap="square" rtlCol="0">
+            <a:spAutoFit/>
+          </a:bodyPr>
+          <a:lstStyle/>
+          <a:p>
+            <a:pPr algn="l"/>
+            <a:r>
+              <a:rPr kumimoji="1" lang="ja-JP" altLang="en-US" sz="2800" b="1" dirty="0">
+                <a:solidFill>
+                  <a:schemeClr val="bg1"/>
+                </a:solidFill>
+              </a:rPr>
+              <a:t>作品名 </a:t>
+            </a:r>
+            <a:r>
+              <a:rPr kumimoji="1" lang="en-US" altLang="ja-JP" sz="2800" b="1" dirty="0">
+                <a:solidFill>
+                  <a:schemeClr val="bg1"/>
+                </a:solidFill>
+              </a:rPr>
+              <a:t>: </a:t>
+            </a:r>
+            <a:r>
+              <a:rPr kumimoji="1" lang="ja-JP" altLang="ja-JP" sz="2800" b="1" dirty="0">
+                <a:solidFill>
+                  <a:schemeClr val="bg1"/>
+                </a:solidFill>
+              </a:rPr>
+              <a:t>他のプラットフォーム対応を前提とした</a:t>
+            </a:r>
+            <a:r>
+              <a:rPr kumimoji="1" lang="ja-JP" altLang="en-US" sz="2800" b="1" dirty="0">
+                <a:solidFill>
+                  <a:schemeClr val="bg1"/>
+                </a:solidFill>
+              </a:rPr>
+              <a:t>フレームワーク</a:t>
+            </a:r>
+          </a:p>
+        </p:txBody>
+      </p:sp>
+      <p:sp>
+        <p:nvSpPr>
+          <p:cNvPr id="11" name="テキスト ボックス 10">
+            <a:extLst>
+              <a:ext uri="{FF2B5EF4-FFF2-40B4-BE49-F238E27FC236}">
+                <a16:creationId xmlns:a16="http://schemas.microsoft.com/office/drawing/2014/main" id="{51D7AAF5-A2A1-C3D5-B707-264CF4610733}"/>
+              </a:ext>
+            </a:extLst>
+          </p:cNvPr>
+          <p:cNvSpPr txBox="1"/>
+          <p:nvPr/>
+        </p:nvSpPr>
+        <p:spPr>
+          <a:xfrm>
+            <a:off x="371168" y="4099037"/>
+            <a:ext cx="4810432" cy="584775"/>
+          </a:xfrm>
+          <a:prstGeom prst="rect">
+            <a:avLst/>
+          </a:prstGeom>
+          <a:noFill/>
+          <a:ln w="12700">
+            <a:noFill/>
+          </a:ln>
+        </p:spPr>
+        <p:txBody>
+          <a:bodyPr wrap="square" rtlCol="0">
+            <a:spAutoFit/>
+          </a:bodyPr>
+          <a:lstStyle/>
+          <a:p>
+            <a:pPr algn="l"/>
+            <a:r>
+              <a:rPr kumimoji="1" lang="ja-JP" altLang="en-US" sz="3200" b="1" dirty="0">
+                <a:solidFill>
+                  <a:schemeClr val="bg1"/>
+                </a:solidFill>
+              </a:rPr>
+              <a:t>コンセプトに必要なこと</a:t>
+            </a:r>
+          </a:p>
+        </p:txBody>
+      </p:sp>
+      <p:sp>
+        <p:nvSpPr>
+          <p:cNvPr id="12" name="テキスト ボックス 11">
+            <a:extLst>
+              <a:ext uri="{FF2B5EF4-FFF2-40B4-BE49-F238E27FC236}">
+                <a16:creationId xmlns:a16="http://schemas.microsoft.com/office/drawing/2014/main" id="{B93B68A5-EBB3-BDF5-7243-C1311556DFDD}"/>
+              </a:ext>
+            </a:extLst>
+          </p:cNvPr>
+          <p:cNvSpPr txBox="1"/>
+          <p:nvPr/>
+        </p:nvSpPr>
+        <p:spPr>
+          <a:xfrm>
+            <a:off x="371168" y="4663492"/>
+            <a:ext cx="5877232" cy="1569660"/>
           </a:xfrm>
           <a:prstGeom prst="rect">
             <a:avLst/>
@@ -2383,59 +2875,106 @@
               <a:t>・ </a:t>
             </a:r>
             <a:r>
-              <a:rPr kumimoji="1" lang="en-US" altLang="ja-JP" sz="2400" dirty="0" err="1">
-                <a:solidFill>
-                  <a:schemeClr val="bg1"/>
-                </a:solidFill>
-              </a:rPr>
-              <a:t>assimp</a:t>
-            </a:r>
-            <a:br>
-              <a:rPr kumimoji="1" lang="en-US" altLang="ja-JP" sz="2400" dirty="0">
-                <a:solidFill>
-                  <a:schemeClr val="bg1"/>
-                </a:solidFill>
-              </a:rPr>
-            </a:br>
-            <a:r>
-              <a:rPr kumimoji="1" lang="ja-JP" altLang="en-US" sz="2400" dirty="0">
-                <a:solidFill>
-                  <a:schemeClr val="bg1"/>
-                </a:solidFill>
-              </a:rPr>
-              <a:t>・ </a:t>
-            </a:r>
-            <a:r>
-              <a:rPr kumimoji="1" lang="en-US" altLang="ja-JP" sz="2400" dirty="0">
-                <a:solidFill>
-                  <a:schemeClr val="bg1"/>
-                </a:solidFill>
-              </a:rPr>
-              <a:t>DirectX Tex</a:t>
-            </a:r>
-          </a:p>
-          <a:p>
-            <a:r>
-              <a:rPr kumimoji="1" lang="ja-JP" altLang="en-US" sz="2400" dirty="0">
-                <a:solidFill>
-                  <a:schemeClr val="bg1"/>
-                </a:solidFill>
-              </a:rPr>
-              <a:t>・ </a:t>
-            </a:r>
-            <a:r>
-              <a:rPr kumimoji="1" lang="en-US" altLang="ja-JP" sz="2400" dirty="0" err="1">
-                <a:solidFill>
-                  <a:schemeClr val="bg1"/>
-                </a:solidFill>
-              </a:rPr>
-              <a:t>imgui</a:t>
-            </a:r>
-            <a:endParaRPr kumimoji="1" lang="ja-JP" altLang="en-US" sz="2400" dirty="0">
+              <a:rPr kumimoji="1" lang="ja-JP" altLang="en-US" sz="2400" b="1" u="sng" dirty="0">
+                <a:solidFill>
+                  <a:schemeClr val="bg1"/>
+                </a:solidFill>
+              </a:rPr>
+              <a:t>データ構造の統一化</a:t>
+            </a:r>
+            <a:endParaRPr kumimoji="1" lang="en-US" altLang="ja-JP" sz="2400" b="1" u="sng" dirty="0">
               <a:solidFill>
                 <a:schemeClr val="bg1"/>
               </a:solidFill>
             </a:endParaRPr>
+          </a:p>
+          <a:p>
+            <a:r>
+              <a:rPr kumimoji="1" lang="ja-JP" altLang="en-US" sz="2400" dirty="0">
+                <a:solidFill>
+                  <a:schemeClr val="bg1"/>
+                </a:solidFill>
+              </a:rPr>
+              <a:t>・ </a:t>
+            </a:r>
+            <a:r>
+              <a:rPr kumimoji="1" lang="ja-JP" altLang="en-US" sz="2400" b="1" u="sng" dirty="0">
+                <a:solidFill>
+                  <a:schemeClr val="bg1"/>
+                </a:solidFill>
+              </a:rPr>
+              <a:t>ゲーム層とプラットフォーム層の分離</a:t>
+            </a:r>
+            <a:endParaRPr kumimoji="1" lang="en-US" altLang="ja-JP" sz="2400" b="1" u="sng" dirty="0">
+              <a:solidFill>
+                <a:schemeClr val="bg1"/>
+              </a:solidFill>
+            </a:endParaRPr>
+          </a:p>
+          <a:p>
+            <a:r>
+              <a:rPr kumimoji="1" lang="ja-JP" altLang="en-US" sz="2400" dirty="0">
+                <a:solidFill>
+                  <a:schemeClr val="bg1"/>
+                </a:solidFill>
+              </a:rPr>
+              <a:t>・</a:t>
+            </a:r>
+            <a:r>
+              <a:rPr kumimoji="1" lang="ja-JP" altLang="en-US" sz="2400" b="1" u="sng" dirty="0">
+                <a:solidFill>
+                  <a:schemeClr val="bg1"/>
+                </a:solidFill>
+              </a:rPr>
+              <a:t> 責任の明確化</a:t>
+            </a:r>
+            <a:endParaRPr kumimoji="1" lang="en-US" altLang="ja-JP" sz="2400" b="1" u="sng" dirty="0">
+              <a:solidFill>
+                <a:schemeClr val="bg1"/>
+              </a:solidFill>
+            </a:endParaRPr>
+          </a:p>
+          <a:p>
+            <a:r>
+              <a:rPr kumimoji="1" lang="ja-JP" altLang="en-US" sz="2400" dirty="0">
+                <a:solidFill>
+                  <a:schemeClr val="bg1"/>
+                </a:solidFill>
+              </a:rPr>
+              <a:t>・ </a:t>
+            </a:r>
+            <a:r>
+              <a:rPr kumimoji="1" lang="ja-JP" altLang="en-US" sz="2400" b="1" u="sng" dirty="0">
+                <a:solidFill>
+                  <a:schemeClr val="bg1"/>
+                </a:solidFill>
+              </a:rPr>
+              <a:t>インターフェイス </a:t>
+            </a:r>
+            <a:r>
+              <a:rPr kumimoji="1" lang="en-US" altLang="ja-JP" sz="2400" b="1" u="sng" dirty="0">
+                <a:solidFill>
+                  <a:schemeClr val="bg1"/>
+                </a:solidFill>
+              </a:rPr>
+              <a:t>(</a:t>
+            </a:r>
+            <a:r>
+              <a:rPr kumimoji="1" lang="ja-JP" altLang="en-US" sz="2400" b="1" u="sng" dirty="0">
+                <a:solidFill>
+                  <a:schemeClr val="bg1"/>
+                </a:solidFill>
+              </a:rPr>
+              <a:t>仲介役</a:t>
+            </a:r>
+            <a:r>
+              <a:rPr kumimoji="1" lang="en-US" altLang="ja-JP" sz="2400" b="1" u="sng" dirty="0">
+                <a:solidFill>
+                  <a:schemeClr val="bg1"/>
+                </a:solidFill>
+              </a:rPr>
+              <a:t>)</a:t>
+            </a:r>
           </a:p>
         </p:txBody>
       </p:sp>
@@ -2453,431 +2992,6 @@
 </file>
 
 <file path=ppt/slides/slide5.xml><?xml version="1.0" encoding="utf-8"?>
-<p:sld xmlns:a="http://schemas.openxmlformats.org/drawingml/2006/main" xmlns:r="http://schemas.openxmlformats.org/officeDocument/2006/relationships" xmlns:p="http://schemas.openxmlformats.org/presentationml/2006/main">
-  <p:cSld>
-    <p:spTree>
-      <p:nvGrpSpPr>
-        <p:cNvPr id="1" name="">
-          <a:extLst>
-            <a:ext uri="{FF2B5EF4-FFF2-40B4-BE49-F238E27FC236}">
-              <a16:creationId xmlns:a16="http://schemas.microsoft.com/office/drawing/2014/main" id="{F4D2B8D1-7A44-1661-C741-A02FE6EF0877}"/>
-            </a:ext>
-          </a:extLst>
-        </p:cNvPr>
-        <p:cNvGrpSpPr/>
-        <p:nvPr/>
-      </p:nvGrpSpPr>
-      <p:grpSpPr>
-        <a:xfrm>
-          <a:off x="0" y="0"/>
-          <a:ext cx="0" cy="0"/>
-          <a:chOff x="0" y="0"/>
-          <a:chExt cx="0" cy="0"/>
-        </a:xfrm>
-      </p:grpSpPr>
-      <p:sp>
-        <p:nvSpPr>
-          <p:cNvPr id="2" name="タイトル 1">
-            <a:extLst>
-              <a:ext uri="{FF2B5EF4-FFF2-40B4-BE49-F238E27FC236}">
-                <a16:creationId xmlns:a16="http://schemas.microsoft.com/office/drawing/2014/main" id="{F7C518BC-F958-1B35-CCDD-CC2D785309FC}"/>
-              </a:ext>
-            </a:extLst>
-          </p:cNvPr>
-          <p:cNvSpPr>
-            <a:spLocks noGrp="1"/>
-          </p:cNvSpPr>
-          <p:nvPr>
-            <p:ph type="title"/>
-          </p:nvPr>
-        </p:nvSpPr>
-        <p:spPr>
-          <a:xfrm>
-            <a:off x="371168" y="390832"/>
-            <a:ext cx="7287259" cy="923330"/>
-          </a:xfrm>
-        </p:spPr>
-        <p:txBody>
-          <a:bodyPr/>
-          <a:lstStyle/>
-          <a:p>
-            <a:r>
-              <a:rPr kumimoji="1" lang="ja-JP" altLang="en-US" sz="6000" dirty="0"/>
-              <a:t>作品概要</a:t>
-            </a:r>
-          </a:p>
-        </p:txBody>
-      </p:sp>
-      <p:sp>
-        <p:nvSpPr>
-          <p:cNvPr id="4" name="テキスト ボックス 3">
-            <a:extLst>
-              <a:ext uri="{FF2B5EF4-FFF2-40B4-BE49-F238E27FC236}">
-                <a16:creationId xmlns:a16="http://schemas.microsoft.com/office/drawing/2014/main" id="{189EE7F1-9B2D-DFC2-B0AC-DB15DBEDC2CA}"/>
-              </a:ext>
-            </a:extLst>
-          </p:cNvPr>
-          <p:cNvSpPr txBox="1"/>
-          <p:nvPr/>
-        </p:nvSpPr>
-        <p:spPr>
-          <a:xfrm>
-            <a:off x="376084" y="5746988"/>
-            <a:ext cx="1838632" cy="584775"/>
-          </a:xfrm>
-          <a:prstGeom prst="rect">
-            <a:avLst/>
-          </a:prstGeom>
-          <a:noFill/>
-          <a:ln w="19050">
-            <a:solidFill>
-              <a:schemeClr val="bg1"/>
-            </a:solidFill>
-          </a:ln>
-        </p:spPr>
-        <p:txBody>
-          <a:bodyPr wrap="square" rtlCol="0">
-            <a:spAutoFit/>
-          </a:bodyPr>
-          <a:lstStyle/>
-          <a:p>
-            <a:pPr algn="l"/>
-            <a:r>
-              <a:rPr kumimoji="1" lang="ja-JP" altLang="en-US" sz="3200" dirty="0">
-                <a:solidFill>
-                  <a:schemeClr val="bg1"/>
-                </a:solidFill>
-              </a:rPr>
-              <a:t>制作期間</a:t>
-            </a:r>
-          </a:p>
-        </p:txBody>
-      </p:sp>
-      <p:sp>
-        <p:nvSpPr>
-          <p:cNvPr id="7" name="テキスト ボックス 6">
-            <a:extLst>
-              <a:ext uri="{FF2B5EF4-FFF2-40B4-BE49-F238E27FC236}">
-                <a16:creationId xmlns:a16="http://schemas.microsoft.com/office/drawing/2014/main" id="{04D52795-696D-6E1A-99BF-81E3D33BD6B9}"/>
-              </a:ext>
-            </a:extLst>
-          </p:cNvPr>
-          <p:cNvSpPr txBox="1"/>
-          <p:nvPr/>
-        </p:nvSpPr>
-        <p:spPr>
-          <a:xfrm>
-            <a:off x="371168" y="1670912"/>
-            <a:ext cx="1838632" cy="584775"/>
-          </a:xfrm>
-          <a:prstGeom prst="rect">
-            <a:avLst/>
-          </a:prstGeom>
-          <a:noFill/>
-          <a:ln w="19050">
-            <a:solidFill>
-              <a:schemeClr val="bg1"/>
-            </a:solidFill>
-          </a:ln>
-        </p:spPr>
-        <p:txBody>
-          <a:bodyPr wrap="square" rtlCol="0">
-            <a:spAutoFit/>
-          </a:bodyPr>
-          <a:lstStyle/>
-          <a:p>
-            <a:pPr algn="l"/>
-            <a:r>
-              <a:rPr kumimoji="1" lang="ja-JP" altLang="en-US" sz="3200" dirty="0">
-                <a:solidFill>
-                  <a:schemeClr val="bg1"/>
-                </a:solidFill>
-              </a:rPr>
-              <a:t>開発環境 </a:t>
-            </a:r>
-          </a:p>
-        </p:txBody>
-      </p:sp>
-      <p:sp>
-        <p:nvSpPr>
-          <p:cNvPr id="8" name="テキスト ボックス 7">
-            <a:extLst>
-              <a:ext uri="{FF2B5EF4-FFF2-40B4-BE49-F238E27FC236}">
-                <a16:creationId xmlns:a16="http://schemas.microsoft.com/office/drawing/2014/main" id="{B8A21C07-7042-B19C-7E48-4EBE8BF15940}"/>
-              </a:ext>
-            </a:extLst>
-          </p:cNvPr>
-          <p:cNvSpPr txBox="1"/>
-          <p:nvPr/>
-        </p:nvSpPr>
-        <p:spPr>
-          <a:xfrm>
-            <a:off x="371168" y="3485072"/>
-            <a:ext cx="4810432" cy="584775"/>
-          </a:xfrm>
-          <a:prstGeom prst="rect">
-            <a:avLst/>
-          </a:prstGeom>
-          <a:noFill/>
-          <a:ln w="19050">
-            <a:solidFill>
-              <a:schemeClr val="bg1"/>
-            </a:solidFill>
-          </a:ln>
-        </p:spPr>
-        <p:txBody>
-          <a:bodyPr wrap="square" rtlCol="0">
-            <a:spAutoFit/>
-          </a:bodyPr>
-          <a:lstStyle/>
-          <a:p>
-            <a:pPr algn="l"/>
-            <a:r>
-              <a:rPr kumimoji="1" lang="ja-JP" altLang="en-US" sz="3200" dirty="0">
-                <a:solidFill>
-                  <a:schemeClr val="bg1"/>
-                </a:solidFill>
-              </a:rPr>
-              <a:t>使用したライブラリー</a:t>
-            </a:r>
-          </a:p>
-        </p:txBody>
-      </p:sp>
-      <p:sp>
-        <p:nvSpPr>
-          <p:cNvPr id="9" name="テキスト ボックス 8">
-            <a:extLst>
-              <a:ext uri="{FF2B5EF4-FFF2-40B4-BE49-F238E27FC236}">
-                <a16:creationId xmlns:a16="http://schemas.microsoft.com/office/drawing/2014/main" id="{3ACF0306-DB2D-1AAF-5B7E-A3B634C448CD}"/>
-              </a:ext>
-            </a:extLst>
-          </p:cNvPr>
-          <p:cNvSpPr txBox="1"/>
-          <p:nvPr/>
-        </p:nvSpPr>
-        <p:spPr>
-          <a:xfrm>
-            <a:off x="371168" y="2317000"/>
-            <a:ext cx="2067232" cy="830997"/>
-          </a:xfrm>
-          <a:prstGeom prst="rect">
-            <a:avLst/>
-          </a:prstGeom>
-          <a:noFill/>
-          <a:ln>
-            <a:noFill/>
-          </a:ln>
-        </p:spPr>
-        <p:txBody>
-          <a:bodyPr wrap="square" rtlCol="0">
-            <a:spAutoFit/>
-          </a:bodyPr>
-          <a:lstStyle/>
-          <a:p>
-            <a:r>
-              <a:rPr kumimoji="1" lang="ja-JP" altLang="en-US" sz="2400" dirty="0">
-                <a:solidFill>
-                  <a:schemeClr val="bg1"/>
-                </a:solidFill>
-              </a:rPr>
-              <a:t>・ </a:t>
-            </a:r>
-            <a:r>
-              <a:rPr kumimoji="1" lang="en-US" altLang="ja-JP" sz="2400" dirty="0">
-                <a:solidFill>
-                  <a:schemeClr val="bg1"/>
-                </a:solidFill>
-              </a:rPr>
-              <a:t>C++20</a:t>
-            </a:r>
-            <a:br>
-              <a:rPr kumimoji="1" lang="en-US" altLang="ja-JP" sz="2400" dirty="0">
-                <a:solidFill>
-                  <a:schemeClr val="bg1"/>
-                </a:solidFill>
-              </a:rPr>
-            </a:br>
-            <a:r>
-              <a:rPr kumimoji="1" lang="ja-JP" altLang="en-US" sz="2400" dirty="0">
-                <a:solidFill>
-                  <a:schemeClr val="bg1"/>
-                </a:solidFill>
-              </a:rPr>
-              <a:t>・ </a:t>
-            </a:r>
-            <a:r>
-              <a:rPr kumimoji="1" lang="en-US" altLang="ja-JP" sz="2400" dirty="0">
-                <a:solidFill>
-                  <a:schemeClr val="bg1"/>
-                </a:solidFill>
-              </a:rPr>
-              <a:t>DirectX11</a:t>
-            </a:r>
-            <a:endParaRPr kumimoji="1" lang="ja-JP" altLang="en-US" sz="2400" dirty="0">
-              <a:solidFill>
-                <a:schemeClr val="bg1"/>
-              </a:solidFill>
-            </a:endParaRPr>
-          </a:p>
-        </p:txBody>
-      </p:sp>
-      <p:sp>
-        <p:nvSpPr>
-          <p:cNvPr id="10" name="テキスト ボックス 9">
-            <a:extLst>
-              <a:ext uri="{FF2B5EF4-FFF2-40B4-BE49-F238E27FC236}">
-                <a16:creationId xmlns:a16="http://schemas.microsoft.com/office/drawing/2014/main" id="{70C16102-087D-3E60-F93F-F272B10EBB0C}"/>
-              </a:ext>
-            </a:extLst>
-          </p:cNvPr>
-          <p:cNvSpPr txBox="1"/>
-          <p:nvPr/>
-        </p:nvSpPr>
-        <p:spPr>
-          <a:xfrm>
-            <a:off x="371168" y="4118578"/>
-            <a:ext cx="2905432" cy="1200329"/>
-          </a:xfrm>
-          <a:prstGeom prst="rect">
-            <a:avLst/>
-          </a:prstGeom>
-          <a:noFill/>
-          <a:ln>
-            <a:noFill/>
-          </a:ln>
-        </p:spPr>
-        <p:txBody>
-          <a:bodyPr wrap="square" rtlCol="0">
-            <a:spAutoFit/>
-          </a:bodyPr>
-          <a:lstStyle/>
-          <a:p>
-            <a:r>
-              <a:rPr kumimoji="1" lang="ja-JP" altLang="en-US" sz="2400" dirty="0">
-                <a:solidFill>
-                  <a:schemeClr val="bg1"/>
-                </a:solidFill>
-              </a:rPr>
-              <a:t>・ </a:t>
-            </a:r>
-            <a:r>
-              <a:rPr kumimoji="1" lang="en-US" altLang="ja-JP" sz="2400" dirty="0" err="1">
-                <a:solidFill>
-                  <a:schemeClr val="bg1"/>
-                </a:solidFill>
-              </a:rPr>
-              <a:t>assimp</a:t>
-            </a:r>
-            <a:br>
-              <a:rPr kumimoji="1" lang="en-US" altLang="ja-JP" sz="2400" dirty="0">
-                <a:solidFill>
-                  <a:schemeClr val="bg1"/>
-                </a:solidFill>
-              </a:rPr>
-            </a:br>
-            <a:r>
-              <a:rPr kumimoji="1" lang="ja-JP" altLang="en-US" sz="2400" dirty="0">
-                <a:solidFill>
-                  <a:schemeClr val="bg1"/>
-                </a:solidFill>
-              </a:rPr>
-              <a:t>・ </a:t>
-            </a:r>
-            <a:r>
-              <a:rPr kumimoji="1" lang="en-US" altLang="ja-JP" sz="2400" dirty="0">
-                <a:solidFill>
-                  <a:schemeClr val="bg1"/>
-                </a:solidFill>
-              </a:rPr>
-              <a:t>DirectX Tex</a:t>
-            </a:r>
-          </a:p>
-          <a:p>
-            <a:r>
-              <a:rPr kumimoji="1" lang="ja-JP" altLang="en-US" sz="2400" dirty="0">
-                <a:solidFill>
-                  <a:schemeClr val="bg1"/>
-                </a:solidFill>
-              </a:rPr>
-              <a:t>・ </a:t>
-            </a:r>
-            <a:r>
-              <a:rPr kumimoji="1" lang="en-US" altLang="ja-JP" sz="2400" dirty="0" err="1">
-                <a:solidFill>
-                  <a:schemeClr val="bg1"/>
-                </a:solidFill>
-              </a:rPr>
-              <a:t>imgui</a:t>
-            </a:r>
-            <a:endParaRPr kumimoji="1" lang="ja-JP" altLang="en-US" sz="2400" dirty="0">
-              <a:solidFill>
-                <a:schemeClr val="bg1"/>
-              </a:solidFill>
-            </a:endParaRPr>
-          </a:p>
-        </p:txBody>
-      </p:sp>
-      <p:sp>
-        <p:nvSpPr>
-          <p:cNvPr id="3" name="テキスト ボックス 2">
-            <a:extLst>
-              <a:ext uri="{FF2B5EF4-FFF2-40B4-BE49-F238E27FC236}">
-                <a16:creationId xmlns:a16="http://schemas.microsoft.com/office/drawing/2014/main" id="{CC53D2EB-AE10-803F-5B20-6760BC2CA432}"/>
-              </a:ext>
-            </a:extLst>
-          </p:cNvPr>
-          <p:cNvSpPr txBox="1"/>
-          <p:nvPr/>
-        </p:nvSpPr>
-        <p:spPr>
-          <a:xfrm>
-            <a:off x="2566997" y="5870098"/>
-            <a:ext cx="2081203" cy="461665"/>
-          </a:xfrm>
-          <a:prstGeom prst="rect">
-            <a:avLst/>
-          </a:prstGeom>
-          <a:noFill/>
-          <a:ln>
-            <a:noFill/>
-          </a:ln>
-        </p:spPr>
-        <p:txBody>
-          <a:bodyPr wrap="square" rtlCol="0">
-            <a:spAutoFit/>
-          </a:bodyPr>
-          <a:lstStyle/>
-          <a:p>
-            <a:r>
-              <a:rPr kumimoji="1" lang="ja-JP" altLang="ja-JP" sz="2400" u="sng" dirty="0">
-                <a:solidFill>
-                  <a:schemeClr val="bg1"/>
-                </a:solidFill>
-              </a:rPr>
-              <a:t>約３～４か月</a:t>
-            </a:r>
-            <a:endParaRPr kumimoji="1" lang="ja-JP" altLang="en-US" sz="2400" u="sng" dirty="0">
-              <a:solidFill>
-                <a:schemeClr val="bg1"/>
-              </a:solidFill>
-            </a:endParaRPr>
-          </a:p>
-        </p:txBody>
-      </p:sp>
-    </p:spTree>
-    <p:extLst>
-      <p:ext uri="{BB962C8B-B14F-4D97-AF65-F5344CB8AC3E}">
-        <p14:creationId xmlns:p14="http://schemas.microsoft.com/office/powerpoint/2010/main" val="84031127"/>
-      </p:ext>
-    </p:extLst>
-  </p:cSld>
-  <p:clrMapOvr>
-    <a:masterClrMapping/>
-  </p:clrMapOvr>
-</p:sld>
-</file>
-
-<file path=ppt/slides/slide6.xml><?xml version="1.0" encoding="utf-8"?>
 <p:sld xmlns:a="http://schemas.openxmlformats.org/drawingml/2006/main" xmlns:r="http://schemas.openxmlformats.org/officeDocument/2006/relationships" xmlns:p="http://schemas.openxmlformats.org/presentationml/2006/main">
   <p:cSld>
     <p:spTree>
@@ -2948,7 +3062,7 @@
         <p:spPr>
           <a:xfrm>
             <a:off x="371168" y="1670339"/>
-            <a:ext cx="2676832" cy="584775"/>
+            <a:ext cx="4048432" cy="584775"/>
           </a:xfrm>
           <a:prstGeom prst="rect">
             <a:avLst/>
@@ -2968,12 +3082,12 @@
           <a:p>
             <a:pPr algn="l"/>
             <a:r>
-              <a:rPr kumimoji="1" lang="ja-JP" altLang="en-US" sz="3200" dirty="0">
-                <a:solidFill>
-                  <a:schemeClr val="bg1"/>
-                </a:solidFill>
-              </a:rPr>
-              <a:t>基本データ型</a:t>
+              <a:rPr kumimoji="1" lang="ja-JP" altLang="en-US" sz="3200" b="1" dirty="0">
+                <a:solidFill>
+                  <a:schemeClr val="bg1"/>
+                </a:solidFill>
+              </a:rPr>
+              <a:t>データ構造の統一化</a:t>
             </a:r>
           </a:p>
         </p:txBody>
@@ -2993,7 +3107,7 @@
         <p:spPr>
           <a:xfrm>
             <a:off x="371168" y="2255114"/>
-            <a:ext cx="10754032" cy="1200329"/>
+            <a:ext cx="10754032" cy="2593980"/>
           </a:xfrm>
           <a:prstGeom prst="rect">
             <a:avLst/>
@@ -3009,100 +3123,410 @@
           </a:bodyPr>
           <a:lstStyle/>
           <a:p>
-            <a:r>
-              <a:rPr kumimoji="1" lang="ja-JP" altLang="en-US" sz="2400" dirty="0">
-                <a:solidFill>
-                  <a:schemeClr val="bg1"/>
-                </a:solidFill>
-              </a:rPr>
-              <a:t>各</a:t>
-            </a:r>
-            <a:r>
-              <a:rPr kumimoji="1" lang="en-US" altLang="ja-JP" sz="2400" dirty="0">
-                <a:solidFill>
-                  <a:schemeClr val="bg1"/>
-                </a:solidFill>
+            <a:pPr marL="0" marR="0" lvl="0" indent="0" algn="l" defTabSz="914400" rtl="0" eaLnBrk="0" fontAlgn="base" latinLnBrk="0" hangingPunct="0">
+              <a:lnSpc>
+                <a:spcPct val="150000"/>
+              </a:lnSpc>
+              <a:spcBef>
+                <a:spcPct val="0"/>
+              </a:spcBef>
+              <a:spcAft>
+                <a:spcPct val="0"/>
+              </a:spcAft>
+              <a:buClrTx/>
+              <a:buSzTx/>
+              <a:buFontTx/>
+              <a:buChar char="•"/>
+              <a:tabLst/>
+            </a:pPr>
+            <a:r>
+              <a:rPr kumimoji="0" lang="en-US" altLang="ja-JP" sz="2800" b="1" i="0" strike="noStrike" cap="none" normalizeH="0" baseline="0" dirty="0">
+                <a:ln>
+                  <a:noFill/>
+                </a:ln>
+                <a:solidFill>
+                  <a:srgbClr val="FF0000"/>
+                </a:solidFill>
+                <a:effectLst/>
+                <a:latin typeface="Arial" panose="020B0604020202020204" pitchFamily="34" charset="0"/>
+              </a:rPr>
+              <a:t> </a:t>
+            </a:r>
+            <a:r>
+              <a:rPr kumimoji="0" lang="ja-JP" altLang="ja-JP" sz="2800" b="1" i="0" u="sng" strike="noStrike" cap="none" normalizeH="0" baseline="0" dirty="0">
+                <a:ln>
+                  <a:noFill/>
+                </a:ln>
+                <a:solidFill>
+                  <a:srgbClr val="FF0000"/>
+                </a:solidFill>
+                <a:effectLst/>
+                <a:latin typeface="Arial" panose="020B0604020202020204" pitchFamily="34" charset="0"/>
+              </a:rPr>
+              <a:t>数学・文字列ライブラリを自作し差異を吸収</a:t>
+            </a:r>
+          </a:p>
+          <a:p>
+            <a:pPr marL="0" marR="0" lvl="0" indent="0" algn="l" defTabSz="914400" rtl="0" eaLnBrk="0" fontAlgn="base" latinLnBrk="0" hangingPunct="0">
+              <a:lnSpc>
+                <a:spcPct val="150000"/>
+              </a:lnSpc>
+              <a:spcBef>
+                <a:spcPct val="0"/>
+              </a:spcBef>
+              <a:spcAft>
+                <a:spcPct val="0"/>
+              </a:spcAft>
+              <a:buClrTx/>
+              <a:buSzTx/>
+              <a:buFontTx/>
+              <a:buChar char="•"/>
+              <a:tabLst/>
+            </a:pPr>
+            <a:r>
+              <a:rPr kumimoji="0" lang="en-US" altLang="ja-JP" sz="2800" b="1" i="0" strike="noStrike" cap="none" normalizeH="0" baseline="0" dirty="0">
+                <a:ln>
+                  <a:noFill/>
+                </a:ln>
+                <a:solidFill>
+                  <a:srgbClr val="FF0000"/>
+                </a:solidFill>
+                <a:effectLst/>
+                <a:latin typeface="Arial" panose="020B0604020202020204" pitchFamily="34" charset="0"/>
+              </a:rPr>
+              <a:t> </a:t>
+            </a:r>
+            <a:r>
+              <a:rPr kumimoji="0" lang="ja-JP" altLang="ja-JP" sz="2800" b="1" i="0" u="sng" strike="noStrike" cap="none" normalizeH="0" baseline="0" dirty="0">
+                <a:ln>
+                  <a:noFill/>
+                </a:ln>
+                <a:solidFill>
+                  <a:srgbClr val="FF0000"/>
+                </a:solidFill>
+                <a:effectLst/>
+                <a:latin typeface="Arial" panose="020B0604020202020204" pitchFamily="34" charset="0"/>
+              </a:rPr>
+              <a:t>数学処理は</a:t>
+            </a:r>
+            <a:r>
+              <a:rPr kumimoji="0" lang="ja-JP" altLang="en-US" sz="2800" b="1" i="0" u="sng" strike="noStrike" cap="none" normalizeH="0" baseline="0" dirty="0">
+                <a:ln>
+                  <a:noFill/>
+                </a:ln>
+                <a:solidFill>
+                  <a:srgbClr val="FF0000"/>
+                </a:solidFill>
+                <a:effectLst/>
+                <a:latin typeface="Arial" panose="020B0604020202020204" pitchFamily="34" charset="0"/>
+              </a:rPr>
+              <a:t>計算関数内を</a:t>
+            </a:r>
+            <a:r>
+              <a:rPr kumimoji="0" lang="en-US" altLang="ja-JP" sz="2800" b="1" i="0" u="sng" strike="noStrike" cap="none" normalizeH="0" baseline="0" dirty="0">
+                <a:ln>
+                  <a:noFill/>
+                </a:ln>
+                <a:solidFill>
+                  <a:srgbClr val="FF0000"/>
+                </a:solidFill>
+                <a:effectLst/>
+                <a:latin typeface="Arial" panose="020B0604020202020204" pitchFamily="34" charset="0"/>
               </a:rPr>
               <a:t>API</a:t>
             </a:r>
             <a:r>
-              <a:rPr kumimoji="1" lang="ja-JP" altLang="en-US" sz="2400" dirty="0">
-                <a:solidFill>
-                  <a:schemeClr val="bg1"/>
-                </a:solidFill>
-              </a:rPr>
-              <a:t>、</a:t>
-            </a:r>
-            <a:r>
-              <a:rPr kumimoji="1" lang="en-US" altLang="ja-JP" sz="2400" dirty="0">
-                <a:solidFill>
-                  <a:schemeClr val="bg1"/>
-                </a:solidFill>
-              </a:rPr>
-              <a:t>OS</a:t>
-            </a:r>
-            <a:r>
-              <a:rPr kumimoji="1" lang="ja-JP" altLang="en-US" sz="2400" dirty="0">
-                <a:solidFill>
-                  <a:schemeClr val="bg1"/>
-                </a:solidFill>
-              </a:rPr>
-              <a:t>ごとの差異を吸収するために自作数学・文字列ライブラリを作成</a:t>
-            </a:r>
-            <a:endParaRPr kumimoji="1" lang="en-US" altLang="ja-JP" sz="2400" dirty="0">
+              <a:rPr kumimoji="0" lang="ja-JP" altLang="en-US" sz="2800" b="1" i="0" u="sng" strike="noStrike" cap="none" normalizeH="0" baseline="0" dirty="0">
+                <a:ln>
+                  <a:noFill/>
+                </a:ln>
+                <a:solidFill>
+                  <a:srgbClr val="FF0000"/>
+                </a:solidFill>
+                <a:effectLst/>
+                <a:latin typeface="Arial" panose="020B0604020202020204" pitchFamily="34" charset="0"/>
+              </a:rPr>
+              <a:t>依存のものを使用して最適化</a:t>
+            </a:r>
+            <a:endParaRPr kumimoji="0" lang="ja-JP" altLang="ja-JP" sz="2800" b="1" i="0" u="sng" strike="noStrike" cap="none" normalizeH="0" baseline="0" dirty="0">
+              <a:ln>
+                <a:noFill/>
+              </a:ln>
               <a:solidFill>
-                <a:schemeClr val="bg1"/>
+                <a:srgbClr val="FF0000"/>
               </a:solidFill>
+              <a:effectLst/>
+              <a:latin typeface="Arial" panose="020B0604020202020204" pitchFamily="34" charset="0"/>
             </a:endParaRPr>
           </a:p>
           <a:p>
-            <a:r>
-              <a:rPr kumimoji="1" lang="ja-JP" altLang="en-US" sz="2400" dirty="0">
-                <a:solidFill>
-                  <a:schemeClr val="bg1"/>
-                </a:solidFill>
-              </a:rPr>
-              <a:t>数学ライブラリは計算処理のみ、プラットフォームに最適なものを使用</a:t>
-            </a:r>
-            <a:endParaRPr kumimoji="1" lang="en-US" altLang="ja-JP" sz="2400" dirty="0">
+            <a:pPr marL="0" marR="0" lvl="0" indent="0" algn="l" defTabSz="914400" rtl="0" eaLnBrk="0" fontAlgn="base" latinLnBrk="0" hangingPunct="0">
+              <a:lnSpc>
+                <a:spcPct val="150000"/>
+              </a:lnSpc>
+              <a:spcBef>
+                <a:spcPct val="0"/>
+              </a:spcBef>
+              <a:spcAft>
+                <a:spcPct val="0"/>
+              </a:spcAft>
+              <a:buClrTx/>
+              <a:buSzTx/>
+              <a:buFontTx/>
+              <a:buChar char="•"/>
+              <a:tabLst/>
+            </a:pPr>
+            <a:r>
+              <a:rPr kumimoji="0" lang="en-US" altLang="ja-JP" sz="2800" b="1" i="0" strike="noStrike" cap="none" normalizeH="0" baseline="0" dirty="0">
+                <a:ln>
+                  <a:noFill/>
+                </a:ln>
+                <a:solidFill>
+                  <a:srgbClr val="FF0000"/>
+                </a:solidFill>
+                <a:effectLst/>
+                <a:latin typeface="Arial" panose="020B0604020202020204" pitchFamily="34" charset="0"/>
+              </a:rPr>
+              <a:t> </a:t>
+            </a:r>
+            <a:r>
+              <a:rPr kumimoji="0" lang="ja-JP" altLang="ja-JP" sz="2800" b="1" i="0" u="sng" strike="noStrike" cap="none" normalizeH="0" baseline="0" dirty="0">
+                <a:ln>
+                  <a:noFill/>
+                </a:ln>
+                <a:solidFill>
+                  <a:srgbClr val="FF0000"/>
+                </a:solidFill>
+                <a:effectLst/>
+                <a:latin typeface="Arial" panose="020B0604020202020204" pitchFamily="34" charset="0"/>
+              </a:rPr>
+              <a:t>文字列は UTF-8 に統一</a:t>
+            </a:r>
+          </a:p>
+          <a:p>
+            <a:pPr marL="0" marR="0" lvl="0" indent="0" algn="l" defTabSz="914400" rtl="0" eaLnBrk="0" fontAlgn="base" latinLnBrk="0" hangingPunct="0">
+              <a:lnSpc>
+                <a:spcPct val="150000"/>
+              </a:lnSpc>
+              <a:spcBef>
+                <a:spcPct val="0"/>
+              </a:spcBef>
+              <a:spcAft>
+                <a:spcPct val="0"/>
+              </a:spcAft>
+              <a:buClrTx/>
+              <a:buSzTx/>
+              <a:buFontTx/>
+              <a:buChar char="•"/>
+              <a:tabLst/>
+            </a:pPr>
+            <a:r>
+              <a:rPr kumimoji="0" lang="en-US" altLang="ja-JP" sz="2800" b="1" strike="noStrike" cap="none" normalizeH="0" baseline="0" dirty="0">
+                <a:ln>
+                  <a:noFill/>
+                </a:ln>
+                <a:solidFill>
+                  <a:srgbClr val="FF0000"/>
+                </a:solidFill>
+                <a:effectLst/>
+                <a:latin typeface="Arial" panose="020B0604020202020204" pitchFamily="34" charset="0"/>
+              </a:rPr>
+              <a:t> </a:t>
+            </a:r>
+            <a:r>
+              <a:rPr kumimoji="0" lang="ja-JP" altLang="ja-JP" sz="2800" b="1" i="0" u="sng" strike="noStrike" cap="none" normalizeH="0" baseline="0" dirty="0">
+                <a:ln>
+                  <a:noFill/>
+                </a:ln>
+                <a:solidFill>
+                  <a:srgbClr val="FF0000"/>
+                </a:solidFill>
+                <a:effectLst/>
+                <a:latin typeface="Arial" panose="020B0604020202020204" pitchFamily="34" charset="0"/>
+              </a:rPr>
+              <a:t>行列</a:t>
+            </a:r>
+            <a:r>
+              <a:rPr kumimoji="0" lang="ja-JP" altLang="en-US" sz="2800" b="1" i="0" u="sng" strike="noStrike" cap="none" normalizeH="0" baseline="0" dirty="0">
+                <a:ln>
+                  <a:noFill/>
+                </a:ln>
+                <a:solidFill>
+                  <a:srgbClr val="FF0000"/>
+                </a:solidFill>
+                <a:effectLst/>
+                <a:latin typeface="Arial" panose="020B0604020202020204" pitchFamily="34" charset="0"/>
+              </a:rPr>
+              <a:t>ルールを</a:t>
+            </a:r>
+            <a:r>
+              <a:rPr kumimoji="0" lang="ja-JP" altLang="ja-JP" sz="2800" b="1" i="0" u="sng" strike="noStrike" cap="none" normalizeH="0" baseline="0" dirty="0">
+                <a:ln>
+                  <a:noFill/>
+                </a:ln>
+                <a:solidFill>
+                  <a:srgbClr val="FF0000"/>
+                </a:solidFill>
+                <a:effectLst/>
+                <a:latin typeface="Arial" panose="020B0604020202020204" pitchFamily="34" charset="0"/>
+              </a:rPr>
+              <a:t>左手・列優先</a:t>
+            </a:r>
+            <a:r>
+              <a:rPr kumimoji="0" lang="en-US" altLang="ja-JP" sz="2800" b="1" i="0" u="sng" strike="noStrike" cap="none" normalizeH="0" baseline="0" dirty="0">
+                <a:ln>
+                  <a:noFill/>
+                </a:ln>
+                <a:solidFill>
+                  <a:srgbClr val="FF0000"/>
+                </a:solidFill>
+                <a:effectLst/>
+                <a:latin typeface="Arial" panose="020B0604020202020204" pitchFamily="34" charset="0"/>
+              </a:rPr>
+              <a:t>(</a:t>
+            </a:r>
+            <a:r>
+              <a:rPr kumimoji="0" lang="ja-JP" altLang="en-US" sz="2800" b="1" i="0" u="sng" strike="noStrike" cap="none" normalizeH="0" baseline="0" dirty="0">
+                <a:ln>
+                  <a:noFill/>
+                </a:ln>
+                <a:solidFill>
+                  <a:srgbClr val="FF0000"/>
+                </a:solidFill>
+                <a:effectLst/>
+                <a:latin typeface="Arial" panose="020B0604020202020204" pitchFamily="34" charset="0"/>
+              </a:rPr>
+              <a:t>列ベクトル</a:t>
+            </a:r>
+            <a:r>
+              <a:rPr kumimoji="0" lang="en-US" altLang="ja-JP" sz="2800" b="1" i="0" u="sng" strike="noStrike" cap="none" normalizeH="0" baseline="0" dirty="0">
+                <a:ln>
+                  <a:noFill/>
+                </a:ln>
+                <a:solidFill>
+                  <a:srgbClr val="FF0000"/>
+                </a:solidFill>
+                <a:effectLst/>
+                <a:latin typeface="Arial" panose="020B0604020202020204" pitchFamily="34" charset="0"/>
+              </a:rPr>
+              <a:t>)</a:t>
+            </a:r>
+            <a:r>
+              <a:rPr kumimoji="0" lang="ja-JP" altLang="en-US" sz="2800" b="1" i="0" u="sng" strike="noStrike" cap="none" normalizeH="0" baseline="0" dirty="0">
+                <a:ln>
+                  <a:noFill/>
+                </a:ln>
+                <a:solidFill>
+                  <a:srgbClr val="FF0000"/>
+                </a:solidFill>
+                <a:effectLst/>
+                <a:latin typeface="Arial" panose="020B0604020202020204" pitchFamily="34" charset="0"/>
+              </a:rPr>
+              <a:t>で決定</a:t>
+            </a:r>
+            <a:endParaRPr kumimoji="0" lang="ja-JP" altLang="ja-JP" sz="2800" b="1" i="0" u="sng" strike="noStrike" cap="none" normalizeH="0" baseline="0" dirty="0">
+              <a:ln>
+                <a:noFill/>
+              </a:ln>
               <a:solidFill>
-                <a:schemeClr val="bg1"/>
+                <a:srgbClr val="FF0000"/>
               </a:solidFill>
+              <a:effectLst/>
+              <a:latin typeface="Arial" panose="020B0604020202020204" pitchFamily="34" charset="0"/>
             </a:endParaRPr>
           </a:p>
-          <a:p>
-            <a:r>
-              <a:rPr kumimoji="1" lang="ja-JP" altLang="en-US" sz="2400" dirty="0">
-                <a:solidFill>
-                  <a:schemeClr val="bg1"/>
-                </a:solidFill>
-              </a:rPr>
-              <a:t>文字列ライブラリはエンコードを</a:t>
-            </a:r>
-            <a:r>
-              <a:rPr kumimoji="1" lang="en-US" altLang="ja-JP" sz="2400" dirty="0">
-                <a:solidFill>
-                  <a:schemeClr val="bg1"/>
-                </a:solidFill>
-              </a:rPr>
-              <a:t>UTF-8</a:t>
-            </a:r>
-            <a:r>
-              <a:rPr kumimoji="1" lang="ja-JP" altLang="en-US" sz="2400" dirty="0">
-                <a:solidFill>
-                  <a:schemeClr val="bg1"/>
-                </a:solidFill>
-              </a:rPr>
-              <a:t>に統一して、差異を吸収しています。</a:t>
-            </a:r>
-            <a:endParaRPr kumimoji="1" lang="en-US" altLang="ja-JP" sz="2400" dirty="0">
-              <a:solidFill>
-                <a:schemeClr val="bg1"/>
-              </a:solidFill>
-            </a:endParaRPr>
-          </a:p>
-        </p:txBody>
-      </p:sp>
+        </p:txBody>
+      </p:sp>
+      <p:pic>
+        <p:nvPicPr>
+          <p:cNvPr id="5" name="図 4" descr="テキスト&#10;&#10;AI 生成コンテンツは誤りを含む可能性があります。">
+            <a:extLst>
+              <a:ext uri="{FF2B5EF4-FFF2-40B4-BE49-F238E27FC236}">
+                <a16:creationId xmlns:a16="http://schemas.microsoft.com/office/drawing/2014/main" id="{3E0A3369-F7C4-BA17-65EB-8625592D6D6A}"/>
+              </a:ext>
+            </a:extLst>
+          </p:cNvPr>
+          <p:cNvPicPr>
+            <a:picLocks noChangeAspect="1"/>
+          </p:cNvPicPr>
+          <p:nvPr/>
+        </p:nvPicPr>
+        <p:blipFill>
+          <a:blip r:embed="rId2"/>
+          <a:stretch>
+            <a:fillRect/>
+          </a:stretch>
+        </p:blipFill>
+        <p:spPr>
+          <a:xfrm>
+            <a:off x="9839632" y="142895"/>
+            <a:ext cx="1981200" cy="2597573"/>
+          </a:xfrm>
+          <a:prstGeom prst="rect">
+            <a:avLst/>
+          </a:prstGeom>
+        </p:spPr>
+      </p:pic>
+      <p:pic>
+        <p:nvPicPr>
+          <p:cNvPr id="8" name="図 7" descr="テキスト&#10;&#10;AI 生成コンテンツは誤りを含む可能性があります。">
+            <a:extLst>
+              <a:ext uri="{FF2B5EF4-FFF2-40B4-BE49-F238E27FC236}">
+                <a16:creationId xmlns:a16="http://schemas.microsoft.com/office/drawing/2014/main" id="{8CCBE5D2-99AD-D425-DBE5-74D9A7632665}"/>
+              </a:ext>
+            </a:extLst>
+          </p:cNvPr>
+          <p:cNvPicPr>
+            <a:picLocks noChangeAspect="1"/>
+          </p:cNvPicPr>
+          <p:nvPr/>
+        </p:nvPicPr>
+        <p:blipFill>
+          <a:blip r:embed="rId3"/>
+          <a:stretch>
+            <a:fillRect/>
+          </a:stretch>
+        </p:blipFill>
+        <p:spPr>
+          <a:xfrm>
+            <a:off x="1964609" y="4869414"/>
+            <a:ext cx="2319184" cy="1926797"/>
+          </a:xfrm>
+          <a:prstGeom prst="rect">
+            <a:avLst/>
+          </a:prstGeom>
+        </p:spPr>
+      </p:pic>
+      <p:pic>
+        <p:nvPicPr>
+          <p:cNvPr id="11" name="図 10" descr="テキスト&#10;&#10;AI 生成コンテンツは誤りを含む可能性があります。">
+            <a:extLst>
+              <a:ext uri="{FF2B5EF4-FFF2-40B4-BE49-F238E27FC236}">
+                <a16:creationId xmlns:a16="http://schemas.microsoft.com/office/drawing/2014/main" id="{DF5F31C7-B79E-640C-B434-DB5C53CA2F95}"/>
+              </a:ext>
+            </a:extLst>
+          </p:cNvPr>
+          <p:cNvPicPr>
+            <a:picLocks noChangeAspect="1"/>
+          </p:cNvPicPr>
+          <p:nvPr/>
+        </p:nvPicPr>
+        <p:blipFill>
+          <a:blip r:embed="rId4"/>
+          <a:stretch>
+            <a:fillRect/>
+          </a:stretch>
+        </p:blipFill>
+        <p:spPr>
+          <a:xfrm>
+            <a:off x="9067800" y="4379556"/>
+            <a:ext cx="2819400" cy="2108626"/>
+          </a:xfrm>
+          <a:prstGeom prst="rect">
+            <a:avLst/>
+          </a:prstGeom>
+        </p:spPr>
+      </p:pic>
     </p:spTree>
     <p:extLst>
       <p:ext uri="{BB962C8B-B14F-4D97-AF65-F5344CB8AC3E}">
@@ -3116,7 +3540,7 @@
 </p:sld>
 </file>
 
-<file path=ppt/slides/slide7.xml><?xml version="1.0" encoding="utf-8"?>
+<file path=ppt/slides/slide6.xml><?xml version="1.0" encoding="utf-8"?>
 <p:sld xmlns:a="http://schemas.openxmlformats.org/drawingml/2006/main" xmlns:r="http://schemas.openxmlformats.org/officeDocument/2006/relationships" xmlns:p="http://schemas.openxmlformats.org/presentationml/2006/main">
   <p:cSld>
     <p:spTree>
@@ -3232,7 +3656,7 @@
         <p:spPr>
           <a:xfrm>
             <a:off x="371168" y="2255114"/>
-            <a:ext cx="10754032" cy="461665"/>
+            <a:ext cx="10754032" cy="1947649"/>
           </a:xfrm>
           <a:prstGeom prst="rect">
             <a:avLst/>
@@ -3248,22 +3672,245 @@
           </a:bodyPr>
           <a:lstStyle/>
           <a:p>
-            <a:r>
-              <a:rPr kumimoji="1" lang="ja-JP" altLang="en-US" sz="2400" dirty="0">
-                <a:solidFill>
-                  <a:schemeClr val="bg1"/>
-                </a:solidFill>
-              </a:rPr>
-              <a:t>リソース管理を名前で</a:t>
-            </a:r>
-            <a:endParaRPr kumimoji="1" lang="en-US" altLang="ja-JP" sz="2400" dirty="0">
+            <a:pPr marL="0" marR="0" lvl="0" indent="0" algn="l" defTabSz="914400" rtl="0" eaLnBrk="0" fontAlgn="base" latinLnBrk="0" hangingPunct="0">
+              <a:lnSpc>
+                <a:spcPct val="150000"/>
+              </a:lnSpc>
+              <a:spcBef>
+                <a:spcPct val="0"/>
+              </a:spcBef>
+              <a:spcAft>
+                <a:spcPct val="0"/>
+              </a:spcAft>
+              <a:buClrTx/>
+              <a:buSzTx/>
+              <a:buFontTx/>
+              <a:buChar char="•"/>
+              <a:tabLst/>
+            </a:pPr>
+            <a:r>
+              <a:rPr kumimoji="0" lang="en-US" altLang="ja-JP" sz="2800" b="1" i="0" strike="noStrike" cap="none" normalizeH="0" baseline="0" dirty="0">
+                <a:ln>
+                  <a:noFill/>
+                </a:ln>
+                <a:solidFill>
+                  <a:srgbClr val="FF0000"/>
+                </a:solidFill>
+                <a:effectLst/>
+                <a:latin typeface="Arial" panose="020B0604020202020204" pitchFamily="34" charset="0"/>
+              </a:rPr>
+              <a:t> </a:t>
+            </a:r>
+            <a:r>
+              <a:rPr kumimoji="0" lang="ja-JP" altLang="ja-JP" sz="2800" b="1" i="0" u="sng" strike="noStrike" cap="none" normalizeH="0" baseline="0" dirty="0">
+                <a:ln>
+                  <a:noFill/>
+                </a:ln>
+                <a:solidFill>
+                  <a:srgbClr val="FF0000"/>
+                </a:solidFill>
+                <a:effectLst/>
+                <a:latin typeface="Arial" panose="020B0604020202020204" pitchFamily="34" charset="0"/>
+              </a:rPr>
+              <a:t>描画マネージャーを抽象化し、ゲーム層へ受け渡し</a:t>
+            </a:r>
+            <a:r>
+              <a:rPr kumimoji="0" lang="ja-JP" altLang="en-US" sz="2800" b="1" i="0" u="sng" strike="noStrike" cap="none" normalizeH="0" baseline="0" dirty="0">
+                <a:ln>
+                  <a:noFill/>
+                </a:ln>
+                <a:solidFill>
+                  <a:srgbClr val="FF0000"/>
+                </a:solidFill>
+                <a:effectLst/>
+                <a:latin typeface="Arial" panose="020B0604020202020204" pitchFamily="34" charset="0"/>
+              </a:rPr>
+              <a:t>ている</a:t>
+            </a:r>
+            <a:endParaRPr kumimoji="0" lang="ja-JP" altLang="ja-JP" sz="2800" b="1" i="0" u="sng" strike="noStrike" cap="none" normalizeH="0" baseline="0" dirty="0">
+              <a:ln>
+                <a:noFill/>
+              </a:ln>
               <a:solidFill>
-                <a:schemeClr val="bg1"/>
+                <a:srgbClr val="FF0000"/>
               </a:solidFill>
+              <a:effectLst/>
+              <a:latin typeface="Arial" panose="020B0604020202020204" pitchFamily="34" charset="0"/>
             </a:endParaRPr>
           </a:p>
-        </p:txBody>
-      </p:sp>
+          <a:p>
+            <a:pPr marL="0" marR="0" lvl="0" indent="0" algn="l" defTabSz="914400" rtl="0" eaLnBrk="0" fontAlgn="base" latinLnBrk="0" hangingPunct="0">
+              <a:lnSpc>
+                <a:spcPct val="150000"/>
+              </a:lnSpc>
+              <a:spcBef>
+                <a:spcPct val="0"/>
+              </a:spcBef>
+              <a:spcAft>
+                <a:spcPct val="0"/>
+              </a:spcAft>
+              <a:buClrTx/>
+              <a:buSzTx/>
+              <a:buFontTx/>
+              <a:buChar char="•"/>
+              <a:tabLst/>
+            </a:pPr>
+            <a:r>
+              <a:rPr kumimoji="0" lang="en-US" altLang="ja-JP" sz="2800" b="1" i="0" strike="noStrike" cap="none" normalizeH="0" baseline="0" dirty="0">
+                <a:ln>
+                  <a:noFill/>
+                </a:ln>
+                <a:solidFill>
+                  <a:srgbClr val="FF0000"/>
+                </a:solidFill>
+                <a:effectLst/>
+                <a:latin typeface="Arial" panose="020B0604020202020204" pitchFamily="34" charset="0"/>
+              </a:rPr>
+              <a:t> </a:t>
+            </a:r>
+            <a:r>
+              <a:rPr kumimoji="0" lang="ja-JP" altLang="ja-JP" sz="2800" b="1" i="0" u="sng" strike="noStrike" cap="none" normalizeH="0" baseline="0" dirty="0">
+                <a:ln>
+                  <a:noFill/>
+                </a:ln>
+                <a:solidFill>
+                  <a:srgbClr val="FF0000"/>
+                </a:solidFill>
+                <a:effectLst/>
+                <a:latin typeface="Arial" panose="020B0604020202020204" pitchFamily="34" charset="0"/>
+              </a:rPr>
+              <a:t>ポリモーフィズムによりAPI差異を意識せず描画</a:t>
+            </a:r>
+            <a:r>
+              <a:rPr kumimoji="0" lang="ja-JP" altLang="en-US" sz="2800" b="1" i="0" u="sng" strike="noStrike" cap="none" normalizeH="0" baseline="0" dirty="0">
+                <a:ln>
+                  <a:noFill/>
+                </a:ln>
+                <a:solidFill>
+                  <a:srgbClr val="FF0000"/>
+                </a:solidFill>
+                <a:effectLst/>
+                <a:latin typeface="Arial" panose="020B0604020202020204" pitchFamily="34" charset="0"/>
+              </a:rPr>
+              <a:t>している</a:t>
+            </a:r>
+            <a:endParaRPr kumimoji="0" lang="ja-JP" altLang="ja-JP" sz="2800" b="1" i="0" u="sng" strike="noStrike" cap="none" normalizeH="0" baseline="0" dirty="0">
+              <a:ln>
+                <a:noFill/>
+              </a:ln>
+              <a:solidFill>
+                <a:srgbClr val="FF0000"/>
+              </a:solidFill>
+              <a:effectLst/>
+              <a:latin typeface="Arial" panose="020B0604020202020204" pitchFamily="34" charset="0"/>
+            </a:endParaRPr>
+          </a:p>
+          <a:p>
+            <a:pPr marL="0" marR="0" lvl="0" indent="0" algn="l" defTabSz="914400" rtl="0" eaLnBrk="0" fontAlgn="base" latinLnBrk="0" hangingPunct="0">
+              <a:lnSpc>
+                <a:spcPct val="150000"/>
+              </a:lnSpc>
+              <a:spcBef>
+                <a:spcPct val="0"/>
+              </a:spcBef>
+              <a:spcAft>
+                <a:spcPct val="0"/>
+              </a:spcAft>
+              <a:buClrTx/>
+              <a:buSzTx/>
+              <a:buFontTx/>
+              <a:buChar char="•"/>
+              <a:tabLst/>
+            </a:pPr>
+            <a:r>
+              <a:rPr kumimoji="0" lang="en-US" altLang="ja-JP" sz="2800" b="1" i="0" strike="noStrike" cap="none" normalizeH="0" baseline="0" dirty="0">
+                <a:ln>
+                  <a:noFill/>
+                </a:ln>
+                <a:solidFill>
+                  <a:srgbClr val="FF0000"/>
+                </a:solidFill>
+                <a:effectLst/>
+                <a:latin typeface="Arial" panose="020B0604020202020204" pitchFamily="34" charset="0"/>
+              </a:rPr>
+              <a:t> </a:t>
+            </a:r>
+            <a:r>
+              <a:rPr kumimoji="0" lang="ja-JP" altLang="ja-JP" sz="2800" b="1" i="0" u="sng" strike="noStrike" cap="none" normalizeH="0" baseline="0" dirty="0">
+                <a:ln>
+                  <a:noFill/>
+                </a:ln>
+                <a:solidFill>
+                  <a:srgbClr val="FF0000"/>
+                </a:solidFill>
+                <a:effectLst/>
+                <a:latin typeface="Arial" panose="020B0604020202020204" pitchFamily="34" charset="0"/>
+              </a:rPr>
+              <a:t>リソースは名前管理とし、自動的に共有される設計</a:t>
+            </a:r>
+          </a:p>
+        </p:txBody>
+      </p:sp>
+      <p:pic>
+        <p:nvPicPr>
+          <p:cNvPr id="5" name="図 4" descr="コンピューターのスクリーンショット&#10;&#10;AI 生成コンテンツは誤りを含む可能性があります。">
+            <a:extLst>
+              <a:ext uri="{FF2B5EF4-FFF2-40B4-BE49-F238E27FC236}">
+                <a16:creationId xmlns:a16="http://schemas.microsoft.com/office/drawing/2014/main" id="{9CB8BAA8-BDBE-C9C1-5046-7FE880236177}"/>
+              </a:ext>
+            </a:extLst>
+          </p:cNvPr>
+          <p:cNvPicPr>
+            <a:picLocks noChangeAspect="1"/>
+          </p:cNvPicPr>
+          <p:nvPr/>
+        </p:nvPicPr>
+        <p:blipFill>
+          <a:blip r:embed="rId2"/>
+          <a:stretch>
+            <a:fillRect/>
+          </a:stretch>
+        </p:blipFill>
+        <p:spPr>
+          <a:xfrm>
+            <a:off x="533400" y="4343400"/>
+            <a:ext cx="8305800" cy="2449382"/>
+          </a:xfrm>
+          <a:prstGeom prst="rect">
+            <a:avLst/>
+          </a:prstGeom>
+        </p:spPr>
+      </p:pic>
+      <p:pic>
+        <p:nvPicPr>
+          <p:cNvPr id="6" name="図 5" descr="パソコンの画面&#10;&#10;AI 生成コンテンツは誤りを含む可能性があります。">
+            <a:extLst>
+              <a:ext uri="{FF2B5EF4-FFF2-40B4-BE49-F238E27FC236}">
+                <a16:creationId xmlns:a16="http://schemas.microsoft.com/office/drawing/2014/main" id="{26975780-4996-340C-E00F-8464A2C9E13F}"/>
+              </a:ext>
+            </a:extLst>
+          </p:cNvPr>
+          <p:cNvPicPr>
+            <a:picLocks noChangeAspect="1"/>
+          </p:cNvPicPr>
+          <p:nvPr/>
+        </p:nvPicPr>
+        <p:blipFill>
+          <a:blip r:embed="rId3"/>
+          <a:stretch>
+            <a:fillRect/>
+          </a:stretch>
+        </p:blipFill>
+        <p:spPr>
+          <a:xfrm>
+            <a:off x="9008745" y="5025166"/>
+            <a:ext cx="2085975" cy="1085850"/>
+          </a:xfrm>
+          <a:prstGeom prst="rect">
+            <a:avLst/>
+          </a:prstGeom>
+        </p:spPr>
+      </p:pic>
     </p:spTree>
     <p:extLst>
       <p:ext uri="{BB962C8B-B14F-4D97-AF65-F5344CB8AC3E}">
@@ -3277,7 +3924,7 @@
 </p:sld>
 </file>
 
-<file path=ppt/slides/slide8.xml><?xml version="1.0" encoding="utf-8"?>
+<file path=ppt/slides/slide7.xml><?xml version="1.0" encoding="utf-8"?>
 <p:sld xmlns:a="http://schemas.openxmlformats.org/drawingml/2006/main" xmlns:r="http://schemas.openxmlformats.org/officeDocument/2006/relationships" xmlns:p="http://schemas.openxmlformats.org/presentationml/2006/main">
   <p:cSld>
     <p:spTree>
@@ -3285,7 +3932,7 @@
         <p:cNvPr id="1" name="">
           <a:extLst>
             <a:ext uri="{FF2B5EF4-FFF2-40B4-BE49-F238E27FC236}">
-              <a16:creationId xmlns:a16="http://schemas.microsoft.com/office/drawing/2014/main" id="{E7213354-E36F-E724-C48D-5EED188468BC}"/>
+              <a16:creationId xmlns:a16="http://schemas.microsoft.com/office/drawing/2014/main" id="{4885C273-3BF3-11C8-794E-5A89FB38F2F2}"/>
             </a:ext>
           </a:extLst>
         </p:cNvPr>
@@ -3305,7 +3952,7 @@
           <p:cNvPr id="2" name="タイトル 1">
             <a:extLst>
               <a:ext uri="{FF2B5EF4-FFF2-40B4-BE49-F238E27FC236}">
-                <a16:creationId xmlns:a16="http://schemas.microsoft.com/office/drawing/2014/main" id="{60D19693-CCAD-0B27-1639-5BAAF0CFB45E}"/>
+                <a16:creationId xmlns:a16="http://schemas.microsoft.com/office/drawing/2014/main" id="{862F1C00-D7CE-F059-1BE3-177E133C5D62}"/>
               </a:ext>
             </a:extLst>
           </p:cNvPr>
@@ -3338,7 +3985,7 @@
           <p:cNvPr id="7" name="テキスト ボックス 6">
             <a:extLst>
               <a:ext uri="{FF2B5EF4-FFF2-40B4-BE49-F238E27FC236}">
-                <a16:creationId xmlns:a16="http://schemas.microsoft.com/office/drawing/2014/main" id="{7C5D7B65-5692-58A3-B036-8AEFD280E6EB}"/>
+                <a16:creationId xmlns:a16="http://schemas.microsoft.com/office/drawing/2014/main" id="{DB4BA5B1-1AA4-D293-0061-3A0D4BBDDE66}"/>
               </a:ext>
             </a:extLst>
           </p:cNvPr>
@@ -3348,7 +3995,7 @@
         <p:spPr>
           <a:xfrm>
             <a:off x="371168" y="1670339"/>
-            <a:ext cx="5191432" cy="584775"/>
+            <a:ext cx="2295832" cy="584775"/>
           </a:xfrm>
           <a:prstGeom prst="rect">
             <a:avLst/>
@@ -3373,7 +4020,7 @@
                   <a:schemeClr val="bg1"/>
                 </a:solidFill>
               </a:rPr>
-              <a:t>リソース管理マネージャー</a:t>
+              <a:t>シェーダー</a:t>
             </a:r>
           </a:p>
         </p:txBody>
@@ -3383,7 +4030,7 @@
           <p:cNvPr id="9" name="テキスト ボックス 8">
             <a:extLst>
               <a:ext uri="{FF2B5EF4-FFF2-40B4-BE49-F238E27FC236}">
-                <a16:creationId xmlns:a16="http://schemas.microsoft.com/office/drawing/2014/main" id="{6A6FD40F-B08A-A2B1-99A9-BA626410D035}"/>
+                <a16:creationId xmlns:a16="http://schemas.microsoft.com/office/drawing/2014/main" id="{E11CF534-4526-C3EB-E7FB-5C4BF067762C}"/>
               </a:ext>
             </a:extLst>
           </p:cNvPr>
@@ -3393,7 +4040,7 @@
         <p:spPr>
           <a:xfrm>
             <a:off x="371168" y="2255114"/>
-            <a:ext cx="10754032" cy="461665"/>
+            <a:ext cx="10754032" cy="3108543"/>
           </a:xfrm>
           <a:prstGeom prst="rect">
             <a:avLst/>
@@ -3409,26 +4056,396 @@
           </a:bodyPr>
           <a:lstStyle/>
           <a:p>
-            <a:r>
-              <a:rPr kumimoji="1" lang="ja-JP" altLang="en-US" sz="2400" dirty="0">
-                <a:solidFill>
-                  <a:schemeClr val="bg1"/>
-                </a:solidFill>
-              </a:rPr>
-              <a:t>リソース管理</a:t>
-            </a:r>
-            <a:endParaRPr kumimoji="1" lang="en-US" altLang="ja-JP" sz="2400" dirty="0">
+            <a:pPr marL="0" marR="0" lvl="0" indent="0" algn="l" defTabSz="914400" rtl="0" eaLnBrk="0" fontAlgn="base" latinLnBrk="0" hangingPunct="0">
+              <a:lnSpc>
+                <a:spcPct val="150000"/>
+              </a:lnSpc>
+              <a:spcBef>
+                <a:spcPct val="0"/>
+              </a:spcBef>
+              <a:spcAft>
+                <a:spcPct val="0"/>
+              </a:spcAft>
+              <a:buClrTx/>
+              <a:buSzTx/>
+              <a:buFontTx/>
+              <a:buChar char="•"/>
+              <a:tabLst/>
+            </a:pPr>
+            <a:r>
+              <a:rPr kumimoji="0" lang="en-US" altLang="ja-JP" sz="2800" b="1" i="0" strike="noStrike" cap="none" normalizeH="0" baseline="0" dirty="0">
+                <a:ln>
+                  <a:noFill/>
+                </a:ln>
+                <a:solidFill>
+                  <a:srgbClr val="FF0000"/>
+                </a:solidFill>
+                <a:effectLst/>
+                <a:latin typeface="Arial" panose="020B0604020202020204" pitchFamily="34" charset="0"/>
+              </a:rPr>
+              <a:t> </a:t>
+            </a:r>
+            <a:r>
+              <a:rPr kumimoji="0" lang="ja-JP" altLang="ja-JP" sz="2800" b="1" i="0" u="sng" strike="noStrike" cap="none" normalizeH="0" baseline="0" dirty="0">
+                <a:ln>
+                  <a:noFill/>
+                </a:ln>
+                <a:solidFill>
+                  <a:srgbClr val="FF0000"/>
+                </a:solidFill>
+                <a:effectLst/>
+                <a:latin typeface="Arial" panose="020B0604020202020204" pitchFamily="34" charset="0"/>
+              </a:rPr>
+              <a:t>シェーダーリフレクションにより必要な定数情報を取得</a:t>
+            </a:r>
+          </a:p>
+          <a:p>
+            <a:pPr marL="0" marR="0" lvl="0" indent="0" algn="l" defTabSz="914400" rtl="0" eaLnBrk="0" fontAlgn="base" latinLnBrk="0" hangingPunct="0">
+              <a:lnSpc>
+                <a:spcPct val="150000"/>
+              </a:lnSpc>
+              <a:spcBef>
+                <a:spcPct val="0"/>
+              </a:spcBef>
+              <a:spcAft>
+                <a:spcPct val="0"/>
+              </a:spcAft>
+              <a:buClrTx/>
+              <a:buSzTx/>
+              <a:buFontTx/>
+              <a:buChar char="•"/>
+              <a:tabLst/>
+            </a:pPr>
+            <a:r>
+              <a:rPr kumimoji="0" lang="en-US" altLang="ja-JP" sz="2800" b="1" i="0" strike="noStrike" cap="none" normalizeH="0" baseline="0" dirty="0">
+                <a:ln>
+                  <a:noFill/>
+                </a:ln>
+                <a:solidFill>
+                  <a:srgbClr val="FF0000"/>
+                </a:solidFill>
+                <a:effectLst/>
+                <a:latin typeface="Arial" panose="020B0604020202020204" pitchFamily="34" charset="0"/>
+              </a:rPr>
+              <a:t> </a:t>
+            </a:r>
+            <a:r>
+              <a:rPr kumimoji="0" lang="ja-JP" altLang="ja-JP" sz="2800" b="1" i="0" u="sng" strike="noStrike" cap="none" normalizeH="0" baseline="0" dirty="0">
+                <a:ln>
+                  <a:noFill/>
+                </a:ln>
+                <a:solidFill>
+                  <a:srgbClr val="FF0000"/>
+                </a:solidFill>
+                <a:effectLst/>
+                <a:latin typeface="Arial" panose="020B0604020202020204" pitchFamily="34" charset="0"/>
+              </a:rPr>
+              <a:t>シェーダーが自身のバインド情報を管理</a:t>
+            </a:r>
+          </a:p>
+          <a:p>
+            <a:pPr marL="0" marR="0" lvl="0" indent="0" algn="l" defTabSz="914400" rtl="0" eaLnBrk="0" fontAlgn="base" latinLnBrk="0" hangingPunct="0">
+              <a:lnSpc>
+                <a:spcPct val="150000"/>
+              </a:lnSpc>
+              <a:spcBef>
+                <a:spcPct val="0"/>
+              </a:spcBef>
+              <a:spcAft>
+                <a:spcPct val="0"/>
+              </a:spcAft>
+              <a:buClrTx/>
+              <a:buSzTx/>
+              <a:buFontTx/>
+              <a:buChar char="•"/>
+              <a:tabLst/>
+            </a:pPr>
+            <a:r>
+              <a:rPr kumimoji="0" lang="en-US" altLang="ja-JP" sz="2800" b="1" i="0" strike="noStrike" cap="none" normalizeH="0" baseline="0" dirty="0">
+                <a:ln>
+                  <a:noFill/>
+                </a:ln>
+                <a:solidFill>
+                  <a:srgbClr val="FF0000"/>
+                </a:solidFill>
+                <a:effectLst/>
+                <a:latin typeface="Arial" panose="020B0604020202020204" pitchFamily="34" charset="0"/>
+              </a:rPr>
+              <a:t> </a:t>
+            </a:r>
+            <a:r>
+              <a:rPr kumimoji="0" lang="ja-JP" altLang="ja-JP" sz="2800" b="1" i="0" u="sng" strike="noStrike" cap="none" normalizeH="0" baseline="0" dirty="0">
+                <a:ln>
+                  <a:noFill/>
+                </a:ln>
+                <a:solidFill>
+                  <a:srgbClr val="FF0000"/>
+                </a:solidFill>
+                <a:effectLst/>
+                <a:latin typeface="Arial" panose="020B0604020202020204" pitchFamily="34" charset="0"/>
+              </a:rPr>
+              <a:t>オブジェクトは</a:t>
+            </a:r>
+            <a:r>
+              <a:rPr kumimoji="0" lang="ja-JP" altLang="en-US" sz="2800" b="1" i="0" u="sng" strike="noStrike" cap="none" normalizeH="0" baseline="0" dirty="0">
+                <a:ln>
+                  <a:noFill/>
+                </a:ln>
+                <a:solidFill>
+                  <a:srgbClr val="FF0000"/>
+                </a:solidFill>
+                <a:effectLst/>
+                <a:latin typeface="Arial" panose="020B0604020202020204" pitchFamily="34" charset="0"/>
+              </a:rPr>
+              <a:t>自身が</a:t>
+            </a:r>
+            <a:r>
+              <a:rPr kumimoji="0" lang="ja-JP" altLang="ja-JP" sz="2800" b="1" i="0" u="sng" strike="noStrike" cap="none" normalizeH="0" baseline="0" dirty="0">
+                <a:ln>
+                  <a:noFill/>
+                </a:ln>
+                <a:solidFill>
+                  <a:srgbClr val="FF0000"/>
+                </a:solidFill>
+                <a:effectLst/>
+                <a:latin typeface="Arial" panose="020B0604020202020204" pitchFamily="34" charset="0"/>
+              </a:rPr>
+              <a:t>更新</a:t>
+            </a:r>
+            <a:r>
+              <a:rPr lang="ja-JP" altLang="en-US" sz="2800" b="1" u="sng" dirty="0">
+                <a:solidFill>
+                  <a:srgbClr val="FF0000"/>
+                </a:solidFill>
+                <a:latin typeface="Arial" panose="020B0604020202020204" pitchFamily="34" charset="0"/>
+              </a:rPr>
+              <a:t>する</a:t>
+            </a:r>
+            <a:r>
+              <a:rPr kumimoji="0" lang="ja-JP" altLang="ja-JP" sz="2800" b="1" i="0" u="sng" strike="noStrike" cap="none" normalizeH="0" baseline="0" dirty="0">
+                <a:ln>
+                  <a:noFill/>
+                </a:ln>
+                <a:solidFill>
+                  <a:srgbClr val="FF0000"/>
+                </a:solidFill>
+                <a:effectLst/>
+                <a:latin typeface="Arial" panose="020B0604020202020204" pitchFamily="34" charset="0"/>
+              </a:rPr>
+              <a:t>定数</a:t>
+            </a:r>
+            <a:r>
+              <a:rPr kumimoji="0" lang="ja-JP" altLang="en-US" sz="2800" b="1" i="0" u="sng" strike="noStrike" cap="none" normalizeH="0" baseline="0" dirty="0">
+                <a:ln>
+                  <a:noFill/>
+                </a:ln>
+                <a:solidFill>
+                  <a:srgbClr val="FF0000"/>
+                </a:solidFill>
+                <a:effectLst/>
+                <a:latin typeface="Arial" panose="020B0604020202020204" pitchFamily="34" charset="0"/>
+              </a:rPr>
+              <a:t>名</a:t>
+            </a:r>
+            <a:r>
+              <a:rPr kumimoji="0" lang="ja-JP" altLang="ja-JP" sz="2800" b="1" i="0" u="sng" strike="noStrike" cap="none" normalizeH="0" baseline="0" dirty="0">
+                <a:ln>
+                  <a:noFill/>
+                </a:ln>
+                <a:solidFill>
+                  <a:srgbClr val="FF0000"/>
+                </a:solidFill>
+                <a:effectLst/>
+                <a:latin typeface="Arial" panose="020B0604020202020204" pitchFamily="34" charset="0"/>
+              </a:rPr>
+              <a:t>のみを</a:t>
+            </a:r>
+            <a:r>
+              <a:rPr kumimoji="0" lang="ja-JP" altLang="en-US" sz="2800" b="1" i="0" u="sng" strike="noStrike" cap="none" normalizeH="0" baseline="0" dirty="0">
+                <a:ln>
+                  <a:noFill/>
+                </a:ln>
+                <a:solidFill>
+                  <a:srgbClr val="FF0000"/>
+                </a:solidFill>
+                <a:effectLst/>
+                <a:latin typeface="Arial" panose="020B0604020202020204" pitchFamily="34" charset="0"/>
+              </a:rPr>
+              <a:t>知る</a:t>
+            </a:r>
+            <a:endParaRPr kumimoji="0" lang="en-US" altLang="ja-JP" sz="2800" b="1" i="0" u="sng" strike="noStrike" cap="none" normalizeH="0" baseline="0" dirty="0">
+              <a:ln>
+                <a:noFill/>
+              </a:ln>
               <a:solidFill>
-                <a:schemeClr val="bg1"/>
+                <a:srgbClr val="FF0000"/>
+              </a:solidFill>
+              <a:effectLst/>
+              <a:latin typeface="Arial" panose="020B0604020202020204" pitchFamily="34" charset="0"/>
+            </a:endParaRPr>
+          </a:p>
+          <a:p>
+            <a:pPr algn="l" rtl="0" eaLnBrk="0" fontAlgn="base" hangingPunct="0">
+              <a:lnSpc>
+                <a:spcPct val="150000"/>
+              </a:lnSpc>
+              <a:spcBef>
+                <a:spcPct val="0"/>
+              </a:spcBef>
+              <a:spcAft>
+                <a:spcPct val="0"/>
+              </a:spcAft>
+              <a:buFontTx/>
+              <a:buChar char="•"/>
+            </a:pPr>
+            <a:r>
+              <a:rPr lang="ja-JP" altLang="en-US" sz="2800" dirty="0">
+                <a:solidFill>
+                  <a:srgbClr val="FF0000"/>
+                </a:solidFill>
+              </a:rPr>
+              <a:t> </a:t>
+            </a:r>
+            <a:r>
+              <a:rPr lang="ja-JP" altLang="en-US" sz="2800" u="sng" dirty="0">
+                <a:solidFill>
+                  <a:srgbClr val="FF0000"/>
+                </a:solidFill>
+              </a:rPr>
+              <a:t>同一ディレクトリ内の </a:t>
+            </a:r>
+            <a:r>
+              <a:rPr lang="en-US" altLang="ja-JP" sz="2800" u="sng" dirty="0">
+                <a:solidFill>
+                  <a:srgbClr val="FF0000"/>
+                </a:solidFill>
+              </a:rPr>
+              <a:t>.</a:t>
+            </a:r>
+            <a:r>
+              <a:rPr lang="en-US" altLang="ja-JP" sz="2800" u="sng" dirty="0" err="1">
+                <a:solidFill>
+                  <a:srgbClr val="FF0000"/>
+                </a:solidFill>
+              </a:rPr>
+              <a:t>hlsl</a:t>
+            </a:r>
+            <a:r>
+              <a:rPr lang="ja-JP" altLang="en-US" sz="2800" u="sng" dirty="0">
+                <a:solidFill>
+                  <a:srgbClr val="FF0000"/>
+                </a:solidFill>
+              </a:rPr>
+              <a:t> を監視し、</a:t>
+            </a:r>
+            <a:endParaRPr lang="en-US" altLang="ja-JP" sz="2800" u="sng" dirty="0">
+              <a:solidFill>
+                <a:srgbClr val="FF0000"/>
               </a:solidFill>
             </a:endParaRPr>
           </a:p>
-        </p:txBody>
-      </p:sp>
+          <a:p>
+            <a:pPr algn="l" rtl="0" eaLnBrk="0" fontAlgn="base" hangingPunct="0">
+              <a:spcBef>
+                <a:spcPct val="0"/>
+              </a:spcBef>
+              <a:spcAft>
+                <a:spcPct val="0"/>
+              </a:spcAft>
+            </a:pPr>
+            <a:r>
+              <a:rPr lang="en-US" altLang="ja-JP" sz="2800" dirty="0">
+                <a:solidFill>
+                  <a:srgbClr val="FF0000"/>
+                </a:solidFill>
+              </a:rPr>
+              <a:t>   </a:t>
+            </a:r>
+            <a:r>
+              <a:rPr lang="ja-JP" altLang="en-US" sz="2800" u="sng" dirty="0">
+                <a:solidFill>
+                  <a:srgbClr val="FF0000"/>
+                </a:solidFill>
+              </a:rPr>
+              <a:t>更新時のみ再コンパイルする仕組みを実装した。</a:t>
+            </a:r>
+            <a:endParaRPr kumimoji="0" lang="ja-JP" altLang="ja-JP" sz="2800" b="1" i="0" u="sng" strike="noStrike" cap="none" normalizeH="0" baseline="0" dirty="0">
+              <a:ln>
+                <a:noFill/>
+              </a:ln>
+              <a:solidFill>
+                <a:srgbClr val="FF0000"/>
+              </a:solidFill>
+              <a:effectLst/>
+              <a:latin typeface="Arial" panose="020B0604020202020204" pitchFamily="34" charset="0"/>
+            </a:endParaRPr>
+          </a:p>
+        </p:txBody>
+      </p:sp>
+      <p:pic>
+        <p:nvPicPr>
+          <p:cNvPr id="4" name="図 3" descr="テキスト, 手紙&#10;&#10;AI 生成コンテンツは誤りを含む可能性があります。">
+            <a:extLst>
+              <a:ext uri="{FF2B5EF4-FFF2-40B4-BE49-F238E27FC236}">
+                <a16:creationId xmlns:a16="http://schemas.microsoft.com/office/drawing/2014/main" id="{50E91340-CF82-BEE3-EFBD-43AE761DDEA1}"/>
+              </a:ext>
+            </a:extLst>
+          </p:cNvPr>
+          <p:cNvPicPr>
+            <a:picLocks noChangeAspect="1"/>
+          </p:cNvPicPr>
+          <p:nvPr/>
+        </p:nvPicPr>
+        <p:blipFill>
+          <a:blip r:embed="rId3"/>
+          <a:stretch>
+            <a:fillRect/>
+          </a:stretch>
+        </p:blipFill>
+        <p:spPr>
+          <a:xfrm>
+            <a:off x="10320674" y="2514600"/>
+            <a:ext cx="1609051" cy="3326129"/>
+          </a:xfrm>
+          <a:prstGeom prst="rect">
+            <a:avLst/>
+          </a:prstGeom>
+        </p:spPr>
+      </p:pic>
+      <p:pic>
+        <p:nvPicPr>
+          <p:cNvPr id="6" name="図 5" descr="テキスト&#10;&#10;AI 生成コンテンツは誤りを含む可能性があります。">
+            <a:extLst>
+              <a:ext uri="{FF2B5EF4-FFF2-40B4-BE49-F238E27FC236}">
+                <a16:creationId xmlns:a16="http://schemas.microsoft.com/office/drawing/2014/main" id="{568BF7ED-C331-5BC8-A967-5A5A20B1B26E}"/>
+              </a:ext>
+            </a:extLst>
+          </p:cNvPr>
+          <p:cNvPicPr>
+            <a:picLocks noChangeAspect="1"/>
+          </p:cNvPicPr>
+          <p:nvPr/>
+        </p:nvPicPr>
+        <p:blipFill>
+          <a:blip r:embed="rId4"/>
+          <a:stretch>
+            <a:fillRect/>
+          </a:stretch>
+        </p:blipFill>
+        <p:spPr>
+          <a:xfrm flipV="1">
+            <a:off x="2743200" y="5394137"/>
+            <a:ext cx="5830415" cy="1232510"/>
+          </a:xfrm>
+          <a:prstGeom prst="rect">
+            <a:avLst/>
+          </a:prstGeom>
+        </p:spPr>
+      </p:pic>
     </p:spTree>
     <p:extLst>
       <p:ext uri="{BB962C8B-B14F-4D97-AF65-F5344CB8AC3E}">
-        <p14:creationId xmlns:p14="http://schemas.microsoft.com/office/powerpoint/2010/main" val="2155919554"/>
+        <p14:creationId xmlns:p14="http://schemas.microsoft.com/office/powerpoint/2010/main" val="1932519092"/>
       </p:ext>
     </p:extLst>
   </p:cSld>
@@ -3438,7 +4455,7 @@
 </p:sld>
 </file>
 
-<file path=ppt/slides/slide9.xml><?xml version="1.0" encoding="utf-8"?>
+<file path=ppt/slides/slide8.xml><?xml version="1.0" encoding="utf-8"?>
 <p:sld xmlns:a="http://schemas.openxmlformats.org/drawingml/2006/main" xmlns:r="http://schemas.openxmlformats.org/officeDocument/2006/relationships" xmlns:p="http://schemas.openxmlformats.org/presentationml/2006/main">
   <p:cSld>
     <p:spTree>
@@ -3509,7 +4526,7 @@
         <p:spPr>
           <a:xfrm>
             <a:off x="371168" y="1670339"/>
-            <a:ext cx="5191432" cy="584775"/>
+            <a:ext cx="3438832" cy="584775"/>
           </a:xfrm>
           <a:prstGeom prst="rect">
             <a:avLst/>
@@ -3534,7 +4551,7 @@
                   <a:schemeClr val="bg1"/>
                 </a:solidFill>
               </a:rPr>
-              <a:t>デバッグ時</a:t>
+              <a:t>デバッグ時のログ</a:t>
             </a:r>
           </a:p>
         </p:txBody>
@@ -3554,7 +4571,7 @@
         <p:spPr>
           <a:xfrm>
             <a:off x="371168" y="2255114"/>
-            <a:ext cx="10754032" cy="461665"/>
+            <a:ext cx="10754032" cy="1947649"/>
           </a:xfrm>
           <a:prstGeom prst="rect">
             <a:avLst/>
@@ -3570,19 +4587,465 @@
           </a:bodyPr>
           <a:lstStyle/>
           <a:p>
-            <a:r>
-              <a:rPr kumimoji="1" lang="ja-JP" altLang="en-US" sz="2400" dirty="0">
-                <a:solidFill>
-                  <a:schemeClr val="bg1"/>
-                </a:solidFill>
-              </a:rPr>
-              <a:t>リソース管理</a:t>
-            </a:r>
-            <a:endParaRPr kumimoji="1" lang="en-US" altLang="ja-JP" sz="2400" dirty="0">
+            <a:pPr marL="0" marR="0" lvl="0" indent="0" algn="l" defTabSz="914400" rtl="0" eaLnBrk="0" fontAlgn="base" latinLnBrk="0" hangingPunct="0">
+              <a:lnSpc>
+                <a:spcPct val="150000"/>
+              </a:lnSpc>
+              <a:spcBef>
+                <a:spcPct val="0"/>
+              </a:spcBef>
+              <a:spcAft>
+                <a:spcPct val="0"/>
+              </a:spcAft>
+              <a:buClrTx/>
+              <a:buSzTx/>
+              <a:buFontTx/>
+              <a:buChar char="•"/>
+              <a:tabLst/>
+            </a:pPr>
+            <a:r>
+              <a:rPr kumimoji="0" lang="ja-JP" altLang="ja-JP" sz="2800" b="1" i="0" u="sng" strike="noStrike" cap="none" normalizeH="0" baseline="0" dirty="0">
+                <a:ln>
+                  <a:noFill/>
+                </a:ln>
+                <a:solidFill>
+                  <a:srgbClr val="FF0000"/>
+                </a:solidFill>
+                <a:effectLst/>
+                <a:latin typeface="Arial" panose="020B0604020202020204" pitchFamily="34" charset="0"/>
+              </a:rPr>
+              <a:t>コンソール／メッセージボックス／ファイル出力に対応</a:t>
+            </a:r>
+          </a:p>
+          <a:p>
+            <a:pPr marL="0" marR="0" lvl="0" indent="0" algn="l" defTabSz="914400" rtl="0" eaLnBrk="0" fontAlgn="base" latinLnBrk="0" hangingPunct="0">
+              <a:lnSpc>
+                <a:spcPct val="150000"/>
+              </a:lnSpc>
+              <a:spcBef>
+                <a:spcPct val="0"/>
+              </a:spcBef>
+              <a:spcAft>
+                <a:spcPct val="0"/>
+              </a:spcAft>
+              <a:buClrTx/>
+              <a:buSzTx/>
+              <a:buFontTx/>
+              <a:buChar char="•"/>
+              <a:tabLst/>
+            </a:pPr>
+            <a:r>
+              <a:rPr kumimoji="0" lang="ja-JP" altLang="ja-JP" sz="2800" b="1" i="0" u="sng" strike="noStrike" cap="none" normalizeH="0" baseline="0" dirty="0">
+                <a:ln>
+                  <a:noFill/>
+                </a:ln>
+                <a:solidFill>
+                  <a:srgbClr val="FF0000"/>
+                </a:solidFill>
+                <a:effectLst/>
+                <a:latin typeface="Arial" panose="020B0604020202020204" pitchFamily="34" charset="0"/>
+              </a:rPr>
+              <a:t>出力先は用途に応じて切り替え可能</a:t>
+            </a:r>
+          </a:p>
+          <a:p>
+            <a:pPr marL="0" marR="0" lvl="0" indent="0" algn="l" defTabSz="914400" rtl="0" eaLnBrk="0" fontAlgn="base" latinLnBrk="0" hangingPunct="0">
+              <a:lnSpc>
+                <a:spcPct val="150000"/>
+              </a:lnSpc>
+              <a:spcBef>
+                <a:spcPct val="0"/>
+              </a:spcBef>
+              <a:spcAft>
+                <a:spcPct val="0"/>
+              </a:spcAft>
+              <a:buClrTx/>
+              <a:buSzTx/>
+              <a:buFontTx/>
+              <a:buChar char="•"/>
+              <a:tabLst/>
+            </a:pPr>
+            <a:r>
+              <a:rPr kumimoji="0" lang="ja-JP" altLang="ja-JP" sz="2800" b="1" i="0" u="sng" strike="noStrike" cap="none" normalizeH="0" baseline="0" dirty="0">
+                <a:ln>
+                  <a:noFill/>
+                </a:ln>
+                <a:solidFill>
+                  <a:srgbClr val="FF0000"/>
+                </a:solidFill>
+                <a:effectLst/>
+                <a:latin typeface="Arial Unicode MS"/>
+              </a:rPr>
+              <a:t>.cpp</a:t>
+            </a:r>
+            <a:r>
+              <a:rPr kumimoji="0" lang="ja-JP" altLang="ja-JP" sz="2800" b="1" i="0" u="sng" strike="noStrike" cap="none" normalizeH="0" baseline="0" dirty="0">
+                <a:ln>
+                  <a:noFill/>
+                </a:ln>
+                <a:solidFill>
+                  <a:srgbClr val="FF0000"/>
+                </a:solidFill>
+                <a:effectLst/>
+              </a:rPr>
+              <a:t> 差し替えによりプラットフォーム依存を吸収</a:t>
+            </a:r>
+            <a:endParaRPr kumimoji="0" lang="ja-JP" altLang="ja-JP" sz="2800" b="1" i="0" u="sng" strike="noStrike" cap="none" normalizeH="0" baseline="0" dirty="0">
+              <a:ln>
+                <a:noFill/>
+              </a:ln>
               <a:solidFill>
-                <a:schemeClr val="bg1"/>
+                <a:srgbClr val="FF0000"/>
               </a:solidFill>
+              <a:effectLst/>
+              <a:latin typeface="Arial" panose="020B0604020202020204" pitchFamily="34" charset="0"/>
             </a:endParaRPr>
+          </a:p>
+        </p:txBody>
+      </p:sp>
+      <p:sp>
+        <p:nvSpPr>
+          <p:cNvPr id="11" name="正方形/長方形 10">
+            <a:extLst>
+              <a:ext uri="{FF2B5EF4-FFF2-40B4-BE49-F238E27FC236}">
+                <a16:creationId xmlns:a16="http://schemas.microsoft.com/office/drawing/2014/main" id="{45771792-CFC1-A612-1DE5-D50543967F92}"/>
+              </a:ext>
+            </a:extLst>
+          </p:cNvPr>
+          <p:cNvSpPr/>
+          <p:nvPr/>
+        </p:nvSpPr>
+        <p:spPr>
+          <a:xfrm>
+            <a:off x="2398337" y="4524855"/>
+            <a:ext cx="2057400" cy="457200"/>
+          </a:xfrm>
+          <a:prstGeom prst="rect">
+            <a:avLst/>
+          </a:prstGeom>
+          <a:noFill/>
+          <a:ln>
+            <a:solidFill>
+              <a:schemeClr val="bg1"/>
+            </a:solidFill>
+          </a:ln>
+        </p:spPr>
+        <p:style>
+          <a:lnRef idx="2">
+            <a:schemeClr val="accent1">
+              <a:shade val="15000"/>
+            </a:schemeClr>
+          </a:lnRef>
+          <a:fillRef idx="1">
+            <a:schemeClr val="accent1"/>
+          </a:fillRef>
+          <a:effectRef idx="0">
+            <a:schemeClr val="accent1"/>
+          </a:effectRef>
+          <a:fontRef idx="minor">
+            <a:schemeClr val="lt1"/>
+          </a:fontRef>
+        </p:style>
+        <p:txBody>
+          <a:bodyPr rtlCol="0" anchor="ctr"/>
+          <a:lstStyle/>
+          <a:p>
+            <a:pPr algn="ctr"/>
+            <a:r>
+              <a:rPr kumimoji="1" lang="en-US" altLang="ja-JP" dirty="0" err="1"/>
+              <a:t>ReportMessage.h</a:t>
+            </a:r>
+            <a:endParaRPr kumimoji="1" lang="ja-JP" altLang="en-US" dirty="0"/>
+          </a:p>
+        </p:txBody>
+      </p:sp>
+      <p:sp>
+        <p:nvSpPr>
+          <p:cNvPr id="12" name="正方形/長方形 11">
+            <a:extLst>
+              <a:ext uri="{FF2B5EF4-FFF2-40B4-BE49-F238E27FC236}">
+                <a16:creationId xmlns:a16="http://schemas.microsoft.com/office/drawing/2014/main" id="{9573E2AD-AD8B-DEC5-389B-EEF1EAAD578F}"/>
+              </a:ext>
+            </a:extLst>
+          </p:cNvPr>
+          <p:cNvSpPr/>
+          <p:nvPr/>
+        </p:nvSpPr>
+        <p:spPr>
+          <a:xfrm>
+            <a:off x="1451727" y="5715000"/>
+            <a:ext cx="1676400" cy="457200"/>
+          </a:xfrm>
+          <a:prstGeom prst="rect">
+            <a:avLst/>
+          </a:prstGeom>
+          <a:noFill/>
+          <a:ln>
+            <a:solidFill>
+              <a:schemeClr val="bg1"/>
+            </a:solidFill>
+          </a:ln>
+        </p:spPr>
+        <p:style>
+          <a:lnRef idx="2">
+            <a:schemeClr val="accent1">
+              <a:shade val="15000"/>
+            </a:schemeClr>
+          </a:lnRef>
+          <a:fillRef idx="1">
+            <a:schemeClr val="accent1"/>
+          </a:fillRef>
+          <a:effectRef idx="0">
+            <a:schemeClr val="accent1"/>
+          </a:effectRef>
+          <a:fontRef idx="minor">
+            <a:schemeClr val="lt1"/>
+          </a:fontRef>
+        </p:style>
+        <p:txBody>
+          <a:bodyPr rtlCol="0" anchor="ctr"/>
+          <a:lstStyle/>
+          <a:p>
+            <a:pPr algn="ctr"/>
+            <a:r>
+              <a:rPr kumimoji="1" lang="en-US" altLang="ja-JP" dirty="0"/>
+              <a:t>DX_RM.cpp</a:t>
+            </a:r>
+            <a:endParaRPr kumimoji="1" lang="ja-JP" altLang="en-US" dirty="0"/>
+          </a:p>
+        </p:txBody>
+      </p:sp>
+      <p:sp>
+        <p:nvSpPr>
+          <p:cNvPr id="13" name="正方形/長方形 12">
+            <a:extLst>
+              <a:ext uri="{FF2B5EF4-FFF2-40B4-BE49-F238E27FC236}">
+                <a16:creationId xmlns:a16="http://schemas.microsoft.com/office/drawing/2014/main" id="{5FAE3F4B-E235-BF8D-9A42-17634D194937}"/>
+              </a:ext>
+            </a:extLst>
+          </p:cNvPr>
+          <p:cNvSpPr/>
+          <p:nvPr/>
+        </p:nvSpPr>
+        <p:spPr>
+          <a:xfrm>
+            <a:off x="3581400" y="5715000"/>
+            <a:ext cx="1676400" cy="457200"/>
+          </a:xfrm>
+          <a:prstGeom prst="rect">
+            <a:avLst/>
+          </a:prstGeom>
+          <a:noFill/>
+          <a:ln>
+            <a:solidFill>
+              <a:schemeClr val="bg1"/>
+            </a:solidFill>
+          </a:ln>
+        </p:spPr>
+        <p:style>
+          <a:lnRef idx="2">
+            <a:schemeClr val="accent1">
+              <a:shade val="15000"/>
+            </a:schemeClr>
+          </a:lnRef>
+          <a:fillRef idx="1">
+            <a:schemeClr val="accent1"/>
+          </a:fillRef>
+          <a:effectRef idx="0">
+            <a:schemeClr val="accent1"/>
+          </a:effectRef>
+          <a:fontRef idx="minor">
+            <a:schemeClr val="lt1"/>
+          </a:fontRef>
+        </p:style>
+        <p:txBody>
+          <a:bodyPr rtlCol="0" anchor="ctr"/>
+          <a:lstStyle/>
+          <a:p>
+            <a:pPr algn="ctr"/>
+            <a:r>
+              <a:rPr kumimoji="1" lang="en-US" altLang="ja-JP" dirty="0"/>
+              <a:t>OGL_RM.cpp</a:t>
+            </a:r>
+            <a:endParaRPr kumimoji="1" lang="ja-JP" altLang="en-US" dirty="0"/>
+          </a:p>
+        </p:txBody>
+      </p:sp>
+      <p:pic>
+        <p:nvPicPr>
+          <p:cNvPr id="15" name="図 14" descr="テキスト&#10;&#10;AI 生成コンテンツは誤りを含む可能性があります。">
+            <a:extLst>
+              <a:ext uri="{FF2B5EF4-FFF2-40B4-BE49-F238E27FC236}">
+                <a16:creationId xmlns:a16="http://schemas.microsoft.com/office/drawing/2014/main" id="{D47A4EB1-5FF5-CEBA-88BB-B75BEF460CE5}"/>
+              </a:ext>
+            </a:extLst>
+          </p:cNvPr>
+          <p:cNvPicPr>
+            <a:picLocks noChangeAspect="1"/>
+          </p:cNvPicPr>
+          <p:nvPr/>
+        </p:nvPicPr>
+        <p:blipFill>
+          <a:blip r:embed="rId2"/>
+          <a:stretch>
+            <a:fillRect/>
+          </a:stretch>
+        </p:blipFill>
+        <p:spPr>
+          <a:xfrm>
+            <a:off x="9024214" y="3100824"/>
+            <a:ext cx="2796618" cy="3238845"/>
+          </a:xfrm>
+          <a:prstGeom prst="rect">
+            <a:avLst/>
+          </a:prstGeom>
+        </p:spPr>
+      </p:pic>
+      <p:cxnSp>
+        <p:nvCxnSpPr>
+          <p:cNvPr id="17" name="コネクタ: カギ線 16">
+            <a:extLst>
+              <a:ext uri="{FF2B5EF4-FFF2-40B4-BE49-F238E27FC236}">
+                <a16:creationId xmlns:a16="http://schemas.microsoft.com/office/drawing/2014/main" id="{C00CA6DE-813D-7FDD-4F33-88AAAC712471}"/>
+              </a:ext>
+            </a:extLst>
+          </p:cNvPr>
+          <p:cNvCxnSpPr>
+            <a:stCxn id="11" idx="2"/>
+            <a:endCxn id="12" idx="0"/>
+          </p:cNvCxnSpPr>
+          <p:nvPr/>
+        </p:nvCxnSpPr>
+        <p:spPr>
+          <a:xfrm rot="5400000">
+            <a:off x="2492010" y="4779972"/>
+            <a:ext cx="732945" cy="1137110"/>
+          </a:xfrm>
+          <a:prstGeom prst="bentConnector3">
+            <a:avLst>
+              <a:gd name="adj1" fmla="val 71464"/>
+            </a:avLst>
+          </a:prstGeom>
+          <a:ln>
+            <a:solidFill>
+              <a:schemeClr val="bg1"/>
+            </a:solidFill>
+            <a:tailEnd type="triangle"/>
+          </a:ln>
+        </p:spPr>
+        <p:style>
+          <a:lnRef idx="1">
+            <a:schemeClr val="accent1"/>
+          </a:lnRef>
+          <a:fillRef idx="0">
+            <a:schemeClr val="accent1"/>
+          </a:fillRef>
+          <a:effectRef idx="0">
+            <a:schemeClr val="accent1"/>
+          </a:effectRef>
+          <a:fontRef idx="minor">
+            <a:schemeClr val="tx1"/>
+          </a:fontRef>
+        </p:style>
+      </p:cxnSp>
+      <p:cxnSp>
+        <p:nvCxnSpPr>
+          <p:cNvPr id="18" name="コネクタ: カギ線 17">
+            <a:extLst>
+              <a:ext uri="{FF2B5EF4-FFF2-40B4-BE49-F238E27FC236}">
+                <a16:creationId xmlns:a16="http://schemas.microsoft.com/office/drawing/2014/main" id="{BC5D3992-D935-FCCF-1F41-663A796E8010}"/>
+              </a:ext>
+            </a:extLst>
+          </p:cNvPr>
+          <p:cNvCxnSpPr>
+            <a:cxnSpLocks/>
+            <a:stCxn id="11" idx="2"/>
+            <a:endCxn id="13" idx="0"/>
+          </p:cNvCxnSpPr>
+          <p:nvPr/>
+        </p:nvCxnSpPr>
+        <p:spPr>
+          <a:xfrm rot="16200000" flipH="1">
+            <a:off x="3556846" y="4852245"/>
+            <a:ext cx="732945" cy="992563"/>
+          </a:xfrm>
+          <a:prstGeom prst="bentConnector3">
+            <a:avLst>
+              <a:gd name="adj1" fmla="val 70122"/>
+            </a:avLst>
+          </a:prstGeom>
+          <a:ln>
+            <a:solidFill>
+              <a:schemeClr val="bg1"/>
+            </a:solidFill>
+            <a:tailEnd type="triangle"/>
+          </a:ln>
+        </p:spPr>
+        <p:style>
+          <a:lnRef idx="1">
+            <a:schemeClr val="accent1"/>
+          </a:lnRef>
+          <a:fillRef idx="0">
+            <a:schemeClr val="accent1"/>
+          </a:fillRef>
+          <a:effectRef idx="0">
+            <a:schemeClr val="accent1"/>
+          </a:effectRef>
+          <a:fontRef idx="minor">
+            <a:schemeClr val="tx1"/>
+          </a:fontRef>
+        </p:style>
+      </p:cxnSp>
+      <p:sp>
+        <p:nvSpPr>
+          <p:cNvPr id="23" name="正方形/長方形 22">
+            <a:extLst>
+              <a:ext uri="{FF2B5EF4-FFF2-40B4-BE49-F238E27FC236}">
+                <a16:creationId xmlns:a16="http://schemas.microsoft.com/office/drawing/2014/main" id="{49C88A72-144D-0F1C-0A4A-D35BE03E1C38}"/>
+              </a:ext>
+            </a:extLst>
+          </p:cNvPr>
+          <p:cNvSpPr/>
+          <p:nvPr/>
+        </p:nvSpPr>
+        <p:spPr>
+          <a:xfrm>
+            <a:off x="3467160" y="5044163"/>
+            <a:ext cx="2057280" cy="400220"/>
+          </a:xfrm>
+          <a:prstGeom prst="rect">
+            <a:avLst/>
+          </a:prstGeom>
+          <a:noFill/>
+          <a:ln>
+            <a:noFill/>
+          </a:ln>
+        </p:spPr>
+        <p:style>
+          <a:lnRef idx="2">
+            <a:schemeClr val="accent1">
+              <a:shade val="15000"/>
+            </a:schemeClr>
+          </a:lnRef>
+          <a:fillRef idx="1">
+            <a:schemeClr val="accent1"/>
+          </a:fillRef>
+          <a:effectRef idx="0">
+            <a:schemeClr val="accent1"/>
+          </a:effectRef>
+          <a:fontRef idx="minor">
+            <a:schemeClr val="lt1"/>
+          </a:fontRef>
+        </p:style>
+        <p:txBody>
+          <a:bodyPr rtlCol="0" anchor="ctr"/>
+          <a:lstStyle/>
+          <a:p>
+            <a:pPr algn="l"/>
+            <a:r>
+              <a:rPr kumimoji="1" lang="ja-JP" altLang="en-US" dirty="0"/>
+              <a:t>ビルド時に差し替え</a:t>
+            </a:r>
           </a:p>
         </p:txBody>
       </p:sp>
@@ -3590,6 +5053,747 @@
     <p:extLst>
       <p:ext uri="{BB962C8B-B14F-4D97-AF65-F5344CB8AC3E}">
         <p14:creationId xmlns:p14="http://schemas.microsoft.com/office/powerpoint/2010/main" val="1589482950"/>
+      </p:ext>
+    </p:extLst>
+  </p:cSld>
+  <p:clrMapOvr>
+    <a:masterClrMapping/>
+  </p:clrMapOvr>
+</p:sld>
+</file>
+
+<file path=ppt/slides/slide9.xml><?xml version="1.0" encoding="utf-8"?>
+<p:sld xmlns:a="http://schemas.openxmlformats.org/drawingml/2006/main" xmlns:r="http://schemas.openxmlformats.org/officeDocument/2006/relationships" xmlns:p="http://schemas.openxmlformats.org/presentationml/2006/main">
+  <p:cSld>
+    <p:spTree>
+      <p:nvGrpSpPr>
+        <p:cNvPr id="1" name="">
+          <a:extLst>
+            <a:ext uri="{FF2B5EF4-FFF2-40B4-BE49-F238E27FC236}">
+              <a16:creationId xmlns:a16="http://schemas.microsoft.com/office/drawing/2014/main" id="{5180B81A-2B52-A397-F013-E1D59C17A104}"/>
+            </a:ext>
+          </a:extLst>
+        </p:cNvPr>
+        <p:cNvGrpSpPr/>
+        <p:nvPr/>
+      </p:nvGrpSpPr>
+      <p:grpSpPr>
+        <a:xfrm>
+          <a:off x="0" y="0"/>
+          <a:ext cx="0" cy="0"/>
+          <a:chOff x="0" y="0"/>
+          <a:chExt cx="0" cy="0"/>
+        </a:xfrm>
+      </p:grpSpPr>
+      <p:sp>
+        <p:nvSpPr>
+          <p:cNvPr id="2" name="タイトル 1">
+            <a:extLst>
+              <a:ext uri="{FF2B5EF4-FFF2-40B4-BE49-F238E27FC236}">
+                <a16:creationId xmlns:a16="http://schemas.microsoft.com/office/drawing/2014/main" id="{491EDACF-D60C-FE19-77A7-71118ED88DD2}"/>
+              </a:ext>
+            </a:extLst>
+          </p:cNvPr>
+          <p:cNvSpPr>
+            <a:spLocks noGrp="1"/>
+          </p:cNvSpPr>
+          <p:nvPr>
+            <p:ph type="title"/>
+          </p:nvPr>
+        </p:nvSpPr>
+        <p:spPr>
+          <a:xfrm>
+            <a:off x="371168" y="390833"/>
+            <a:ext cx="7706032" cy="923330"/>
+          </a:xfrm>
+        </p:spPr>
+        <p:txBody>
+          <a:bodyPr/>
+          <a:lstStyle/>
+          <a:p>
+            <a:r>
+              <a:rPr kumimoji="1" lang="ja-JP" altLang="en-US" sz="6000" dirty="0"/>
+              <a:t>今後</a:t>
+            </a:r>
+          </a:p>
+        </p:txBody>
+      </p:sp>
+      <p:sp>
+        <p:nvSpPr>
+          <p:cNvPr id="7" name="テキスト ボックス 6">
+            <a:extLst>
+              <a:ext uri="{FF2B5EF4-FFF2-40B4-BE49-F238E27FC236}">
+                <a16:creationId xmlns:a16="http://schemas.microsoft.com/office/drawing/2014/main" id="{A370E018-015F-6D9B-6B02-3A8BADC61388}"/>
+              </a:ext>
+            </a:extLst>
+          </p:cNvPr>
+          <p:cNvSpPr txBox="1"/>
+          <p:nvPr/>
+        </p:nvSpPr>
+        <p:spPr>
+          <a:xfrm>
+            <a:off x="371168" y="1658644"/>
+            <a:ext cx="8849032" cy="584775"/>
+          </a:xfrm>
+          <a:prstGeom prst="rect">
+            <a:avLst/>
+          </a:prstGeom>
+          <a:noFill/>
+          <a:ln w="19050">
+            <a:solidFill>
+              <a:schemeClr val="bg1"/>
+            </a:solidFill>
+          </a:ln>
+        </p:spPr>
+        <p:txBody>
+          <a:bodyPr wrap="square" rtlCol="0">
+            <a:spAutoFit/>
+          </a:bodyPr>
+          <a:lstStyle/>
+          <a:p>
+            <a:pPr algn="l"/>
+            <a:r>
+              <a:rPr kumimoji="1" lang="ja-JP" altLang="en-US" sz="3200" dirty="0">
+                <a:solidFill>
+                  <a:schemeClr val="bg1"/>
+                </a:solidFill>
+              </a:rPr>
+              <a:t>キャッシュミス </a:t>
+            </a:r>
+            <a:r>
+              <a:rPr kumimoji="1" lang="en-US" altLang="ja-JP" sz="3200" dirty="0">
+                <a:solidFill>
+                  <a:schemeClr val="bg1"/>
+                </a:solidFill>
+              </a:rPr>
+              <a:t>: </a:t>
+            </a:r>
+            <a:r>
+              <a:rPr kumimoji="1" lang="ja-JP" altLang="en-US" sz="3200" dirty="0">
+                <a:solidFill>
+                  <a:schemeClr val="bg1"/>
+                </a:solidFill>
+              </a:rPr>
+              <a:t>描画マネージャーの単一責任</a:t>
+            </a:r>
+          </a:p>
+        </p:txBody>
+      </p:sp>
+      <p:sp>
+        <p:nvSpPr>
+          <p:cNvPr id="9" name="テキスト ボックス 8">
+            <a:extLst>
+              <a:ext uri="{FF2B5EF4-FFF2-40B4-BE49-F238E27FC236}">
+                <a16:creationId xmlns:a16="http://schemas.microsoft.com/office/drawing/2014/main" id="{64096C8E-2385-53F6-9578-C01DDB0C8B8C}"/>
+              </a:ext>
+            </a:extLst>
+          </p:cNvPr>
+          <p:cNvSpPr txBox="1"/>
+          <p:nvPr/>
+        </p:nvSpPr>
+        <p:spPr>
+          <a:xfrm>
+            <a:off x="371168" y="2243419"/>
+            <a:ext cx="11820832" cy="1815882"/>
+          </a:xfrm>
+          <a:prstGeom prst="rect">
+            <a:avLst/>
+          </a:prstGeom>
+          <a:noFill/>
+          <a:ln>
+            <a:noFill/>
+          </a:ln>
+        </p:spPr>
+        <p:txBody>
+          <a:bodyPr wrap="square" rtlCol="0">
+            <a:spAutoFit/>
+          </a:bodyPr>
+          <a:lstStyle/>
+          <a:p>
+            <a:pPr marL="0" marR="0" lvl="0" indent="0" algn="l" defTabSz="914400" rtl="0" eaLnBrk="0" fontAlgn="base" latinLnBrk="0" hangingPunct="0">
+              <a:lnSpc>
+                <a:spcPct val="100000"/>
+              </a:lnSpc>
+              <a:spcBef>
+                <a:spcPct val="0"/>
+              </a:spcBef>
+              <a:spcAft>
+                <a:spcPct val="0"/>
+              </a:spcAft>
+              <a:buClrTx/>
+              <a:buSzTx/>
+              <a:buFontTx/>
+              <a:buChar char="•"/>
+              <a:tabLst/>
+            </a:pPr>
+            <a:r>
+              <a:rPr kumimoji="0" lang="en-US" altLang="ja-JP" sz="2800" b="0" i="0" u="none" strike="noStrike" cap="none" normalizeH="0" baseline="0" dirty="0">
+                <a:ln>
+                  <a:noFill/>
+                </a:ln>
+                <a:solidFill>
+                  <a:schemeClr val="bg1"/>
+                </a:solidFill>
+                <a:effectLst/>
+                <a:latin typeface="Arial" panose="020B0604020202020204" pitchFamily="34" charset="0"/>
+              </a:rPr>
+              <a:t> </a:t>
+            </a:r>
+            <a:r>
+              <a:rPr kumimoji="0" lang="en-US" altLang="ja-JP" sz="2800" b="0" i="0" u="none" strike="noStrike" cap="none" normalizeH="0" baseline="0" dirty="0" err="1">
+                <a:ln>
+                  <a:noFill/>
+                </a:ln>
+                <a:solidFill>
+                  <a:schemeClr val="bg1"/>
+                </a:solidFill>
+                <a:effectLst/>
+                <a:latin typeface="Arial" panose="020B0604020202020204" pitchFamily="34" charset="0"/>
+              </a:rPr>
+              <a:t>Vtable</a:t>
+            </a:r>
+            <a:r>
+              <a:rPr kumimoji="0" lang="ja-JP" altLang="en-US" sz="2800" b="0" i="0" u="none" strike="noStrike" cap="none" normalizeH="0" baseline="0" dirty="0">
+                <a:ln>
+                  <a:noFill/>
+                </a:ln>
+                <a:solidFill>
+                  <a:schemeClr val="bg1"/>
+                </a:solidFill>
+                <a:effectLst/>
+                <a:latin typeface="Arial" panose="020B0604020202020204" pitchFamily="34" charset="0"/>
+              </a:rPr>
+              <a:t>参照</a:t>
+            </a:r>
+            <a:r>
+              <a:rPr kumimoji="0" lang="ja-JP" altLang="ja-JP" sz="2800" b="0" i="0" u="none" strike="noStrike" cap="none" normalizeH="0" baseline="0" dirty="0">
+                <a:ln>
+                  <a:noFill/>
+                </a:ln>
+                <a:solidFill>
+                  <a:schemeClr val="bg1"/>
+                </a:solidFill>
+                <a:effectLst/>
+                <a:latin typeface="Arial" panose="020B0604020202020204" pitchFamily="34" charset="0"/>
+              </a:rPr>
+              <a:t>で</a:t>
+            </a:r>
+            <a:r>
+              <a:rPr kumimoji="0" lang="ja-JP" altLang="en-US" sz="2800" b="0" i="0" u="none" strike="noStrike" cap="none" normalizeH="0" baseline="0" dirty="0">
+                <a:ln>
+                  <a:noFill/>
+                </a:ln>
+                <a:solidFill>
+                  <a:schemeClr val="bg1"/>
+                </a:solidFill>
+                <a:effectLst/>
+                <a:latin typeface="Arial" panose="020B0604020202020204" pitchFamily="34" charset="0"/>
+              </a:rPr>
+              <a:t>メモリ使用量が増えると</a:t>
+            </a:r>
+            <a:r>
+              <a:rPr kumimoji="0" lang="ja-JP" altLang="ja-JP" sz="2800" b="0" i="0" u="none" strike="noStrike" cap="none" normalizeH="0" baseline="0" dirty="0">
+                <a:ln>
+                  <a:noFill/>
+                </a:ln>
+                <a:solidFill>
+                  <a:schemeClr val="bg1"/>
+                </a:solidFill>
+                <a:effectLst/>
+                <a:latin typeface="Arial" panose="020B0604020202020204" pitchFamily="34" charset="0"/>
+              </a:rPr>
+              <a:t>キャッシュミスが</a:t>
+            </a:r>
+            <a:r>
+              <a:rPr lang="ja-JP" altLang="en-US" sz="2800" dirty="0">
+                <a:solidFill>
+                  <a:schemeClr val="bg1"/>
+                </a:solidFill>
+                <a:latin typeface="Arial" panose="020B0604020202020204" pitchFamily="34" charset="0"/>
+              </a:rPr>
+              <a:t>多く</a:t>
+            </a:r>
+            <a:r>
+              <a:rPr kumimoji="0" lang="ja-JP" altLang="ja-JP" sz="2800" b="0" i="0" u="none" strike="noStrike" cap="none" normalizeH="0" baseline="0" dirty="0">
+                <a:ln>
+                  <a:noFill/>
+                </a:ln>
+                <a:solidFill>
+                  <a:schemeClr val="bg1"/>
+                </a:solidFill>
+                <a:effectLst/>
+                <a:latin typeface="Arial" panose="020B0604020202020204" pitchFamily="34" charset="0"/>
+              </a:rPr>
+              <a:t>発生</a:t>
+            </a:r>
+            <a:r>
+              <a:rPr kumimoji="0" lang="ja-JP" altLang="en-US" sz="2800" b="0" i="0" u="none" strike="noStrike" cap="none" normalizeH="0" baseline="0" dirty="0">
+                <a:ln>
+                  <a:noFill/>
+                </a:ln>
+                <a:solidFill>
+                  <a:schemeClr val="bg1"/>
+                </a:solidFill>
+                <a:effectLst/>
+                <a:latin typeface="Arial" panose="020B0604020202020204" pitchFamily="34" charset="0"/>
+              </a:rPr>
+              <a:t>しそう</a:t>
+            </a:r>
+            <a:endParaRPr kumimoji="0" lang="ja-JP" altLang="ja-JP" sz="2800" b="0" i="0" u="none" strike="noStrike" cap="none" normalizeH="0" baseline="0" dirty="0">
+              <a:ln>
+                <a:noFill/>
+              </a:ln>
+              <a:solidFill>
+                <a:schemeClr val="bg1"/>
+              </a:solidFill>
+              <a:effectLst/>
+              <a:latin typeface="Arial" panose="020B0604020202020204" pitchFamily="34" charset="0"/>
+            </a:endParaRPr>
+          </a:p>
+          <a:p>
+            <a:pPr marL="0" marR="0" lvl="0" indent="0" algn="l" defTabSz="914400" rtl="0" eaLnBrk="0" fontAlgn="base" latinLnBrk="0" hangingPunct="0">
+              <a:lnSpc>
+                <a:spcPct val="100000"/>
+              </a:lnSpc>
+              <a:spcBef>
+                <a:spcPct val="0"/>
+              </a:spcBef>
+              <a:spcAft>
+                <a:spcPct val="0"/>
+              </a:spcAft>
+              <a:buClrTx/>
+              <a:buSzTx/>
+              <a:buFontTx/>
+              <a:buChar char="•"/>
+              <a:tabLst/>
+            </a:pPr>
+            <a:r>
+              <a:rPr kumimoji="0" lang="en-US" altLang="ja-JP" sz="2800" b="0" i="0" u="none" strike="noStrike" cap="none" normalizeH="0" baseline="0" dirty="0">
+                <a:ln>
+                  <a:noFill/>
+                </a:ln>
+                <a:solidFill>
+                  <a:schemeClr val="bg1"/>
+                </a:solidFill>
+                <a:effectLst/>
+                <a:latin typeface="Arial" panose="020B0604020202020204" pitchFamily="34" charset="0"/>
+              </a:rPr>
+              <a:t> </a:t>
+            </a:r>
+            <a:r>
+              <a:rPr kumimoji="0" lang="ja-JP" altLang="ja-JP" sz="2800" b="0" i="0" u="none" strike="noStrike" cap="none" normalizeH="0" baseline="0" dirty="0">
+                <a:ln>
+                  <a:noFill/>
+                </a:ln>
+                <a:solidFill>
+                  <a:schemeClr val="bg1"/>
+                </a:solidFill>
+                <a:effectLst/>
+                <a:latin typeface="Arial" panose="020B0604020202020204" pitchFamily="34" charset="0"/>
+              </a:rPr>
+              <a:t>複数テクスチャをまとめ</a:t>
+            </a:r>
+            <a:r>
+              <a:rPr kumimoji="0" lang="ja-JP" altLang="en-US" sz="2800" b="0" i="0" u="none" strike="noStrike" cap="none" normalizeH="0" baseline="0" dirty="0">
+                <a:ln>
+                  <a:noFill/>
+                </a:ln>
+                <a:solidFill>
+                  <a:schemeClr val="bg1"/>
+                </a:solidFill>
+                <a:effectLst/>
+                <a:latin typeface="Arial" panose="020B0604020202020204" pitchFamily="34" charset="0"/>
+              </a:rPr>
+              <a:t>て</a:t>
+            </a:r>
+            <a:r>
+              <a:rPr kumimoji="0" lang="ja-JP" altLang="ja-JP" sz="2800" b="0" i="0" u="none" strike="noStrike" cap="none" normalizeH="0" baseline="0" dirty="0">
+                <a:ln>
+                  <a:noFill/>
+                </a:ln>
+                <a:solidFill>
+                  <a:schemeClr val="bg1"/>
+                </a:solidFill>
+                <a:effectLst/>
+                <a:latin typeface="Arial" panose="020B0604020202020204" pitchFamily="34" charset="0"/>
+              </a:rPr>
+              <a:t>GPU転送が</a:t>
+            </a:r>
+            <a:r>
+              <a:rPr kumimoji="0" lang="ja-JP" altLang="en-US" sz="2800" b="0" i="0" u="none" strike="noStrike" cap="none" normalizeH="0" baseline="0" dirty="0">
+                <a:ln>
+                  <a:noFill/>
+                </a:ln>
+                <a:solidFill>
+                  <a:schemeClr val="bg1"/>
+                </a:solidFill>
+                <a:effectLst/>
+                <a:latin typeface="Arial" panose="020B0604020202020204" pitchFamily="34" charset="0"/>
+              </a:rPr>
+              <a:t>行えない</a:t>
+            </a:r>
+            <a:endParaRPr kumimoji="0" lang="ja-JP" altLang="ja-JP" sz="2800" b="0" i="0" u="none" strike="noStrike" cap="none" normalizeH="0" baseline="0" dirty="0">
+              <a:ln>
+                <a:noFill/>
+              </a:ln>
+              <a:solidFill>
+                <a:schemeClr val="bg1"/>
+              </a:solidFill>
+              <a:effectLst/>
+              <a:latin typeface="Arial" panose="020B0604020202020204" pitchFamily="34" charset="0"/>
+            </a:endParaRPr>
+          </a:p>
+          <a:p>
+            <a:pPr marL="0" marR="0" lvl="0" indent="0" algn="l" defTabSz="914400" rtl="0" eaLnBrk="0" fontAlgn="base" latinLnBrk="0" hangingPunct="0">
+              <a:lnSpc>
+                <a:spcPct val="100000"/>
+              </a:lnSpc>
+              <a:spcBef>
+                <a:spcPct val="0"/>
+              </a:spcBef>
+              <a:spcAft>
+                <a:spcPct val="0"/>
+              </a:spcAft>
+              <a:buClrTx/>
+              <a:buSzTx/>
+              <a:buFontTx/>
+              <a:buChar char="•"/>
+              <a:tabLst/>
+            </a:pPr>
+            <a:r>
+              <a:rPr kumimoji="0" lang="en-US" altLang="ja-JP" sz="2800" b="0" i="0" u="none" strike="noStrike" cap="none" normalizeH="0" baseline="0" dirty="0">
+                <a:ln>
+                  <a:noFill/>
+                </a:ln>
+                <a:solidFill>
+                  <a:schemeClr val="bg1"/>
+                </a:solidFill>
+                <a:effectLst/>
+                <a:latin typeface="Arial" panose="020B0604020202020204" pitchFamily="34" charset="0"/>
+              </a:rPr>
+              <a:t> </a:t>
+            </a:r>
+            <a:r>
+              <a:rPr kumimoji="0" lang="ja-JP" altLang="ja-JP" sz="2800" b="0" i="0" u="none" strike="noStrike" cap="none" normalizeH="0" baseline="0" dirty="0">
+                <a:ln>
+                  <a:noFill/>
+                </a:ln>
+                <a:solidFill>
+                  <a:schemeClr val="bg1"/>
+                </a:solidFill>
+                <a:effectLst/>
+                <a:latin typeface="Arial" panose="020B0604020202020204" pitchFamily="34" charset="0"/>
+              </a:rPr>
+              <a:t>作成と描画を兼任しており単一責任になっていない</a:t>
+            </a:r>
+          </a:p>
+          <a:p>
+            <a:pPr marL="0" marR="0" lvl="0" indent="0" algn="l" defTabSz="914400" rtl="0" eaLnBrk="0" fontAlgn="base" latinLnBrk="0" hangingPunct="0">
+              <a:lnSpc>
+                <a:spcPct val="100000"/>
+              </a:lnSpc>
+              <a:spcBef>
+                <a:spcPct val="0"/>
+              </a:spcBef>
+              <a:spcAft>
+                <a:spcPct val="0"/>
+              </a:spcAft>
+              <a:buClrTx/>
+              <a:buSzTx/>
+              <a:tabLst/>
+            </a:pPr>
+            <a:r>
+              <a:rPr lang="ja-JP" altLang="en-US" sz="2800" b="1" dirty="0">
+                <a:solidFill>
+                  <a:schemeClr val="tx1"/>
+                </a:solidFill>
+                <a:latin typeface="Arial" panose="020B0604020202020204" pitchFamily="34" charset="0"/>
+              </a:rPr>
+              <a:t>   </a:t>
+            </a:r>
+            <a:r>
+              <a:rPr kumimoji="0" lang="ja-JP" altLang="ja-JP" sz="2800" b="1" i="0" u="none" strike="noStrike" cap="none" normalizeH="0" baseline="0" dirty="0">
+                <a:ln>
+                  <a:noFill/>
+                </a:ln>
+                <a:solidFill>
+                  <a:srgbClr val="FF0000"/>
+                </a:solidFill>
+                <a:effectLst/>
+                <a:latin typeface="Arial" panose="020B0604020202020204" pitchFamily="34" charset="0"/>
+              </a:rPr>
+              <a:t>→</a:t>
+            </a:r>
+            <a:r>
+              <a:rPr kumimoji="0" lang="ja-JP" altLang="ja-JP" sz="2800" b="1" i="0" u="none" strike="noStrike" cap="none" normalizeH="0" baseline="0" dirty="0">
+                <a:ln>
+                  <a:noFill/>
+                </a:ln>
+                <a:solidFill>
+                  <a:schemeClr val="tx1"/>
+                </a:solidFill>
+                <a:effectLst/>
+                <a:latin typeface="Arial" panose="020B0604020202020204" pitchFamily="34" charset="0"/>
+              </a:rPr>
+              <a:t> </a:t>
+            </a:r>
+            <a:r>
+              <a:rPr kumimoji="0" lang="ja-JP" altLang="ja-JP" sz="2800" b="1" i="0" u="sng" strike="noStrike" cap="none" normalizeH="0" baseline="0" dirty="0">
+                <a:ln>
+                  <a:noFill/>
+                </a:ln>
+                <a:solidFill>
+                  <a:srgbClr val="FF0000"/>
+                </a:solidFill>
+                <a:effectLst/>
+                <a:latin typeface="Arial" panose="020B0604020202020204" pitchFamily="34" charset="0"/>
+              </a:rPr>
+              <a:t>描画コマンドリスト方式で解決予定</a:t>
+            </a:r>
+            <a:endParaRPr kumimoji="0" lang="ja-JP" altLang="ja-JP" sz="2800" b="0" i="0" u="sng" strike="noStrike" cap="none" normalizeH="0" baseline="0" dirty="0">
+              <a:ln>
+                <a:noFill/>
+              </a:ln>
+              <a:solidFill>
+                <a:srgbClr val="FF0000"/>
+              </a:solidFill>
+              <a:effectLst/>
+              <a:latin typeface="Arial" panose="020B0604020202020204" pitchFamily="34" charset="0"/>
+            </a:endParaRPr>
+          </a:p>
+        </p:txBody>
+      </p:sp>
+      <p:sp>
+        <p:nvSpPr>
+          <p:cNvPr id="3" name="テキスト ボックス 2">
+            <a:extLst>
+              <a:ext uri="{FF2B5EF4-FFF2-40B4-BE49-F238E27FC236}">
+                <a16:creationId xmlns:a16="http://schemas.microsoft.com/office/drawing/2014/main" id="{D5E8B5C8-1559-F56D-8159-A0FBF5C99E58}"/>
+              </a:ext>
+            </a:extLst>
+          </p:cNvPr>
+          <p:cNvSpPr txBox="1"/>
+          <p:nvPr/>
+        </p:nvSpPr>
+        <p:spPr>
+          <a:xfrm>
+            <a:off x="371168" y="4629971"/>
+            <a:ext cx="1973826" cy="584775"/>
+          </a:xfrm>
+          <a:prstGeom prst="rect">
+            <a:avLst/>
+          </a:prstGeom>
+          <a:noFill/>
+          <a:ln w="19050">
+            <a:solidFill>
+              <a:schemeClr val="bg1"/>
+            </a:solidFill>
+          </a:ln>
+        </p:spPr>
+        <p:txBody>
+          <a:bodyPr wrap="square" rtlCol="0">
+            <a:spAutoFit/>
+          </a:bodyPr>
+          <a:lstStyle/>
+          <a:p>
+            <a:pPr algn="l"/>
+            <a:r>
+              <a:rPr kumimoji="1" lang="ja-JP" altLang="en-US" sz="3200" dirty="0">
+                <a:solidFill>
+                  <a:schemeClr val="bg1"/>
+                </a:solidFill>
+              </a:rPr>
+              <a:t>入力情報</a:t>
+            </a:r>
+          </a:p>
+        </p:txBody>
+      </p:sp>
+      <p:sp>
+        <p:nvSpPr>
+          <p:cNvPr id="4" name="テキスト ボックス 3">
+            <a:extLst>
+              <a:ext uri="{FF2B5EF4-FFF2-40B4-BE49-F238E27FC236}">
+                <a16:creationId xmlns:a16="http://schemas.microsoft.com/office/drawing/2014/main" id="{96FBA82A-5A07-D216-661B-1270A38C75D8}"/>
+              </a:ext>
+            </a:extLst>
+          </p:cNvPr>
+          <p:cNvSpPr txBox="1"/>
+          <p:nvPr/>
+        </p:nvSpPr>
+        <p:spPr>
+          <a:xfrm>
+            <a:off x="371168" y="5199356"/>
+            <a:ext cx="11135032" cy="954107"/>
+          </a:xfrm>
+          <a:prstGeom prst="rect">
+            <a:avLst/>
+          </a:prstGeom>
+          <a:noFill/>
+          <a:ln>
+            <a:noFill/>
+          </a:ln>
+        </p:spPr>
+        <p:txBody>
+          <a:bodyPr wrap="square" rtlCol="0">
+            <a:spAutoFit/>
+          </a:bodyPr>
+          <a:lstStyle/>
+          <a:p>
+            <a:pPr marL="0" marR="0" lvl="0" indent="0" algn="l" defTabSz="914400" rtl="0" eaLnBrk="0" fontAlgn="base" latinLnBrk="0" hangingPunct="0">
+              <a:lnSpc>
+                <a:spcPct val="100000"/>
+              </a:lnSpc>
+              <a:spcBef>
+                <a:spcPct val="0"/>
+              </a:spcBef>
+              <a:spcAft>
+                <a:spcPct val="0"/>
+              </a:spcAft>
+              <a:buClrTx/>
+              <a:buSzTx/>
+              <a:buFontTx/>
+              <a:buChar char="•"/>
+              <a:tabLst/>
+            </a:pPr>
+            <a:r>
+              <a:rPr kumimoji="0" lang="ja-JP" altLang="en-US" sz="2800" b="0" i="0" u="none" strike="noStrike" cap="none" normalizeH="0" baseline="0" dirty="0">
+                <a:ln>
+                  <a:noFill/>
+                </a:ln>
+                <a:solidFill>
+                  <a:schemeClr val="bg1"/>
+                </a:solidFill>
+                <a:effectLst/>
+                <a:latin typeface="Arial" panose="020B0604020202020204" pitchFamily="34" charset="0"/>
+              </a:rPr>
+              <a:t> マウスとキーボードの入力しか今のままでは取れず、拡張性が低い</a:t>
+            </a:r>
+            <a:endParaRPr kumimoji="0" lang="en-US" altLang="ja-JP" sz="2800" b="0" i="0" u="none" strike="noStrike" cap="none" normalizeH="0" baseline="0" dirty="0">
+              <a:ln>
+                <a:noFill/>
+              </a:ln>
+              <a:solidFill>
+                <a:schemeClr val="bg1"/>
+              </a:solidFill>
+              <a:effectLst/>
+              <a:latin typeface="Arial" panose="020B0604020202020204" pitchFamily="34" charset="0"/>
+            </a:endParaRPr>
+          </a:p>
+          <a:p>
+            <a:pPr marL="0" marR="0" lvl="0" indent="0" algn="l" defTabSz="914400" rtl="0" eaLnBrk="0" fontAlgn="base" latinLnBrk="0" hangingPunct="0">
+              <a:lnSpc>
+                <a:spcPct val="100000"/>
+              </a:lnSpc>
+              <a:spcBef>
+                <a:spcPct val="0"/>
+              </a:spcBef>
+              <a:spcAft>
+                <a:spcPct val="0"/>
+              </a:spcAft>
+              <a:buClrTx/>
+              <a:buSzTx/>
+              <a:tabLst/>
+            </a:pPr>
+            <a:r>
+              <a:rPr lang="ja-JP" altLang="en-US" sz="2800" dirty="0">
+                <a:solidFill>
+                  <a:schemeClr val="bg1"/>
+                </a:solidFill>
+                <a:latin typeface="Arial" panose="020B0604020202020204" pitchFamily="34" charset="0"/>
+              </a:rPr>
+              <a:t>　</a:t>
+            </a:r>
+            <a:r>
+              <a:rPr lang="ja-JP" altLang="en-US" sz="2800" dirty="0">
+                <a:solidFill>
+                  <a:srgbClr val="FF0000"/>
+                </a:solidFill>
+                <a:latin typeface="Arial" panose="020B0604020202020204" pitchFamily="34" charset="0"/>
+              </a:rPr>
+              <a:t>→ </a:t>
+            </a:r>
+            <a:r>
+              <a:rPr kumimoji="0" lang="ja-JP" altLang="ja-JP" sz="2800" b="0" i="0" u="sng" strike="noStrike" cap="none" normalizeH="0" baseline="0" dirty="0">
+                <a:ln>
+                  <a:noFill/>
+                </a:ln>
+                <a:solidFill>
+                  <a:srgbClr val="FF0000"/>
+                </a:solidFill>
+                <a:effectLst/>
+                <a:latin typeface="Arial" panose="020B0604020202020204" pitchFamily="34" charset="0"/>
+              </a:rPr>
+              <a:t>プラットフォーム層で入力をアクション</a:t>
+            </a:r>
+            <a:r>
+              <a:rPr kumimoji="0" lang="en-US" altLang="ja-JP" sz="2800" b="0" i="0" u="sng" strike="noStrike" cap="none" normalizeH="0" baseline="0" dirty="0">
+                <a:ln>
+                  <a:noFill/>
+                </a:ln>
+                <a:solidFill>
+                  <a:srgbClr val="FF0000"/>
+                </a:solidFill>
+                <a:effectLst/>
+                <a:latin typeface="Arial" panose="020B0604020202020204" pitchFamily="34" charset="0"/>
+              </a:rPr>
+              <a:t>(</a:t>
+            </a:r>
+            <a:r>
+              <a:rPr kumimoji="0" lang="ja-JP" altLang="ja-JP" sz="2800" b="0" i="0" u="sng" strike="noStrike" cap="none" normalizeH="0" baseline="0" dirty="0">
+                <a:ln>
+                  <a:noFill/>
+                </a:ln>
+                <a:solidFill>
+                  <a:srgbClr val="FF0000"/>
+                </a:solidFill>
+                <a:effectLst/>
+                <a:latin typeface="Arial" panose="020B0604020202020204" pitchFamily="34" charset="0"/>
+              </a:rPr>
+              <a:t>意図</a:t>
+            </a:r>
+            <a:r>
+              <a:rPr kumimoji="0" lang="en-US" altLang="ja-JP" sz="2800" b="0" i="0" u="sng" strike="noStrike" cap="none" normalizeH="0" baseline="0" dirty="0">
+                <a:ln>
+                  <a:noFill/>
+                </a:ln>
+                <a:solidFill>
+                  <a:srgbClr val="FF0000"/>
+                </a:solidFill>
+                <a:effectLst/>
+                <a:latin typeface="Arial" panose="020B0604020202020204" pitchFamily="34" charset="0"/>
+              </a:rPr>
+              <a:t>)</a:t>
+            </a:r>
+            <a:r>
+              <a:rPr kumimoji="0" lang="ja-JP" altLang="ja-JP" sz="2800" b="0" i="0" u="sng" strike="noStrike" cap="none" normalizeH="0" baseline="0" dirty="0">
+                <a:ln>
+                  <a:noFill/>
+                </a:ln>
+                <a:solidFill>
+                  <a:srgbClr val="FF0000"/>
+                </a:solidFill>
+                <a:effectLst/>
+                <a:latin typeface="Arial" panose="020B0604020202020204" pitchFamily="34" charset="0"/>
+              </a:rPr>
+              <a:t>へ変換</a:t>
+            </a:r>
+            <a:endParaRPr kumimoji="0" lang="en-US" altLang="ja-JP" sz="2800" b="0" i="0" u="sng" strike="noStrike" cap="none" normalizeH="0" baseline="0" dirty="0">
+              <a:ln>
+                <a:noFill/>
+              </a:ln>
+              <a:solidFill>
+                <a:srgbClr val="FF0000"/>
+              </a:solidFill>
+              <a:effectLst/>
+              <a:latin typeface="Arial" panose="020B0604020202020204" pitchFamily="34" charset="0"/>
+            </a:endParaRPr>
+          </a:p>
+        </p:txBody>
+      </p:sp>
+    </p:spTree>
+    <p:extLst>
+      <p:ext uri="{BB962C8B-B14F-4D97-AF65-F5344CB8AC3E}">
+        <p14:creationId xmlns:p14="http://schemas.microsoft.com/office/powerpoint/2010/main" val="2142884083"/>
       </p:ext>
     </p:extLst>
   </p:cSld>
@@ -3880,4 +6084,319 @@
   <a:objectDefaults/>
   <a:extraClrSchemeLst/>
 </a:theme>
+</file>
+
+<file path=ppt/theme/theme2.xml><?xml version="1.0" encoding="utf-8"?>
+<a:theme xmlns:a="http://schemas.openxmlformats.org/drawingml/2006/main" name="Office テーマ">
+  <a:themeElements>
+    <a:clrScheme name="Office">
+      <a:dk1>
+        <a:sysClr val="windowText" lastClr="000000"/>
+      </a:dk1>
+      <a:lt1>
+        <a:sysClr val="window" lastClr="FFFFFF"/>
+      </a:lt1>
+      <a:dk2>
+        <a:srgbClr val="0E2841"/>
+      </a:dk2>
+      <a:lt2>
+        <a:srgbClr val="E8E8E8"/>
+      </a:lt2>
+      <a:accent1>
+        <a:srgbClr val="156082"/>
+      </a:accent1>
+      <a:accent2>
+        <a:srgbClr val="E97132"/>
+      </a:accent2>
+      <a:accent3>
+        <a:srgbClr val="196B24"/>
+      </a:accent3>
+      <a:accent4>
+        <a:srgbClr val="0F9ED5"/>
+      </a:accent4>
+      <a:accent5>
+        <a:srgbClr val="A02B93"/>
+      </a:accent5>
+      <a:accent6>
+        <a:srgbClr val="4EA72E"/>
+      </a:accent6>
+      <a:hlink>
+        <a:srgbClr val="467886"/>
+      </a:hlink>
+      <a:folHlink>
+        <a:srgbClr val="96607D"/>
+      </a:folHlink>
+    </a:clrScheme>
+    <a:fontScheme name="Office">
+      <a:majorFont>
+        <a:latin typeface="游ゴシック Light" panose="02110004020202020204"/>
+        <a:ea typeface=""/>
+        <a:cs typeface=""/>
+        <a:font script="Jpan" typeface="游ゴシック Light"/>
+        <a:font script="Hang" typeface="맑은 고딕"/>
+        <a:font script="Hans" typeface="等线 Light"/>
+        <a:font script="Hant" typeface="新細明體"/>
+        <a:font script="Arab" typeface="Times New Roman"/>
+        <a:font script="Hebr" typeface="Times New Roman"/>
+        <a:font script="Thai" typeface="Angsana New"/>
+        <a:font script="Ethi" typeface="Nyala"/>
+        <a:font script="Beng" typeface="Vrinda"/>
+        <a:font script="Gujr" typeface="Shruti"/>
+        <a:font script="Khmr" typeface="MoolBoran"/>
+        <a:font script="Knda" typeface="Tunga"/>
+        <a:font script="Guru" typeface="Raavi"/>
+        <a:font script="Cans" typeface="Euphemia"/>
+        <a:font script="Cher" typeface="Plantagenet Cherokee"/>
+        <a:font script="Yiii" typeface="Microsoft Yi Baiti"/>
+        <a:font script="Tibt" typeface="Microsoft Himalaya"/>
+        <a:font script="Thaa" typeface="MV Boli"/>
+        <a:font script="Deva" typeface="Mangal"/>
+        <a:font script="Telu" typeface="Gautami"/>
+        <a:font script="Taml" typeface="Latha"/>
+        <a:font script="Syrc" typeface="Estrangelo Edessa"/>
+        <a:font script="Orya" typeface="Kalinga"/>
+        <a:font script="Mlym" typeface="Kartika"/>
+        <a:font script="Laoo" typeface="DokChampa"/>
+        <a:font script="Sinh" typeface="Iskoola Pota"/>
+        <a:font script="Mong" typeface="Mongolian Baiti"/>
+        <a:font script="Viet" typeface="Times New Roman"/>
+        <a:font script="Uigh" typeface="Microsoft Uighur"/>
+        <a:font script="Geor" typeface="Sylfaen"/>
+        <a:font script="Armn" typeface="Arial"/>
+        <a:font script="Bugi" typeface="Leelawadee UI"/>
+        <a:font script="Bopo" typeface="Microsoft JhengHei"/>
+        <a:font script="Java" typeface="Javanese Text"/>
+        <a:font script="Lisu" typeface="Segoe UI"/>
+        <a:font script="Mymr" typeface="Myanmar Text"/>
+        <a:font script="Nkoo" typeface="Ebrima"/>
+        <a:font script="Olck" typeface="Nirmala UI"/>
+        <a:font script="Osma" typeface="Ebrima"/>
+        <a:font script="Phag" typeface="Phagspa"/>
+        <a:font script="Syrn" typeface="Estrangelo Edessa"/>
+        <a:font script="Syrj" typeface="Estrangelo Edessa"/>
+        <a:font script="Syre" typeface="Estrangelo Edessa"/>
+        <a:font script="Sora" typeface="Nirmala UI"/>
+        <a:font script="Tale" typeface="Microsoft Tai Le"/>
+        <a:font script="Talu" typeface="Microsoft New Tai Lue"/>
+        <a:font script="Tfng" typeface="Ebrima"/>
+      </a:majorFont>
+      <a:minorFont>
+        <a:latin typeface="游ゴシック" panose="02110004020202020204"/>
+        <a:ea typeface=""/>
+        <a:cs typeface=""/>
+        <a:font script="Jpan" typeface="游ゴシック"/>
+        <a:font script="Hang" typeface="맑은 고딕"/>
+        <a:font script="Hans" typeface="等线"/>
+        <a:font script="Hant" typeface="新細明體"/>
+        <a:font script="Arab" typeface="Arial"/>
+        <a:font script="Hebr" typeface="Arial"/>
+        <a:font script="Thai" typeface="Cordia New"/>
+        <a:font script="Ethi" typeface="Nyala"/>
+        <a:font script="Beng" typeface="Vrinda"/>
+        <a:font script="Gujr" typeface="Shruti"/>
+        <a:font script="Khmr" typeface="DaunPenh"/>
+        <a:font script="Knda" typeface="Tunga"/>
+        <a:font script="Guru" typeface="Raavi"/>
+        <a:font script="Cans" typeface="Euphemia"/>
+        <a:font script="Cher" typeface="Plantagenet Cherokee"/>
+        <a:font script="Yiii" typeface="Microsoft Yi Baiti"/>
+        <a:font script="Tibt" typeface="Microsoft Himalaya"/>
+        <a:font script="Thaa" typeface="MV Boli"/>
+        <a:font script="Deva" typeface="Mangal"/>
+        <a:font script="Telu" typeface="Gautami"/>
+        <a:font script="Taml" typeface="Latha"/>
+        <a:font script="Syrc" typeface="Estrangelo Edessa"/>
+        <a:font script="Orya" typeface="Kalinga"/>
+        <a:font script="Mlym" typeface="Kartika"/>
+        <a:font script="Laoo" typeface="DokChampa"/>
+        <a:font script="Sinh" typeface="Iskoola Pota"/>
+        <a:font script="Mong" typeface="Mongolian Baiti"/>
+        <a:font script="Viet" typeface="Arial"/>
+        <a:font script="Uigh" typeface="Microsoft Uighur"/>
+        <a:font script="Geor" typeface="Sylfaen"/>
+        <a:font script="Armn" typeface="Arial"/>
+        <a:font script="Bugi" typeface="Leelawadee UI"/>
+        <a:font script="Bopo" typeface="Microsoft JhengHei"/>
+        <a:font script="Java" typeface="Javanese Text"/>
+        <a:font script="Lisu" typeface="Segoe UI"/>
+        <a:font script="Mymr" typeface="Myanmar Text"/>
+        <a:font script="Nkoo" typeface="Ebrima"/>
+        <a:font script="Olck" typeface="Nirmala UI"/>
+        <a:font script="Osma" typeface="Ebrima"/>
+        <a:font script="Phag" typeface="Phagspa"/>
+        <a:font script="Syrn" typeface="Estrangelo Edessa"/>
+        <a:font script="Syrj" typeface="Estrangelo Edessa"/>
+        <a:font script="Syre" typeface="Estrangelo Edessa"/>
+        <a:font script="Sora" typeface="Nirmala UI"/>
+        <a:font script="Tale" typeface="Microsoft Tai Le"/>
+        <a:font script="Talu" typeface="Microsoft New Tai Lue"/>
+        <a:font script="Tfng" typeface="Ebrima"/>
+      </a:minorFont>
+    </a:fontScheme>
+    <a:fmtScheme name="Office">
+      <a:fillStyleLst>
+        <a:solidFill>
+          <a:schemeClr val="phClr"/>
+        </a:solidFill>
+        <a:gradFill rotWithShape="1">
+          <a:gsLst>
+            <a:gs pos="0">
+              <a:schemeClr val="phClr">
+                <a:lumMod val="110000"/>
+                <a:satMod val="105000"/>
+                <a:tint val="67000"/>
+              </a:schemeClr>
+            </a:gs>
+            <a:gs pos="50000">
+              <a:schemeClr val="phClr">
+                <a:lumMod val="105000"/>
+                <a:satMod val="103000"/>
+                <a:tint val="73000"/>
+              </a:schemeClr>
+            </a:gs>
+            <a:gs pos="100000">
+              <a:schemeClr val="phClr">
+                <a:lumMod val="105000"/>
+                <a:satMod val="109000"/>
+                <a:tint val="81000"/>
+              </a:schemeClr>
+            </a:gs>
+          </a:gsLst>
+          <a:lin ang="5400000" scaled="0"/>
+        </a:gradFill>
+        <a:gradFill rotWithShape="1">
+          <a:gsLst>
+            <a:gs pos="0">
+              <a:schemeClr val="phClr">
+                <a:satMod val="103000"/>
+                <a:lumMod val="102000"/>
+                <a:tint val="94000"/>
+              </a:schemeClr>
+            </a:gs>
+            <a:gs pos="50000">
+              <a:schemeClr val="phClr">
+                <a:satMod val="110000"/>
+                <a:lumMod val="100000"/>
+                <a:shade val="100000"/>
+              </a:schemeClr>
+            </a:gs>
+            <a:gs pos="100000">
+              <a:schemeClr val="phClr">
+                <a:lumMod val="99000"/>
+                <a:satMod val="120000"/>
+                <a:shade val="78000"/>
+              </a:schemeClr>
+            </a:gs>
+          </a:gsLst>
+          <a:lin ang="5400000" scaled="0"/>
+        </a:gradFill>
+      </a:fillStyleLst>
+      <a:lnStyleLst>
+        <a:ln w="12700" cap="flat" cmpd="sng" algn="ctr">
+          <a:solidFill>
+            <a:schemeClr val="phClr"/>
+          </a:solidFill>
+          <a:prstDash val="solid"/>
+          <a:miter lim="800000"/>
+        </a:ln>
+        <a:ln w="19050" cap="flat" cmpd="sng" algn="ctr">
+          <a:solidFill>
+            <a:schemeClr val="phClr"/>
+          </a:solidFill>
+          <a:prstDash val="solid"/>
+          <a:miter lim="800000"/>
+        </a:ln>
+        <a:ln w="25400" cap="flat" cmpd="sng" algn="ctr">
+          <a:solidFill>
+            <a:schemeClr val="phClr"/>
+          </a:solidFill>
+          <a:prstDash val="solid"/>
+          <a:miter lim="800000"/>
+        </a:ln>
+      </a:lnStyleLst>
+      <a:effectStyleLst>
+        <a:effectStyle>
+          <a:effectLst/>
+        </a:effectStyle>
+        <a:effectStyle>
+          <a:effectLst/>
+        </a:effectStyle>
+        <a:effectStyle>
+          <a:effectLst>
+            <a:outerShdw blurRad="57150" dist="19050" dir="5400000" algn="ctr" rotWithShape="0">
+              <a:srgbClr val="000000">
+                <a:alpha val="63000"/>
+              </a:srgbClr>
+            </a:outerShdw>
+          </a:effectLst>
+        </a:effectStyle>
+      </a:effectStyleLst>
+      <a:bgFillStyleLst>
+        <a:solidFill>
+          <a:schemeClr val="phClr"/>
+        </a:solidFill>
+        <a:solidFill>
+          <a:schemeClr val="phClr">
+            <a:tint val="95000"/>
+            <a:satMod val="170000"/>
+          </a:schemeClr>
+        </a:solidFill>
+        <a:gradFill rotWithShape="1">
+          <a:gsLst>
+            <a:gs pos="0">
+              <a:schemeClr val="phClr">
+                <a:tint val="93000"/>
+                <a:satMod val="150000"/>
+                <a:shade val="98000"/>
+                <a:lumMod val="102000"/>
+              </a:schemeClr>
+            </a:gs>
+            <a:gs pos="50000">
+              <a:schemeClr val="phClr">
+                <a:tint val="98000"/>
+                <a:satMod val="130000"/>
+                <a:shade val="90000"/>
+                <a:lumMod val="103000"/>
+              </a:schemeClr>
+            </a:gs>
+            <a:gs pos="100000">
+              <a:schemeClr val="phClr">
+                <a:shade val="63000"/>
+                <a:satMod val="120000"/>
+              </a:schemeClr>
+            </a:gs>
+          </a:gsLst>
+          <a:lin ang="5400000" scaled="0"/>
+        </a:gradFill>
+      </a:bgFillStyleLst>
+    </a:fmtScheme>
+  </a:themeElements>
+  <a:objectDefaults>
+    <a:lnDef>
+      <a:spPr/>
+      <a:bodyPr/>
+      <a:lstStyle/>
+      <a:style>
+        <a:lnRef idx="2">
+          <a:schemeClr val="accent1"/>
+        </a:lnRef>
+        <a:fillRef idx="0">
+          <a:schemeClr val="accent1"/>
+        </a:fillRef>
+        <a:effectRef idx="1">
+          <a:schemeClr val="accent1"/>
+        </a:effectRef>
+        <a:fontRef idx="minor">
+          <a:schemeClr val="tx1"/>
+        </a:fontRef>
+      </a:style>
+    </a:lnDef>
+  </a:objectDefaults>
+  <a:extraClrSchemeLst/>
+  <a:extLst>
+    <a:ext uri="{05A4C25C-085E-4340-85A3-A5531E510DB2}">
+      <thm15:themeFamily xmlns:thm15="http://schemas.microsoft.com/office/thememl/2012/main" name="Office Theme" id="{2E142A2C-CD16-42D6-873A-C26D2A0506FA}" vid="{1BDDFF52-6CD6-40A5-AB3C-68EB2F1E4D0A}"/>
+    </a:ext>
+  </a:extLst>
+</a:theme>
 </file>
--- a/就職作品詳細資料.pptx
+++ b/就職作品詳細資料.pptx
@@ -5,7 +5,7 @@
     <p:sldMasterId id="2147483648" r:id="rId1"/>
   </p:sldMasterIdLst>
   <p:notesMasterIdLst>
-    <p:notesMasterId r:id="rId11"/>
+    <p:notesMasterId r:id="rId14"/>
   </p:notesMasterIdLst>
   <p:sldIdLst>
     <p:sldId id="256" r:id="rId2"/>
@@ -13,10 +13,13 @@
     <p:sldId id="259" r:id="rId4"/>
     <p:sldId id="260" r:id="rId5"/>
     <p:sldId id="262" r:id="rId6"/>
-    <p:sldId id="264" r:id="rId7"/>
-    <p:sldId id="267" r:id="rId8"/>
-    <p:sldId id="265" r:id="rId9"/>
-    <p:sldId id="266" r:id="rId10"/>
+    <p:sldId id="270" r:id="rId7"/>
+    <p:sldId id="264" r:id="rId8"/>
+    <p:sldId id="267" r:id="rId9"/>
+    <p:sldId id="265" r:id="rId10"/>
+    <p:sldId id="268" r:id="rId11"/>
+    <p:sldId id="269" r:id="rId12"/>
+    <p:sldId id="266" r:id="rId13"/>
   </p:sldIdLst>
   <p:sldSz cx="12192000" cy="6858000"/>
   <p:notesSz cx="12192000" cy="6858000"/>
@@ -126,7 +129,7 @@
           <a:p>
             <a:fld id="{7844CC07-7CCF-4856-941D-F16981C68265}" type="datetimeFigureOut">
               <a:rPr kumimoji="1" lang="ja-JP" altLang="en-US" smtClean="0"/>
-              <a:t>2026/2/2</a:t>
+              <a:t>2026/2/17</a:t>
             </a:fld>
             <a:endParaRPr kumimoji="1" lang="ja-JP" altLang="en-US"/>
           </a:p>
@@ -490,7 +493,7 @@
           <a:p>
             <a:fld id="{C0476A4E-7012-4A9C-843C-6443E265FB9C}" type="slidenum">
               <a:rPr kumimoji="1" lang="ja-JP" altLang="en-US" smtClean="0"/>
-              <a:t>7</a:t>
+              <a:t>8</a:t>
             </a:fld>
             <a:endParaRPr kumimoji="1" lang="ja-JP" altLang="en-US"/>
           </a:p>
@@ -660,7 +663,7 @@
           <a:p>
             <a:fld id="{1D8BD707-D9CF-40AE-B4C6-C98DA3205C09}" type="datetimeFigureOut">
               <a:rPr lang="en-US"/>
-              <a:t>2/2/2026</a:t>
+              <a:t>2/17/2026</a:t>
             </a:fld>
             <a:endParaRPr lang="en-US"/>
           </a:p>
@@ -837,7 +840,7 @@
           <a:p>
             <a:fld id="{1D8BD707-D9CF-40AE-B4C6-C98DA3205C09}" type="datetimeFigureOut">
               <a:rPr lang="en-US"/>
-              <a:t>2/2/2026</a:t>
+              <a:t>2/17/2026</a:t>
             </a:fld>
             <a:endParaRPr lang="en-US"/>
           </a:p>
@@ -1051,7 +1054,7 @@
           <a:p>
             <a:fld id="{1D8BD707-D9CF-40AE-B4C6-C98DA3205C09}" type="datetimeFigureOut">
               <a:rPr lang="en-US"/>
-              <a:t>2/2/2026</a:t>
+              <a:t>2/17/2026</a:t>
             </a:fld>
             <a:endParaRPr lang="en-US"/>
           </a:p>
@@ -1199,7 +1202,7 @@
           <a:p>
             <a:fld id="{1D8BD707-D9CF-40AE-B4C6-C98DA3205C09}" type="datetimeFigureOut">
               <a:rPr lang="en-US"/>
-              <a:t>2/2/2026</a:t>
+              <a:t>2/17/2026</a:t>
             </a:fld>
             <a:endParaRPr lang="en-US"/>
           </a:p>
@@ -1318,7 +1321,7 @@
           <a:p>
             <a:fld id="{1D8BD707-D9CF-40AE-B4C6-C98DA3205C09}" type="datetimeFigureOut">
               <a:rPr lang="en-US"/>
-              <a:t>2/2/2026</a:t>
+              <a:t>2/17/2026</a:t>
             </a:fld>
             <a:endParaRPr lang="en-US"/>
           </a:p>
@@ -1565,7 +1568,7 @@
           <a:p>
             <a:fld id="{1D8BD707-D9CF-40AE-B4C6-C98DA3205C09}" type="datetimeFigureOut">
               <a:rPr lang="en-US"/>
-              <a:t>2/2/2026</a:t>
+              <a:t>2/17/2026</a:t>
             </a:fld>
             <a:endParaRPr lang="en-US"/>
           </a:p>
@@ -1899,6 +1902,1359 @@
 </p:sld>
 </file>
 
+<file path=ppt/slides/slide10.xml><?xml version="1.0" encoding="utf-8"?>
+<p:sld xmlns:a="http://schemas.openxmlformats.org/drawingml/2006/main" xmlns:r="http://schemas.openxmlformats.org/officeDocument/2006/relationships" xmlns:p="http://schemas.openxmlformats.org/presentationml/2006/main">
+  <p:cSld>
+    <p:spTree>
+      <p:nvGrpSpPr>
+        <p:cNvPr id="1" name="">
+          <a:extLst>
+            <a:ext uri="{FF2B5EF4-FFF2-40B4-BE49-F238E27FC236}">
+              <a16:creationId xmlns:a16="http://schemas.microsoft.com/office/drawing/2014/main" id="{0EE6778F-F635-0616-B585-7716CA1C0ACF}"/>
+            </a:ext>
+          </a:extLst>
+        </p:cNvPr>
+        <p:cNvGrpSpPr/>
+        <p:nvPr/>
+      </p:nvGrpSpPr>
+      <p:grpSpPr>
+        <a:xfrm>
+          <a:off x="0" y="0"/>
+          <a:ext cx="0" cy="0"/>
+          <a:chOff x="0" y="0"/>
+          <a:chExt cx="0" cy="0"/>
+        </a:xfrm>
+      </p:grpSpPr>
+      <p:sp>
+        <p:nvSpPr>
+          <p:cNvPr id="2" name="タイトル 1">
+            <a:extLst>
+              <a:ext uri="{FF2B5EF4-FFF2-40B4-BE49-F238E27FC236}">
+                <a16:creationId xmlns:a16="http://schemas.microsoft.com/office/drawing/2014/main" id="{2DB26341-98AF-0E9C-4437-65316181FF16}"/>
+              </a:ext>
+            </a:extLst>
+          </p:cNvPr>
+          <p:cNvSpPr>
+            <a:spLocks noGrp="1"/>
+          </p:cNvSpPr>
+          <p:nvPr>
+            <p:ph type="title"/>
+          </p:nvPr>
+        </p:nvSpPr>
+        <p:spPr>
+          <a:xfrm>
+            <a:off x="371168" y="390833"/>
+            <a:ext cx="7706032" cy="923330"/>
+          </a:xfrm>
+        </p:spPr>
+        <p:txBody>
+          <a:bodyPr/>
+          <a:lstStyle/>
+          <a:p>
+            <a:r>
+              <a:rPr kumimoji="1" lang="ja-JP" altLang="en-US" sz="6000" dirty="0"/>
+              <a:t>コンセプト実現に向けて</a:t>
+            </a:r>
+          </a:p>
+        </p:txBody>
+      </p:sp>
+      <p:sp>
+        <p:nvSpPr>
+          <p:cNvPr id="7" name="テキスト ボックス 6">
+            <a:extLst>
+              <a:ext uri="{FF2B5EF4-FFF2-40B4-BE49-F238E27FC236}">
+                <a16:creationId xmlns:a16="http://schemas.microsoft.com/office/drawing/2014/main" id="{F341FC28-02CD-E182-1342-CF3FB1CB8771}"/>
+              </a:ext>
+            </a:extLst>
+          </p:cNvPr>
+          <p:cNvSpPr txBox="1"/>
+          <p:nvPr/>
+        </p:nvSpPr>
+        <p:spPr>
+          <a:xfrm>
+            <a:off x="371168" y="1670339"/>
+            <a:ext cx="1686232" cy="584775"/>
+          </a:xfrm>
+          <a:prstGeom prst="rect">
+            <a:avLst/>
+          </a:prstGeom>
+          <a:noFill/>
+          <a:ln w="19050">
+            <a:solidFill>
+              <a:schemeClr val="bg1"/>
+            </a:solidFill>
+          </a:ln>
+        </p:spPr>
+        <p:txBody>
+          <a:bodyPr wrap="square" rtlCol="0">
+            <a:spAutoFit/>
+          </a:bodyPr>
+          <a:lstStyle/>
+          <a:p>
+            <a:pPr algn="l"/>
+            <a:r>
+              <a:rPr kumimoji="1" lang="en-US" altLang="ja-JP" sz="3200" dirty="0" err="1">
+                <a:solidFill>
+                  <a:schemeClr val="bg1"/>
+                </a:solidFill>
+              </a:rPr>
+              <a:t>CMake</a:t>
+            </a:r>
+            <a:endParaRPr kumimoji="1" lang="ja-JP" altLang="en-US" sz="3200" dirty="0">
+              <a:solidFill>
+                <a:schemeClr val="bg1"/>
+              </a:solidFill>
+            </a:endParaRPr>
+          </a:p>
+        </p:txBody>
+      </p:sp>
+      <p:sp>
+        <p:nvSpPr>
+          <p:cNvPr id="9" name="テキスト ボックス 8">
+            <a:extLst>
+              <a:ext uri="{FF2B5EF4-FFF2-40B4-BE49-F238E27FC236}">
+                <a16:creationId xmlns:a16="http://schemas.microsoft.com/office/drawing/2014/main" id="{9C391546-A754-DD6D-302A-C86B444F8767}"/>
+              </a:ext>
+            </a:extLst>
+          </p:cNvPr>
+          <p:cNvSpPr txBox="1"/>
+          <p:nvPr/>
+        </p:nvSpPr>
+        <p:spPr>
+          <a:xfrm>
+            <a:off x="371168" y="2255114"/>
+            <a:ext cx="10754032" cy="1301318"/>
+          </a:xfrm>
+          <a:prstGeom prst="rect">
+            <a:avLst/>
+          </a:prstGeom>
+          <a:noFill/>
+          <a:ln>
+            <a:noFill/>
+          </a:ln>
+        </p:spPr>
+        <p:txBody>
+          <a:bodyPr wrap="square" rtlCol="0">
+            <a:spAutoFit/>
+          </a:bodyPr>
+          <a:lstStyle/>
+          <a:p>
+            <a:pPr marL="0" marR="0" lvl="0" indent="0" algn="l" defTabSz="914400" rtl="0" eaLnBrk="0" fontAlgn="base" latinLnBrk="0" hangingPunct="0">
+              <a:lnSpc>
+                <a:spcPct val="150000"/>
+              </a:lnSpc>
+              <a:spcBef>
+                <a:spcPct val="0"/>
+              </a:spcBef>
+              <a:spcAft>
+                <a:spcPct val="0"/>
+              </a:spcAft>
+              <a:buClrTx/>
+              <a:buSzTx/>
+              <a:buFontTx/>
+              <a:buChar char="•"/>
+              <a:tabLst/>
+            </a:pPr>
+            <a:r>
+              <a:rPr lang="ja-JP" altLang="en-US" sz="2800" b="1" u="sng" dirty="0">
+                <a:solidFill>
+                  <a:srgbClr val="FF0000"/>
+                </a:solidFill>
+                <a:latin typeface="Arial" panose="020B0604020202020204" pitchFamily="34" charset="0"/>
+              </a:rPr>
+              <a:t>マルチプラットフォームへの対応が行いやすい</a:t>
+            </a:r>
+            <a:endParaRPr kumimoji="0" lang="en-US" altLang="ja-JP" sz="2800" b="1" i="0" u="sng" strike="noStrike" cap="none" normalizeH="0" baseline="0" dirty="0">
+              <a:ln>
+                <a:noFill/>
+              </a:ln>
+              <a:solidFill>
+                <a:srgbClr val="FF0000"/>
+              </a:solidFill>
+              <a:effectLst/>
+              <a:latin typeface="Arial" panose="020B0604020202020204" pitchFamily="34" charset="0"/>
+            </a:endParaRPr>
+          </a:p>
+          <a:p>
+            <a:pPr marL="0" marR="0" lvl="0" indent="0" algn="l" defTabSz="914400" rtl="0" eaLnBrk="0" fontAlgn="base" latinLnBrk="0" hangingPunct="0">
+              <a:lnSpc>
+                <a:spcPct val="150000"/>
+              </a:lnSpc>
+              <a:spcBef>
+                <a:spcPct val="0"/>
+              </a:spcBef>
+              <a:spcAft>
+                <a:spcPct val="0"/>
+              </a:spcAft>
+              <a:buClrTx/>
+              <a:buSzTx/>
+              <a:buFontTx/>
+              <a:buChar char="•"/>
+              <a:tabLst/>
+            </a:pPr>
+            <a:r>
+              <a:rPr kumimoji="0" lang="en-US" altLang="ja-JP" sz="2800" b="1" i="0" u="sng" strike="noStrike" cap="none" normalizeH="0" baseline="0" dirty="0" err="1">
+                <a:ln>
+                  <a:noFill/>
+                </a:ln>
+                <a:solidFill>
+                  <a:srgbClr val="FF0000"/>
+                </a:solidFill>
+                <a:effectLst/>
+              </a:rPr>
+              <a:t>VisualStudio</a:t>
+            </a:r>
+            <a:r>
+              <a:rPr kumimoji="0" lang="ja-JP" altLang="en-US" sz="2800" b="1" i="0" u="sng" strike="noStrike" cap="none" normalizeH="0" baseline="0" dirty="0">
+                <a:ln>
+                  <a:noFill/>
+                </a:ln>
+                <a:solidFill>
+                  <a:srgbClr val="FF0000"/>
+                </a:solidFill>
+                <a:effectLst/>
+              </a:rPr>
+              <a:t>に依存しない</a:t>
+            </a:r>
+            <a:endParaRPr kumimoji="0" lang="ja-JP" altLang="ja-JP" sz="2800" b="1" i="0" u="sng" strike="noStrike" cap="none" normalizeH="0" baseline="0" dirty="0">
+              <a:ln>
+                <a:noFill/>
+              </a:ln>
+              <a:solidFill>
+                <a:srgbClr val="FF0000"/>
+              </a:solidFill>
+              <a:effectLst/>
+              <a:latin typeface="Arial" panose="020B0604020202020204" pitchFamily="34" charset="0"/>
+            </a:endParaRPr>
+          </a:p>
+        </p:txBody>
+      </p:sp>
+      <p:pic>
+        <p:nvPicPr>
+          <p:cNvPr id="4" name="図 3" descr="テキスト&#10;&#10;AI 生成コンテンツは誤りを含む可能性があります。">
+            <a:extLst>
+              <a:ext uri="{FF2B5EF4-FFF2-40B4-BE49-F238E27FC236}">
+                <a16:creationId xmlns:a16="http://schemas.microsoft.com/office/drawing/2014/main" id="{25A12992-FB76-D612-8CDD-0BADB4BEE9B9}"/>
+              </a:ext>
+            </a:extLst>
+          </p:cNvPr>
+          <p:cNvPicPr>
+            <a:picLocks noChangeAspect="1"/>
+          </p:cNvPicPr>
+          <p:nvPr/>
+        </p:nvPicPr>
+        <p:blipFill>
+          <a:blip r:embed="rId2"/>
+          <a:stretch>
+            <a:fillRect/>
+          </a:stretch>
+        </p:blipFill>
+        <p:spPr>
+          <a:xfrm>
+            <a:off x="8045245" y="2998781"/>
+            <a:ext cx="3967514" cy="3577513"/>
+          </a:xfrm>
+          <a:prstGeom prst="rect">
+            <a:avLst/>
+          </a:prstGeom>
+        </p:spPr>
+      </p:pic>
+    </p:spTree>
+    <p:extLst>
+      <p:ext uri="{BB962C8B-B14F-4D97-AF65-F5344CB8AC3E}">
+        <p14:creationId xmlns:p14="http://schemas.microsoft.com/office/powerpoint/2010/main" val="2883724813"/>
+      </p:ext>
+    </p:extLst>
+  </p:cSld>
+  <p:clrMapOvr>
+    <a:masterClrMapping/>
+  </p:clrMapOvr>
+</p:sld>
+</file>
+
+<file path=ppt/slides/slide11.xml><?xml version="1.0" encoding="utf-8"?>
+<p:sld xmlns:a="http://schemas.openxmlformats.org/drawingml/2006/main" xmlns:r="http://schemas.openxmlformats.org/officeDocument/2006/relationships" xmlns:p="http://schemas.openxmlformats.org/presentationml/2006/main">
+  <p:cSld>
+    <p:spTree>
+      <p:nvGrpSpPr>
+        <p:cNvPr id="1" name="">
+          <a:extLst>
+            <a:ext uri="{FF2B5EF4-FFF2-40B4-BE49-F238E27FC236}">
+              <a16:creationId xmlns:a16="http://schemas.microsoft.com/office/drawing/2014/main" id="{22DC5B7D-D9BF-A27C-3DFF-F3E67B753766}"/>
+            </a:ext>
+          </a:extLst>
+        </p:cNvPr>
+        <p:cNvGrpSpPr/>
+        <p:nvPr/>
+      </p:nvGrpSpPr>
+      <p:grpSpPr>
+        <a:xfrm>
+          <a:off x="0" y="0"/>
+          <a:ext cx="0" cy="0"/>
+          <a:chOff x="0" y="0"/>
+          <a:chExt cx="0" cy="0"/>
+        </a:xfrm>
+      </p:grpSpPr>
+      <p:sp>
+        <p:nvSpPr>
+          <p:cNvPr id="2" name="タイトル 1">
+            <a:extLst>
+              <a:ext uri="{FF2B5EF4-FFF2-40B4-BE49-F238E27FC236}">
+                <a16:creationId xmlns:a16="http://schemas.microsoft.com/office/drawing/2014/main" id="{5242688C-0B15-1DF2-C15E-73345C421A27}"/>
+              </a:ext>
+            </a:extLst>
+          </p:cNvPr>
+          <p:cNvSpPr>
+            <a:spLocks noGrp="1"/>
+          </p:cNvSpPr>
+          <p:nvPr>
+            <p:ph type="title"/>
+          </p:nvPr>
+        </p:nvSpPr>
+        <p:spPr>
+          <a:xfrm>
+            <a:off x="371168" y="390833"/>
+            <a:ext cx="7706032" cy="923330"/>
+          </a:xfrm>
+        </p:spPr>
+        <p:txBody>
+          <a:bodyPr/>
+          <a:lstStyle/>
+          <a:p>
+            <a:r>
+              <a:rPr kumimoji="1" lang="ja-JP" altLang="en-US" sz="6000" dirty="0"/>
+              <a:t>コンセプト実現に向けて</a:t>
+            </a:r>
+          </a:p>
+        </p:txBody>
+      </p:sp>
+      <p:sp>
+        <p:nvSpPr>
+          <p:cNvPr id="7" name="テキスト ボックス 6">
+            <a:extLst>
+              <a:ext uri="{FF2B5EF4-FFF2-40B4-BE49-F238E27FC236}">
+                <a16:creationId xmlns:a16="http://schemas.microsoft.com/office/drawing/2014/main" id="{7C2B3AA5-8889-FC69-C336-FD952CCBE9B4}"/>
+              </a:ext>
+            </a:extLst>
+          </p:cNvPr>
+          <p:cNvSpPr txBox="1"/>
+          <p:nvPr/>
+        </p:nvSpPr>
+        <p:spPr>
+          <a:xfrm>
+            <a:off x="371168" y="1670339"/>
+            <a:ext cx="2372032" cy="584775"/>
+          </a:xfrm>
+          <a:prstGeom prst="rect">
+            <a:avLst/>
+          </a:prstGeom>
+          <a:noFill/>
+          <a:ln w="19050">
+            <a:solidFill>
+              <a:schemeClr val="bg1"/>
+            </a:solidFill>
+          </a:ln>
+        </p:spPr>
+        <p:txBody>
+          <a:bodyPr wrap="square" rtlCol="0">
+            <a:spAutoFit/>
+          </a:bodyPr>
+          <a:lstStyle/>
+          <a:p>
+            <a:pPr algn="l"/>
+            <a:r>
+              <a:rPr kumimoji="1" lang="ja-JP" altLang="en-US" sz="3200" dirty="0">
+                <a:solidFill>
+                  <a:schemeClr val="bg1"/>
+                </a:solidFill>
+              </a:rPr>
+              <a:t>コンパイル</a:t>
+            </a:r>
+          </a:p>
+        </p:txBody>
+      </p:sp>
+      <p:sp>
+        <p:nvSpPr>
+          <p:cNvPr id="9" name="テキスト ボックス 8">
+            <a:extLst>
+              <a:ext uri="{FF2B5EF4-FFF2-40B4-BE49-F238E27FC236}">
+                <a16:creationId xmlns:a16="http://schemas.microsoft.com/office/drawing/2014/main" id="{14944BB5-297B-AAEF-858A-EA307D884FE6}"/>
+              </a:ext>
+            </a:extLst>
+          </p:cNvPr>
+          <p:cNvSpPr txBox="1"/>
+          <p:nvPr/>
+        </p:nvSpPr>
+        <p:spPr>
+          <a:xfrm>
+            <a:off x="371168" y="2255114"/>
+            <a:ext cx="10754032" cy="1305165"/>
+          </a:xfrm>
+          <a:prstGeom prst="rect">
+            <a:avLst/>
+          </a:prstGeom>
+          <a:noFill/>
+          <a:ln>
+            <a:noFill/>
+          </a:ln>
+        </p:spPr>
+        <p:txBody>
+          <a:bodyPr wrap="square" rtlCol="0">
+            <a:spAutoFit/>
+          </a:bodyPr>
+          <a:lstStyle/>
+          <a:p>
+            <a:pPr marL="0" marR="0" lvl="0" indent="0" algn="l" defTabSz="914400" rtl="0" eaLnBrk="0" fontAlgn="base" latinLnBrk="0" hangingPunct="0">
+              <a:lnSpc>
+                <a:spcPct val="150000"/>
+              </a:lnSpc>
+              <a:spcBef>
+                <a:spcPct val="0"/>
+              </a:spcBef>
+              <a:spcAft>
+                <a:spcPct val="0"/>
+              </a:spcAft>
+              <a:buClrTx/>
+              <a:buSzTx/>
+              <a:buFontTx/>
+              <a:buChar char="•"/>
+              <a:tabLst/>
+            </a:pPr>
+            <a:r>
+              <a:rPr kumimoji="0" lang="en-US" altLang="ja-JP" sz="2800" b="1" i="0" u="sng" strike="noStrike" cap="none" normalizeH="0" baseline="0" dirty="0">
+                <a:ln>
+                  <a:noFill/>
+                </a:ln>
+                <a:solidFill>
+                  <a:srgbClr val="FF0000"/>
+                </a:solidFill>
+                <a:effectLst/>
+                <a:latin typeface="Arial" panose="020B0604020202020204" pitchFamily="34" charset="0"/>
+              </a:rPr>
+              <a:t>Microsoft</a:t>
+            </a:r>
+            <a:r>
+              <a:rPr lang="ja-JP" altLang="en-US" sz="2800" b="1" u="sng" dirty="0">
+                <a:solidFill>
+                  <a:srgbClr val="FF0000"/>
+                </a:solidFill>
+                <a:latin typeface="Arial" panose="020B0604020202020204" pitchFamily="34" charset="0"/>
+              </a:rPr>
+              <a:t>系は</a:t>
+            </a:r>
+            <a:r>
+              <a:rPr lang="en-US" altLang="ja-JP" sz="2800" b="1" u="sng" dirty="0">
+                <a:solidFill>
+                  <a:srgbClr val="FF0000"/>
+                </a:solidFill>
+                <a:latin typeface="Arial" panose="020B0604020202020204" pitchFamily="34" charset="0"/>
+              </a:rPr>
+              <a:t>Clang-CL </a:t>
+            </a:r>
+            <a:r>
+              <a:rPr lang="ja-JP" altLang="en-US" sz="2800" b="1" u="sng" dirty="0">
+                <a:solidFill>
+                  <a:srgbClr val="FF0000"/>
+                </a:solidFill>
+                <a:latin typeface="Arial" panose="020B0604020202020204" pitchFamily="34" charset="0"/>
+              </a:rPr>
+              <a:t>を使用しています。</a:t>
+            </a:r>
+            <a:endParaRPr lang="en-US" altLang="ja-JP" sz="2800" b="1" u="sng" dirty="0">
+              <a:solidFill>
+                <a:srgbClr val="FF0000"/>
+              </a:solidFill>
+              <a:latin typeface="Arial" panose="020B0604020202020204" pitchFamily="34" charset="0"/>
+            </a:endParaRPr>
+          </a:p>
+          <a:p>
+            <a:pPr marL="0" marR="0" lvl="0" indent="0" algn="l" defTabSz="914400" rtl="0" eaLnBrk="0" fontAlgn="base" latinLnBrk="0" hangingPunct="0">
+              <a:lnSpc>
+                <a:spcPct val="150000"/>
+              </a:lnSpc>
+              <a:spcBef>
+                <a:spcPct val="0"/>
+              </a:spcBef>
+              <a:spcAft>
+                <a:spcPct val="0"/>
+              </a:spcAft>
+              <a:buClrTx/>
+              <a:buSzTx/>
+              <a:buFontTx/>
+              <a:buChar char="•"/>
+              <a:tabLst/>
+            </a:pPr>
+            <a:r>
+              <a:rPr kumimoji="0" lang="ja-JP" altLang="en-US" sz="2800" b="1" i="0" u="sng" strike="noStrike" cap="none" normalizeH="0" baseline="0" dirty="0">
+                <a:ln>
+                  <a:noFill/>
+                </a:ln>
+                <a:solidFill>
+                  <a:srgbClr val="FF0000"/>
+                </a:solidFill>
+                <a:effectLst/>
+                <a:latin typeface="Arial" panose="020B0604020202020204" pitchFamily="34" charset="0"/>
+              </a:rPr>
+              <a:t>他の</a:t>
+            </a:r>
+            <a:r>
+              <a:rPr kumimoji="0" lang="en-US" altLang="ja-JP" sz="2800" b="1" i="0" u="sng" strike="noStrike" cap="none" normalizeH="0" baseline="0" dirty="0">
+                <a:ln>
+                  <a:noFill/>
+                </a:ln>
+                <a:solidFill>
+                  <a:srgbClr val="FF0000"/>
+                </a:solidFill>
+                <a:effectLst/>
+                <a:latin typeface="Arial" panose="020B0604020202020204" pitchFamily="34" charset="0"/>
+              </a:rPr>
+              <a:t>OS</a:t>
+            </a:r>
+            <a:r>
+              <a:rPr lang="ja-JP" altLang="en-US" sz="2800" b="1" u="sng" dirty="0">
+                <a:solidFill>
+                  <a:srgbClr val="FF0000"/>
+                </a:solidFill>
+                <a:latin typeface="Arial" panose="020B0604020202020204" pitchFamily="34" charset="0"/>
+              </a:rPr>
+              <a:t>で</a:t>
+            </a:r>
+            <a:r>
+              <a:rPr kumimoji="0" lang="ja-JP" altLang="en-US" sz="2800" b="1" i="0" u="sng" strike="noStrike" cap="none" normalizeH="0" baseline="0" dirty="0">
+                <a:ln>
+                  <a:noFill/>
+                </a:ln>
+                <a:solidFill>
+                  <a:srgbClr val="FF0000"/>
+                </a:solidFill>
+                <a:effectLst/>
+                <a:latin typeface="Arial" panose="020B0604020202020204" pitchFamily="34" charset="0"/>
+              </a:rPr>
+              <a:t>は</a:t>
+            </a:r>
+            <a:r>
+              <a:rPr kumimoji="0" lang="en-US" altLang="ja-JP" sz="2800" b="1" i="0" u="sng" strike="noStrike" cap="none" normalizeH="0" baseline="0" dirty="0">
+                <a:ln>
+                  <a:noFill/>
+                </a:ln>
+                <a:solidFill>
+                  <a:srgbClr val="FF0000"/>
+                </a:solidFill>
+                <a:effectLst/>
+                <a:latin typeface="Arial" panose="020B0604020202020204" pitchFamily="34" charset="0"/>
+              </a:rPr>
+              <a:t>Clang</a:t>
+            </a:r>
+            <a:r>
+              <a:rPr kumimoji="0" lang="ja-JP" altLang="en-US" sz="2800" b="1" i="0" u="sng" strike="noStrike" cap="none" normalizeH="0" baseline="0" dirty="0">
+                <a:ln>
+                  <a:noFill/>
+                </a:ln>
+                <a:solidFill>
+                  <a:srgbClr val="FF0000"/>
+                </a:solidFill>
+                <a:effectLst/>
+                <a:latin typeface="Arial" panose="020B0604020202020204" pitchFamily="34" charset="0"/>
+              </a:rPr>
+              <a:t>を基本として使用することを想定しています。</a:t>
+            </a:r>
+            <a:endParaRPr kumimoji="0" lang="en-US" altLang="ja-JP" sz="2800" b="1" i="0" u="sng" strike="noStrike" cap="none" normalizeH="0" baseline="0" dirty="0">
+              <a:ln>
+                <a:noFill/>
+              </a:ln>
+              <a:solidFill>
+                <a:srgbClr val="FF0000"/>
+              </a:solidFill>
+              <a:effectLst/>
+              <a:latin typeface="Arial" panose="020B0604020202020204" pitchFamily="34" charset="0"/>
+            </a:endParaRPr>
+          </a:p>
+        </p:txBody>
+      </p:sp>
+      <p:pic>
+        <p:nvPicPr>
+          <p:cNvPr id="5" name="図 4" descr="テキスト&#10;&#10;AI 生成コンテンツは誤りを含む可能性があります。">
+            <a:extLst>
+              <a:ext uri="{FF2B5EF4-FFF2-40B4-BE49-F238E27FC236}">
+                <a16:creationId xmlns:a16="http://schemas.microsoft.com/office/drawing/2014/main" id="{3404B61A-4545-0E5B-7446-B6D5B6B23BDC}"/>
+              </a:ext>
+            </a:extLst>
+          </p:cNvPr>
+          <p:cNvPicPr>
+            <a:picLocks noChangeAspect="1"/>
+          </p:cNvPicPr>
+          <p:nvPr/>
+        </p:nvPicPr>
+        <p:blipFill>
+          <a:blip r:embed="rId2"/>
+          <a:stretch>
+            <a:fillRect/>
+          </a:stretch>
+        </p:blipFill>
+        <p:spPr>
+          <a:xfrm>
+            <a:off x="5105400" y="3568690"/>
+            <a:ext cx="6690852" cy="3289310"/>
+          </a:xfrm>
+          <a:prstGeom prst="rect">
+            <a:avLst/>
+          </a:prstGeom>
+        </p:spPr>
+      </p:pic>
+    </p:spTree>
+    <p:extLst>
+      <p:ext uri="{BB962C8B-B14F-4D97-AF65-F5344CB8AC3E}">
+        <p14:creationId xmlns:p14="http://schemas.microsoft.com/office/powerpoint/2010/main" val="809909671"/>
+      </p:ext>
+    </p:extLst>
+  </p:cSld>
+  <p:clrMapOvr>
+    <a:masterClrMapping/>
+  </p:clrMapOvr>
+</p:sld>
+</file>
+
+<file path=ppt/slides/slide12.xml><?xml version="1.0" encoding="utf-8"?>
+<p:sld xmlns:a="http://schemas.openxmlformats.org/drawingml/2006/main" xmlns:r="http://schemas.openxmlformats.org/officeDocument/2006/relationships" xmlns:p="http://schemas.openxmlformats.org/presentationml/2006/main">
+  <p:cSld>
+    <p:spTree>
+      <p:nvGrpSpPr>
+        <p:cNvPr id="1" name="">
+          <a:extLst>
+            <a:ext uri="{FF2B5EF4-FFF2-40B4-BE49-F238E27FC236}">
+              <a16:creationId xmlns:a16="http://schemas.microsoft.com/office/drawing/2014/main" id="{5180B81A-2B52-A397-F013-E1D59C17A104}"/>
+            </a:ext>
+          </a:extLst>
+        </p:cNvPr>
+        <p:cNvGrpSpPr/>
+        <p:nvPr/>
+      </p:nvGrpSpPr>
+      <p:grpSpPr>
+        <a:xfrm>
+          <a:off x="0" y="0"/>
+          <a:ext cx="0" cy="0"/>
+          <a:chOff x="0" y="0"/>
+          <a:chExt cx="0" cy="0"/>
+        </a:xfrm>
+      </p:grpSpPr>
+      <p:sp>
+        <p:nvSpPr>
+          <p:cNvPr id="2" name="タイトル 1">
+            <a:extLst>
+              <a:ext uri="{FF2B5EF4-FFF2-40B4-BE49-F238E27FC236}">
+                <a16:creationId xmlns:a16="http://schemas.microsoft.com/office/drawing/2014/main" id="{491EDACF-D60C-FE19-77A7-71118ED88DD2}"/>
+              </a:ext>
+            </a:extLst>
+          </p:cNvPr>
+          <p:cNvSpPr>
+            <a:spLocks noGrp="1"/>
+          </p:cNvSpPr>
+          <p:nvPr>
+            <p:ph type="title"/>
+          </p:nvPr>
+        </p:nvSpPr>
+        <p:spPr>
+          <a:xfrm>
+            <a:off x="371168" y="390833"/>
+            <a:ext cx="7706032" cy="923330"/>
+          </a:xfrm>
+        </p:spPr>
+        <p:txBody>
+          <a:bodyPr/>
+          <a:lstStyle/>
+          <a:p>
+            <a:r>
+              <a:rPr kumimoji="1" lang="ja-JP" altLang="en-US" sz="6000" dirty="0"/>
+              <a:t>今後</a:t>
+            </a:r>
+          </a:p>
+        </p:txBody>
+      </p:sp>
+      <p:sp>
+        <p:nvSpPr>
+          <p:cNvPr id="7" name="テキスト ボックス 6">
+            <a:extLst>
+              <a:ext uri="{FF2B5EF4-FFF2-40B4-BE49-F238E27FC236}">
+                <a16:creationId xmlns:a16="http://schemas.microsoft.com/office/drawing/2014/main" id="{A370E018-015F-6D9B-6B02-3A8BADC61388}"/>
+              </a:ext>
+            </a:extLst>
+          </p:cNvPr>
+          <p:cNvSpPr txBox="1"/>
+          <p:nvPr/>
+        </p:nvSpPr>
+        <p:spPr>
+          <a:xfrm>
+            <a:off x="371168" y="1658644"/>
+            <a:ext cx="8849032" cy="584775"/>
+          </a:xfrm>
+          <a:prstGeom prst="rect">
+            <a:avLst/>
+          </a:prstGeom>
+          <a:noFill/>
+          <a:ln w="19050">
+            <a:solidFill>
+              <a:schemeClr val="bg1"/>
+            </a:solidFill>
+          </a:ln>
+        </p:spPr>
+        <p:txBody>
+          <a:bodyPr wrap="square" rtlCol="0">
+            <a:spAutoFit/>
+          </a:bodyPr>
+          <a:lstStyle/>
+          <a:p>
+            <a:pPr algn="l"/>
+            <a:r>
+              <a:rPr kumimoji="1" lang="ja-JP" altLang="en-US" sz="3200" dirty="0">
+                <a:solidFill>
+                  <a:schemeClr val="bg1"/>
+                </a:solidFill>
+              </a:rPr>
+              <a:t>キャッシュミス </a:t>
+            </a:r>
+            <a:r>
+              <a:rPr kumimoji="1" lang="en-US" altLang="ja-JP" sz="3200" dirty="0">
+                <a:solidFill>
+                  <a:schemeClr val="bg1"/>
+                </a:solidFill>
+              </a:rPr>
+              <a:t>: </a:t>
+            </a:r>
+            <a:r>
+              <a:rPr kumimoji="1" lang="ja-JP" altLang="en-US" sz="3200" dirty="0">
+                <a:solidFill>
+                  <a:schemeClr val="bg1"/>
+                </a:solidFill>
+              </a:rPr>
+              <a:t>描画マネージャーの単一責任</a:t>
+            </a:r>
+          </a:p>
+        </p:txBody>
+      </p:sp>
+      <p:sp>
+        <p:nvSpPr>
+          <p:cNvPr id="9" name="テキスト ボックス 8">
+            <a:extLst>
+              <a:ext uri="{FF2B5EF4-FFF2-40B4-BE49-F238E27FC236}">
+                <a16:creationId xmlns:a16="http://schemas.microsoft.com/office/drawing/2014/main" id="{64096C8E-2385-53F6-9578-C01DDB0C8B8C}"/>
+              </a:ext>
+            </a:extLst>
+          </p:cNvPr>
+          <p:cNvSpPr txBox="1"/>
+          <p:nvPr/>
+        </p:nvSpPr>
+        <p:spPr>
+          <a:xfrm>
+            <a:off x="371168" y="2243419"/>
+            <a:ext cx="11820832" cy="1815882"/>
+          </a:xfrm>
+          <a:prstGeom prst="rect">
+            <a:avLst/>
+          </a:prstGeom>
+          <a:noFill/>
+          <a:ln>
+            <a:noFill/>
+          </a:ln>
+        </p:spPr>
+        <p:txBody>
+          <a:bodyPr wrap="square" rtlCol="0">
+            <a:spAutoFit/>
+          </a:bodyPr>
+          <a:lstStyle/>
+          <a:p>
+            <a:pPr marL="0" marR="0" lvl="0" indent="0" algn="l" defTabSz="914400" rtl="0" eaLnBrk="0" fontAlgn="base" latinLnBrk="0" hangingPunct="0">
+              <a:lnSpc>
+                <a:spcPct val="100000"/>
+              </a:lnSpc>
+              <a:spcBef>
+                <a:spcPct val="0"/>
+              </a:spcBef>
+              <a:spcAft>
+                <a:spcPct val="0"/>
+              </a:spcAft>
+              <a:buClrTx/>
+              <a:buSzTx/>
+              <a:buFontTx/>
+              <a:buChar char="•"/>
+              <a:tabLst/>
+            </a:pPr>
+            <a:r>
+              <a:rPr kumimoji="0" lang="en-US" altLang="ja-JP" sz="2800" b="0" i="0" u="none" strike="noStrike" cap="none" normalizeH="0" baseline="0" dirty="0">
+                <a:ln>
+                  <a:noFill/>
+                </a:ln>
+                <a:solidFill>
+                  <a:schemeClr val="bg1"/>
+                </a:solidFill>
+                <a:effectLst/>
+                <a:latin typeface="Arial" panose="020B0604020202020204" pitchFamily="34" charset="0"/>
+              </a:rPr>
+              <a:t> </a:t>
+            </a:r>
+            <a:r>
+              <a:rPr kumimoji="0" lang="en-US" altLang="ja-JP" sz="2800" b="0" i="0" u="none" strike="noStrike" cap="none" normalizeH="0" baseline="0" dirty="0" err="1">
+                <a:ln>
+                  <a:noFill/>
+                </a:ln>
+                <a:solidFill>
+                  <a:schemeClr val="bg1"/>
+                </a:solidFill>
+                <a:effectLst/>
+                <a:latin typeface="Arial" panose="020B0604020202020204" pitchFamily="34" charset="0"/>
+              </a:rPr>
+              <a:t>Vtable</a:t>
+            </a:r>
+            <a:r>
+              <a:rPr kumimoji="0" lang="ja-JP" altLang="en-US" sz="2800" b="0" i="0" u="none" strike="noStrike" cap="none" normalizeH="0" baseline="0" dirty="0">
+                <a:ln>
+                  <a:noFill/>
+                </a:ln>
+                <a:solidFill>
+                  <a:schemeClr val="bg1"/>
+                </a:solidFill>
+                <a:effectLst/>
+                <a:latin typeface="Arial" panose="020B0604020202020204" pitchFamily="34" charset="0"/>
+              </a:rPr>
+              <a:t>参照</a:t>
+            </a:r>
+            <a:r>
+              <a:rPr kumimoji="0" lang="ja-JP" altLang="ja-JP" sz="2800" b="0" i="0" u="none" strike="noStrike" cap="none" normalizeH="0" baseline="0" dirty="0">
+                <a:ln>
+                  <a:noFill/>
+                </a:ln>
+                <a:solidFill>
+                  <a:schemeClr val="bg1"/>
+                </a:solidFill>
+                <a:effectLst/>
+                <a:latin typeface="Arial" panose="020B0604020202020204" pitchFamily="34" charset="0"/>
+              </a:rPr>
+              <a:t>で</a:t>
+            </a:r>
+            <a:r>
+              <a:rPr kumimoji="0" lang="ja-JP" altLang="en-US" sz="2800" b="0" i="0" u="none" strike="noStrike" cap="none" normalizeH="0" baseline="0" dirty="0">
+                <a:ln>
+                  <a:noFill/>
+                </a:ln>
+                <a:solidFill>
+                  <a:schemeClr val="bg1"/>
+                </a:solidFill>
+                <a:effectLst/>
+                <a:latin typeface="Arial" panose="020B0604020202020204" pitchFamily="34" charset="0"/>
+              </a:rPr>
+              <a:t>メモリ使用量が増えると</a:t>
+            </a:r>
+            <a:r>
+              <a:rPr kumimoji="0" lang="ja-JP" altLang="ja-JP" sz="2800" b="0" i="0" u="none" strike="noStrike" cap="none" normalizeH="0" baseline="0" dirty="0">
+                <a:ln>
+                  <a:noFill/>
+                </a:ln>
+                <a:solidFill>
+                  <a:schemeClr val="bg1"/>
+                </a:solidFill>
+                <a:effectLst/>
+                <a:latin typeface="Arial" panose="020B0604020202020204" pitchFamily="34" charset="0"/>
+              </a:rPr>
+              <a:t>キャッシュミスが</a:t>
+            </a:r>
+            <a:r>
+              <a:rPr lang="ja-JP" altLang="en-US" sz="2800" dirty="0">
+                <a:solidFill>
+                  <a:schemeClr val="bg1"/>
+                </a:solidFill>
+                <a:latin typeface="Arial" panose="020B0604020202020204" pitchFamily="34" charset="0"/>
+              </a:rPr>
+              <a:t>多く</a:t>
+            </a:r>
+            <a:r>
+              <a:rPr kumimoji="0" lang="ja-JP" altLang="ja-JP" sz="2800" b="0" i="0" u="none" strike="noStrike" cap="none" normalizeH="0" baseline="0" dirty="0">
+                <a:ln>
+                  <a:noFill/>
+                </a:ln>
+                <a:solidFill>
+                  <a:schemeClr val="bg1"/>
+                </a:solidFill>
+                <a:effectLst/>
+                <a:latin typeface="Arial" panose="020B0604020202020204" pitchFamily="34" charset="0"/>
+              </a:rPr>
+              <a:t>発生</a:t>
+            </a:r>
+            <a:r>
+              <a:rPr kumimoji="0" lang="ja-JP" altLang="en-US" sz="2800" b="0" i="0" u="none" strike="noStrike" cap="none" normalizeH="0" baseline="0" dirty="0">
+                <a:ln>
+                  <a:noFill/>
+                </a:ln>
+                <a:solidFill>
+                  <a:schemeClr val="bg1"/>
+                </a:solidFill>
+                <a:effectLst/>
+                <a:latin typeface="Arial" panose="020B0604020202020204" pitchFamily="34" charset="0"/>
+              </a:rPr>
+              <a:t>しそう</a:t>
+            </a:r>
+            <a:endParaRPr kumimoji="0" lang="ja-JP" altLang="ja-JP" sz="2800" b="0" i="0" u="none" strike="noStrike" cap="none" normalizeH="0" baseline="0" dirty="0">
+              <a:ln>
+                <a:noFill/>
+              </a:ln>
+              <a:solidFill>
+                <a:schemeClr val="bg1"/>
+              </a:solidFill>
+              <a:effectLst/>
+              <a:latin typeface="Arial" panose="020B0604020202020204" pitchFamily="34" charset="0"/>
+            </a:endParaRPr>
+          </a:p>
+          <a:p>
+            <a:pPr marL="0" marR="0" lvl="0" indent="0" algn="l" defTabSz="914400" rtl="0" eaLnBrk="0" fontAlgn="base" latinLnBrk="0" hangingPunct="0">
+              <a:lnSpc>
+                <a:spcPct val="100000"/>
+              </a:lnSpc>
+              <a:spcBef>
+                <a:spcPct val="0"/>
+              </a:spcBef>
+              <a:spcAft>
+                <a:spcPct val="0"/>
+              </a:spcAft>
+              <a:buClrTx/>
+              <a:buSzTx/>
+              <a:buFontTx/>
+              <a:buChar char="•"/>
+              <a:tabLst/>
+            </a:pPr>
+            <a:r>
+              <a:rPr kumimoji="0" lang="en-US" altLang="ja-JP" sz="2800" b="0" i="0" u="none" strike="noStrike" cap="none" normalizeH="0" baseline="0" dirty="0">
+                <a:ln>
+                  <a:noFill/>
+                </a:ln>
+                <a:solidFill>
+                  <a:schemeClr val="bg1"/>
+                </a:solidFill>
+                <a:effectLst/>
+                <a:latin typeface="Arial" panose="020B0604020202020204" pitchFamily="34" charset="0"/>
+              </a:rPr>
+              <a:t> </a:t>
+            </a:r>
+            <a:r>
+              <a:rPr kumimoji="0" lang="ja-JP" altLang="ja-JP" sz="2800" b="0" i="0" u="none" strike="noStrike" cap="none" normalizeH="0" baseline="0" dirty="0">
+                <a:ln>
+                  <a:noFill/>
+                </a:ln>
+                <a:solidFill>
+                  <a:schemeClr val="bg1"/>
+                </a:solidFill>
+                <a:effectLst/>
+                <a:latin typeface="Arial" panose="020B0604020202020204" pitchFamily="34" charset="0"/>
+              </a:rPr>
+              <a:t>複数テクスチャをまとめ</a:t>
+            </a:r>
+            <a:r>
+              <a:rPr kumimoji="0" lang="ja-JP" altLang="en-US" sz="2800" b="0" i="0" u="none" strike="noStrike" cap="none" normalizeH="0" baseline="0" dirty="0">
+                <a:ln>
+                  <a:noFill/>
+                </a:ln>
+                <a:solidFill>
+                  <a:schemeClr val="bg1"/>
+                </a:solidFill>
+                <a:effectLst/>
+                <a:latin typeface="Arial" panose="020B0604020202020204" pitchFamily="34" charset="0"/>
+              </a:rPr>
+              <a:t>て</a:t>
+            </a:r>
+            <a:r>
+              <a:rPr kumimoji="0" lang="ja-JP" altLang="ja-JP" sz="2800" b="0" i="0" u="none" strike="noStrike" cap="none" normalizeH="0" baseline="0" dirty="0">
+                <a:ln>
+                  <a:noFill/>
+                </a:ln>
+                <a:solidFill>
+                  <a:schemeClr val="bg1"/>
+                </a:solidFill>
+                <a:effectLst/>
+                <a:latin typeface="Arial" panose="020B0604020202020204" pitchFamily="34" charset="0"/>
+              </a:rPr>
+              <a:t>GPU転送が</a:t>
+            </a:r>
+            <a:r>
+              <a:rPr kumimoji="0" lang="ja-JP" altLang="en-US" sz="2800" b="0" i="0" u="none" strike="noStrike" cap="none" normalizeH="0" baseline="0" dirty="0">
+                <a:ln>
+                  <a:noFill/>
+                </a:ln>
+                <a:solidFill>
+                  <a:schemeClr val="bg1"/>
+                </a:solidFill>
+                <a:effectLst/>
+                <a:latin typeface="Arial" panose="020B0604020202020204" pitchFamily="34" charset="0"/>
+              </a:rPr>
+              <a:t>行えない</a:t>
+            </a:r>
+            <a:endParaRPr kumimoji="0" lang="ja-JP" altLang="ja-JP" sz="2800" b="0" i="0" u="none" strike="noStrike" cap="none" normalizeH="0" baseline="0" dirty="0">
+              <a:ln>
+                <a:noFill/>
+              </a:ln>
+              <a:solidFill>
+                <a:schemeClr val="bg1"/>
+              </a:solidFill>
+              <a:effectLst/>
+              <a:latin typeface="Arial" panose="020B0604020202020204" pitchFamily="34" charset="0"/>
+            </a:endParaRPr>
+          </a:p>
+          <a:p>
+            <a:pPr marL="0" marR="0" lvl="0" indent="0" algn="l" defTabSz="914400" rtl="0" eaLnBrk="0" fontAlgn="base" latinLnBrk="0" hangingPunct="0">
+              <a:lnSpc>
+                <a:spcPct val="100000"/>
+              </a:lnSpc>
+              <a:spcBef>
+                <a:spcPct val="0"/>
+              </a:spcBef>
+              <a:spcAft>
+                <a:spcPct val="0"/>
+              </a:spcAft>
+              <a:buClrTx/>
+              <a:buSzTx/>
+              <a:buFontTx/>
+              <a:buChar char="•"/>
+              <a:tabLst/>
+            </a:pPr>
+            <a:r>
+              <a:rPr kumimoji="0" lang="en-US" altLang="ja-JP" sz="2800" b="0" i="0" u="none" strike="noStrike" cap="none" normalizeH="0" baseline="0" dirty="0">
+                <a:ln>
+                  <a:noFill/>
+                </a:ln>
+                <a:solidFill>
+                  <a:schemeClr val="bg1"/>
+                </a:solidFill>
+                <a:effectLst/>
+                <a:latin typeface="Arial" panose="020B0604020202020204" pitchFamily="34" charset="0"/>
+              </a:rPr>
+              <a:t> </a:t>
+            </a:r>
+            <a:r>
+              <a:rPr kumimoji="0" lang="ja-JP" altLang="ja-JP" sz="2800" b="0" i="0" u="none" strike="noStrike" cap="none" normalizeH="0" baseline="0" dirty="0">
+                <a:ln>
+                  <a:noFill/>
+                </a:ln>
+                <a:solidFill>
+                  <a:schemeClr val="bg1"/>
+                </a:solidFill>
+                <a:effectLst/>
+                <a:latin typeface="Arial" panose="020B0604020202020204" pitchFamily="34" charset="0"/>
+              </a:rPr>
+              <a:t>作成と描画を兼任しており単一責任になっていない</a:t>
+            </a:r>
+          </a:p>
+          <a:p>
+            <a:pPr marL="0" marR="0" lvl="0" indent="0" algn="l" defTabSz="914400" rtl="0" eaLnBrk="0" fontAlgn="base" latinLnBrk="0" hangingPunct="0">
+              <a:lnSpc>
+                <a:spcPct val="100000"/>
+              </a:lnSpc>
+              <a:spcBef>
+                <a:spcPct val="0"/>
+              </a:spcBef>
+              <a:spcAft>
+                <a:spcPct val="0"/>
+              </a:spcAft>
+              <a:buClrTx/>
+              <a:buSzTx/>
+              <a:tabLst/>
+            </a:pPr>
+            <a:r>
+              <a:rPr lang="ja-JP" altLang="en-US" sz="2800" b="1" dirty="0">
+                <a:solidFill>
+                  <a:schemeClr val="tx1"/>
+                </a:solidFill>
+                <a:latin typeface="Arial" panose="020B0604020202020204" pitchFamily="34" charset="0"/>
+              </a:rPr>
+              <a:t>   </a:t>
+            </a:r>
+            <a:r>
+              <a:rPr kumimoji="0" lang="ja-JP" altLang="ja-JP" sz="2800" b="1" i="0" u="none" strike="noStrike" cap="none" normalizeH="0" baseline="0" dirty="0">
+                <a:ln>
+                  <a:noFill/>
+                </a:ln>
+                <a:solidFill>
+                  <a:srgbClr val="FF0000"/>
+                </a:solidFill>
+                <a:effectLst/>
+                <a:latin typeface="Arial" panose="020B0604020202020204" pitchFamily="34" charset="0"/>
+              </a:rPr>
+              <a:t>→</a:t>
+            </a:r>
+            <a:r>
+              <a:rPr kumimoji="0" lang="ja-JP" altLang="ja-JP" sz="2800" b="1" i="0" u="none" strike="noStrike" cap="none" normalizeH="0" baseline="0" dirty="0">
+                <a:ln>
+                  <a:noFill/>
+                </a:ln>
+                <a:solidFill>
+                  <a:schemeClr val="tx1"/>
+                </a:solidFill>
+                <a:effectLst/>
+                <a:latin typeface="Arial" panose="020B0604020202020204" pitchFamily="34" charset="0"/>
+              </a:rPr>
+              <a:t> </a:t>
+            </a:r>
+            <a:r>
+              <a:rPr kumimoji="0" lang="ja-JP" altLang="ja-JP" sz="2800" b="1" i="0" u="sng" strike="noStrike" cap="none" normalizeH="0" baseline="0" dirty="0">
+                <a:ln>
+                  <a:noFill/>
+                </a:ln>
+                <a:solidFill>
+                  <a:srgbClr val="FF0000"/>
+                </a:solidFill>
+                <a:effectLst/>
+                <a:latin typeface="Arial" panose="020B0604020202020204" pitchFamily="34" charset="0"/>
+              </a:rPr>
+              <a:t>描画コマンドリスト方式で解決予定</a:t>
+            </a:r>
+            <a:endParaRPr kumimoji="0" lang="ja-JP" altLang="ja-JP" sz="2800" b="0" i="0" u="sng" strike="noStrike" cap="none" normalizeH="0" baseline="0" dirty="0">
+              <a:ln>
+                <a:noFill/>
+              </a:ln>
+              <a:solidFill>
+                <a:srgbClr val="FF0000"/>
+              </a:solidFill>
+              <a:effectLst/>
+              <a:latin typeface="Arial" panose="020B0604020202020204" pitchFamily="34" charset="0"/>
+            </a:endParaRPr>
+          </a:p>
+        </p:txBody>
+      </p:sp>
+      <p:sp>
+        <p:nvSpPr>
+          <p:cNvPr id="3" name="テキスト ボックス 2">
+            <a:extLst>
+              <a:ext uri="{FF2B5EF4-FFF2-40B4-BE49-F238E27FC236}">
+                <a16:creationId xmlns:a16="http://schemas.microsoft.com/office/drawing/2014/main" id="{D5E8B5C8-1559-F56D-8159-A0FBF5C99E58}"/>
+              </a:ext>
+            </a:extLst>
+          </p:cNvPr>
+          <p:cNvSpPr txBox="1"/>
+          <p:nvPr/>
+        </p:nvSpPr>
+        <p:spPr>
+          <a:xfrm>
+            <a:off x="371168" y="4629971"/>
+            <a:ext cx="1973826" cy="584775"/>
+          </a:xfrm>
+          <a:prstGeom prst="rect">
+            <a:avLst/>
+          </a:prstGeom>
+          <a:noFill/>
+          <a:ln w="19050">
+            <a:solidFill>
+              <a:schemeClr val="bg1"/>
+            </a:solidFill>
+          </a:ln>
+        </p:spPr>
+        <p:txBody>
+          <a:bodyPr wrap="square" rtlCol="0">
+            <a:spAutoFit/>
+          </a:bodyPr>
+          <a:lstStyle/>
+          <a:p>
+            <a:pPr algn="l"/>
+            <a:r>
+              <a:rPr kumimoji="1" lang="ja-JP" altLang="en-US" sz="3200" dirty="0">
+                <a:solidFill>
+                  <a:schemeClr val="bg1"/>
+                </a:solidFill>
+              </a:rPr>
+              <a:t>入力情報</a:t>
+            </a:r>
+          </a:p>
+        </p:txBody>
+      </p:sp>
+      <p:sp>
+        <p:nvSpPr>
+          <p:cNvPr id="4" name="テキスト ボックス 3">
+            <a:extLst>
+              <a:ext uri="{FF2B5EF4-FFF2-40B4-BE49-F238E27FC236}">
+                <a16:creationId xmlns:a16="http://schemas.microsoft.com/office/drawing/2014/main" id="{96FBA82A-5A07-D216-661B-1270A38C75D8}"/>
+              </a:ext>
+            </a:extLst>
+          </p:cNvPr>
+          <p:cNvSpPr txBox="1"/>
+          <p:nvPr/>
+        </p:nvSpPr>
+        <p:spPr>
+          <a:xfrm>
+            <a:off x="371168" y="5199356"/>
+            <a:ext cx="11135032" cy="954107"/>
+          </a:xfrm>
+          <a:prstGeom prst="rect">
+            <a:avLst/>
+          </a:prstGeom>
+          <a:noFill/>
+          <a:ln>
+            <a:noFill/>
+          </a:ln>
+        </p:spPr>
+        <p:txBody>
+          <a:bodyPr wrap="square" rtlCol="0">
+            <a:spAutoFit/>
+          </a:bodyPr>
+          <a:lstStyle/>
+          <a:p>
+            <a:pPr marL="0" marR="0" lvl="0" indent="0" algn="l" defTabSz="914400" rtl="0" eaLnBrk="0" fontAlgn="base" latinLnBrk="0" hangingPunct="0">
+              <a:lnSpc>
+                <a:spcPct val="100000"/>
+              </a:lnSpc>
+              <a:spcBef>
+                <a:spcPct val="0"/>
+              </a:spcBef>
+              <a:spcAft>
+                <a:spcPct val="0"/>
+              </a:spcAft>
+              <a:buClrTx/>
+              <a:buSzTx/>
+              <a:buFontTx/>
+              <a:buChar char="•"/>
+              <a:tabLst/>
+            </a:pPr>
+            <a:r>
+              <a:rPr kumimoji="0" lang="ja-JP" altLang="en-US" sz="2800" b="0" i="0" u="none" strike="noStrike" cap="none" normalizeH="0" baseline="0" dirty="0">
+                <a:ln>
+                  <a:noFill/>
+                </a:ln>
+                <a:solidFill>
+                  <a:schemeClr val="bg1"/>
+                </a:solidFill>
+                <a:effectLst/>
+                <a:latin typeface="Arial" panose="020B0604020202020204" pitchFamily="34" charset="0"/>
+              </a:rPr>
+              <a:t> マウスとキーボードの入力しか今のままでは取れず、拡張性が低い</a:t>
+            </a:r>
+            <a:endParaRPr kumimoji="0" lang="en-US" altLang="ja-JP" sz="2800" b="0" i="0" u="none" strike="noStrike" cap="none" normalizeH="0" baseline="0" dirty="0">
+              <a:ln>
+                <a:noFill/>
+              </a:ln>
+              <a:solidFill>
+                <a:schemeClr val="bg1"/>
+              </a:solidFill>
+              <a:effectLst/>
+              <a:latin typeface="Arial" panose="020B0604020202020204" pitchFamily="34" charset="0"/>
+            </a:endParaRPr>
+          </a:p>
+          <a:p>
+            <a:pPr marL="0" marR="0" lvl="0" indent="0" algn="l" defTabSz="914400" rtl="0" eaLnBrk="0" fontAlgn="base" latinLnBrk="0" hangingPunct="0">
+              <a:lnSpc>
+                <a:spcPct val="100000"/>
+              </a:lnSpc>
+              <a:spcBef>
+                <a:spcPct val="0"/>
+              </a:spcBef>
+              <a:spcAft>
+                <a:spcPct val="0"/>
+              </a:spcAft>
+              <a:buClrTx/>
+              <a:buSzTx/>
+              <a:tabLst/>
+            </a:pPr>
+            <a:r>
+              <a:rPr lang="ja-JP" altLang="en-US" sz="2800" dirty="0">
+                <a:solidFill>
+                  <a:schemeClr val="bg1"/>
+                </a:solidFill>
+                <a:latin typeface="Arial" panose="020B0604020202020204" pitchFamily="34" charset="0"/>
+              </a:rPr>
+              <a:t>　</a:t>
+            </a:r>
+            <a:r>
+              <a:rPr lang="ja-JP" altLang="en-US" sz="2800" dirty="0">
+                <a:solidFill>
+                  <a:srgbClr val="FF0000"/>
+                </a:solidFill>
+                <a:latin typeface="Arial" panose="020B0604020202020204" pitchFamily="34" charset="0"/>
+              </a:rPr>
+              <a:t>→ </a:t>
+            </a:r>
+            <a:r>
+              <a:rPr kumimoji="0" lang="ja-JP" altLang="ja-JP" sz="2800" b="0" i="0" u="sng" strike="noStrike" cap="none" normalizeH="0" baseline="0" dirty="0">
+                <a:ln>
+                  <a:noFill/>
+                </a:ln>
+                <a:solidFill>
+                  <a:srgbClr val="FF0000"/>
+                </a:solidFill>
+                <a:effectLst/>
+                <a:latin typeface="Arial" panose="020B0604020202020204" pitchFamily="34" charset="0"/>
+              </a:rPr>
+              <a:t>プラットフォーム層で入力をアクション</a:t>
+            </a:r>
+            <a:r>
+              <a:rPr kumimoji="0" lang="en-US" altLang="ja-JP" sz="2800" b="0" i="0" u="sng" strike="noStrike" cap="none" normalizeH="0" baseline="0" dirty="0">
+                <a:ln>
+                  <a:noFill/>
+                </a:ln>
+                <a:solidFill>
+                  <a:srgbClr val="FF0000"/>
+                </a:solidFill>
+                <a:effectLst/>
+                <a:latin typeface="Arial" panose="020B0604020202020204" pitchFamily="34" charset="0"/>
+              </a:rPr>
+              <a:t>(</a:t>
+            </a:r>
+            <a:r>
+              <a:rPr kumimoji="0" lang="ja-JP" altLang="ja-JP" sz="2800" b="0" i="0" u="sng" strike="noStrike" cap="none" normalizeH="0" baseline="0" dirty="0">
+                <a:ln>
+                  <a:noFill/>
+                </a:ln>
+                <a:solidFill>
+                  <a:srgbClr val="FF0000"/>
+                </a:solidFill>
+                <a:effectLst/>
+                <a:latin typeface="Arial" panose="020B0604020202020204" pitchFamily="34" charset="0"/>
+              </a:rPr>
+              <a:t>意図</a:t>
+            </a:r>
+            <a:r>
+              <a:rPr kumimoji="0" lang="en-US" altLang="ja-JP" sz="2800" b="0" i="0" u="sng" strike="noStrike" cap="none" normalizeH="0" baseline="0" dirty="0">
+                <a:ln>
+                  <a:noFill/>
+                </a:ln>
+                <a:solidFill>
+                  <a:srgbClr val="FF0000"/>
+                </a:solidFill>
+                <a:effectLst/>
+                <a:latin typeface="Arial" panose="020B0604020202020204" pitchFamily="34" charset="0"/>
+              </a:rPr>
+              <a:t>)</a:t>
+            </a:r>
+            <a:r>
+              <a:rPr kumimoji="0" lang="ja-JP" altLang="ja-JP" sz="2800" b="0" i="0" u="sng" strike="noStrike" cap="none" normalizeH="0" baseline="0" dirty="0">
+                <a:ln>
+                  <a:noFill/>
+                </a:ln>
+                <a:solidFill>
+                  <a:srgbClr val="FF0000"/>
+                </a:solidFill>
+                <a:effectLst/>
+                <a:latin typeface="Arial" panose="020B0604020202020204" pitchFamily="34" charset="0"/>
+              </a:rPr>
+              <a:t>へ変換</a:t>
+            </a:r>
+            <a:endParaRPr kumimoji="0" lang="en-US" altLang="ja-JP" sz="2800" b="0" i="0" u="sng" strike="noStrike" cap="none" normalizeH="0" baseline="0" dirty="0">
+              <a:ln>
+                <a:noFill/>
+              </a:ln>
+              <a:solidFill>
+                <a:srgbClr val="FF0000"/>
+              </a:solidFill>
+              <a:effectLst/>
+              <a:latin typeface="Arial" panose="020B0604020202020204" pitchFamily="34" charset="0"/>
+            </a:endParaRPr>
+          </a:p>
+        </p:txBody>
+      </p:sp>
+    </p:spTree>
+    <p:extLst>
+      <p:ext uri="{BB962C8B-B14F-4D97-AF65-F5344CB8AC3E}">
+        <p14:creationId xmlns:p14="http://schemas.microsoft.com/office/powerpoint/2010/main" val="2142884083"/>
+      </p:ext>
+    </p:extLst>
+  </p:cSld>
+  <p:clrMapOvr>
+    <a:masterClrMapping/>
+  </p:clrMapOvr>
+</p:sld>
+</file>
+
 <file path=ppt/slides/slide2.xml><?xml version="1.0" encoding="utf-8"?>
 <p:sld xmlns:a="http://schemas.openxmlformats.org/drawingml/2006/main" xmlns:r="http://schemas.openxmlformats.org/officeDocument/2006/relationships" xmlns:p="http://schemas.openxmlformats.org/presentationml/2006/main">
   <p:cSld>
@@ -3548,6 +4904,555 @@
         <p:cNvPr id="1" name="">
           <a:extLst>
             <a:ext uri="{FF2B5EF4-FFF2-40B4-BE49-F238E27FC236}">
+              <a16:creationId xmlns:a16="http://schemas.microsoft.com/office/drawing/2014/main" id="{370C1AA3-519A-9260-0D1B-D5D46C3E3E48}"/>
+            </a:ext>
+          </a:extLst>
+        </p:cNvPr>
+        <p:cNvGrpSpPr/>
+        <p:nvPr/>
+      </p:nvGrpSpPr>
+      <p:grpSpPr>
+        <a:xfrm>
+          <a:off x="0" y="0"/>
+          <a:ext cx="0" cy="0"/>
+          <a:chOff x="0" y="0"/>
+          <a:chExt cx="0" cy="0"/>
+        </a:xfrm>
+      </p:grpSpPr>
+      <p:sp>
+        <p:nvSpPr>
+          <p:cNvPr id="2" name="タイトル 1">
+            <a:extLst>
+              <a:ext uri="{FF2B5EF4-FFF2-40B4-BE49-F238E27FC236}">
+                <a16:creationId xmlns:a16="http://schemas.microsoft.com/office/drawing/2014/main" id="{9A6CC34D-930C-01B7-5991-EE45DAB865D6}"/>
+              </a:ext>
+            </a:extLst>
+          </p:cNvPr>
+          <p:cNvSpPr>
+            <a:spLocks noGrp="1"/>
+          </p:cNvSpPr>
+          <p:nvPr>
+            <p:ph type="title"/>
+          </p:nvPr>
+        </p:nvSpPr>
+        <p:spPr>
+          <a:xfrm>
+            <a:off x="371168" y="390833"/>
+            <a:ext cx="7706032" cy="923330"/>
+          </a:xfrm>
+        </p:spPr>
+        <p:txBody>
+          <a:bodyPr/>
+          <a:lstStyle/>
+          <a:p>
+            <a:r>
+              <a:rPr kumimoji="1" lang="ja-JP" altLang="en-US" sz="6000" dirty="0"/>
+              <a:t>コンセプト実現に向けて</a:t>
+            </a:r>
+          </a:p>
+        </p:txBody>
+      </p:sp>
+      <p:sp>
+        <p:nvSpPr>
+          <p:cNvPr id="7" name="テキスト ボックス 6">
+            <a:extLst>
+              <a:ext uri="{FF2B5EF4-FFF2-40B4-BE49-F238E27FC236}">
+                <a16:creationId xmlns:a16="http://schemas.microsoft.com/office/drawing/2014/main" id="{48DB896E-E113-A94D-1526-CC9F9C2BA603}"/>
+              </a:ext>
+            </a:extLst>
+          </p:cNvPr>
+          <p:cNvSpPr txBox="1"/>
+          <p:nvPr/>
+        </p:nvSpPr>
+        <p:spPr>
+          <a:xfrm>
+            <a:off x="371168" y="1670339"/>
+            <a:ext cx="3134032" cy="584775"/>
+          </a:xfrm>
+          <a:prstGeom prst="rect">
+            <a:avLst/>
+          </a:prstGeom>
+          <a:noFill/>
+          <a:ln w="19050">
+            <a:solidFill>
+              <a:schemeClr val="bg1"/>
+            </a:solidFill>
+          </a:ln>
+        </p:spPr>
+        <p:txBody>
+          <a:bodyPr wrap="square" rtlCol="0">
+            <a:spAutoFit/>
+          </a:bodyPr>
+          <a:lstStyle/>
+          <a:p>
+            <a:pPr algn="l"/>
+            <a:r>
+              <a:rPr kumimoji="1" lang="ja-JP" altLang="en-US" sz="3200" b="1" dirty="0">
+                <a:solidFill>
+                  <a:schemeClr val="bg1"/>
+                </a:solidFill>
+              </a:rPr>
+              <a:t>数学ライブラリ</a:t>
+            </a:r>
+          </a:p>
+        </p:txBody>
+      </p:sp>
+      <p:sp>
+        <p:nvSpPr>
+          <p:cNvPr id="9" name="テキスト ボックス 8">
+            <a:extLst>
+              <a:ext uri="{FF2B5EF4-FFF2-40B4-BE49-F238E27FC236}">
+                <a16:creationId xmlns:a16="http://schemas.microsoft.com/office/drawing/2014/main" id="{BBCACBDA-B786-06A1-2B2F-950A99F09582}"/>
+              </a:ext>
+            </a:extLst>
+          </p:cNvPr>
+          <p:cNvSpPr txBox="1"/>
+          <p:nvPr/>
+        </p:nvSpPr>
+        <p:spPr>
+          <a:xfrm>
+            <a:off x="371168" y="2255114"/>
+            <a:ext cx="10754032" cy="2593980"/>
+          </a:xfrm>
+          <a:prstGeom prst="rect">
+            <a:avLst/>
+          </a:prstGeom>
+          <a:noFill/>
+          <a:ln>
+            <a:noFill/>
+          </a:ln>
+        </p:spPr>
+        <p:txBody>
+          <a:bodyPr wrap="square" rtlCol="0">
+            <a:spAutoFit/>
+          </a:bodyPr>
+          <a:lstStyle/>
+          <a:p>
+            <a:pPr marL="0" marR="0" lvl="0" indent="0" algn="l" defTabSz="914400" rtl="0" eaLnBrk="0" fontAlgn="base" latinLnBrk="0" hangingPunct="0">
+              <a:lnSpc>
+                <a:spcPct val="150000"/>
+              </a:lnSpc>
+              <a:spcBef>
+                <a:spcPct val="0"/>
+              </a:spcBef>
+              <a:spcAft>
+                <a:spcPct val="0"/>
+              </a:spcAft>
+              <a:buClrTx/>
+              <a:buSzTx/>
+              <a:buFontTx/>
+              <a:buChar char="•"/>
+              <a:tabLst/>
+            </a:pPr>
+            <a:r>
+              <a:rPr kumimoji="0" lang="en-US" altLang="ja-JP" sz="2800" b="1" i="0" strike="noStrike" cap="none" normalizeH="0" baseline="0" dirty="0">
+                <a:ln>
+                  <a:noFill/>
+                </a:ln>
+                <a:solidFill>
+                  <a:srgbClr val="FF0000"/>
+                </a:solidFill>
+                <a:effectLst/>
+                <a:latin typeface="Arial" panose="020B0604020202020204" pitchFamily="34" charset="0"/>
+              </a:rPr>
+              <a:t> </a:t>
+            </a:r>
+            <a:r>
+              <a:rPr kumimoji="0" lang="ja-JP" altLang="ja-JP" sz="2800" b="1" i="0" u="sng" strike="noStrike" cap="none" normalizeH="0" baseline="0" dirty="0">
+                <a:ln>
+                  <a:noFill/>
+                </a:ln>
+                <a:solidFill>
+                  <a:srgbClr val="FF0000"/>
+                </a:solidFill>
+                <a:effectLst/>
+                <a:latin typeface="Arial" panose="020B0604020202020204" pitchFamily="34" charset="0"/>
+              </a:rPr>
+              <a:t>数学・文字列ライブラリを自作し差異を吸収</a:t>
+            </a:r>
+          </a:p>
+          <a:p>
+            <a:pPr marL="0" marR="0" lvl="0" indent="0" algn="l" defTabSz="914400" rtl="0" eaLnBrk="0" fontAlgn="base" latinLnBrk="0" hangingPunct="0">
+              <a:lnSpc>
+                <a:spcPct val="150000"/>
+              </a:lnSpc>
+              <a:spcBef>
+                <a:spcPct val="0"/>
+              </a:spcBef>
+              <a:spcAft>
+                <a:spcPct val="0"/>
+              </a:spcAft>
+              <a:buClrTx/>
+              <a:buSzTx/>
+              <a:buFontTx/>
+              <a:buChar char="•"/>
+              <a:tabLst/>
+            </a:pPr>
+            <a:r>
+              <a:rPr kumimoji="0" lang="en-US" altLang="ja-JP" sz="2800" b="1" i="0" strike="noStrike" cap="none" normalizeH="0" baseline="0" dirty="0">
+                <a:ln>
+                  <a:noFill/>
+                </a:ln>
+                <a:solidFill>
+                  <a:srgbClr val="FF0000"/>
+                </a:solidFill>
+                <a:effectLst/>
+                <a:latin typeface="Arial" panose="020B0604020202020204" pitchFamily="34" charset="0"/>
+              </a:rPr>
+              <a:t> </a:t>
+            </a:r>
+            <a:r>
+              <a:rPr kumimoji="0" lang="ja-JP" altLang="ja-JP" sz="2800" b="1" i="0" u="sng" strike="noStrike" cap="none" normalizeH="0" baseline="0" dirty="0">
+                <a:ln>
+                  <a:noFill/>
+                </a:ln>
+                <a:solidFill>
+                  <a:srgbClr val="FF0000"/>
+                </a:solidFill>
+                <a:effectLst/>
+                <a:latin typeface="Arial" panose="020B0604020202020204" pitchFamily="34" charset="0"/>
+              </a:rPr>
+              <a:t>数学処理は</a:t>
+            </a:r>
+            <a:r>
+              <a:rPr kumimoji="0" lang="ja-JP" altLang="en-US" sz="2800" b="1" i="0" u="sng" strike="noStrike" cap="none" normalizeH="0" baseline="0" dirty="0">
+                <a:ln>
+                  <a:noFill/>
+                </a:ln>
+                <a:solidFill>
+                  <a:srgbClr val="FF0000"/>
+                </a:solidFill>
+                <a:effectLst/>
+                <a:latin typeface="Arial" panose="020B0604020202020204" pitchFamily="34" charset="0"/>
+              </a:rPr>
+              <a:t>計算関数内を</a:t>
+            </a:r>
+            <a:r>
+              <a:rPr kumimoji="0" lang="en-US" altLang="ja-JP" sz="2800" b="1" i="0" u="sng" strike="noStrike" cap="none" normalizeH="0" baseline="0" dirty="0">
+                <a:ln>
+                  <a:noFill/>
+                </a:ln>
+                <a:solidFill>
+                  <a:srgbClr val="FF0000"/>
+                </a:solidFill>
+                <a:effectLst/>
+                <a:latin typeface="Arial" panose="020B0604020202020204" pitchFamily="34" charset="0"/>
+              </a:rPr>
+              <a:t>API</a:t>
+            </a:r>
+            <a:r>
+              <a:rPr kumimoji="0" lang="ja-JP" altLang="en-US" sz="2800" b="1" i="0" u="sng" strike="noStrike" cap="none" normalizeH="0" baseline="0" dirty="0">
+                <a:ln>
+                  <a:noFill/>
+                </a:ln>
+                <a:solidFill>
+                  <a:srgbClr val="FF0000"/>
+                </a:solidFill>
+                <a:effectLst/>
+                <a:latin typeface="Arial" panose="020B0604020202020204" pitchFamily="34" charset="0"/>
+              </a:rPr>
+              <a:t>依存のものを使用して最適化</a:t>
+            </a:r>
+            <a:endParaRPr kumimoji="0" lang="ja-JP" altLang="ja-JP" sz="2800" b="1" i="0" u="sng" strike="noStrike" cap="none" normalizeH="0" baseline="0" dirty="0">
+              <a:ln>
+                <a:noFill/>
+              </a:ln>
+              <a:solidFill>
+                <a:srgbClr val="FF0000"/>
+              </a:solidFill>
+              <a:effectLst/>
+              <a:latin typeface="Arial" panose="020B0604020202020204" pitchFamily="34" charset="0"/>
+            </a:endParaRPr>
+          </a:p>
+          <a:p>
+            <a:pPr marL="0" marR="0" lvl="0" indent="0" algn="l" defTabSz="914400" rtl="0" eaLnBrk="0" fontAlgn="base" latinLnBrk="0" hangingPunct="0">
+              <a:lnSpc>
+                <a:spcPct val="150000"/>
+              </a:lnSpc>
+              <a:spcBef>
+                <a:spcPct val="0"/>
+              </a:spcBef>
+              <a:spcAft>
+                <a:spcPct val="0"/>
+              </a:spcAft>
+              <a:buClrTx/>
+              <a:buSzTx/>
+              <a:buFontTx/>
+              <a:buChar char="•"/>
+              <a:tabLst/>
+            </a:pPr>
+            <a:r>
+              <a:rPr kumimoji="0" lang="en-US" altLang="ja-JP" sz="2800" b="1" i="0" strike="noStrike" cap="none" normalizeH="0" baseline="0" dirty="0">
+                <a:ln>
+                  <a:noFill/>
+                </a:ln>
+                <a:solidFill>
+                  <a:srgbClr val="FF0000"/>
+                </a:solidFill>
+                <a:effectLst/>
+                <a:latin typeface="Arial" panose="020B0604020202020204" pitchFamily="34" charset="0"/>
+              </a:rPr>
+              <a:t> </a:t>
+            </a:r>
+            <a:r>
+              <a:rPr kumimoji="0" lang="ja-JP" altLang="ja-JP" sz="2800" b="1" i="0" u="sng" strike="noStrike" cap="none" normalizeH="0" baseline="0" dirty="0">
+                <a:ln>
+                  <a:noFill/>
+                </a:ln>
+                <a:solidFill>
+                  <a:srgbClr val="FF0000"/>
+                </a:solidFill>
+                <a:effectLst/>
+                <a:latin typeface="Arial" panose="020B0604020202020204" pitchFamily="34" charset="0"/>
+              </a:rPr>
+              <a:t>文字列は UTF-8 に統一</a:t>
+            </a:r>
+          </a:p>
+          <a:p>
+            <a:pPr marL="0" marR="0" lvl="0" indent="0" algn="l" defTabSz="914400" rtl="0" eaLnBrk="0" fontAlgn="base" latinLnBrk="0" hangingPunct="0">
+              <a:lnSpc>
+                <a:spcPct val="150000"/>
+              </a:lnSpc>
+              <a:spcBef>
+                <a:spcPct val="0"/>
+              </a:spcBef>
+              <a:spcAft>
+                <a:spcPct val="0"/>
+              </a:spcAft>
+              <a:buClrTx/>
+              <a:buSzTx/>
+              <a:buFontTx/>
+              <a:buChar char="•"/>
+              <a:tabLst/>
+            </a:pPr>
+            <a:r>
+              <a:rPr kumimoji="0" lang="en-US" altLang="ja-JP" sz="2800" b="1" strike="noStrike" cap="none" normalizeH="0" baseline="0" dirty="0">
+                <a:ln>
+                  <a:noFill/>
+                </a:ln>
+                <a:solidFill>
+                  <a:srgbClr val="FF0000"/>
+                </a:solidFill>
+                <a:effectLst/>
+                <a:latin typeface="Arial" panose="020B0604020202020204" pitchFamily="34" charset="0"/>
+              </a:rPr>
+              <a:t> </a:t>
+            </a:r>
+            <a:r>
+              <a:rPr kumimoji="0" lang="ja-JP" altLang="ja-JP" sz="2800" b="1" i="0" u="sng" strike="noStrike" cap="none" normalizeH="0" baseline="0" dirty="0">
+                <a:ln>
+                  <a:noFill/>
+                </a:ln>
+                <a:solidFill>
+                  <a:srgbClr val="FF0000"/>
+                </a:solidFill>
+                <a:effectLst/>
+                <a:latin typeface="Arial" panose="020B0604020202020204" pitchFamily="34" charset="0"/>
+              </a:rPr>
+              <a:t>行列</a:t>
+            </a:r>
+            <a:r>
+              <a:rPr kumimoji="0" lang="ja-JP" altLang="en-US" sz="2800" b="1" i="0" u="sng" strike="noStrike" cap="none" normalizeH="0" baseline="0" dirty="0">
+                <a:ln>
+                  <a:noFill/>
+                </a:ln>
+                <a:solidFill>
+                  <a:srgbClr val="FF0000"/>
+                </a:solidFill>
+                <a:effectLst/>
+                <a:latin typeface="Arial" panose="020B0604020202020204" pitchFamily="34" charset="0"/>
+              </a:rPr>
+              <a:t>ルールを</a:t>
+            </a:r>
+            <a:r>
+              <a:rPr kumimoji="0" lang="ja-JP" altLang="ja-JP" sz="2800" b="1" i="0" u="sng" strike="noStrike" cap="none" normalizeH="0" baseline="0" dirty="0">
+                <a:ln>
+                  <a:noFill/>
+                </a:ln>
+                <a:solidFill>
+                  <a:srgbClr val="FF0000"/>
+                </a:solidFill>
+                <a:effectLst/>
+                <a:latin typeface="Arial" panose="020B0604020202020204" pitchFamily="34" charset="0"/>
+              </a:rPr>
+              <a:t>左手・列優先</a:t>
+            </a:r>
+            <a:r>
+              <a:rPr kumimoji="0" lang="en-US" altLang="ja-JP" sz="2800" b="1" i="0" u="sng" strike="noStrike" cap="none" normalizeH="0" baseline="0" dirty="0">
+                <a:ln>
+                  <a:noFill/>
+                </a:ln>
+                <a:solidFill>
+                  <a:srgbClr val="FF0000"/>
+                </a:solidFill>
+                <a:effectLst/>
+                <a:latin typeface="Arial" panose="020B0604020202020204" pitchFamily="34" charset="0"/>
+              </a:rPr>
+              <a:t>(</a:t>
+            </a:r>
+            <a:r>
+              <a:rPr kumimoji="0" lang="ja-JP" altLang="en-US" sz="2800" b="1" i="0" u="sng" strike="noStrike" cap="none" normalizeH="0" baseline="0" dirty="0">
+                <a:ln>
+                  <a:noFill/>
+                </a:ln>
+                <a:solidFill>
+                  <a:srgbClr val="FF0000"/>
+                </a:solidFill>
+                <a:effectLst/>
+                <a:latin typeface="Arial" panose="020B0604020202020204" pitchFamily="34" charset="0"/>
+              </a:rPr>
+              <a:t>列ベクトル</a:t>
+            </a:r>
+            <a:r>
+              <a:rPr kumimoji="0" lang="en-US" altLang="ja-JP" sz="2800" b="1" i="0" u="sng" strike="noStrike" cap="none" normalizeH="0" baseline="0" dirty="0">
+                <a:ln>
+                  <a:noFill/>
+                </a:ln>
+                <a:solidFill>
+                  <a:srgbClr val="FF0000"/>
+                </a:solidFill>
+                <a:effectLst/>
+                <a:latin typeface="Arial" panose="020B0604020202020204" pitchFamily="34" charset="0"/>
+              </a:rPr>
+              <a:t>)</a:t>
+            </a:r>
+            <a:r>
+              <a:rPr kumimoji="0" lang="ja-JP" altLang="en-US" sz="2800" b="1" i="0" u="sng" strike="noStrike" cap="none" normalizeH="0" baseline="0" dirty="0">
+                <a:ln>
+                  <a:noFill/>
+                </a:ln>
+                <a:solidFill>
+                  <a:srgbClr val="FF0000"/>
+                </a:solidFill>
+                <a:effectLst/>
+                <a:latin typeface="Arial" panose="020B0604020202020204" pitchFamily="34" charset="0"/>
+              </a:rPr>
+              <a:t>で決定</a:t>
+            </a:r>
+            <a:endParaRPr kumimoji="0" lang="ja-JP" altLang="ja-JP" sz="2800" b="1" i="0" u="sng" strike="noStrike" cap="none" normalizeH="0" baseline="0" dirty="0">
+              <a:ln>
+                <a:noFill/>
+              </a:ln>
+              <a:solidFill>
+                <a:srgbClr val="FF0000"/>
+              </a:solidFill>
+              <a:effectLst/>
+              <a:latin typeface="Arial" panose="020B0604020202020204" pitchFamily="34" charset="0"/>
+            </a:endParaRPr>
+          </a:p>
+        </p:txBody>
+      </p:sp>
+      <p:pic>
+        <p:nvPicPr>
+          <p:cNvPr id="5" name="図 4" descr="テキスト&#10;&#10;AI 生成コンテンツは誤りを含む可能性があります。">
+            <a:extLst>
+              <a:ext uri="{FF2B5EF4-FFF2-40B4-BE49-F238E27FC236}">
+                <a16:creationId xmlns:a16="http://schemas.microsoft.com/office/drawing/2014/main" id="{48766FDA-2376-B14F-F9FC-8FC373C51E13}"/>
+              </a:ext>
+            </a:extLst>
+          </p:cNvPr>
+          <p:cNvPicPr>
+            <a:picLocks noChangeAspect="1"/>
+          </p:cNvPicPr>
+          <p:nvPr/>
+        </p:nvPicPr>
+        <p:blipFill>
+          <a:blip r:embed="rId2"/>
+          <a:stretch>
+            <a:fillRect/>
+          </a:stretch>
+        </p:blipFill>
+        <p:spPr>
+          <a:xfrm>
+            <a:off x="9839632" y="142895"/>
+            <a:ext cx="1981200" cy="2597573"/>
+          </a:xfrm>
+          <a:prstGeom prst="rect">
+            <a:avLst/>
+          </a:prstGeom>
+        </p:spPr>
+      </p:pic>
+      <p:pic>
+        <p:nvPicPr>
+          <p:cNvPr id="8" name="図 7" descr="テキスト&#10;&#10;AI 生成コンテンツは誤りを含む可能性があります。">
+            <a:extLst>
+              <a:ext uri="{FF2B5EF4-FFF2-40B4-BE49-F238E27FC236}">
+                <a16:creationId xmlns:a16="http://schemas.microsoft.com/office/drawing/2014/main" id="{E6A71839-FB3B-0B2A-DF05-2F7D00725441}"/>
+              </a:ext>
+            </a:extLst>
+          </p:cNvPr>
+          <p:cNvPicPr>
+            <a:picLocks noChangeAspect="1"/>
+          </p:cNvPicPr>
+          <p:nvPr/>
+        </p:nvPicPr>
+        <p:blipFill>
+          <a:blip r:embed="rId3"/>
+          <a:stretch>
+            <a:fillRect/>
+          </a:stretch>
+        </p:blipFill>
+        <p:spPr>
+          <a:xfrm>
+            <a:off x="1964609" y="4869414"/>
+            <a:ext cx="2319184" cy="1926797"/>
+          </a:xfrm>
+          <a:prstGeom prst="rect">
+            <a:avLst/>
+          </a:prstGeom>
+        </p:spPr>
+      </p:pic>
+      <p:pic>
+        <p:nvPicPr>
+          <p:cNvPr id="11" name="図 10" descr="テキスト&#10;&#10;AI 生成コンテンツは誤りを含む可能性があります。">
+            <a:extLst>
+              <a:ext uri="{FF2B5EF4-FFF2-40B4-BE49-F238E27FC236}">
+                <a16:creationId xmlns:a16="http://schemas.microsoft.com/office/drawing/2014/main" id="{C8B781E0-4B59-E32B-9C85-287121A86A1C}"/>
+              </a:ext>
+            </a:extLst>
+          </p:cNvPr>
+          <p:cNvPicPr>
+            <a:picLocks noChangeAspect="1"/>
+          </p:cNvPicPr>
+          <p:nvPr/>
+        </p:nvPicPr>
+        <p:blipFill>
+          <a:blip r:embed="rId4"/>
+          <a:stretch>
+            <a:fillRect/>
+          </a:stretch>
+        </p:blipFill>
+        <p:spPr>
+          <a:xfrm>
+            <a:off x="9067800" y="4379556"/>
+            <a:ext cx="2819400" cy="2108626"/>
+          </a:xfrm>
+          <a:prstGeom prst="rect">
+            <a:avLst/>
+          </a:prstGeom>
+        </p:spPr>
+      </p:pic>
+    </p:spTree>
+    <p:extLst>
+      <p:ext uri="{BB962C8B-B14F-4D97-AF65-F5344CB8AC3E}">
+        <p14:creationId xmlns:p14="http://schemas.microsoft.com/office/powerpoint/2010/main" val="875634887"/>
+      </p:ext>
+    </p:extLst>
+  </p:cSld>
+  <p:clrMapOvr>
+    <a:masterClrMapping/>
+  </p:clrMapOvr>
+</p:sld>
+</file>
+
+<file path=ppt/slides/slide7.xml><?xml version="1.0" encoding="utf-8"?>
+<p:sld xmlns:a="http://schemas.openxmlformats.org/drawingml/2006/main" xmlns:r="http://schemas.openxmlformats.org/officeDocument/2006/relationships" xmlns:p="http://schemas.openxmlformats.org/presentationml/2006/main">
+  <p:cSld>
+    <p:spTree>
+      <p:nvGrpSpPr>
+        <p:cNvPr id="1" name="">
+          <a:extLst>
+            <a:ext uri="{FF2B5EF4-FFF2-40B4-BE49-F238E27FC236}">
               <a16:creationId xmlns:a16="http://schemas.microsoft.com/office/drawing/2014/main" id="{D272469C-9544-3EE0-2E53-A6F33783F7EE}"/>
             </a:ext>
           </a:extLst>
@@ -3924,7 +5829,7 @@
 </p:sld>
 </file>
 
-<file path=ppt/slides/slide7.xml><?xml version="1.0" encoding="utf-8"?>
+<file path=ppt/slides/slide8.xml><?xml version="1.0" encoding="utf-8"?>
 <p:sld xmlns:a="http://schemas.openxmlformats.org/drawingml/2006/main" xmlns:r="http://schemas.openxmlformats.org/officeDocument/2006/relationships" xmlns:p="http://schemas.openxmlformats.org/presentationml/2006/main">
   <p:cSld>
     <p:spTree>
@@ -4455,7 +6360,7 @@
 </p:sld>
 </file>
 
-<file path=ppt/slides/slide8.xml><?xml version="1.0" encoding="utf-8"?>
+<file path=ppt/slides/slide9.xml><?xml version="1.0" encoding="utf-8"?>
 <p:sld xmlns:a="http://schemas.openxmlformats.org/drawingml/2006/main" xmlns:r="http://schemas.openxmlformats.org/officeDocument/2006/relationships" xmlns:p="http://schemas.openxmlformats.org/presentationml/2006/main">
   <p:cSld>
     <p:spTree>
@@ -5053,747 +6958,6 @@
     <p:extLst>
       <p:ext uri="{BB962C8B-B14F-4D97-AF65-F5344CB8AC3E}">
         <p14:creationId xmlns:p14="http://schemas.microsoft.com/office/powerpoint/2010/main" val="1589482950"/>
-      </p:ext>
-    </p:extLst>
-  </p:cSld>
-  <p:clrMapOvr>
-    <a:masterClrMapping/>
-  </p:clrMapOvr>
-</p:sld>
-</file>
-
-<file path=ppt/slides/slide9.xml><?xml version="1.0" encoding="utf-8"?>
-<p:sld xmlns:a="http://schemas.openxmlformats.org/drawingml/2006/main" xmlns:r="http://schemas.openxmlformats.org/officeDocument/2006/relationships" xmlns:p="http://schemas.openxmlformats.org/presentationml/2006/main">
-  <p:cSld>
-    <p:spTree>
-      <p:nvGrpSpPr>
-        <p:cNvPr id="1" name="">
-          <a:extLst>
-            <a:ext uri="{FF2B5EF4-FFF2-40B4-BE49-F238E27FC236}">
-              <a16:creationId xmlns:a16="http://schemas.microsoft.com/office/drawing/2014/main" id="{5180B81A-2B52-A397-F013-E1D59C17A104}"/>
-            </a:ext>
-          </a:extLst>
-        </p:cNvPr>
-        <p:cNvGrpSpPr/>
-        <p:nvPr/>
-      </p:nvGrpSpPr>
-      <p:grpSpPr>
-        <a:xfrm>
-          <a:off x="0" y="0"/>
-          <a:ext cx="0" cy="0"/>
-          <a:chOff x="0" y="0"/>
-          <a:chExt cx="0" cy="0"/>
-        </a:xfrm>
-      </p:grpSpPr>
-      <p:sp>
-        <p:nvSpPr>
-          <p:cNvPr id="2" name="タイトル 1">
-            <a:extLst>
-              <a:ext uri="{FF2B5EF4-FFF2-40B4-BE49-F238E27FC236}">
-                <a16:creationId xmlns:a16="http://schemas.microsoft.com/office/drawing/2014/main" id="{491EDACF-D60C-FE19-77A7-71118ED88DD2}"/>
-              </a:ext>
-            </a:extLst>
-          </p:cNvPr>
-          <p:cNvSpPr>
-            <a:spLocks noGrp="1"/>
-          </p:cNvSpPr>
-          <p:nvPr>
-            <p:ph type="title"/>
-          </p:nvPr>
-        </p:nvSpPr>
-        <p:spPr>
-          <a:xfrm>
-            <a:off x="371168" y="390833"/>
-            <a:ext cx="7706032" cy="923330"/>
-          </a:xfrm>
-        </p:spPr>
-        <p:txBody>
-          <a:bodyPr/>
-          <a:lstStyle/>
-          <a:p>
-            <a:r>
-              <a:rPr kumimoji="1" lang="ja-JP" altLang="en-US" sz="6000" dirty="0"/>
-              <a:t>今後</a:t>
-            </a:r>
-          </a:p>
-        </p:txBody>
-      </p:sp>
-      <p:sp>
-        <p:nvSpPr>
-          <p:cNvPr id="7" name="テキスト ボックス 6">
-            <a:extLst>
-              <a:ext uri="{FF2B5EF4-FFF2-40B4-BE49-F238E27FC236}">
-                <a16:creationId xmlns:a16="http://schemas.microsoft.com/office/drawing/2014/main" id="{A370E018-015F-6D9B-6B02-3A8BADC61388}"/>
-              </a:ext>
-            </a:extLst>
-          </p:cNvPr>
-          <p:cNvSpPr txBox="1"/>
-          <p:nvPr/>
-        </p:nvSpPr>
-        <p:spPr>
-          <a:xfrm>
-            <a:off x="371168" y="1658644"/>
-            <a:ext cx="8849032" cy="584775"/>
-          </a:xfrm>
-          <a:prstGeom prst="rect">
-            <a:avLst/>
-          </a:prstGeom>
-          <a:noFill/>
-          <a:ln w="19050">
-            <a:solidFill>
-              <a:schemeClr val="bg1"/>
-            </a:solidFill>
-          </a:ln>
-        </p:spPr>
-        <p:txBody>
-          <a:bodyPr wrap="square" rtlCol="0">
-            <a:spAutoFit/>
-          </a:bodyPr>
-          <a:lstStyle/>
-          <a:p>
-            <a:pPr algn="l"/>
-            <a:r>
-              <a:rPr kumimoji="1" lang="ja-JP" altLang="en-US" sz="3200" dirty="0">
-                <a:solidFill>
-                  <a:schemeClr val="bg1"/>
-                </a:solidFill>
-              </a:rPr>
-              <a:t>キャッシュミス </a:t>
-            </a:r>
-            <a:r>
-              <a:rPr kumimoji="1" lang="en-US" altLang="ja-JP" sz="3200" dirty="0">
-                <a:solidFill>
-                  <a:schemeClr val="bg1"/>
-                </a:solidFill>
-              </a:rPr>
-              <a:t>: </a:t>
-            </a:r>
-            <a:r>
-              <a:rPr kumimoji="1" lang="ja-JP" altLang="en-US" sz="3200" dirty="0">
-                <a:solidFill>
-                  <a:schemeClr val="bg1"/>
-                </a:solidFill>
-              </a:rPr>
-              <a:t>描画マネージャーの単一責任</a:t>
-            </a:r>
-          </a:p>
-        </p:txBody>
-      </p:sp>
-      <p:sp>
-        <p:nvSpPr>
-          <p:cNvPr id="9" name="テキスト ボックス 8">
-            <a:extLst>
-              <a:ext uri="{FF2B5EF4-FFF2-40B4-BE49-F238E27FC236}">
-                <a16:creationId xmlns:a16="http://schemas.microsoft.com/office/drawing/2014/main" id="{64096C8E-2385-53F6-9578-C01DDB0C8B8C}"/>
-              </a:ext>
-            </a:extLst>
-          </p:cNvPr>
-          <p:cNvSpPr txBox="1"/>
-          <p:nvPr/>
-        </p:nvSpPr>
-        <p:spPr>
-          <a:xfrm>
-            <a:off x="371168" y="2243419"/>
-            <a:ext cx="11820832" cy="1815882"/>
-          </a:xfrm>
-          <a:prstGeom prst="rect">
-            <a:avLst/>
-          </a:prstGeom>
-          <a:noFill/>
-          <a:ln>
-            <a:noFill/>
-          </a:ln>
-        </p:spPr>
-        <p:txBody>
-          <a:bodyPr wrap="square" rtlCol="0">
-            <a:spAutoFit/>
-          </a:bodyPr>
-          <a:lstStyle/>
-          <a:p>
-            <a:pPr marL="0" marR="0" lvl="0" indent="0" algn="l" defTabSz="914400" rtl="0" eaLnBrk="0" fontAlgn="base" latinLnBrk="0" hangingPunct="0">
-              <a:lnSpc>
-                <a:spcPct val="100000"/>
-              </a:lnSpc>
-              <a:spcBef>
-                <a:spcPct val="0"/>
-              </a:spcBef>
-              <a:spcAft>
-                <a:spcPct val="0"/>
-              </a:spcAft>
-              <a:buClrTx/>
-              <a:buSzTx/>
-              <a:buFontTx/>
-              <a:buChar char="•"/>
-              <a:tabLst/>
-            </a:pPr>
-            <a:r>
-              <a:rPr kumimoji="0" lang="en-US" altLang="ja-JP" sz="2800" b="0" i="0" u="none" strike="noStrike" cap="none" normalizeH="0" baseline="0" dirty="0">
-                <a:ln>
-                  <a:noFill/>
-                </a:ln>
-                <a:solidFill>
-                  <a:schemeClr val="bg1"/>
-                </a:solidFill>
-                <a:effectLst/>
-                <a:latin typeface="Arial" panose="020B0604020202020204" pitchFamily="34" charset="0"/>
-              </a:rPr>
-              <a:t> </a:t>
-            </a:r>
-            <a:r>
-              <a:rPr kumimoji="0" lang="en-US" altLang="ja-JP" sz="2800" b="0" i="0" u="none" strike="noStrike" cap="none" normalizeH="0" baseline="0" dirty="0" err="1">
-                <a:ln>
-                  <a:noFill/>
-                </a:ln>
-                <a:solidFill>
-                  <a:schemeClr val="bg1"/>
-                </a:solidFill>
-                <a:effectLst/>
-                <a:latin typeface="Arial" panose="020B0604020202020204" pitchFamily="34" charset="0"/>
-              </a:rPr>
-              <a:t>Vtable</a:t>
-            </a:r>
-            <a:r>
-              <a:rPr kumimoji="0" lang="ja-JP" altLang="en-US" sz="2800" b="0" i="0" u="none" strike="noStrike" cap="none" normalizeH="0" baseline="0" dirty="0">
-                <a:ln>
-                  <a:noFill/>
-                </a:ln>
-                <a:solidFill>
-                  <a:schemeClr val="bg1"/>
-                </a:solidFill>
-                <a:effectLst/>
-                <a:latin typeface="Arial" panose="020B0604020202020204" pitchFamily="34" charset="0"/>
-              </a:rPr>
-              <a:t>参照</a:t>
-            </a:r>
-            <a:r>
-              <a:rPr kumimoji="0" lang="ja-JP" altLang="ja-JP" sz="2800" b="0" i="0" u="none" strike="noStrike" cap="none" normalizeH="0" baseline="0" dirty="0">
-                <a:ln>
-                  <a:noFill/>
-                </a:ln>
-                <a:solidFill>
-                  <a:schemeClr val="bg1"/>
-                </a:solidFill>
-                <a:effectLst/>
-                <a:latin typeface="Arial" panose="020B0604020202020204" pitchFamily="34" charset="0"/>
-              </a:rPr>
-              <a:t>で</a:t>
-            </a:r>
-            <a:r>
-              <a:rPr kumimoji="0" lang="ja-JP" altLang="en-US" sz="2800" b="0" i="0" u="none" strike="noStrike" cap="none" normalizeH="0" baseline="0" dirty="0">
-                <a:ln>
-                  <a:noFill/>
-                </a:ln>
-                <a:solidFill>
-                  <a:schemeClr val="bg1"/>
-                </a:solidFill>
-                <a:effectLst/>
-                <a:latin typeface="Arial" panose="020B0604020202020204" pitchFamily="34" charset="0"/>
-              </a:rPr>
-              <a:t>メモリ使用量が増えると</a:t>
-            </a:r>
-            <a:r>
-              <a:rPr kumimoji="0" lang="ja-JP" altLang="ja-JP" sz="2800" b="0" i="0" u="none" strike="noStrike" cap="none" normalizeH="0" baseline="0" dirty="0">
-                <a:ln>
-                  <a:noFill/>
-                </a:ln>
-                <a:solidFill>
-                  <a:schemeClr val="bg1"/>
-                </a:solidFill>
-                <a:effectLst/>
-                <a:latin typeface="Arial" panose="020B0604020202020204" pitchFamily="34" charset="0"/>
-              </a:rPr>
-              <a:t>キャッシュミスが</a:t>
-            </a:r>
-            <a:r>
-              <a:rPr lang="ja-JP" altLang="en-US" sz="2800" dirty="0">
-                <a:solidFill>
-                  <a:schemeClr val="bg1"/>
-                </a:solidFill>
-                <a:latin typeface="Arial" panose="020B0604020202020204" pitchFamily="34" charset="0"/>
-              </a:rPr>
-              <a:t>多く</a:t>
-            </a:r>
-            <a:r>
-              <a:rPr kumimoji="0" lang="ja-JP" altLang="ja-JP" sz="2800" b="0" i="0" u="none" strike="noStrike" cap="none" normalizeH="0" baseline="0" dirty="0">
-                <a:ln>
-                  <a:noFill/>
-                </a:ln>
-                <a:solidFill>
-                  <a:schemeClr val="bg1"/>
-                </a:solidFill>
-                <a:effectLst/>
-                <a:latin typeface="Arial" panose="020B0604020202020204" pitchFamily="34" charset="0"/>
-              </a:rPr>
-              <a:t>発生</a:t>
-            </a:r>
-            <a:r>
-              <a:rPr kumimoji="0" lang="ja-JP" altLang="en-US" sz="2800" b="0" i="0" u="none" strike="noStrike" cap="none" normalizeH="0" baseline="0" dirty="0">
-                <a:ln>
-                  <a:noFill/>
-                </a:ln>
-                <a:solidFill>
-                  <a:schemeClr val="bg1"/>
-                </a:solidFill>
-                <a:effectLst/>
-                <a:latin typeface="Arial" panose="020B0604020202020204" pitchFamily="34" charset="0"/>
-              </a:rPr>
-              <a:t>しそう</a:t>
-            </a:r>
-            <a:endParaRPr kumimoji="0" lang="ja-JP" altLang="ja-JP" sz="2800" b="0" i="0" u="none" strike="noStrike" cap="none" normalizeH="0" baseline="0" dirty="0">
-              <a:ln>
-                <a:noFill/>
-              </a:ln>
-              <a:solidFill>
-                <a:schemeClr val="bg1"/>
-              </a:solidFill>
-              <a:effectLst/>
-              <a:latin typeface="Arial" panose="020B0604020202020204" pitchFamily="34" charset="0"/>
-            </a:endParaRPr>
-          </a:p>
-          <a:p>
-            <a:pPr marL="0" marR="0" lvl="0" indent="0" algn="l" defTabSz="914400" rtl="0" eaLnBrk="0" fontAlgn="base" latinLnBrk="0" hangingPunct="0">
-              <a:lnSpc>
-                <a:spcPct val="100000"/>
-              </a:lnSpc>
-              <a:spcBef>
-                <a:spcPct val="0"/>
-              </a:spcBef>
-              <a:spcAft>
-                <a:spcPct val="0"/>
-              </a:spcAft>
-              <a:buClrTx/>
-              <a:buSzTx/>
-              <a:buFontTx/>
-              <a:buChar char="•"/>
-              <a:tabLst/>
-            </a:pPr>
-            <a:r>
-              <a:rPr kumimoji="0" lang="en-US" altLang="ja-JP" sz="2800" b="0" i="0" u="none" strike="noStrike" cap="none" normalizeH="0" baseline="0" dirty="0">
-                <a:ln>
-                  <a:noFill/>
-                </a:ln>
-                <a:solidFill>
-                  <a:schemeClr val="bg1"/>
-                </a:solidFill>
-                <a:effectLst/>
-                <a:latin typeface="Arial" panose="020B0604020202020204" pitchFamily="34" charset="0"/>
-              </a:rPr>
-              <a:t> </a:t>
-            </a:r>
-            <a:r>
-              <a:rPr kumimoji="0" lang="ja-JP" altLang="ja-JP" sz="2800" b="0" i="0" u="none" strike="noStrike" cap="none" normalizeH="0" baseline="0" dirty="0">
-                <a:ln>
-                  <a:noFill/>
-                </a:ln>
-                <a:solidFill>
-                  <a:schemeClr val="bg1"/>
-                </a:solidFill>
-                <a:effectLst/>
-                <a:latin typeface="Arial" panose="020B0604020202020204" pitchFamily="34" charset="0"/>
-              </a:rPr>
-              <a:t>複数テクスチャをまとめ</a:t>
-            </a:r>
-            <a:r>
-              <a:rPr kumimoji="0" lang="ja-JP" altLang="en-US" sz="2800" b="0" i="0" u="none" strike="noStrike" cap="none" normalizeH="0" baseline="0" dirty="0">
-                <a:ln>
-                  <a:noFill/>
-                </a:ln>
-                <a:solidFill>
-                  <a:schemeClr val="bg1"/>
-                </a:solidFill>
-                <a:effectLst/>
-                <a:latin typeface="Arial" panose="020B0604020202020204" pitchFamily="34" charset="0"/>
-              </a:rPr>
-              <a:t>て</a:t>
-            </a:r>
-            <a:r>
-              <a:rPr kumimoji="0" lang="ja-JP" altLang="ja-JP" sz="2800" b="0" i="0" u="none" strike="noStrike" cap="none" normalizeH="0" baseline="0" dirty="0">
-                <a:ln>
-                  <a:noFill/>
-                </a:ln>
-                <a:solidFill>
-                  <a:schemeClr val="bg1"/>
-                </a:solidFill>
-                <a:effectLst/>
-                <a:latin typeface="Arial" panose="020B0604020202020204" pitchFamily="34" charset="0"/>
-              </a:rPr>
-              <a:t>GPU転送が</a:t>
-            </a:r>
-            <a:r>
-              <a:rPr kumimoji="0" lang="ja-JP" altLang="en-US" sz="2800" b="0" i="0" u="none" strike="noStrike" cap="none" normalizeH="0" baseline="0" dirty="0">
-                <a:ln>
-                  <a:noFill/>
-                </a:ln>
-                <a:solidFill>
-                  <a:schemeClr val="bg1"/>
-                </a:solidFill>
-                <a:effectLst/>
-                <a:latin typeface="Arial" panose="020B0604020202020204" pitchFamily="34" charset="0"/>
-              </a:rPr>
-              <a:t>行えない</a:t>
-            </a:r>
-            <a:endParaRPr kumimoji="0" lang="ja-JP" altLang="ja-JP" sz="2800" b="0" i="0" u="none" strike="noStrike" cap="none" normalizeH="0" baseline="0" dirty="0">
-              <a:ln>
-                <a:noFill/>
-              </a:ln>
-              <a:solidFill>
-                <a:schemeClr val="bg1"/>
-              </a:solidFill>
-              <a:effectLst/>
-              <a:latin typeface="Arial" panose="020B0604020202020204" pitchFamily="34" charset="0"/>
-            </a:endParaRPr>
-          </a:p>
-          <a:p>
-            <a:pPr marL="0" marR="0" lvl="0" indent="0" algn="l" defTabSz="914400" rtl="0" eaLnBrk="0" fontAlgn="base" latinLnBrk="0" hangingPunct="0">
-              <a:lnSpc>
-                <a:spcPct val="100000"/>
-              </a:lnSpc>
-              <a:spcBef>
-                <a:spcPct val="0"/>
-              </a:spcBef>
-              <a:spcAft>
-                <a:spcPct val="0"/>
-              </a:spcAft>
-              <a:buClrTx/>
-              <a:buSzTx/>
-              <a:buFontTx/>
-              <a:buChar char="•"/>
-              <a:tabLst/>
-            </a:pPr>
-            <a:r>
-              <a:rPr kumimoji="0" lang="en-US" altLang="ja-JP" sz="2800" b="0" i="0" u="none" strike="noStrike" cap="none" normalizeH="0" baseline="0" dirty="0">
-                <a:ln>
-                  <a:noFill/>
-                </a:ln>
-                <a:solidFill>
-                  <a:schemeClr val="bg1"/>
-                </a:solidFill>
-                <a:effectLst/>
-                <a:latin typeface="Arial" panose="020B0604020202020204" pitchFamily="34" charset="0"/>
-              </a:rPr>
-              <a:t> </a:t>
-            </a:r>
-            <a:r>
-              <a:rPr kumimoji="0" lang="ja-JP" altLang="ja-JP" sz="2800" b="0" i="0" u="none" strike="noStrike" cap="none" normalizeH="0" baseline="0" dirty="0">
-                <a:ln>
-                  <a:noFill/>
-                </a:ln>
-                <a:solidFill>
-                  <a:schemeClr val="bg1"/>
-                </a:solidFill>
-                <a:effectLst/>
-                <a:latin typeface="Arial" panose="020B0604020202020204" pitchFamily="34" charset="0"/>
-              </a:rPr>
-              <a:t>作成と描画を兼任しており単一責任になっていない</a:t>
-            </a:r>
-          </a:p>
-          <a:p>
-            <a:pPr marL="0" marR="0" lvl="0" indent="0" algn="l" defTabSz="914400" rtl="0" eaLnBrk="0" fontAlgn="base" latinLnBrk="0" hangingPunct="0">
-              <a:lnSpc>
-                <a:spcPct val="100000"/>
-              </a:lnSpc>
-              <a:spcBef>
-                <a:spcPct val="0"/>
-              </a:spcBef>
-              <a:spcAft>
-                <a:spcPct val="0"/>
-              </a:spcAft>
-              <a:buClrTx/>
-              <a:buSzTx/>
-              <a:tabLst/>
-            </a:pPr>
-            <a:r>
-              <a:rPr lang="ja-JP" altLang="en-US" sz="2800" b="1" dirty="0">
-                <a:solidFill>
-                  <a:schemeClr val="tx1"/>
-                </a:solidFill>
-                <a:latin typeface="Arial" panose="020B0604020202020204" pitchFamily="34" charset="0"/>
-              </a:rPr>
-              <a:t>   </a:t>
-            </a:r>
-            <a:r>
-              <a:rPr kumimoji="0" lang="ja-JP" altLang="ja-JP" sz="2800" b="1" i="0" u="none" strike="noStrike" cap="none" normalizeH="0" baseline="0" dirty="0">
-                <a:ln>
-                  <a:noFill/>
-                </a:ln>
-                <a:solidFill>
-                  <a:srgbClr val="FF0000"/>
-                </a:solidFill>
-                <a:effectLst/>
-                <a:latin typeface="Arial" panose="020B0604020202020204" pitchFamily="34" charset="0"/>
-              </a:rPr>
-              <a:t>→</a:t>
-            </a:r>
-            <a:r>
-              <a:rPr kumimoji="0" lang="ja-JP" altLang="ja-JP" sz="2800" b="1" i="0" u="none" strike="noStrike" cap="none" normalizeH="0" baseline="0" dirty="0">
-                <a:ln>
-                  <a:noFill/>
-                </a:ln>
-                <a:solidFill>
-                  <a:schemeClr val="tx1"/>
-                </a:solidFill>
-                <a:effectLst/>
-                <a:latin typeface="Arial" panose="020B0604020202020204" pitchFamily="34" charset="0"/>
-              </a:rPr>
-              <a:t> </a:t>
-            </a:r>
-            <a:r>
-              <a:rPr kumimoji="0" lang="ja-JP" altLang="ja-JP" sz="2800" b="1" i="0" u="sng" strike="noStrike" cap="none" normalizeH="0" baseline="0" dirty="0">
-                <a:ln>
-                  <a:noFill/>
-                </a:ln>
-                <a:solidFill>
-                  <a:srgbClr val="FF0000"/>
-                </a:solidFill>
-                <a:effectLst/>
-                <a:latin typeface="Arial" panose="020B0604020202020204" pitchFamily="34" charset="0"/>
-              </a:rPr>
-              <a:t>描画コマンドリスト方式で解決予定</a:t>
-            </a:r>
-            <a:endParaRPr kumimoji="0" lang="ja-JP" altLang="ja-JP" sz="2800" b="0" i="0" u="sng" strike="noStrike" cap="none" normalizeH="0" baseline="0" dirty="0">
-              <a:ln>
-                <a:noFill/>
-              </a:ln>
-              <a:solidFill>
-                <a:srgbClr val="FF0000"/>
-              </a:solidFill>
-              <a:effectLst/>
-              <a:latin typeface="Arial" panose="020B0604020202020204" pitchFamily="34" charset="0"/>
-            </a:endParaRPr>
-          </a:p>
-        </p:txBody>
-      </p:sp>
-      <p:sp>
-        <p:nvSpPr>
-          <p:cNvPr id="3" name="テキスト ボックス 2">
-            <a:extLst>
-              <a:ext uri="{FF2B5EF4-FFF2-40B4-BE49-F238E27FC236}">
-                <a16:creationId xmlns:a16="http://schemas.microsoft.com/office/drawing/2014/main" id="{D5E8B5C8-1559-F56D-8159-A0FBF5C99E58}"/>
-              </a:ext>
-            </a:extLst>
-          </p:cNvPr>
-          <p:cNvSpPr txBox="1"/>
-          <p:nvPr/>
-        </p:nvSpPr>
-        <p:spPr>
-          <a:xfrm>
-            <a:off x="371168" y="4629971"/>
-            <a:ext cx="1973826" cy="584775"/>
-          </a:xfrm>
-          <a:prstGeom prst="rect">
-            <a:avLst/>
-          </a:prstGeom>
-          <a:noFill/>
-          <a:ln w="19050">
-            <a:solidFill>
-              <a:schemeClr val="bg1"/>
-            </a:solidFill>
-          </a:ln>
-        </p:spPr>
-        <p:txBody>
-          <a:bodyPr wrap="square" rtlCol="0">
-            <a:spAutoFit/>
-          </a:bodyPr>
-          <a:lstStyle/>
-          <a:p>
-            <a:pPr algn="l"/>
-            <a:r>
-              <a:rPr kumimoji="1" lang="ja-JP" altLang="en-US" sz="3200" dirty="0">
-                <a:solidFill>
-                  <a:schemeClr val="bg1"/>
-                </a:solidFill>
-              </a:rPr>
-              <a:t>入力情報</a:t>
-            </a:r>
-          </a:p>
-        </p:txBody>
-      </p:sp>
-      <p:sp>
-        <p:nvSpPr>
-          <p:cNvPr id="4" name="テキスト ボックス 3">
-            <a:extLst>
-              <a:ext uri="{FF2B5EF4-FFF2-40B4-BE49-F238E27FC236}">
-                <a16:creationId xmlns:a16="http://schemas.microsoft.com/office/drawing/2014/main" id="{96FBA82A-5A07-D216-661B-1270A38C75D8}"/>
-              </a:ext>
-            </a:extLst>
-          </p:cNvPr>
-          <p:cNvSpPr txBox="1"/>
-          <p:nvPr/>
-        </p:nvSpPr>
-        <p:spPr>
-          <a:xfrm>
-            <a:off x="371168" y="5199356"/>
-            <a:ext cx="11135032" cy="954107"/>
-          </a:xfrm>
-          <a:prstGeom prst="rect">
-            <a:avLst/>
-          </a:prstGeom>
-          <a:noFill/>
-          <a:ln>
-            <a:noFill/>
-          </a:ln>
-        </p:spPr>
-        <p:txBody>
-          <a:bodyPr wrap="square" rtlCol="0">
-            <a:spAutoFit/>
-          </a:bodyPr>
-          <a:lstStyle/>
-          <a:p>
-            <a:pPr marL="0" marR="0" lvl="0" indent="0" algn="l" defTabSz="914400" rtl="0" eaLnBrk="0" fontAlgn="base" latinLnBrk="0" hangingPunct="0">
-              <a:lnSpc>
-                <a:spcPct val="100000"/>
-              </a:lnSpc>
-              <a:spcBef>
-                <a:spcPct val="0"/>
-              </a:spcBef>
-              <a:spcAft>
-                <a:spcPct val="0"/>
-              </a:spcAft>
-              <a:buClrTx/>
-              <a:buSzTx/>
-              <a:buFontTx/>
-              <a:buChar char="•"/>
-              <a:tabLst/>
-            </a:pPr>
-            <a:r>
-              <a:rPr kumimoji="0" lang="ja-JP" altLang="en-US" sz="2800" b="0" i="0" u="none" strike="noStrike" cap="none" normalizeH="0" baseline="0" dirty="0">
-                <a:ln>
-                  <a:noFill/>
-                </a:ln>
-                <a:solidFill>
-                  <a:schemeClr val="bg1"/>
-                </a:solidFill>
-                <a:effectLst/>
-                <a:latin typeface="Arial" panose="020B0604020202020204" pitchFamily="34" charset="0"/>
-              </a:rPr>
-              <a:t> マウスとキーボードの入力しか今のままでは取れず、拡張性が低い</a:t>
-            </a:r>
-            <a:endParaRPr kumimoji="0" lang="en-US" altLang="ja-JP" sz="2800" b="0" i="0" u="none" strike="noStrike" cap="none" normalizeH="0" baseline="0" dirty="0">
-              <a:ln>
-                <a:noFill/>
-              </a:ln>
-              <a:solidFill>
-                <a:schemeClr val="bg1"/>
-              </a:solidFill>
-              <a:effectLst/>
-              <a:latin typeface="Arial" panose="020B0604020202020204" pitchFamily="34" charset="0"/>
-            </a:endParaRPr>
-          </a:p>
-          <a:p>
-            <a:pPr marL="0" marR="0" lvl="0" indent="0" algn="l" defTabSz="914400" rtl="0" eaLnBrk="0" fontAlgn="base" latinLnBrk="0" hangingPunct="0">
-              <a:lnSpc>
-                <a:spcPct val="100000"/>
-              </a:lnSpc>
-              <a:spcBef>
-                <a:spcPct val="0"/>
-              </a:spcBef>
-              <a:spcAft>
-                <a:spcPct val="0"/>
-              </a:spcAft>
-              <a:buClrTx/>
-              <a:buSzTx/>
-              <a:tabLst/>
-            </a:pPr>
-            <a:r>
-              <a:rPr lang="ja-JP" altLang="en-US" sz="2800" dirty="0">
-                <a:solidFill>
-                  <a:schemeClr val="bg1"/>
-                </a:solidFill>
-                <a:latin typeface="Arial" panose="020B0604020202020204" pitchFamily="34" charset="0"/>
-              </a:rPr>
-              <a:t>　</a:t>
-            </a:r>
-            <a:r>
-              <a:rPr lang="ja-JP" altLang="en-US" sz="2800" dirty="0">
-                <a:solidFill>
-                  <a:srgbClr val="FF0000"/>
-                </a:solidFill>
-                <a:latin typeface="Arial" panose="020B0604020202020204" pitchFamily="34" charset="0"/>
-              </a:rPr>
-              <a:t>→ </a:t>
-            </a:r>
-            <a:r>
-              <a:rPr kumimoji="0" lang="ja-JP" altLang="ja-JP" sz="2800" b="0" i="0" u="sng" strike="noStrike" cap="none" normalizeH="0" baseline="0" dirty="0">
-                <a:ln>
-                  <a:noFill/>
-                </a:ln>
-                <a:solidFill>
-                  <a:srgbClr val="FF0000"/>
-                </a:solidFill>
-                <a:effectLst/>
-                <a:latin typeface="Arial" panose="020B0604020202020204" pitchFamily="34" charset="0"/>
-              </a:rPr>
-              <a:t>プラットフォーム層で入力をアクション</a:t>
-            </a:r>
-            <a:r>
-              <a:rPr kumimoji="0" lang="en-US" altLang="ja-JP" sz="2800" b="0" i="0" u="sng" strike="noStrike" cap="none" normalizeH="0" baseline="0" dirty="0">
-                <a:ln>
-                  <a:noFill/>
-                </a:ln>
-                <a:solidFill>
-                  <a:srgbClr val="FF0000"/>
-                </a:solidFill>
-                <a:effectLst/>
-                <a:latin typeface="Arial" panose="020B0604020202020204" pitchFamily="34" charset="0"/>
-              </a:rPr>
-              <a:t>(</a:t>
-            </a:r>
-            <a:r>
-              <a:rPr kumimoji="0" lang="ja-JP" altLang="ja-JP" sz="2800" b="0" i="0" u="sng" strike="noStrike" cap="none" normalizeH="0" baseline="0" dirty="0">
-                <a:ln>
-                  <a:noFill/>
-                </a:ln>
-                <a:solidFill>
-                  <a:srgbClr val="FF0000"/>
-                </a:solidFill>
-                <a:effectLst/>
-                <a:latin typeface="Arial" panose="020B0604020202020204" pitchFamily="34" charset="0"/>
-              </a:rPr>
-              <a:t>意図</a:t>
-            </a:r>
-            <a:r>
-              <a:rPr kumimoji="0" lang="en-US" altLang="ja-JP" sz="2800" b="0" i="0" u="sng" strike="noStrike" cap="none" normalizeH="0" baseline="0" dirty="0">
-                <a:ln>
-                  <a:noFill/>
-                </a:ln>
-                <a:solidFill>
-                  <a:srgbClr val="FF0000"/>
-                </a:solidFill>
-                <a:effectLst/>
-                <a:latin typeface="Arial" panose="020B0604020202020204" pitchFamily="34" charset="0"/>
-              </a:rPr>
-              <a:t>)</a:t>
-            </a:r>
-            <a:r>
-              <a:rPr kumimoji="0" lang="ja-JP" altLang="ja-JP" sz="2800" b="0" i="0" u="sng" strike="noStrike" cap="none" normalizeH="0" baseline="0" dirty="0">
-                <a:ln>
-                  <a:noFill/>
-                </a:ln>
-                <a:solidFill>
-                  <a:srgbClr val="FF0000"/>
-                </a:solidFill>
-                <a:effectLst/>
-                <a:latin typeface="Arial" panose="020B0604020202020204" pitchFamily="34" charset="0"/>
-              </a:rPr>
-              <a:t>へ変換</a:t>
-            </a:r>
-            <a:endParaRPr kumimoji="0" lang="en-US" altLang="ja-JP" sz="2800" b="0" i="0" u="sng" strike="noStrike" cap="none" normalizeH="0" baseline="0" dirty="0">
-              <a:ln>
-                <a:noFill/>
-              </a:ln>
-              <a:solidFill>
-                <a:srgbClr val="FF0000"/>
-              </a:solidFill>
-              <a:effectLst/>
-              <a:latin typeface="Arial" panose="020B0604020202020204" pitchFamily="34" charset="0"/>
-            </a:endParaRPr>
-          </a:p>
-        </p:txBody>
-      </p:sp>
-    </p:spTree>
-    <p:extLst>
-      <p:ext uri="{BB962C8B-B14F-4D97-AF65-F5344CB8AC3E}">
-        <p14:creationId xmlns:p14="http://schemas.microsoft.com/office/powerpoint/2010/main" val="2142884083"/>
       </p:ext>
     </p:extLst>
   </p:cSld>

--- a/就職作品詳細資料.pptx
+++ b/就職作品詳細資料.pptx
@@ -2093,16 +2093,36 @@
               <a:tabLst/>
             </a:pPr>
             <a:r>
-              <a:rPr kumimoji="0" lang="en-US" altLang="ja-JP" sz="2800" b="1" i="0" u="sng" strike="noStrike" cap="none" normalizeH="0" baseline="0" dirty="0" err="1">
-                <a:ln>
-                  <a:noFill/>
-                </a:ln>
-                <a:solidFill>
-                  <a:srgbClr val="FF0000"/>
-                </a:solidFill>
-                <a:effectLst/>
-              </a:rPr>
-              <a:t>VisualStudio</a:t>
+              <a:rPr kumimoji="0" lang="en-US" altLang="ja-JP" sz="2800" b="1" i="0" u="sng" strike="noStrike" cap="none" normalizeH="0" baseline="0" dirty="0">
+                <a:ln>
+                  <a:noFill/>
+                </a:ln>
+                <a:solidFill>
+                  <a:srgbClr val="FF0000"/>
+                </a:solidFill>
+                <a:effectLst/>
+              </a:rPr>
+              <a:t>Visual</a:t>
+            </a:r>
+            <a:r>
+              <a:rPr lang="ja-JP" altLang="en-US" sz="2800" b="1" u="sng" dirty="0">
+                <a:solidFill>
+                  <a:srgbClr val="FF0000"/>
+                </a:solidFill>
+              </a:rPr>
+              <a:t> </a:t>
+            </a:r>
+            <a:r>
+              <a:rPr kumimoji="0" lang="en-US" altLang="ja-JP" sz="2800" b="1" i="0" u="sng" strike="noStrike" cap="none" normalizeH="0" baseline="0" dirty="0">
+                <a:ln>
+                  <a:noFill/>
+                </a:ln>
+                <a:solidFill>
+                  <a:srgbClr val="FF0000"/>
+                </a:solidFill>
+                <a:effectLst/>
+              </a:rPr>
+              <a:t>Studio</a:t>
             </a:r>
             <a:r>
               <a:rPr kumimoji="0" lang="ja-JP" altLang="en-US" sz="2800" b="1" i="0" u="sng" strike="noStrike" cap="none" normalizeH="0" baseline="0" dirty="0">

--- a/就職作品詳細資料.pptx
+++ b/就職作品詳細資料.pptx
@@ -5,7 +5,7 @@
     <p:sldMasterId id="2147483648" r:id="rId1"/>
   </p:sldMasterIdLst>
   <p:notesMasterIdLst>
-    <p:notesMasterId r:id="rId14"/>
+    <p:notesMasterId r:id="rId13"/>
   </p:notesMasterIdLst>
   <p:sldIdLst>
     <p:sldId id="256" r:id="rId2"/>
@@ -13,13 +13,12 @@
     <p:sldId id="259" r:id="rId4"/>
     <p:sldId id="260" r:id="rId5"/>
     <p:sldId id="262" r:id="rId6"/>
-    <p:sldId id="270" r:id="rId7"/>
-    <p:sldId id="264" r:id="rId8"/>
-    <p:sldId id="267" r:id="rId9"/>
-    <p:sldId id="265" r:id="rId10"/>
-    <p:sldId id="268" r:id="rId11"/>
-    <p:sldId id="269" r:id="rId12"/>
-    <p:sldId id="266" r:id="rId13"/>
+    <p:sldId id="264" r:id="rId7"/>
+    <p:sldId id="267" r:id="rId8"/>
+    <p:sldId id="265" r:id="rId9"/>
+    <p:sldId id="268" r:id="rId10"/>
+    <p:sldId id="269" r:id="rId11"/>
+    <p:sldId id="266" r:id="rId12"/>
   </p:sldIdLst>
   <p:sldSz cx="12192000" cy="6858000"/>
   <p:notesSz cx="12192000" cy="6858000"/>
@@ -129,7 +128,7 @@
           <a:p>
             <a:fld id="{7844CC07-7CCF-4856-941D-F16981C68265}" type="datetimeFigureOut">
               <a:rPr kumimoji="1" lang="ja-JP" altLang="en-US" smtClean="0"/>
-              <a:t>2026/2/17</a:t>
+              <a:t>2026/2/18</a:t>
             </a:fld>
             <a:endParaRPr kumimoji="1" lang="ja-JP" altLang="en-US"/>
           </a:p>
@@ -493,7 +492,7 @@
           <a:p>
             <a:fld id="{C0476A4E-7012-4A9C-843C-6443E265FB9C}" type="slidenum">
               <a:rPr kumimoji="1" lang="ja-JP" altLang="en-US" smtClean="0"/>
-              <a:t>8</a:t>
+              <a:t>7</a:t>
             </a:fld>
             <a:endParaRPr kumimoji="1" lang="ja-JP" altLang="en-US"/>
           </a:p>
@@ -663,7 +662,7 @@
           <a:p>
             <a:fld id="{1D8BD707-D9CF-40AE-B4C6-C98DA3205C09}" type="datetimeFigureOut">
               <a:rPr lang="en-US"/>
-              <a:t>2/17/2026</a:t>
+              <a:t>2/18/2026</a:t>
             </a:fld>
             <a:endParaRPr lang="en-US"/>
           </a:p>
@@ -840,7 +839,7 @@
           <a:p>
             <a:fld id="{1D8BD707-D9CF-40AE-B4C6-C98DA3205C09}" type="datetimeFigureOut">
               <a:rPr lang="en-US"/>
-              <a:t>2/17/2026</a:t>
+              <a:t>2/18/2026</a:t>
             </a:fld>
             <a:endParaRPr lang="en-US"/>
           </a:p>
@@ -1054,7 +1053,7 @@
           <a:p>
             <a:fld id="{1D8BD707-D9CF-40AE-B4C6-C98DA3205C09}" type="datetimeFigureOut">
               <a:rPr lang="en-US"/>
-              <a:t>2/17/2026</a:t>
+              <a:t>2/18/2026</a:t>
             </a:fld>
             <a:endParaRPr lang="en-US"/>
           </a:p>
@@ -1202,7 +1201,7 @@
           <a:p>
             <a:fld id="{1D8BD707-D9CF-40AE-B4C6-C98DA3205C09}" type="datetimeFigureOut">
               <a:rPr lang="en-US"/>
-              <a:t>2/17/2026</a:t>
+              <a:t>2/18/2026</a:t>
             </a:fld>
             <a:endParaRPr lang="en-US"/>
           </a:p>
@@ -1321,7 +1320,7 @@
           <a:p>
             <a:fld id="{1D8BD707-D9CF-40AE-B4C6-C98DA3205C09}" type="datetimeFigureOut">
               <a:rPr lang="en-US"/>
-              <a:t>2/17/2026</a:t>
+              <a:t>2/18/2026</a:t>
             </a:fld>
             <a:endParaRPr lang="en-US"/>
           </a:p>
@@ -1568,7 +1567,7 @@
           <a:p>
             <a:fld id="{1D8BD707-D9CF-40AE-B4C6-C98DA3205C09}" type="datetimeFigureOut">
               <a:rPr lang="en-US"/>
-              <a:t>2/17/2026</a:t>
+              <a:t>2/18/2026</a:t>
             </a:fld>
             <a:endParaRPr lang="en-US"/>
           </a:p>
@@ -1910,7 +1909,7 @@
         <p:cNvPr id="1" name="">
           <a:extLst>
             <a:ext uri="{FF2B5EF4-FFF2-40B4-BE49-F238E27FC236}">
-              <a16:creationId xmlns:a16="http://schemas.microsoft.com/office/drawing/2014/main" id="{0EE6778F-F635-0616-B585-7716CA1C0ACF}"/>
+              <a16:creationId xmlns:a16="http://schemas.microsoft.com/office/drawing/2014/main" id="{22DC5B7D-D9BF-A27C-3DFF-F3E67B753766}"/>
             </a:ext>
           </a:extLst>
         </p:cNvPr>
@@ -1930,7 +1929,7 @@
           <p:cNvPr id="2" name="タイトル 1">
             <a:extLst>
               <a:ext uri="{FF2B5EF4-FFF2-40B4-BE49-F238E27FC236}">
-                <a16:creationId xmlns:a16="http://schemas.microsoft.com/office/drawing/2014/main" id="{2DB26341-98AF-0E9C-4437-65316181FF16}"/>
+                <a16:creationId xmlns:a16="http://schemas.microsoft.com/office/drawing/2014/main" id="{5242688C-0B15-1DF2-C15E-73345C421A27}"/>
               </a:ext>
             </a:extLst>
           </p:cNvPr>
@@ -1963,7 +1962,7 @@
           <p:cNvPr id="7" name="テキスト ボックス 6">
             <a:extLst>
               <a:ext uri="{FF2B5EF4-FFF2-40B4-BE49-F238E27FC236}">
-                <a16:creationId xmlns:a16="http://schemas.microsoft.com/office/drawing/2014/main" id="{F341FC28-02CD-E182-1342-CF3FB1CB8771}"/>
+                <a16:creationId xmlns:a16="http://schemas.microsoft.com/office/drawing/2014/main" id="{7C2B3AA5-8889-FC69-C336-FD952CCBE9B4}"/>
               </a:ext>
             </a:extLst>
           </p:cNvPr>
@@ -1973,7 +1972,7 @@
         <p:spPr>
           <a:xfrm>
             <a:off x="371168" y="1670339"/>
-            <a:ext cx="1686232" cy="584775"/>
+            <a:ext cx="2372032" cy="584775"/>
           </a:xfrm>
           <a:prstGeom prst="rect">
             <a:avLst/>
@@ -1993,18 +1992,13 @@
           <a:p>
             <a:pPr algn="l"/>
             <a:r>
-              <a:rPr kumimoji="1" lang="en-US" altLang="ja-JP" sz="3200" dirty="0" err="1">
-                <a:solidFill>
-                  <a:schemeClr val="bg1"/>
-                </a:solidFill>
-              </a:rPr>
-              <a:t>CMake</a:t>
-            </a:r>
-            <a:endParaRPr kumimoji="1" lang="ja-JP" altLang="en-US" sz="3200" dirty="0">
-              <a:solidFill>
-                <a:schemeClr val="bg1"/>
-              </a:solidFill>
-            </a:endParaRPr>
+              <a:rPr kumimoji="1" lang="ja-JP" altLang="en-US" sz="3200" dirty="0">
+                <a:solidFill>
+                  <a:schemeClr val="bg1"/>
+                </a:solidFill>
+              </a:rPr>
+              <a:t>コンパイル</a:t>
+            </a:r>
           </a:p>
         </p:txBody>
       </p:sp>
@@ -2013,7 +2007,7 @@
           <p:cNvPr id="9" name="テキスト ボックス 8">
             <a:extLst>
               <a:ext uri="{FF2B5EF4-FFF2-40B4-BE49-F238E27FC236}">
-                <a16:creationId xmlns:a16="http://schemas.microsoft.com/office/drawing/2014/main" id="{9C391546-A754-DD6D-302A-C86B444F8767}"/>
+                <a16:creationId xmlns:a16="http://schemas.microsoft.com/office/drawing/2014/main" id="{14944BB5-297B-AAEF-858A-EA307D884FE6}"/>
               </a:ext>
             </a:extLst>
           </p:cNvPr>
@@ -2023,7 +2017,7 @@
         <p:spPr>
           <a:xfrm>
             <a:off x="371168" y="2255114"/>
-            <a:ext cx="10754032" cy="1301318"/>
+            <a:ext cx="10754032" cy="1305165"/>
           </a:xfrm>
           <a:prstGeom prst="rect">
             <a:avLst/>
@@ -2056,43 +2050,6 @@
               <a:tabLst/>
             </a:pPr>
             <a:r>
-              <a:rPr lang="ja-JP" altLang="en-US" sz="2800" b="1" u="sng" dirty="0">
-                <a:solidFill>
-                  <a:srgbClr val="FF0000"/>
-                </a:solidFill>
-                <a:latin typeface="Arial" panose="020B0604020202020204" pitchFamily="34" charset="0"/>
-              </a:rPr>
-              <a:t>マルチプラットフォームへの対応が行いやすい</a:t>
-            </a:r>
-            <a:endParaRPr kumimoji="0" lang="en-US" altLang="ja-JP" sz="2800" b="1" i="0" u="sng" strike="noStrike" cap="none" normalizeH="0" baseline="0" dirty="0">
-              <a:ln>
-                <a:noFill/>
-              </a:ln>
-              <a:solidFill>
-                <a:srgbClr val="FF0000"/>
-              </a:solidFill>
-              <a:effectLst/>
-              <a:latin typeface="Arial" panose="020B0604020202020204" pitchFamily="34" charset="0"/>
-            </a:endParaRPr>
-          </a:p>
-          <a:p>
-            <a:pPr marL="0" marR="0" lvl="0" indent="0" algn="l" defTabSz="914400" rtl="0" eaLnBrk="0" fontAlgn="base" latinLnBrk="0" hangingPunct="0">
-              <a:lnSpc>
-                <a:spcPct val="150000"/>
-              </a:lnSpc>
-              <a:spcBef>
-                <a:spcPct val="0"/>
-              </a:spcBef>
-              <a:spcAft>
-                <a:spcPct val="0"/>
-              </a:spcAft>
-              <a:buClrTx/>
-              <a:buSzTx/>
-              <a:buFontTx/>
-              <a:buChar char="•"/>
-              <a:tabLst/>
-            </a:pPr>
-            <a:r>
               <a:rPr kumimoji="0" lang="en-US" altLang="ja-JP" sz="2800" b="1" i="0" u="sng" strike="noStrike" cap="none" normalizeH="0" baseline="0" dirty="0">
                 <a:ln>
                   <a:noFill/>
@@ -2101,266 +2058,31 @@
                   <a:srgbClr val="FF0000"/>
                 </a:solidFill>
                 <a:effectLst/>
-              </a:rPr>
-              <a:t>Visual</a:t>
-            </a:r>
-            <a:r>
-              <a:rPr lang="ja-JP" altLang="en-US" sz="2800" b="1" u="sng" dirty="0">
-                <a:solidFill>
-                  <a:srgbClr val="FF0000"/>
-                </a:solidFill>
-              </a:rPr>
-              <a:t> </a:t>
-            </a:r>
-            <a:r>
-              <a:rPr kumimoji="0" lang="en-US" altLang="ja-JP" sz="2800" b="1" i="0" u="sng" strike="noStrike" cap="none" normalizeH="0" baseline="0" dirty="0">
-                <a:ln>
-                  <a:noFill/>
-                </a:ln>
-                <a:solidFill>
-                  <a:srgbClr val="FF0000"/>
-                </a:solidFill>
-                <a:effectLst/>
-              </a:rPr>
-              <a:t>Studio</a:t>
-            </a:r>
-            <a:r>
-              <a:rPr kumimoji="0" lang="ja-JP" altLang="en-US" sz="2800" b="1" i="0" u="sng" strike="noStrike" cap="none" normalizeH="0" baseline="0" dirty="0">
-                <a:ln>
-                  <a:noFill/>
-                </a:ln>
-                <a:solidFill>
-                  <a:srgbClr val="FF0000"/>
-                </a:solidFill>
-                <a:effectLst/>
-              </a:rPr>
-              <a:t>に依存しない</a:t>
-            </a:r>
-            <a:endParaRPr kumimoji="0" lang="ja-JP" altLang="ja-JP" sz="2800" b="1" i="0" u="sng" strike="noStrike" cap="none" normalizeH="0" baseline="0" dirty="0">
-              <a:ln>
-                <a:noFill/>
-              </a:ln>
-              <a:solidFill>
-                <a:srgbClr val="FF0000"/>
-              </a:solidFill>
-              <a:effectLst/>
-              <a:latin typeface="Arial" panose="020B0604020202020204" pitchFamily="34" charset="0"/>
-            </a:endParaRPr>
-          </a:p>
-        </p:txBody>
-      </p:sp>
-      <p:pic>
-        <p:nvPicPr>
-          <p:cNvPr id="4" name="図 3" descr="テキスト&#10;&#10;AI 生成コンテンツは誤りを含む可能性があります。">
-            <a:extLst>
-              <a:ext uri="{FF2B5EF4-FFF2-40B4-BE49-F238E27FC236}">
-                <a16:creationId xmlns:a16="http://schemas.microsoft.com/office/drawing/2014/main" id="{25A12992-FB76-D612-8CDD-0BADB4BEE9B9}"/>
-              </a:ext>
-            </a:extLst>
-          </p:cNvPr>
-          <p:cNvPicPr>
-            <a:picLocks noChangeAspect="1"/>
-          </p:cNvPicPr>
-          <p:nvPr/>
-        </p:nvPicPr>
-        <p:blipFill>
-          <a:blip r:embed="rId2"/>
-          <a:stretch>
-            <a:fillRect/>
-          </a:stretch>
-        </p:blipFill>
-        <p:spPr>
-          <a:xfrm>
-            <a:off x="8045245" y="2998781"/>
-            <a:ext cx="3967514" cy="3577513"/>
-          </a:xfrm>
-          <a:prstGeom prst="rect">
-            <a:avLst/>
-          </a:prstGeom>
-        </p:spPr>
-      </p:pic>
-    </p:spTree>
-    <p:extLst>
-      <p:ext uri="{BB962C8B-B14F-4D97-AF65-F5344CB8AC3E}">
-        <p14:creationId xmlns:p14="http://schemas.microsoft.com/office/powerpoint/2010/main" val="2883724813"/>
-      </p:ext>
-    </p:extLst>
-  </p:cSld>
-  <p:clrMapOvr>
-    <a:masterClrMapping/>
-  </p:clrMapOvr>
-</p:sld>
-</file>
-
-<file path=ppt/slides/slide11.xml><?xml version="1.0" encoding="utf-8"?>
-<p:sld xmlns:a="http://schemas.openxmlformats.org/drawingml/2006/main" xmlns:r="http://schemas.openxmlformats.org/officeDocument/2006/relationships" xmlns:p="http://schemas.openxmlformats.org/presentationml/2006/main">
-  <p:cSld>
-    <p:spTree>
-      <p:nvGrpSpPr>
-        <p:cNvPr id="1" name="">
-          <a:extLst>
-            <a:ext uri="{FF2B5EF4-FFF2-40B4-BE49-F238E27FC236}">
-              <a16:creationId xmlns:a16="http://schemas.microsoft.com/office/drawing/2014/main" id="{22DC5B7D-D9BF-A27C-3DFF-F3E67B753766}"/>
-            </a:ext>
-          </a:extLst>
-        </p:cNvPr>
-        <p:cNvGrpSpPr/>
-        <p:nvPr/>
-      </p:nvGrpSpPr>
-      <p:grpSpPr>
-        <a:xfrm>
-          <a:off x="0" y="0"/>
-          <a:ext cx="0" cy="0"/>
-          <a:chOff x="0" y="0"/>
-          <a:chExt cx="0" cy="0"/>
-        </a:xfrm>
-      </p:grpSpPr>
-      <p:sp>
-        <p:nvSpPr>
-          <p:cNvPr id="2" name="タイトル 1">
-            <a:extLst>
-              <a:ext uri="{FF2B5EF4-FFF2-40B4-BE49-F238E27FC236}">
-                <a16:creationId xmlns:a16="http://schemas.microsoft.com/office/drawing/2014/main" id="{5242688C-0B15-1DF2-C15E-73345C421A27}"/>
-              </a:ext>
-            </a:extLst>
-          </p:cNvPr>
-          <p:cNvSpPr>
-            <a:spLocks noGrp="1"/>
-          </p:cNvSpPr>
-          <p:nvPr>
-            <p:ph type="title"/>
-          </p:nvPr>
-        </p:nvSpPr>
-        <p:spPr>
-          <a:xfrm>
-            <a:off x="371168" y="390833"/>
-            <a:ext cx="7706032" cy="923330"/>
-          </a:xfrm>
-        </p:spPr>
-        <p:txBody>
-          <a:bodyPr/>
-          <a:lstStyle/>
-          <a:p>
-            <a:r>
-              <a:rPr kumimoji="1" lang="ja-JP" altLang="en-US" sz="6000" dirty="0"/>
-              <a:t>コンセプト実現に向けて</a:t>
-            </a:r>
-          </a:p>
-        </p:txBody>
-      </p:sp>
-      <p:sp>
-        <p:nvSpPr>
-          <p:cNvPr id="7" name="テキスト ボックス 6">
-            <a:extLst>
-              <a:ext uri="{FF2B5EF4-FFF2-40B4-BE49-F238E27FC236}">
-                <a16:creationId xmlns:a16="http://schemas.microsoft.com/office/drawing/2014/main" id="{7C2B3AA5-8889-FC69-C336-FD952CCBE9B4}"/>
-              </a:ext>
-            </a:extLst>
-          </p:cNvPr>
-          <p:cNvSpPr txBox="1"/>
-          <p:nvPr/>
-        </p:nvSpPr>
-        <p:spPr>
-          <a:xfrm>
-            <a:off x="371168" y="1670339"/>
-            <a:ext cx="2372032" cy="584775"/>
-          </a:xfrm>
-          <a:prstGeom prst="rect">
-            <a:avLst/>
-          </a:prstGeom>
-          <a:noFill/>
-          <a:ln w="19050">
-            <a:solidFill>
-              <a:schemeClr val="bg1"/>
-            </a:solidFill>
-          </a:ln>
-        </p:spPr>
-        <p:txBody>
-          <a:bodyPr wrap="square" rtlCol="0">
-            <a:spAutoFit/>
-          </a:bodyPr>
-          <a:lstStyle/>
-          <a:p>
-            <a:pPr algn="l"/>
-            <a:r>
-              <a:rPr kumimoji="1" lang="ja-JP" altLang="en-US" sz="3200" dirty="0">
-                <a:solidFill>
-                  <a:schemeClr val="bg1"/>
-                </a:solidFill>
-              </a:rPr>
-              <a:t>コンパイル</a:t>
-            </a:r>
-          </a:p>
-        </p:txBody>
-      </p:sp>
-      <p:sp>
-        <p:nvSpPr>
-          <p:cNvPr id="9" name="テキスト ボックス 8">
-            <a:extLst>
-              <a:ext uri="{FF2B5EF4-FFF2-40B4-BE49-F238E27FC236}">
-                <a16:creationId xmlns:a16="http://schemas.microsoft.com/office/drawing/2014/main" id="{14944BB5-297B-AAEF-858A-EA307D884FE6}"/>
-              </a:ext>
-            </a:extLst>
-          </p:cNvPr>
-          <p:cNvSpPr txBox="1"/>
-          <p:nvPr/>
-        </p:nvSpPr>
-        <p:spPr>
-          <a:xfrm>
-            <a:off x="371168" y="2255114"/>
-            <a:ext cx="10754032" cy="1305165"/>
-          </a:xfrm>
-          <a:prstGeom prst="rect">
-            <a:avLst/>
-          </a:prstGeom>
-          <a:noFill/>
-          <a:ln>
-            <a:noFill/>
-          </a:ln>
-        </p:spPr>
-        <p:txBody>
-          <a:bodyPr wrap="square" rtlCol="0">
-            <a:spAutoFit/>
-          </a:bodyPr>
-          <a:lstStyle/>
-          <a:p>
-            <a:pPr marL="0" marR="0" lvl="0" indent="0" algn="l" defTabSz="914400" rtl="0" eaLnBrk="0" fontAlgn="base" latinLnBrk="0" hangingPunct="0">
-              <a:lnSpc>
-                <a:spcPct val="150000"/>
-              </a:lnSpc>
-              <a:spcBef>
-                <a:spcPct val="0"/>
-              </a:spcBef>
-              <a:spcAft>
-                <a:spcPct val="0"/>
-              </a:spcAft>
-              <a:buClrTx/>
-              <a:buSzTx/>
-              <a:buFontTx/>
-              <a:buChar char="•"/>
-              <a:tabLst/>
-            </a:pPr>
-            <a:r>
-              <a:rPr kumimoji="0" lang="en-US" altLang="ja-JP" sz="2800" b="1" i="0" u="sng" strike="noStrike" cap="none" normalizeH="0" baseline="0" dirty="0">
-                <a:ln>
-                  <a:noFill/>
-                </a:ln>
-                <a:solidFill>
-                  <a:srgbClr val="FF0000"/>
-                </a:solidFill>
-                <a:effectLst/>
-                <a:latin typeface="Arial" panose="020B0604020202020204" pitchFamily="34" charset="0"/>
-              </a:rPr>
-              <a:t>Microsoft</a:t>
-            </a:r>
-            <a:r>
-              <a:rPr lang="ja-JP" altLang="en-US" sz="2800" b="1" u="sng" dirty="0">
-                <a:solidFill>
-                  <a:srgbClr val="FF0000"/>
-                </a:solidFill>
-                <a:latin typeface="Arial" panose="020B0604020202020204" pitchFamily="34" charset="0"/>
-              </a:rPr>
-              <a:t>系は</a:t>
+                <a:latin typeface="Arial" panose="020B0604020202020204" pitchFamily="34" charset="0"/>
+              </a:rPr>
+              <a:t>DirectX</a:t>
+            </a:r>
+            <a:r>
+              <a:rPr kumimoji="0" lang="ja-JP" altLang="en-US" sz="2800" b="1" i="0" u="sng" strike="noStrike" cap="none" normalizeH="0" baseline="0">
+                <a:ln>
+                  <a:noFill/>
+                </a:ln>
+                <a:solidFill>
+                  <a:srgbClr val="FF0000"/>
+                </a:solidFill>
+                <a:effectLst/>
+                <a:latin typeface="Arial" panose="020B0604020202020204" pitchFamily="34" charset="0"/>
+              </a:rPr>
+              <a:t>で</a:t>
+            </a:r>
+            <a:r>
+              <a:rPr lang="ja-JP" altLang="en-US" sz="2800" b="1" u="sng">
+                <a:solidFill>
+                  <a:srgbClr val="FF0000"/>
+                </a:solidFill>
+                <a:latin typeface="Arial" panose="020B0604020202020204" pitchFamily="34" charset="0"/>
+              </a:rPr>
+              <a:t>は</a:t>
             </a:r>
             <a:r>
               <a:rPr lang="en-US" altLang="ja-JP" sz="2800" b="1" u="sng" dirty="0">
@@ -2534,7 +2256,7 @@
 </p:sld>
 </file>
 
-<file path=ppt/slides/slide12.xml><?xml version="1.0" encoding="utf-8"?>
+<file path=ppt/slides/slide11.xml><?xml version="1.0" encoding="utf-8"?>
 <p:sld xmlns:a="http://schemas.openxmlformats.org/drawingml/2006/main" xmlns:r="http://schemas.openxmlformats.org/officeDocument/2006/relationships" xmlns:p="http://schemas.openxmlformats.org/presentationml/2006/main">
   <p:cSld>
     <p:spTree>
@@ -4924,555 +4646,6 @@
         <p:cNvPr id="1" name="">
           <a:extLst>
             <a:ext uri="{FF2B5EF4-FFF2-40B4-BE49-F238E27FC236}">
-              <a16:creationId xmlns:a16="http://schemas.microsoft.com/office/drawing/2014/main" id="{370C1AA3-519A-9260-0D1B-D5D46C3E3E48}"/>
-            </a:ext>
-          </a:extLst>
-        </p:cNvPr>
-        <p:cNvGrpSpPr/>
-        <p:nvPr/>
-      </p:nvGrpSpPr>
-      <p:grpSpPr>
-        <a:xfrm>
-          <a:off x="0" y="0"/>
-          <a:ext cx="0" cy="0"/>
-          <a:chOff x="0" y="0"/>
-          <a:chExt cx="0" cy="0"/>
-        </a:xfrm>
-      </p:grpSpPr>
-      <p:sp>
-        <p:nvSpPr>
-          <p:cNvPr id="2" name="タイトル 1">
-            <a:extLst>
-              <a:ext uri="{FF2B5EF4-FFF2-40B4-BE49-F238E27FC236}">
-                <a16:creationId xmlns:a16="http://schemas.microsoft.com/office/drawing/2014/main" id="{9A6CC34D-930C-01B7-5991-EE45DAB865D6}"/>
-              </a:ext>
-            </a:extLst>
-          </p:cNvPr>
-          <p:cNvSpPr>
-            <a:spLocks noGrp="1"/>
-          </p:cNvSpPr>
-          <p:nvPr>
-            <p:ph type="title"/>
-          </p:nvPr>
-        </p:nvSpPr>
-        <p:spPr>
-          <a:xfrm>
-            <a:off x="371168" y="390833"/>
-            <a:ext cx="7706032" cy="923330"/>
-          </a:xfrm>
-        </p:spPr>
-        <p:txBody>
-          <a:bodyPr/>
-          <a:lstStyle/>
-          <a:p>
-            <a:r>
-              <a:rPr kumimoji="1" lang="ja-JP" altLang="en-US" sz="6000" dirty="0"/>
-              <a:t>コンセプト実現に向けて</a:t>
-            </a:r>
-          </a:p>
-        </p:txBody>
-      </p:sp>
-      <p:sp>
-        <p:nvSpPr>
-          <p:cNvPr id="7" name="テキスト ボックス 6">
-            <a:extLst>
-              <a:ext uri="{FF2B5EF4-FFF2-40B4-BE49-F238E27FC236}">
-                <a16:creationId xmlns:a16="http://schemas.microsoft.com/office/drawing/2014/main" id="{48DB896E-E113-A94D-1526-CC9F9C2BA603}"/>
-              </a:ext>
-            </a:extLst>
-          </p:cNvPr>
-          <p:cNvSpPr txBox="1"/>
-          <p:nvPr/>
-        </p:nvSpPr>
-        <p:spPr>
-          <a:xfrm>
-            <a:off x="371168" y="1670339"/>
-            <a:ext cx="3134032" cy="584775"/>
-          </a:xfrm>
-          <a:prstGeom prst="rect">
-            <a:avLst/>
-          </a:prstGeom>
-          <a:noFill/>
-          <a:ln w="19050">
-            <a:solidFill>
-              <a:schemeClr val="bg1"/>
-            </a:solidFill>
-          </a:ln>
-        </p:spPr>
-        <p:txBody>
-          <a:bodyPr wrap="square" rtlCol="0">
-            <a:spAutoFit/>
-          </a:bodyPr>
-          <a:lstStyle/>
-          <a:p>
-            <a:pPr algn="l"/>
-            <a:r>
-              <a:rPr kumimoji="1" lang="ja-JP" altLang="en-US" sz="3200" b="1" dirty="0">
-                <a:solidFill>
-                  <a:schemeClr val="bg1"/>
-                </a:solidFill>
-              </a:rPr>
-              <a:t>数学ライブラリ</a:t>
-            </a:r>
-          </a:p>
-        </p:txBody>
-      </p:sp>
-      <p:sp>
-        <p:nvSpPr>
-          <p:cNvPr id="9" name="テキスト ボックス 8">
-            <a:extLst>
-              <a:ext uri="{FF2B5EF4-FFF2-40B4-BE49-F238E27FC236}">
-                <a16:creationId xmlns:a16="http://schemas.microsoft.com/office/drawing/2014/main" id="{BBCACBDA-B786-06A1-2B2F-950A99F09582}"/>
-              </a:ext>
-            </a:extLst>
-          </p:cNvPr>
-          <p:cNvSpPr txBox="1"/>
-          <p:nvPr/>
-        </p:nvSpPr>
-        <p:spPr>
-          <a:xfrm>
-            <a:off x="371168" y="2255114"/>
-            <a:ext cx="10754032" cy="2593980"/>
-          </a:xfrm>
-          <a:prstGeom prst="rect">
-            <a:avLst/>
-          </a:prstGeom>
-          <a:noFill/>
-          <a:ln>
-            <a:noFill/>
-          </a:ln>
-        </p:spPr>
-        <p:txBody>
-          <a:bodyPr wrap="square" rtlCol="0">
-            <a:spAutoFit/>
-          </a:bodyPr>
-          <a:lstStyle/>
-          <a:p>
-            <a:pPr marL="0" marR="0" lvl="0" indent="0" algn="l" defTabSz="914400" rtl="0" eaLnBrk="0" fontAlgn="base" latinLnBrk="0" hangingPunct="0">
-              <a:lnSpc>
-                <a:spcPct val="150000"/>
-              </a:lnSpc>
-              <a:spcBef>
-                <a:spcPct val="0"/>
-              </a:spcBef>
-              <a:spcAft>
-                <a:spcPct val="0"/>
-              </a:spcAft>
-              <a:buClrTx/>
-              <a:buSzTx/>
-              <a:buFontTx/>
-              <a:buChar char="•"/>
-              <a:tabLst/>
-            </a:pPr>
-            <a:r>
-              <a:rPr kumimoji="0" lang="en-US" altLang="ja-JP" sz="2800" b="1" i="0" strike="noStrike" cap="none" normalizeH="0" baseline="0" dirty="0">
-                <a:ln>
-                  <a:noFill/>
-                </a:ln>
-                <a:solidFill>
-                  <a:srgbClr val="FF0000"/>
-                </a:solidFill>
-                <a:effectLst/>
-                <a:latin typeface="Arial" panose="020B0604020202020204" pitchFamily="34" charset="0"/>
-              </a:rPr>
-              <a:t> </a:t>
-            </a:r>
-            <a:r>
-              <a:rPr kumimoji="0" lang="ja-JP" altLang="ja-JP" sz="2800" b="1" i="0" u="sng" strike="noStrike" cap="none" normalizeH="0" baseline="0" dirty="0">
-                <a:ln>
-                  <a:noFill/>
-                </a:ln>
-                <a:solidFill>
-                  <a:srgbClr val="FF0000"/>
-                </a:solidFill>
-                <a:effectLst/>
-                <a:latin typeface="Arial" panose="020B0604020202020204" pitchFamily="34" charset="0"/>
-              </a:rPr>
-              <a:t>数学・文字列ライブラリを自作し差異を吸収</a:t>
-            </a:r>
-          </a:p>
-          <a:p>
-            <a:pPr marL="0" marR="0" lvl="0" indent="0" algn="l" defTabSz="914400" rtl="0" eaLnBrk="0" fontAlgn="base" latinLnBrk="0" hangingPunct="0">
-              <a:lnSpc>
-                <a:spcPct val="150000"/>
-              </a:lnSpc>
-              <a:spcBef>
-                <a:spcPct val="0"/>
-              </a:spcBef>
-              <a:spcAft>
-                <a:spcPct val="0"/>
-              </a:spcAft>
-              <a:buClrTx/>
-              <a:buSzTx/>
-              <a:buFontTx/>
-              <a:buChar char="•"/>
-              <a:tabLst/>
-            </a:pPr>
-            <a:r>
-              <a:rPr kumimoji="0" lang="en-US" altLang="ja-JP" sz="2800" b="1" i="0" strike="noStrike" cap="none" normalizeH="0" baseline="0" dirty="0">
-                <a:ln>
-                  <a:noFill/>
-                </a:ln>
-                <a:solidFill>
-                  <a:srgbClr val="FF0000"/>
-                </a:solidFill>
-                <a:effectLst/>
-                <a:latin typeface="Arial" panose="020B0604020202020204" pitchFamily="34" charset="0"/>
-              </a:rPr>
-              <a:t> </a:t>
-            </a:r>
-            <a:r>
-              <a:rPr kumimoji="0" lang="ja-JP" altLang="ja-JP" sz="2800" b="1" i="0" u="sng" strike="noStrike" cap="none" normalizeH="0" baseline="0" dirty="0">
-                <a:ln>
-                  <a:noFill/>
-                </a:ln>
-                <a:solidFill>
-                  <a:srgbClr val="FF0000"/>
-                </a:solidFill>
-                <a:effectLst/>
-                <a:latin typeface="Arial" panose="020B0604020202020204" pitchFamily="34" charset="0"/>
-              </a:rPr>
-              <a:t>数学処理は</a:t>
-            </a:r>
-            <a:r>
-              <a:rPr kumimoji="0" lang="ja-JP" altLang="en-US" sz="2800" b="1" i="0" u="sng" strike="noStrike" cap="none" normalizeH="0" baseline="0" dirty="0">
-                <a:ln>
-                  <a:noFill/>
-                </a:ln>
-                <a:solidFill>
-                  <a:srgbClr val="FF0000"/>
-                </a:solidFill>
-                <a:effectLst/>
-                <a:latin typeface="Arial" panose="020B0604020202020204" pitchFamily="34" charset="0"/>
-              </a:rPr>
-              <a:t>計算関数内を</a:t>
-            </a:r>
-            <a:r>
-              <a:rPr kumimoji="0" lang="en-US" altLang="ja-JP" sz="2800" b="1" i="0" u="sng" strike="noStrike" cap="none" normalizeH="0" baseline="0" dirty="0">
-                <a:ln>
-                  <a:noFill/>
-                </a:ln>
-                <a:solidFill>
-                  <a:srgbClr val="FF0000"/>
-                </a:solidFill>
-                <a:effectLst/>
-                <a:latin typeface="Arial" panose="020B0604020202020204" pitchFamily="34" charset="0"/>
-              </a:rPr>
-              <a:t>API</a:t>
-            </a:r>
-            <a:r>
-              <a:rPr kumimoji="0" lang="ja-JP" altLang="en-US" sz="2800" b="1" i="0" u="sng" strike="noStrike" cap="none" normalizeH="0" baseline="0" dirty="0">
-                <a:ln>
-                  <a:noFill/>
-                </a:ln>
-                <a:solidFill>
-                  <a:srgbClr val="FF0000"/>
-                </a:solidFill>
-                <a:effectLst/>
-                <a:latin typeface="Arial" panose="020B0604020202020204" pitchFamily="34" charset="0"/>
-              </a:rPr>
-              <a:t>依存のものを使用して最適化</a:t>
-            </a:r>
-            <a:endParaRPr kumimoji="0" lang="ja-JP" altLang="ja-JP" sz="2800" b="1" i="0" u="sng" strike="noStrike" cap="none" normalizeH="0" baseline="0" dirty="0">
-              <a:ln>
-                <a:noFill/>
-              </a:ln>
-              <a:solidFill>
-                <a:srgbClr val="FF0000"/>
-              </a:solidFill>
-              <a:effectLst/>
-              <a:latin typeface="Arial" panose="020B0604020202020204" pitchFamily="34" charset="0"/>
-            </a:endParaRPr>
-          </a:p>
-          <a:p>
-            <a:pPr marL="0" marR="0" lvl="0" indent="0" algn="l" defTabSz="914400" rtl="0" eaLnBrk="0" fontAlgn="base" latinLnBrk="0" hangingPunct="0">
-              <a:lnSpc>
-                <a:spcPct val="150000"/>
-              </a:lnSpc>
-              <a:spcBef>
-                <a:spcPct val="0"/>
-              </a:spcBef>
-              <a:spcAft>
-                <a:spcPct val="0"/>
-              </a:spcAft>
-              <a:buClrTx/>
-              <a:buSzTx/>
-              <a:buFontTx/>
-              <a:buChar char="•"/>
-              <a:tabLst/>
-            </a:pPr>
-            <a:r>
-              <a:rPr kumimoji="0" lang="en-US" altLang="ja-JP" sz="2800" b="1" i="0" strike="noStrike" cap="none" normalizeH="0" baseline="0" dirty="0">
-                <a:ln>
-                  <a:noFill/>
-                </a:ln>
-                <a:solidFill>
-                  <a:srgbClr val="FF0000"/>
-                </a:solidFill>
-                <a:effectLst/>
-                <a:latin typeface="Arial" panose="020B0604020202020204" pitchFamily="34" charset="0"/>
-              </a:rPr>
-              <a:t> </a:t>
-            </a:r>
-            <a:r>
-              <a:rPr kumimoji="0" lang="ja-JP" altLang="ja-JP" sz="2800" b="1" i="0" u="sng" strike="noStrike" cap="none" normalizeH="0" baseline="0" dirty="0">
-                <a:ln>
-                  <a:noFill/>
-                </a:ln>
-                <a:solidFill>
-                  <a:srgbClr val="FF0000"/>
-                </a:solidFill>
-                <a:effectLst/>
-                <a:latin typeface="Arial" panose="020B0604020202020204" pitchFamily="34" charset="0"/>
-              </a:rPr>
-              <a:t>文字列は UTF-8 に統一</a:t>
-            </a:r>
-          </a:p>
-          <a:p>
-            <a:pPr marL="0" marR="0" lvl="0" indent="0" algn="l" defTabSz="914400" rtl="0" eaLnBrk="0" fontAlgn="base" latinLnBrk="0" hangingPunct="0">
-              <a:lnSpc>
-                <a:spcPct val="150000"/>
-              </a:lnSpc>
-              <a:spcBef>
-                <a:spcPct val="0"/>
-              </a:spcBef>
-              <a:spcAft>
-                <a:spcPct val="0"/>
-              </a:spcAft>
-              <a:buClrTx/>
-              <a:buSzTx/>
-              <a:buFontTx/>
-              <a:buChar char="•"/>
-              <a:tabLst/>
-            </a:pPr>
-            <a:r>
-              <a:rPr kumimoji="0" lang="en-US" altLang="ja-JP" sz="2800" b="1" strike="noStrike" cap="none" normalizeH="0" baseline="0" dirty="0">
-                <a:ln>
-                  <a:noFill/>
-                </a:ln>
-                <a:solidFill>
-                  <a:srgbClr val="FF0000"/>
-                </a:solidFill>
-                <a:effectLst/>
-                <a:latin typeface="Arial" panose="020B0604020202020204" pitchFamily="34" charset="0"/>
-              </a:rPr>
-              <a:t> </a:t>
-            </a:r>
-            <a:r>
-              <a:rPr kumimoji="0" lang="ja-JP" altLang="ja-JP" sz="2800" b="1" i="0" u="sng" strike="noStrike" cap="none" normalizeH="0" baseline="0" dirty="0">
-                <a:ln>
-                  <a:noFill/>
-                </a:ln>
-                <a:solidFill>
-                  <a:srgbClr val="FF0000"/>
-                </a:solidFill>
-                <a:effectLst/>
-                <a:latin typeface="Arial" panose="020B0604020202020204" pitchFamily="34" charset="0"/>
-              </a:rPr>
-              <a:t>行列</a:t>
-            </a:r>
-            <a:r>
-              <a:rPr kumimoji="0" lang="ja-JP" altLang="en-US" sz="2800" b="1" i="0" u="sng" strike="noStrike" cap="none" normalizeH="0" baseline="0" dirty="0">
-                <a:ln>
-                  <a:noFill/>
-                </a:ln>
-                <a:solidFill>
-                  <a:srgbClr val="FF0000"/>
-                </a:solidFill>
-                <a:effectLst/>
-                <a:latin typeface="Arial" panose="020B0604020202020204" pitchFamily="34" charset="0"/>
-              </a:rPr>
-              <a:t>ルールを</a:t>
-            </a:r>
-            <a:r>
-              <a:rPr kumimoji="0" lang="ja-JP" altLang="ja-JP" sz="2800" b="1" i="0" u="sng" strike="noStrike" cap="none" normalizeH="0" baseline="0" dirty="0">
-                <a:ln>
-                  <a:noFill/>
-                </a:ln>
-                <a:solidFill>
-                  <a:srgbClr val="FF0000"/>
-                </a:solidFill>
-                <a:effectLst/>
-                <a:latin typeface="Arial" panose="020B0604020202020204" pitchFamily="34" charset="0"/>
-              </a:rPr>
-              <a:t>左手・列優先</a:t>
-            </a:r>
-            <a:r>
-              <a:rPr kumimoji="0" lang="en-US" altLang="ja-JP" sz="2800" b="1" i="0" u="sng" strike="noStrike" cap="none" normalizeH="0" baseline="0" dirty="0">
-                <a:ln>
-                  <a:noFill/>
-                </a:ln>
-                <a:solidFill>
-                  <a:srgbClr val="FF0000"/>
-                </a:solidFill>
-                <a:effectLst/>
-                <a:latin typeface="Arial" panose="020B0604020202020204" pitchFamily="34" charset="0"/>
-              </a:rPr>
-              <a:t>(</a:t>
-            </a:r>
-            <a:r>
-              <a:rPr kumimoji="0" lang="ja-JP" altLang="en-US" sz="2800" b="1" i="0" u="sng" strike="noStrike" cap="none" normalizeH="0" baseline="0" dirty="0">
-                <a:ln>
-                  <a:noFill/>
-                </a:ln>
-                <a:solidFill>
-                  <a:srgbClr val="FF0000"/>
-                </a:solidFill>
-                <a:effectLst/>
-                <a:latin typeface="Arial" panose="020B0604020202020204" pitchFamily="34" charset="0"/>
-              </a:rPr>
-              <a:t>列ベクトル</a:t>
-            </a:r>
-            <a:r>
-              <a:rPr kumimoji="0" lang="en-US" altLang="ja-JP" sz="2800" b="1" i="0" u="sng" strike="noStrike" cap="none" normalizeH="0" baseline="0" dirty="0">
-                <a:ln>
-                  <a:noFill/>
-                </a:ln>
-                <a:solidFill>
-                  <a:srgbClr val="FF0000"/>
-                </a:solidFill>
-                <a:effectLst/>
-                <a:latin typeface="Arial" panose="020B0604020202020204" pitchFamily="34" charset="0"/>
-              </a:rPr>
-              <a:t>)</a:t>
-            </a:r>
-            <a:r>
-              <a:rPr kumimoji="0" lang="ja-JP" altLang="en-US" sz="2800" b="1" i="0" u="sng" strike="noStrike" cap="none" normalizeH="0" baseline="0" dirty="0">
-                <a:ln>
-                  <a:noFill/>
-                </a:ln>
-                <a:solidFill>
-                  <a:srgbClr val="FF0000"/>
-                </a:solidFill>
-                <a:effectLst/>
-                <a:latin typeface="Arial" panose="020B0604020202020204" pitchFamily="34" charset="0"/>
-              </a:rPr>
-              <a:t>で決定</a:t>
-            </a:r>
-            <a:endParaRPr kumimoji="0" lang="ja-JP" altLang="ja-JP" sz="2800" b="1" i="0" u="sng" strike="noStrike" cap="none" normalizeH="0" baseline="0" dirty="0">
-              <a:ln>
-                <a:noFill/>
-              </a:ln>
-              <a:solidFill>
-                <a:srgbClr val="FF0000"/>
-              </a:solidFill>
-              <a:effectLst/>
-              <a:latin typeface="Arial" panose="020B0604020202020204" pitchFamily="34" charset="0"/>
-            </a:endParaRPr>
-          </a:p>
-        </p:txBody>
-      </p:sp>
-      <p:pic>
-        <p:nvPicPr>
-          <p:cNvPr id="5" name="図 4" descr="テキスト&#10;&#10;AI 生成コンテンツは誤りを含む可能性があります。">
-            <a:extLst>
-              <a:ext uri="{FF2B5EF4-FFF2-40B4-BE49-F238E27FC236}">
-                <a16:creationId xmlns:a16="http://schemas.microsoft.com/office/drawing/2014/main" id="{48766FDA-2376-B14F-F9FC-8FC373C51E13}"/>
-              </a:ext>
-            </a:extLst>
-          </p:cNvPr>
-          <p:cNvPicPr>
-            <a:picLocks noChangeAspect="1"/>
-          </p:cNvPicPr>
-          <p:nvPr/>
-        </p:nvPicPr>
-        <p:blipFill>
-          <a:blip r:embed="rId2"/>
-          <a:stretch>
-            <a:fillRect/>
-          </a:stretch>
-        </p:blipFill>
-        <p:spPr>
-          <a:xfrm>
-            <a:off x="9839632" y="142895"/>
-            <a:ext cx="1981200" cy="2597573"/>
-          </a:xfrm>
-          <a:prstGeom prst="rect">
-            <a:avLst/>
-          </a:prstGeom>
-        </p:spPr>
-      </p:pic>
-      <p:pic>
-        <p:nvPicPr>
-          <p:cNvPr id="8" name="図 7" descr="テキスト&#10;&#10;AI 生成コンテンツは誤りを含む可能性があります。">
-            <a:extLst>
-              <a:ext uri="{FF2B5EF4-FFF2-40B4-BE49-F238E27FC236}">
-                <a16:creationId xmlns:a16="http://schemas.microsoft.com/office/drawing/2014/main" id="{E6A71839-FB3B-0B2A-DF05-2F7D00725441}"/>
-              </a:ext>
-            </a:extLst>
-          </p:cNvPr>
-          <p:cNvPicPr>
-            <a:picLocks noChangeAspect="1"/>
-          </p:cNvPicPr>
-          <p:nvPr/>
-        </p:nvPicPr>
-        <p:blipFill>
-          <a:blip r:embed="rId3"/>
-          <a:stretch>
-            <a:fillRect/>
-          </a:stretch>
-        </p:blipFill>
-        <p:spPr>
-          <a:xfrm>
-            <a:off x="1964609" y="4869414"/>
-            <a:ext cx="2319184" cy="1926797"/>
-          </a:xfrm>
-          <a:prstGeom prst="rect">
-            <a:avLst/>
-          </a:prstGeom>
-        </p:spPr>
-      </p:pic>
-      <p:pic>
-        <p:nvPicPr>
-          <p:cNvPr id="11" name="図 10" descr="テキスト&#10;&#10;AI 生成コンテンツは誤りを含む可能性があります。">
-            <a:extLst>
-              <a:ext uri="{FF2B5EF4-FFF2-40B4-BE49-F238E27FC236}">
-                <a16:creationId xmlns:a16="http://schemas.microsoft.com/office/drawing/2014/main" id="{C8B781E0-4B59-E32B-9C85-287121A86A1C}"/>
-              </a:ext>
-            </a:extLst>
-          </p:cNvPr>
-          <p:cNvPicPr>
-            <a:picLocks noChangeAspect="1"/>
-          </p:cNvPicPr>
-          <p:nvPr/>
-        </p:nvPicPr>
-        <p:blipFill>
-          <a:blip r:embed="rId4"/>
-          <a:stretch>
-            <a:fillRect/>
-          </a:stretch>
-        </p:blipFill>
-        <p:spPr>
-          <a:xfrm>
-            <a:off x="9067800" y="4379556"/>
-            <a:ext cx="2819400" cy="2108626"/>
-          </a:xfrm>
-          <a:prstGeom prst="rect">
-            <a:avLst/>
-          </a:prstGeom>
-        </p:spPr>
-      </p:pic>
-    </p:spTree>
-    <p:extLst>
-      <p:ext uri="{BB962C8B-B14F-4D97-AF65-F5344CB8AC3E}">
-        <p14:creationId xmlns:p14="http://schemas.microsoft.com/office/powerpoint/2010/main" val="875634887"/>
-      </p:ext>
-    </p:extLst>
-  </p:cSld>
-  <p:clrMapOvr>
-    <a:masterClrMapping/>
-  </p:clrMapOvr>
-</p:sld>
-</file>
-
-<file path=ppt/slides/slide7.xml><?xml version="1.0" encoding="utf-8"?>
-<p:sld xmlns:a="http://schemas.openxmlformats.org/drawingml/2006/main" xmlns:r="http://schemas.openxmlformats.org/officeDocument/2006/relationships" xmlns:p="http://schemas.openxmlformats.org/presentationml/2006/main">
-  <p:cSld>
-    <p:spTree>
-      <p:nvGrpSpPr>
-        <p:cNvPr id="1" name="">
-          <a:extLst>
-            <a:ext uri="{FF2B5EF4-FFF2-40B4-BE49-F238E27FC236}">
               <a16:creationId xmlns:a16="http://schemas.microsoft.com/office/drawing/2014/main" id="{D272469C-9544-3EE0-2E53-A6F33783F7EE}"/>
             </a:ext>
           </a:extLst>
@@ -5849,7 +5022,7 @@
 </p:sld>
 </file>
 
-<file path=ppt/slides/slide8.xml><?xml version="1.0" encoding="utf-8"?>
+<file path=ppt/slides/slide7.xml><?xml version="1.0" encoding="utf-8"?>
 <p:sld xmlns:a="http://schemas.openxmlformats.org/drawingml/2006/main" xmlns:r="http://schemas.openxmlformats.org/officeDocument/2006/relationships" xmlns:p="http://schemas.openxmlformats.org/presentationml/2006/main">
   <p:cSld>
     <p:spTree>
@@ -6380,7 +5553,7 @@
 </p:sld>
 </file>
 
-<file path=ppt/slides/slide9.xml><?xml version="1.0" encoding="utf-8"?>
+<file path=ppt/slides/slide8.xml><?xml version="1.0" encoding="utf-8"?>
 <p:sld xmlns:a="http://schemas.openxmlformats.org/drawingml/2006/main" xmlns:r="http://schemas.openxmlformats.org/officeDocument/2006/relationships" xmlns:p="http://schemas.openxmlformats.org/presentationml/2006/main">
   <p:cSld>
     <p:spTree>
@@ -6978,6 +6151,296 @@
     <p:extLst>
       <p:ext uri="{BB962C8B-B14F-4D97-AF65-F5344CB8AC3E}">
         <p14:creationId xmlns:p14="http://schemas.microsoft.com/office/powerpoint/2010/main" val="1589482950"/>
+      </p:ext>
+    </p:extLst>
+  </p:cSld>
+  <p:clrMapOvr>
+    <a:masterClrMapping/>
+  </p:clrMapOvr>
+</p:sld>
+</file>
+
+<file path=ppt/slides/slide9.xml><?xml version="1.0" encoding="utf-8"?>
+<p:sld xmlns:a="http://schemas.openxmlformats.org/drawingml/2006/main" xmlns:r="http://schemas.openxmlformats.org/officeDocument/2006/relationships" xmlns:p="http://schemas.openxmlformats.org/presentationml/2006/main">
+  <p:cSld>
+    <p:spTree>
+      <p:nvGrpSpPr>
+        <p:cNvPr id="1" name="">
+          <a:extLst>
+            <a:ext uri="{FF2B5EF4-FFF2-40B4-BE49-F238E27FC236}">
+              <a16:creationId xmlns:a16="http://schemas.microsoft.com/office/drawing/2014/main" id="{0EE6778F-F635-0616-B585-7716CA1C0ACF}"/>
+            </a:ext>
+          </a:extLst>
+        </p:cNvPr>
+        <p:cNvGrpSpPr/>
+        <p:nvPr/>
+      </p:nvGrpSpPr>
+      <p:grpSpPr>
+        <a:xfrm>
+          <a:off x="0" y="0"/>
+          <a:ext cx="0" cy="0"/>
+          <a:chOff x="0" y="0"/>
+          <a:chExt cx="0" cy="0"/>
+        </a:xfrm>
+      </p:grpSpPr>
+      <p:sp>
+        <p:nvSpPr>
+          <p:cNvPr id="2" name="タイトル 1">
+            <a:extLst>
+              <a:ext uri="{FF2B5EF4-FFF2-40B4-BE49-F238E27FC236}">
+                <a16:creationId xmlns:a16="http://schemas.microsoft.com/office/drawing/2014/main" id="{2DB26341-98AF-0E9C-4437-65316181FF16}"/>
+              </a:ext>
+            </a:extLst>
+          </p:cNvPr>
+          <p:cNvSpPr>
+            <a:spLocks noGrp="1"/>
+          </p:cNvSpPr>
+          <p:nvPr>
+            <p:ph type="title"/>
+          </p:nvPr>
+        </p:nvSpPr>
+        <p:spPr>
+          <a:xfrm>
+            <a:off x="371168" y="390833"/>
+            <a:ext cx="7706032" cy="923330"/>
+          </a:xfrm>
+        </p:spPr>
+        <p:txBody>
+          <a:bodyPr/>
+          <a:lstStyle/>
+          <a:p>
+            <a:r>
+              <a:rPr kumimoji="1" lang="ja-JP" altLang="en-US" sz="6000" dirty="0"/>
+              <a:t>コンセプト実現に向けて</a:t>
+            </a:r>
+          </a:p>
+        </p:txBody>
+      </p:sp>
+      <p:sp>
+        <p:nvSpPr>
+          <p:cNvPr id="7" name="テキスト ボックス 6">
+            <a:extLst>
+              <a:ext uri="{FF2B5EF4-FFF2-40B4-BE49-F238E27FC236}">
+                <a16:creationId xmlns:a16="http://schemas.microsoft.com/office/drawing/2014/main" id="{F341FC28-02CD-E182-1342-CF3FB1CB8771}"/>
+              </a:ext>
+            </a:extLst>
+          </p:cNvPr>
+          <p:cNvSpPr txBox="1"/>
+          <p:nvPr/>
+        </p:nvSpPr>
+        <p:spPr>
+          <a:xfrm>
+            <a:off x="371168" y="1670339"/>
+            <a:ext cx="1686232" cy="584775"/>
+          </a:xfrm>
+          <a:prstGeom prst="rect">
+            <a:avLst/>
+          </a:prstGeom>
+          <a:noFill/>
+          <a:ln w="19050">
+            <a:solidFill>
+              <a:schemeClr val="bg1"/>
+            </a:solidFill>
+          </a:ln>
+        </p:spPr>
+        <p:txBody>
+          <a:bodyPr wrap="square" rtlCol="0">
+            <a:spAutoFit/>
+          </a:bodyPr>
+          <a:lstStyle/>
+          <a:p>
+            <a:pPr algn="l"/>
+            <a:r>
+              <a:rPr kumimoji="1" lang="en-US" altLang="ja-JP" sz="3200" dirty="0" err="1">
+                <a:solidFill>
+                  <a:schemeClr val="bg1"/>
+                </a:solidFill>
+              </a:rPr>
+              <a:t>CMake</a:t>
+            </a:r>
+            <a:endParaRPr kumimoji="1" lang="ja-JP" altLang="en-US" sz="3200" dirty="0">
+              <a:solidFill>
+                <a:schemeClr val="bg1"/>
+              </a:solidFill>
+            </a:endParaRPr>
+          </a:p>
+        </p:txBody>
+      </p:sp>
+      <p:sp>
+        <p:nvSpPr>
+          <p:cNvPr id="9" name="テキスト ボックス 8">
+            <a:extLst>
+              <a:ext uri="{FF2B5EF4-FFF2-40B4-BE49-F238E27FC236}">
+                <a16:creationId xmlns:a16="http://schemas.microsoft.com/office/drawing/2014/main" id="{9C391546-A754-DD6D-302A-C86B444F8767}"/>
+              </a:ext>
+            </a:extLst>
+          </p:cNvPr>
+          <p:cNvSpPr txBox="1"/>
+          <p:nvPr/>
+        </p:nvSpPr>
+        <p:spPr>
+          <a:xfrm>
+            <a:off x="371168" y="2255114"/>
+            <a:ext cx="10754032" cy="1301318"/>
+          </a:xfrm>
+          <a:prstGeom prst="rect">
+            <a:avLst/>
+          </a:prstGeom>
+          <a:noFill/>
+          <a:ln>
+            <a:noFill/>
+          </a:ln>
+        </p:spPr>
+        <p:txBody>
+          <a:bodyPr wrap="square" rtlCol="0">
+            <a:spAutoFit/>
+          </a:bodyPr>
+          <a:lstStyle/>
+          <a:p>
+            <a:pPr marL="0" marR="0" lvl="0" indent="0" algn="l" defTabSz="914400" rtl="0" eaLnBrk="0" fontAlgn="base" latinLnBrk="0" hangingPunct="0">
+              <a:lnSpc>
+                <a:spcPct val="150000"/>
+              </a:lnSpc>
+              <a:spcBef>
+                <a:spcPct val="0"/>
+              </a:spcBef>
+              <a:spcAft>
+                <a:spcPct val="0"/>
+              </a:spcAft>
+              <a:buClrTx/>
+              <a:buSzTx/>
+              <a:buFontTx/>
+              <a:buChar char="•"/>
+              <a:tabLst/>
+            </a:pPr>
+            <a:r>
+              <a:rPr lang="ja-JP" altLang="en-US" sz="2800" b="1" u="sng" dirty="0">
+                <a:solidFill>
+                  <a:srgbClr val="FF0000"/>
+                </a:solidFill>
+                <a:latin typeface="Arial" panose="020B0604020202020204" pitchFamily="34" charset="0"/>
+              </a:rPr>
+              <a:t>マルチプラットフォームへの対応が行いやすい</a:t>
+            </a:r>
+            <a:endParaRPr kumimoji="0" lang="en-US" altLang="ja-JP" sz="2800" b="1" i="0" u="sng" strike="noStrike" cap="none" normalizeH="0" baseline="0" dirty="0">
+              <a:ln>
+                <a:noFill/>
+              </a:ln>
+              <a:solidFill>
+                <a:srgbClr val="FF0000"/>
+              </a:solidFill>
+              <a:effectLst/>
+              <a:latin typeface="Arial" panose="020B0604020202020204" pitchFamily="34" charset="0"/>
+            </a:endParaRPr>
+          </a:p>
+          <a:p>
+            <a:pPr marL="0" marR="0" lvl="0" indent="0" algn="l" defTabSz="914400" rtl="0" eaLnBrk="0" fontAlgn="base" latinLnBrk="0" hangingPunct="0">
+              <a:lnSpc>
+                <a:spcPct val="150000"/>
+              </a:lnSpc>
+              <a:spcBef>
+                <a:spcPct val="0"/>
+              </a:spcBef>
+              <a:spcAft>
+                <a:spcPct val="0"/>
+              </a:spcAft>
+              <a:buClrTx/>
+              <a:buSzTx/>
+              <a:buFontTx/>
+              <a:buChar char="•"/>
+              <a:tabLst/>
+            </a:pPr>
+            <a:r>
+              <a:rPr kumimoji="0" lang="en-US" altLang="ja-JP" sz="2800" b="1" i="0" u="sng" strike="noStrike" cap="none" normalizeH="0" baseline="0" dirty="0">
+                <a:ln>
+                  <a:noFill/>
+                </a:ln>
+                <a:solidFill>
+                  <a:srgbClr val="FF0000"/>
+                </a:solidFill>
+                <a:effectLst/>
+              </a:rPr>
+              <a:t>Visual</a:t>
+            </a:r>
+            <a:r>
+              <a:rPr lang="ja-JP" altLang="en-US" sz="2800" b="1" u="sng" dirty="0">
+                <a:solidFill>
+                  <a:srgbClr val="FF0000"/>
+                </a:solidFill>
+              </a:rPr>
+              <a:t> </a:t>
+            </a:r>
+            <a:r>
+              <a:rPr kumimoji="0" lang="en-US" altLang="ja-JP" sz="2800" b="1" i="0" u="sng" strike="noStrike" cap="none" normalizeH="0" baseline="0" dirty="0">
+                <a:ln>
+                  <a:noFill/>
+                </a:ln>
+                <a:solidFill>
+                  <a:srgbClr val="FF0000"/>
+                </a:solidFill>
+                <a:effectLst/>
+              </a:rPr>
+              <a:t>Studio</a:t>
+            </a:r>
+            <a:r>
+              <a:rPr kumimoji="0" lang="ja-JP" altLang="en-US" sz="2800" b="1" i="0" u="sng" strike="noStrike" cap="none" normalizeH="0" baseline="0" dirty="0">
+                <a:ln>
+                  <a:noFill/>
+                </a:ln>
+                <a:solidFill>
+                  <a:srgbClr val="FF0000"/>
+                </a:solidFill>
+                <a:effectLst/>
+              </a:rPr>
+              <a:t>に依存しない</a:t>
+            </a:r>
+            <a:endParaRPr kumimoji="0" lang="ja-JP" altLang="ja-JP" sz="2800" b="1" i="0" u="sng" strike="noStrike" cap="none" normalizeH="0" baseline="0" dirty="0">
+              <a:ln>
+                <a:noFill/>
+              </a:ln>
+              <a:solidFill>
+                <a:srgbClr val="FF0000"/>
+              </a:solidFill>
+              <a:effectLst/>
+              <a:latin typeface="Arial" panose="020B0604020202020204" pitchFamily="34" charset="0"/>
+            </a:endParaRPr>
+          </a:p>
+        </p:txBody>
+      </p:sp>
+      <p:pic>
+        <p:nvPicPr>
+          <p:cNvPr id="4" name="図 3" descr="テキスト&#10;&#10;AI 生成コンテンツは誤りを含む可能性があります。">
+            <a:extLst>
+              <a:ext uri="{FF2B5EF4-FFF2-40B4-BE49-F238E27FC236}">
+                <a16:creationId xmlns:a16="http://schemas.microsoft.com/office/drawing/2014/main" id="{25A12992-FB76-D612-8CDD-0BADB4BEE9B9}"/>
+              </a:ext>
+            </a:extLst>
+          </p:cNvPr>
+          <p:cNvPicPr>
+            <a:picLocks noChangeAspect="1"/>
+          </p:cNvPicPr>
+          <p:nvPr/>
+        </p:nvPicPr>
+        <p:blipFill>
+          <a:blip r:embed="rId2"/>
+          <a:stretch>
+            <a:fillRect/>
+          </a:stretch>
+        </p:blipFill>
+        <p:spPr>
+          <a:xfrm>
+            <a:off x="8045245" y="2998781"/>
+            <a:ext cx="3967514" cy="3577513"/>
+          </a:xfrm>
+          <a:prstGeom prst="rect">
+            <a:avLst/>
+          </a:prstGeom>
+        </p:spPr>
+      </p:pic>
+    </p:spTree>
+    <p:extLst>
+      <p:ext uri="{BB962C8B-B14F-4D97-AF65-F5344CB8AC3E}">
+        <p14:creationId xmlns:p14="http://schemas.microsoft.com/office/powerpoint/2010/main" val="2883724813"/>
       </p:ext>
     </p:extLst>
   </p:cSld>

--- a/就職作品詳細資料.pptx
+++ b/就職作品詳細資料.pptx
@@ -5,7 +5,7 @@
     <p:sldMasterId id="2147483648" r:id="rId1"/>
   </p:sldMasterIdLst>
   <p:notesMasterIdLst>
-    <p:notesMasterId r:id="rId13"/>
+    <p:notesMasterId r:id="rId18"/>
   </p:notesMasterIdLst>
   <p:sldIdLst>
     <p:sldId id="256" r:id="rId2"/>
@@ -18,7 +18,12 @@
     <p:sldId id="265" r:id="rId9"/>
     <p:sldId id="268" r:id="rId10"/>
     <p:sldId id="269" r:id="rId11"/>
-    <p:sldId id="266" r:id="rId12"/>
+    <p:sldId id="270" r:id="rId12"/>
+    <p:sldId id="272" r:id="rId13"/>
+    <p:sldId id="271" r:id="rId14"/>
+    <p:sldId id="273" r:id="rId15"/>
+    <p:sldId id="274" r:id="rId16"/>
+    <p:sldId id="275" r:id="rId17"/>
   </p:sldIdLst>
   <p:sldSz cx="12192000" cy="6858000"/>
   <p:notesSz cx="12192000" cy="6858000"/>
@@ -128,7 +133,7 @@
           <a:p>
             <a:fld id="{7844CC07-7CCF-4856-941D-F16981C68265}" type="datetimeFigureOut">
               <a:rPr kumimoji="1" lang="ja-JP" altLang="en-US" smtClean="0"/>
-              <a:t>2026/2/18</a:t>
+              <a:t>2026/2/19</a:t>
             </a:fld>
             <a:endParaRPr kumimoji="1" lang="ja-JP" altLang="en-US"/>
           </a:p>
@@ -662,7 +667,7 @@
           <a:p>
             <a:fld id="{1D8BD707-D9CF-40AE-B4C6-C98DA3205C09}" type="datetimeFigureOut">
               <a:rPr lang="en-US"/>
-              <a:t>2/18/2026</a:t>
+              <a:t>2/19/2026</a:t>
             </a:fld>
             <a:endParaRPr lang="en-US"/>
           </a:p>
@@ -839,7 +844,7 @@
           <a:p>
             <a:fld id="{1D8BD707-D9CF-40AE-B4C6-C98DA3205C09}" type="datetimeFigureOut">
               <a:rPr lang="en-US"/>
-              <a:t>2/18/2026</a:t>
+              <a:t>2/19/2026</a:t>
             </a:fld>
             <a:endParaRPr lang="en-US"/>
           </a:p>
@@ -1053,7 +1058,7 @@
           <a:p>
             <a:fld id="{1D8BD707-D9CF-40AE-B4C6-C98DA3205C09}" type="datetimeFigureOut">
               <a:rPr lang="en-US"/>
-              <a:t>2/18/2026</a:t>
+              <a:t>2/19/2026</a:t>
             </a:fld>
             <a:endParaRPr lang="en-US"/>
           </a:p>
@@ -1201,7 +1206,7 @@
           <a:p>
             <a:fld id="{1D8BD707-D9CF-40AE-B4C6-C98DA3205C09}" type="datetimeFigureOut">
               <a:rPr lang="en-US"/>
-              <a:t>2/18/2026</a:t>
+              <a:t>2/19/2026</a:t>
             </a:fld>
             <a:endParaRPr lang="en-US"/>
           </a:p>
@@ -1320,7 +1325,7 @@
           <a:p>
             <a:fld id="{1D8BD707-D9CF-40AE-B4C6-C98DA3205C09}" type="datetimeFigureOut">
               <a:rPr lang="en-US"/>
-              <a:t>2/18/2026</a:t>
+              <a:t>2/19/2026</a:t>
             </a:fld>
             <a:endParaRPr lang="en-US"/>
           </a:p>
@@ -1567,7 +1572,7 @@
           <a:p>
             <a:fld id="{1D8BD707-D9CF-40AE-B4C6-C98DA3205C09}" type="datetimeFigureOut">
               <a:rPr lang="en-US"/>
-              <a:t>2/18/2026</a:t>
+              <a:t>2/19/2026</a:t>
             </a:fld>
             <a:endParaRPr lang="en-US"/>
           </a:p>
@@ -2063,7 +2068,7 @@
               <a:t>DirectX</a:t>
             </a:r>
             <a:r>
-              <a:rPr kumimoji="0" lang="ja-JP" altLang="en-US" sz="2800" b="1" i="0" u="sng" strike="noStrike" cap="none" normalizeH="0" baseline="0">
+              <a:rPr kumimoji="0" lang="ja-JP" altLang="en-US" sz="2800" b="1" i="0" u="sng" strike="noStrike" cap="none" normalizeH="0" baseline="0" dirty="0">
                 <a:ln>
                   <a:noFill/>
                 </a:ln>
@@ -2076,7 +2081,7 @@
               <a:t>で</a:t>
             </a:r>
             <a:r>
-              <a:rPr lang="ja-JP" altLang="en-US" sz="2800" b="1" u="sng">
+              <a:rPr lang="ja-JP" altLang="en-US" sz="2800" b="1" u="sng" dirty="0">
                 <a:solidFill>
                   <a:srgbClr val="FF0000"/>
                 </a:solidFill>
@@ -2264,7 +2269,7 @@
         <p:cNvPr id="1" name="">
           <a:extLst>
             <a:ext uri="{FF2B5EF4-FFF2-40B4-BE49-F238E27FC236}">
-              <a16:creationId xmlns:a16="http://schemas.microsoft.com/office/drawing/2014/main" id="{5180B81A-2B52-A397-F013-E1D59C17A104}"/>
+              <a16:creationId xmlns:a16="http://schemas.microsoft.com/office/drawing/2014/main" id="{5B2C7372-ED01-E531-666C-D915BB10BA4E}"/>
             </a:ext>
           </a:extLst>
         </p:cNvPr>
@@ -2284,7 +2289,7 @@
           <p:cNvPr id="2" name="タイトル 1">
             <a:extLst>
               <a:ext uri="{FF2B5EF4-FFF2-40B4-BE49-F238E27FC236}">
-                <a16:creationId xmlns:a16="http://schemas.microsoft.com/office/drawing/2014/main" id="{491EDACF-D60C-FE19-77A7-71118ED88DD2}"/>
+                <a16:creationId xmlns:a16="http://schemas.microsoft.com/office/drawing/2014/main" id="{D20B677F-6748-6461-8629-A772D11BDDC1}"/>
               </a:ext>
             </a:extLst>
           </p:cNvPr>
@@ -2298,7 +2303,7 @@
         <p:spPr>
           <a:xfrm>
             <a:off x="371168" y="390833"/>
-            <a:ext cx="7706032" cy="923330"/>
+            <a:ext cx="4734232" cy="1056967"/>
           </a:xfrm>
         </p:spPr>
         <p:txBody>
@@ -2307,7 +2312,7 @@
           <a:p>
             <a:r>
               <a:rPr kumimoji="1" lang="ja-JP" altLang="en-US" sz="6000" dirty="0"/>
-              <a:t>今後</a:t>
+              <a:t>問題点と今後</a:t>
             </a:r>
           </a:p>
         </p:txBody>
@@ -2317,7 +2322,7 @@
           <p:cNvPr id="7" name="テキスト ボックス 6">
             <a:extLst>
               <a:ext uri="{FF2B5EF4-FFF2-40B4-BE49-F238E27FC236}">
-                <a16:creationId xmlns:a16="http://schemas.microsoft.com/office/drawing/2014/main" id="{A370E018-015F-6D9B-6B02-3A8BADC61388}"/>
+                <a16:creationId xmlns:a16="http://schemas.microsoft.com/office/drawing/2014/main" id="{2148FB8C-D07F-2C9F-3D46-FE119165A1FE}"/>
               </a:ext>
             </a:extLst>
           </p:cNvPr>
@@ -2326,8 +2331,8 @@
         </p:nvSpPr>
         <p:spPr>
           <a:xfrm>
-            <a:off x="371168" y="1658644"/>
-            <a:ext cx="8849032" cy="584775"/>
+            <a:off x="371168" y="1670339"/>
+            <a:ext cx="4734232" cy="584775"/>
           </a:xfrm>
           <a:prstGeom prst="rect">
             <a:avLst/>
@@ -2352,23 +2357,7 @@
                   <a:schemeClr val="bg1"/>
                 </a:solidFill>
               </a:rPr>
-              <a:t>キャッシュミス </a:t>
-            </a:r>
-            <a:r>
-              <a:rPr kumimoji="1" lang="en-US" altLang="ja-JP" sz="3200" dirty="0">
-                <a:solidFill>
-                  <a:schemeClr val="bg1"/>
-                </a:solidFill>
-              </a:rPr>
-              <a:t>: </a:t>
-            </a:r>
-            <a:r>
-              <a:rPr kumimoji="1" lang="ja-JP" altLang="en-US" sz="3200" dirty="0">
-                <a:solidFill>
-                  <a:schemeClr val="bg1"/>
-                </a:solidFill>
-              </a:rPr>
-              <a:t>描画マネージャーの単一責任</a:t>
+              <a:t>描画マネージャー問題点</a:t>
             </a:r>
           </a:p>
         </p:txBody>
@@ -2378,7 +2367,7 @@
           <p:cNvPr id="9" name="テキスト ボックス 8">
             <a:extLst>
               <a:ext uri="{FF2B5EF4-FFF2-40B4-BE49-F238E27FC236}">
-                <a16:creationId xmlns:a16="http://schemas.microsoft.com/office/drawing/2014/main" id="{64096C8E-2385-53F6-9578-C01DDB0C8B8C}"/>
+                <a16:creationId xmlns:a16="http://schemas.microsoft.com/office/drawing/2014/main" id="{4E4874A6-9524-92A0-D25C-436FA0850661}"/>
               </a:ext>
             </a:extLst>
           </p:cNvPr>
@@ -2387,8 +2376,8 @@
         </p:nvSpPr>
         <p:spPr>
           <a:xfrm>
-            <a:off x="371168" y="2243419"/>
-            <a:ext cx="11820832" cy="1815882"/>
+            <a:off x="371168" y="2255114"/>
+            <a:ext cx="10754032" cy="3244158"/>
           </a:xfrm>
           <a:prstGeom prst="rect">
             <a:avLst/>
@@ -2406,7 +2395,7 @@
           <a:p>
             <a:pPr marL="0" marR="0" lvl="0" indent="0" algn="l" defTabSz="914400" rtl="0" eaLnBrk="0" fontAlgn="base" latinLnBrk="0" hangingPunct="0">
               <a:lnSpc>
-                <a:spcPct val="100000"/>
+                <a:spcPct val="150000"/>
               </a:lnSpc>
               <a:spcBef>
                 <a:spcPct val="0"/>
@@ -2421,25 +2410,170 @@
               <a:tabLst/>
             </a:pPr>
             <a:r>
-              <a:rPr kumimoji="0" lang="en-US" altLang="ja-JP" sz="2800" b="0" i="0" u="none" strike="noStrike" cap="none" normalizeH="0" baseline="0" dirty="0">
-                <a:ln>
-                  <a:noFill/>
-                </a:ln>
-                <a:solidFill>
-                  <a:schemeClr val="bg1"/>
-                </a:solidFill>
-                <a:effectLst/>
+              <a:rPr kumimoji="0" lang="ja-JP" altLang="en-US" sz="2800" i="0" u="sng" strike="noStrike" cap="none" normalizeH="0" baseline="0" dirty="0">
+                <a:ln>
+                  <a:noFill/>
+                </a:ln>
+                <a:solidFill>
+                  <a:schemeClr val="bg1"/>
+                </a:solidFill>
+                <a:effectLst/>
+                <a:latin typeface="Arial" panose="020B0604020202020204" pitchFamily="34" charset="0"/>
+              </a:rPr>
+              <a:t>今の描画マネージャーでは</a:t>
+            </a:r>
+            <a:r>
+              <a:rPr kumimoji="0" lang="en-US" altLang="ja-JP" sz="2800" i="0" u="sng" strike="noStrike" cap="none" normalizeH="0" baseline="0" dirty="0">
+                <a:ln>
+                  <a:noFill/>
+                </a:ln>
+                <a:solidFill>
+                  <a:schemeClr val="bg1"/>
+                </a:solidFill>
+                <a:effectLst/>
+                <a:latin typeface="Arial" panose="020B0604020202020204" pitchFamily="34" charset="0"/>
+              </a:rPr>
+              <a:t>API</a:t>
+            </a:r>
+            <a:r>
+              <a:rPr kumimoji="0" lang="ja-JP" altLang="en-US" sz="2800" i="0" u="sng" strike="noStrike" cap="none" normalizeH="0" baseline="0" dirty="0">
+                <a:ln>
+                  <a:noFill/>
+                </a:ln>
+                <a:solidFill>
+                  <a:schemeClr val="bg1"/>
+                </a:solidFill>
+                <a:effectLst/>
+                <a:latin typeface="Arial" panose="020B0604020202020204" pitchFamily="34" charset="0"/>
+              </a:rPr>
+              <a:t>オブジェクトだけでなく</a:t>
+            </a:r>
+            <a:br>
+              <a:rPr lang="en-US" altLang="ja-JP" sz="2800" u="sng" dirty="0">
+                <a:solidFill>
+                  <a:schemeClr val="bg1"/>
+                </a:solidFill>
+                <a:latin typeface="Arial" panose="020B0604020202020204" pitchFamily="34" charset="0"/>
+              </a:rPr>
+            </a:br>
+            <a:r>
+              <a:rPr lang="en-US" altLang="ja-JP" sz="2800" dirty="0">
+                <a:solidFill>
+                  <a:schemeClr val="bg1"/>
+                </a:solidFill>
                 <a:latin typeface="Arial" panose="020B0604020202020204" pitchFamily="34" charset="0"/>
               </a:rPr>
               <a:t> </a:t>
             </a:r>
             <a:r>
-              <a:rPr kumimoji="0" lang="en-US" altLang="ja-JP" sz="2800" b="0" i="0" u="none" strike="noStrike" cap="none" normalizeH="0" baseline="0" dirty="0" err="1">
-                <a:ln>
-                  <a:noFill/>
-                </a:ln>
-                <a:solidFill>
-                  <a:schemeClr val="bg1"/>
+              <a:rPr kumimoji="0" lang="ja-JP" altLang="en-US" sz="2800" i="0" u="sng" strike="noStrike" cap="none" normalizeH="0" baseline="0" dirty="0">
+                <a:ln>
+                  <a:noFill/>
+                </a:ln>
+                <a:solidFill>
+                  <a:schemeClr val="bg1"/>
+                </a:solidFill>
+                <a:effectLst/>
+                <a:latin typeface="Arial" panose="020B0604020202020204" pitchFamily="34" charset="0"/>
+              </a:rPr>
+              <a:t>各リソースマネージャーも動的確保していたり、</a:t>
+            </a:r>
+            <a:br>
+              <a:rPr kumimoji="0" lang="en-US" altLang="ja-JP" sz="2800" i="0" u="sng" strike="noStrike" cap="none" normalizeH="0" baseline="0" dirty="0">
+                <a:ln>
+                  <a:noFill/>
+                </a:ln>
+                <a:solidFill>
+                  <a:schemeClr val="bg1"/>
+                </a:solidFill>
+                <a:effectLst/>
+                <a:latin typeface="Arial" panose="020B0604020202020204" pitchFamily="34" charset="0"/>
+              </a:rPr>
+            </a:br>
+            <a:r>
+              <a:rPr kumimoji="0" lang="en-US" altLang="ja-JP" sz="2800" i="0" strike="noStrike" cap="none" normalizeH="0" baseline="0" dirty="0">
+                <a:ln>
+                  <a:noFill/>
+                </a:ln>
+                <a:solidFill>
+                  <a:schemeClr val="bg1"/>
+                </a:solidFill>
+                <a:effectLst/>
+                <a:latin typeface="Arial" panose="020B0604020202020204" pitchFamily="34" charset="0"/>
+              </a:rPr>
+              <a:t> </a:t>
+            </a:r>
+            <a:r>
+              <a:rPr kumimoji="0" lang="ja-JP" altLang="en-US" sz="2800" i="0" u="sng" strike="noStrike" cap="none" normalizeH="0" baseline="0" dirty="0">
+                <a:ln>
+                  <a:noFill/>
+                </a:ln>
+                <a:solidFill>
+                  <a:schemeClr val="bg1"/>
+                </a:solidFill>
+                <a:effectLst/>
+                <a:latin typeface="Arial" panose="020B0604020202020204" pitchFamily="34" charset="0"/>
+              </a:rPr>
+              <a:t>描画マネージャーそのものをインターフェイスとして</a:t>
+            </a:r>
+            <a:br>
+              <a:rPr kumimoji="0" lang="en-US" altLang="ja-JP" sz="2800" i="0" u="sng" strike="noStrike" cap="none" normalizeH="0" baseline="0" dirty="0">
+                <a:ln>
+                  <a:noFill/>
+                </a:ln>
+                <a:solidFill>
+                  <a:schemeClr val="bg1"/>
+                </a:solidFill>
+                <a:effectLst/>
+                <a:latin typeface="Arial" panose="020B0604020202020204" pitchFamily="34" charset="0"/>
+              </a:rPr>
+            </a:br>
+            <a:r>
+              <a:rPr kumimoji="0" lang="en-US" altLang="ja-JP" sz="2800" i="0" strike="noStrike" cap="none" normalizeH="0" baseline="0" dirty="0">
+                <a:ln>
+                  <a:noFill/>
+                </a:ln>
+                <a:solidFill>
+                  <a:schemeClr val="bg1"/>
+                </a:solidFill>
+                <a:effectLst/>
+                <a:latin typeface="Arial" panose="020B0604020202020204" pitchFamily="34" charset="0"/>
+              </a:rPr>
+              <a:t> </a:t>
+            </a:r>
+            <a:r>
+              <a:rPr kumimoji="0" lang="ja-JP" altLang="en-US" sz="2800" i="0" u="sng" strike="noStrike" cap="none" normalizeH="0" baseline="0" dirty="0">
+                <a:ln>
+                  <a:noFill/>
+                </a:ln>
+                <a:solidFill>
+                  <a:schemeClr val="bg1"/>
+                </a:solidFill>
+                <a:effectLst/>
+                <a:latin typeface="Arial" panose="020B0604020202020204" pitchFamily="34" charset="0"/>
+              </a:rPr>
+              <a:t>扱っているため、</a:t>
+            </a:r>
+            <a:r>
+              <a:rPr kumimoji="0" lang="ja-JP" altLang="en-US" sz="2800" i="0" u="sng" strike="noStrike" cap="none" normalizeH="0" baseline="0" dirty="0">
+                <a:ln>
+                  <a:noFill/>
+                </a:ln>
+                <a:solidFill>
+                  <a:srgbClr val="FF0000"/>
+                </a:solidFill>
+                <a:effectLst/>
+                <a:latin typeface="Arial" panose="020B0604020202020204" pitchFamily="34" charset="0"/>
+              </a:rPr>
+              <a:t>参照や</a:t>
+            </a:r>
+            <a:r>
+              <a:rPr kumimoji="0" lang="en-US" altLang="ja-JP" sz="2800" i="0" u="sng" strike="noStrike" cap="none" normalizeH="0" baseline="0" dirty="0" err="1">
+                <a:ln>
+                  <a:noFill/>
+                </a:ln>
+                <a:solidFill>
+                  <a:srgbClr val="FF0000"/>
                 </a:solidFill>
                 <a:effectLst/>
                 <a:latin typeface="Arial" panose="020B0604020202020204" pitchFamily="34" charset="0"/>
@@ -2447,57 +2581,35 @@
               <a:t>Vtable</a:t>
             </a:r>
             <a:r>
-              <a:rPr kumimoji="0" lang="ja-JP" altLang="en-US" sz="2800" b="0" i="0" u="none" strike="noStrike" cap="none" normalizeH="0" baseline="0" dirty="0">
-                <a:ln>
-                  <a:noFill/>
-                </a:ln>
-                <a:solidFill>
-                  <a:schemeClr val="bg1"/>
-                </a:solidFill>
-                <a:effectLst/>
-                <a:latin typeface="Arial" panose="020B0604020202020204" pitchFamily="34" charset="0"/>
-              </a:rPr>
-              <a:t>参照</a:t>
-            </a:r>
-            <a:r>
-              <a:rPr kumimoji="0" lang="ja-JP" altLang="ja-JP" sz="2800" b="0" i="0" u="none" strike="noStrike" cap="none" normalizeH="0" baseline="0" dirty="0">
-                <a:ln>
-                  <a:noFill/>
-                </a:ln>
-                <a:solidFill>
-                  <a:schemeClr val="bg1"/>
-                </a:solidFill>
-                <a:effectLst/>
-                <a:latin typeface="Arial" panose="020B0604020202020204" pitchFamily="34" charset="0"/>
-              </a:rPr>
-              <a:t>で</a:t>
-            </a:r>
-            <a:r>
-              <a:rPr kumimoji="0" lang="ja-JP" altLang="en-US" sz="2800" b="0" i="0" u="none" strike="noStrike" cap="none" normalizeH="0" baseline="0" dirty="0">
-                <a:ln>
-                  <a:noFill/>
-                </a:ln>
-                <a:solidFill>
-                  <a:schemeClr val="bg1"/>
-                </a:solidFill>
-                <a:effectLst/>
-                <a:latin typeface="Arial" panose="020B0604020202020204" pitchFamily="34" charset="0"/>
-              </a:rPr>
-              <a:t>メモリ使用量が増えると</a:t>
-            </a:r>
-            <a:r>
-              <a:rPr kumimoji="0" lang="ja-JP" altLang="ja-JP" sz="2800" b="0" i="0" u="none" strike="noStrike" cap="none" normalizeH="0" baseline="0" dirty="0">
-                <a:ln>
-                  <a:noFill/>
-                </a:ln>
-                <a:solidFill>
-                  <a:schemeClr val="bg1"/>
-                </a:solidFill>
-                <a:effectLst/>
-                <a:latin typeface="Arial" panose="020B0604020202020204" pitchFamily="34" charset="0"/>
-              </a:rPr>
-              <a:t>キャッシュミスが</a:t>
-            </a:r>
+              <a:rPr kumimoji="0" lang="ja-JP" altLang="en-US" sz="2800" i="0" u="sng" strike="noStrike" cap="none" normalizeH="0" baseline="0" dirty="0">
+                <a:ln>
+                  <a:noFill/>
+                </a:ln>
+                <a:solidFill>
+                  <a:srgbClr val="FF0000"/>
+                </a:solidFill>
+                <a:effectLst/>
+                <a:latin typeface="Arial" panose="020B0604020202020204" pitchFamily="34" charset="0"/>
+              </a:rPr>
+              <a:t>を何度も見に行ってしまう</a:t>
+            </a:r>
+            <a:r>
+              <a:rPr lang="ja-JP" altLang="en-US" sz="2800" u="sng" dirty="0">
+                <a:solidFill>
+                  <a:schemeClr val="bg1"/>
+                </a:solidFill>
+                <a:latin typeface="Arial" panose="020B0604020202020204" pitchFamily="34" charset="0"/>
+              </a:rPr>
+              <a:t>。</a:t>
+            </a:r>
+            <a:br>
+              <a:rPr lang="en-US" altLang="ja-JP" sz="2800" u="sng" dirty="0">
+                <a:solidFill>
+                  <a:schemeClr val="bg1"/>
+                </a:solidFill>
+                <a:latin typeface="Arial" panose="020B0604020202020204" pitchFamily="34" charset="0"/>
+              </a:rPr>
+            </a:br>
             <a:r>
               <a:rPr lang="ja-JP" altLang="en-US" sz="2800" dirty="0">
                 <a:solidFill>
@@ -2505,35 +2617,36 @@
                 </a:solidFill>
                 <a:latin typeface="Arial" panose="020B0604020202020204" pitchFamily="34" charset="0"/>
               </a:rPr>
-              <a:t>多く</a:t>
-            </a:r>
-            <a:r>
-              <a:rPr kumimoji="0" lang="ja-JP" altLang="ja-JP" sz="2800" b="0" i="0" u="none" strike="noStrike" cap="none" normalizeH="0" baseline="0" dirty="0">
-                <a:ln>
-                  <a:noFill/>
-                </a:ln>
-                <a:solidFill>
-                  <a:schemeClr val="bg1"/>
-                </a:solidFill>
-                <a:effectLst/>
-                <a:latin typeface="Arial" panose="020B0604020202020204" pitchFamily="34" charset="0"/>
-              </a:rPr>
-              <a:t>発生</a:t>
-            </a:r>
-            <a:r>
-              <a:rPr kumimoji="0" lang="ja-JP" altLang="en-US" sz="2800" b="0" i="0" u="none" strike="noStrike" cap="none" normalizeH="0" baseline="0" dirty="0">
-                <a:ln>
-                  <a:noFill/>
-                </a:ln>
-                <a:solidFill>
-                  <a:schemeClr val="bg1"/>
-                </a:solidFill>
-                <a:effectLst/>
-                <a:latin typeface="Arial" panose="020B0604020202020204" pitchFamily="34" charset="0"/>
-              </a:rPr>
-              <a:t>しそう</a:t>
-            </a:r>
-            <a:endParaRPr kumimoji="0" lang="ja-JP" altLang="ja-JP" sz="2800" b="0" i="0" u="none" strike="noStrike" cap="none" normalizeH="0" baseline="0" dirty="0">
+              <a:t> </a:t>
+            </a:r>
+            <a:r>
+              <a:rPr lang="ja-JP" altLang="en-US" sz="2800" u="sng" dirty="0">
+                <a:solidFill>
+                  <a:schemeClr val="bg1"/>
+                </a:solidFill>
+                <a:latin typeface="Arial" panose="020B0604020202020204" pitchFamily="34" charset="0"/>
+              </a:rPr>
+              <a:t>描画マネージャーが</a:t>
+            </a:r>
+            <a:r>
+              <a:rPr lang="ja-JP" altLang="en-US" sz="2800" u="sng" dirty="0">
+                <a:solidFill>
+                  <a:srgbClr val="FF0000"/>
+                </a:solidFill>
+                <a:latin typeface="Arial" panose="020B0604020202020204" pitchFamily="34" charset="0"/>
+              </a:rPr>
+              <a:t>単一責任</a:t>
+            </a:r>
+            <a:r>
+              <a:rPr lang="ja-JP" altLang="en-US" sz="2800" u="sng" dirty="0">
+                <a:solidFill>
+                  <a:schemeClr val="bg1"/>
+                </a:solidFill>
+                <a:latin typeface="Arial" panose="020B0604020202020204" pitchFamily="34" charset="0"/>
+              </a:rPr>
+              <a:t>になっていない。</a:t>
+            </a:r>
+            <a:endParaRPr kumimoji="0" lang="en-US" altLang="ja-JP" sz="2800" i="0" u="sng" strike="noStrike" cap="none" normalizeH="0" baseline="0" dirty="0">
               <a:ln>
                 <a:noFill/>
               </a:ln>
@@ -2544,10 +2657,156 @@
               <a:latin typeface="Arial" panose="020B0604020202020204" pitchFamily="34" charset="0"/>
             </a:endParaRPr>
           </a:p>
+        </p:txBody>
+      </p:sp>
+    </p:spTree>
+    <p:extLst>
+      <p:ext uri="{BB962C8B-B14F-4D97-AF65-F5344CB8AC3E}">
+        <p14:creationId xmlns:p14="http://schemas.microsoft.com/office/powerpoint/2010/main" val="3932587397"/>
+      </p:ext>
+    </p:extLst>
+  </p:cSld>
+  <p:clrMapOvr>
+    <a:masterClrMapping/>
+  </p:clrMapOvr>
+</p:sld>
+</file>
+
+<file path=ppt/slides/slide12.xml><?xml version="1.0" encoding="utf-8"?>
+<p:sld xmlns:a="http://schemas.openxmlformats.org/drawingml/2006/main" xmlns:r="http://schemas.openxmlformats.org/officeDocument/2006/relationships" xmlns:p="http://schemas.openxmlformats.org/presentationml/2006/main">
+  <p:cSld>
+    <p:spTree>
+      <p:nvGrpSpPr>
+        <p:cNvPr id="1" name="">
+          <a:extLst>
+            <a:ext uri="{FF2B5EF4-FFF2-40B4-BE49-F238E27FC236}">
+              <a16:creationId xmlns:a16="http://schemas.microsoft.com/office/drawing/2014/main" id="{DDD76A4A-96B6-B5C3-F33B-15A892D3A019}"/>
+            </a:ext>
+          </a:extLst>
+        </p:cNvPr>
+        <p:cNvGrpSpPr/>
+        <p:nvPr/>
+      </p:nvGrpSpPr>
+      <p:grpSpPr>
+        <a:xfrm>
+          <a:off x="0" y="0"/>
+          <a:ext cx="0" cy="0"/>
+          <a:chOff x="0" y="0"/>
+          <a:chExt cx="0" cy="0"/>
+        </a:xfrm>
+      </p:grpSpPr>
+      <p:sp>
+        <p:nvSpPr>
+          <p:cNvPr id="2" name="タイトル 1">
+            <a:extLst>
+              <a:ext uri="{FF2B5EF4-FFF2-40B4-BE49-F238E27FC236}">
+                <a16:creationId xmlns:a16="http://schemas.microsoft.com/office/drawing/2014/main" id="{03119F17-02FF-29DD-3A37-E88E9FBA1E6C}"/>
+              </a:ext>
+            </a:extLst>
+          </p:cNvPr>
+          <p:cNvSpPr>
+            <a:spLocks noGrp="1"/>
+          </p:cNvSpPr>
+          <p:nvPr>
+            <p:ph type="title"/>
+          </p:nvPr>
+        </p:nvSpPr>
+        <p:spPr>
+          <a:xfrm>
+            <a:off x="371168" y="390833"/>
+            <a:ext cx="4734232" cy="1056967"/>
+          </a:xfrm>
+        </p:spPr>
+        <p:txBody>
+          <a:bodyPr/>
+          <a:lstStyle/>
+          <a:p>
+            <a:r>
+              <a:rPr kumimoji="1" lang="ja-JP" altLang="en-US" sz="6000" dirty="0"/>
+              <a:t>問題点と今後</a:t>
+            </a:r>
+          </a:p>
+        </p:txBody>
+      </p:sp>
+      <p:sp>
+        <p:nvSpPr>
+          <p:cNvPr id="7" name="テキスト ボックス 6">
+            <a:extLst>
+              <a:ext uri="{FF2B5EF4-FFF2-40B4-BE49-F238E27FC236}">
+                <a16:creationId xmlns:a16="http://schemas.microsoft.com/office/drawing/2014/main" id="{31526CF2-D70C-713C-E716-B44B9C85F463}"/>
+              </a:ext>
+            </a:extLst>
+          </p:cNvPr>
+          <p:cNvSpPr txBox="1"/>
+          <p:nvPr/>
+        </p:nvSpPr>
+        <p:spPr>
+          <a:xfrm>
+            <a:off x="371168" y="1670339"/>
+            <a:ext cx="4277032" cy="584775"/>
+          </a:xfrm>
+          <a:prstGeom prst="rect">
+            <a:avLst/>
+          </a:prstGeom>
+          <a:noFill/>
+          <a:ln w="19050">
+            <a:solidFill>
+              <a:schemeClr val="bg1"/>
+            </a:solidFill>
+          </a:ln>
+        </p:spPr>
+        <p:txBody>
+          <a:bodyPr wrap="square" rtlCol="0">
+            <a:spAutoFit/>
+          </a:bodyPr>
+          <a:lstStyle/>
+          <a:p>
+            <a:pPr algn="l"/>
+            <a:r>
+              <a:rPr kumimoji="1" lang="ja-JP" altLang="en-US" sz="3200" dirty="0">
+                <a:solidFill>
+                  <a:schemeClr val="bg1"/>
+                </a:solidFill>
+              </a:rPr>
+              <a:t>描画マネージャー今後</a:t>
+            </a:r>
+          </a:p>
+        </p:txBody>
+      </p:sp>
+      <p:sp>
+        <p:nvSpPr>
+          <p:cNvPr id="9" name="テキスト ボックス 8">
+            <a:extLst>
+              <a:ext uri="{FF2B5EF4-FFF2-40B4-BE49-F238E27FC236}">
+                <a16:creationId xmlns:a16="http://schemas.microsoft.com/office/drawing/2014/main" id="{9DFE138E-B6AF-9782-444F-6E2376C6518C}"/>
+              </a:ext>
+            </a:extLst>
+          </p:cNvPr>
+          <p:cNvSpPr txBox="1"/>
+          <p:nvPr/>
+        </p:nvSpPr>
+        <p:spPr>
+          <a:xfrm>
+            <a:off x="371168" y="2255114"/>
+            <a:ext cx="10754032" cy="2593980"/>
+          </a:xfrm>
+          <a:prstGeom prst="rect">
+            <a:avLst/>
+          </a:prstGeom>
+          <a:noFill/>
+          <a:ln>
+            <a:noFill/>
+          </a:ln>
+        </p:spPr>
+        <p:txBody>
+          <a:bodyPr wrap="square" rtlCol="0">
+            <a:spAutoFit/>
+          </a:bodyPr>
+          <a:lstStyle/>
           <a:p>
             <a:pPr marL="0" marR="0" lvl="0" indent="0" algn="l" defTabSz="914400" rtl="0" eaLnBrk="0" fontAlgn="base" latinLnBrk="0" hangingPunct="0">
               <a:lnSpc>
-                <a:spcPct val="100000"/>
+                <a:spcPct val="150000"/>
               </a:lnSpc>
               <a:spcBef>
                 <a:spcPct val="0"/>
@@ -2562,71 +2821,124 @@
               <a:tabLst/>
             </a:pPr>
             <a:r>
-              <a:rPr kumimoji="0" lang="en-US" altLang="ja-JP" sz="2800" b="0" i="0" u="none" strike="noStrike" cap="none" normalizeH="0" baseline="0" dirty="0">
-                <a:ln>
-                  <a:noFill/>
-                </a:ln>
-                <a:solidFill>
-                  <a:schemeClr val="bg1"/>
-                </a:solidFill>
-                <a:effectLst/>
+              <a:rPr kumimoji="0" lang="ja-JP" altLang="en-US" sz="2800" i="0" u="sng" strike="noStrike" cap="none" normalizeH="0" baseline="0" dirty="0">
+                <a:ln>
+                  <a:noFill/>
+                </a:ln>
+                <a:solidFill>
+                  <a:schemeClr val="bg1"/>
+                </a:solidFill>
+                <a:effectLst/>
+                <a:latin typeface="Arial" panose="020B0604020202020204" pitchFamily="34" charset="0"/>
+              </a:rPr>
+              <a:t>描画マネージャーの問題点を改善するために、</a:t>
+            </a:r>
+            <a:br>
+              <a:rPr lang="en-US" altLang="ja-JP" sz="2800" u="sng" dirty="0">
+                <a:solidFill>
+                  <a:schemeClr val="bg1"/>
+                </a:solidFill>
+                <a:latin typeface="Arial" panose="020B0604020202020204" pitchFamily="34" charset="0"/>
+              </a:rPr>
+            </a:br>
+            <a:r>
+              <a:rPr lang="en-US" altLang="ja-JP" sz="2800" dirty="0">
+                <a:solidFill>
+                  <a:schemeClr val="bg1"/>
+                </a:solidFill>
                 <a:latin typeface="Arial" panose="020B0604020202020204" pitchFamily="34" charset="0"/>
               </a:rPr>
               <a:t> </a:t>
             </a:r>
             <a:r>
-              <a:rPr kumimoji="0" lang="ja-JP" altLang="ja-JP" sz="2800" b="0" i="0" u="none" strike="noStrike" cap="none" normalizeH="0" baseline="0" dirty="0">
-                <a:ln>
-                  <a:noFill/>
-                </a:ln>
-                <a:solidFill>
-                  <a:schemeClr val="bg1"/>
-                </a:solidFill>
-                <a:effectLst/>
-                <a:latin typeface="Arial" panose="020B0604020202020204" pitchFamily="34" charset="0"/>
-              </a:rPr>
-              <a:t>複数テクスチャをまとめ</a:t>
-            </a:r>
-            <a:r>
-              <a:rPr kumimoji="0" lang="ja-JP" altLang="en-US" sz="2800" b="0" i="0" u="none" strike="noStrike" cap="none" normalizeH="0" baseline="0" dirty="0">
-                <a:ln>
-                  <a:noFill/>
-                </a:ln>
-                <a:solidFill>
-                  <a:schemeClr val="bg1"/>
-                </a:solidFill>
-                <a:effectLst/>
-                <a:latin typeface="Arial" panose="020B0604020202020204" pitchFamily="34" charset="0"/>
-              </a:rPr>
-              <a:t>て</a:t>
-            </a:r>
-            <a:r>
-              <a:rPr kumimoji="0" lang="ja-JP" altLang="ja-JP" sz="2800" b="0" i="0" u="none" strike="noStrike" cap="none" normalizeH="0" baseline="0" dirty="0">
-                <a:ln>
-                  <a:noFill/>
-                </a:ln>
-                <a:solidFill>
-                  <a:schemeClr val="bg1"/>
-                </a:solidFill>
-                <a:effectLst/>
-                <a:latin typeface="Arial" panose="020B0604020202020204" pitchFamily="34" charset="0"/>
-              </a:rPr>
-              <a:t>GPU転送が</a:t>
-            </a:r>
-            <a:r>
-              <a:rPr kumimoji="0" lang="ja-JP" altLang="en-US" sz="2800" b="0" i="0" u="none" strike="noStrike" cap="none" normalizeH="0" baseline="0" dirty="0">
-                <a:ln>
-                  <a:noFill/>
-                </a:ln>
-                <a:solidFill>
-                  <a:schemeClr val="bg1"/>
-                </a:solidFill>
-                <a:effectLst/>
-                <a:latin typeface="Arial" panose="020B0604020202020204" pitchFamily="34" charset="0"/>
-              </a:rPr>
-              <a:t>行えない</a:t>
-            </a:r>
-            <a:endParaRPr kumimoji="0" lang="ja-JP" altLang="ja-JP" sz="2800" b="0" i="0" u="none" strike="noStrike" cap="none" normalizeH="0" baseline="0" dirty="0">
+              <a:rPr lang="ja-JP" altLang="en-US" sz="2800" b="1" u="sng" dirty="0">
+                <a:solidFill>
+                  <a:srgbClr val="FF0000"/>
+                </a:solidFill>
+                <a:latin typeface="Arial" panose="020B0604020202020204" pitchFamily="34" charset="0"/>
+              </a:rPr>
+              <a:t>コマンドリスト方式</a:t>
+            </a:r>
+            <a:r>
+              <a:rPr lang="ja-JP" altLang="en-US" sz="2800" u="sng" dirty="0">
+                <a:solidFill>
+                  <a:schemeClr val="bg1"/>
+                </a:solidFill>
+                <a:latin typeface="Arial" panose="020B0604020202020204" pitchFamily="34" charset="0"/>
+              </a:rPr>
+              <a:t>を採用して、</a:t>
+            </a:r>
+            <a:r>
+              <a:rPr lang="en-US" altLang="ja-JP" sz="2800" u="sng" dirty="0">
+                <a:solidFill>
+                  <a:schemeClr val="bg1"/>
+                </a:solidFill>
+                <a:latin typeface="Arial" panose="020B0604020202020204" pitchFamily="34" charset="0"/>
+              </a:rPr>
+              <a:t>API</a:t>
+            </a:r>
+            <a:r>
+              <a:rPr lang="ja-JP" altLang="en-US" sz="2800" u="sng" dirty="0">
+                <a:solidFill>
+                  <a:schemeClr val="bg1"/>
+                </a:solidFill>
+                <a:latin typeface="Arial" panose="020B0604020202020204" pitchFamily="34" charset="0"/>
+              </a:rPr>
+              <a:t>オブジェクト作成だけを</a:t>
+            </a:r>
+            <a:br>
+              <a:rPr lang="en-US" altLang="ja-JP" sz="2800" u="sng" dirty="0">
+                <a:solidFill>
+                  <a:schemeClr val="bg1"/>
+                </a:solidFill>
+                <a:latin typeface="Arial" panose="020B0604020202020204" pitchFamily="34" charset="0"/>
+              </a:rPr>
+            </a:br>
+            <a:r>
+              <a:rPr lang="en-US" altLang="ja-JP" sz="2800" dirty="0">
+                <a:solidFill>
+                  <a:schemeClr val="bg1"/>
+                </a:solidFill>
+                <a:latin typeface="Arial" panose="020B0604020202020204" pitchFamily="34" charset="0"/>
+              </a:rPr>
+              <a:t> </a:t>
+            </a:r>
+            <a:r>
+              <a:rPr lang="ja-JP" altLang="en-US" sz="2800" u="sng" dirty="0">
+                <a:solidFill>
+                  <a:schemeClr val="bg1"/>
+                </a:solidFill>
+                <a:latin typeface="Arial" panose="020B0604020202020204" pitchFamily="34" charset="0"/>
+              </a:rPr>
+              <a:t>インターフェイスとして扱うことで今の２つの問題点を</a:t>
+            </a:r>
+            <a:br>
+              <a:rPr lang="en-US" altLang="ja-JP" sz="2800" u="sng" dirty="0">
+                <a:solidFill>
+                  <a:schemeClr val="bg1"/>
+                </a:solidFill>
+                <a:latin typeface="Arial" panose="020B0604020202020204" pitchFamily="34" charset="0"/>
+              </a:rPr>
+            </a:br>
+            <a:r>
+              <a:rPr lang="en-US" altLang="ja-JP" sz="2800" dirty="0">
+                <a:solidFill>
+                  <a:schemeClr val="bg1"/>
+                </a:solidFill>
+                <a:latin typeface="Arial" panose="020B0604020202020204" pitchFamily="34" charset="0"/>
+              </a:rPr>
+              <a:t> </a:t>
+            </a:r>
+            <a:r>
+              <a:rPr lang="ja-JP" altLang="en-US" sz="2800" u="sng" dirty="0">
+                <a:solidFill>
+                  <a:schemeClr val="bg1"/>
+                </a:solidFill>
+                <a:latin typeface="Arial" panose="020B0604020202020204" pitchFamily="34" charset="0"/>
+              </a:rPr>
+              <a:t>改善できると考えています。</a:t>
+            </a:r>
+            <a:endParaRPr kumimoji="0" lang="en-US" altLang="ja-JP" sz="2800" i="0" u="sng" strike="noStrike" cap="none" normalizeH="0" baseline="0" dirty="0">
               <a:ln>
                 <a:noFill/>
               </a:ln>
@@ -2637,10 +2949,156 @@
               <a:latin typeface="Arial" panose="020B0604020202020204" pitchFamily="34" charset="0"/>
             </a:endParaRPr>
           </a:p>
+        </p:txBody>
+      </p:sp>
+    </p:spTree>
+    <p:extLst>
+      <p:ext uri="{BB962C8B-B14F-4D97-AF65-F5344CB8AC3E}">
+        <p14:creationId xmlns:p14="http://schemas.microsoft.com/office/powerpoint/2010/main" val="3952776080"/>
+      </p:ext>
+    </p:extLst>
+  </p:cSld>
+  <p:clrMapOvr>
+    <a:masterClrMapping/>
+  </p:clrMapOvr>
+</p:sld>
+</file>
+
+<file path=ppt/slides/slide13.xml><?xml version="1.0" encoding="utf-8"?>
+<p:sld xmlns:a="http://schemas.openxmlformats.org/drawingml/2006/main" xmlns:r="http://schemas.openxmlformats.org/officeDocument/2006/relationships" xmlns:p="http://schemas.openxmlformats.org/presentationml/2006/main">
+  <p:cSld>
+    <p:spTree>
+      <p:nvGrpSpPr>
+        <p:cNvPr id="1" name="">
+          <a:extLst>
+            <a:ext uri="{FF2B5EF4-FFF2-40B4-BE49-F238E27FC236}">
+              <a16:creationId xmlns:a16="http://schemas.microsoft.com/office/drawing/2014/main" id="{CF3DD36B-21A6-69BC-5E81-7F45F199B651}"/>
+            </a:ext>
+          </a:extLst>
+        </p:cNvPr>
+        <p:cNvGrpSpPr/>
+        <p:nvPr/>
+      </p:nvGrpSpPr>
+      <p:grpSpPr>
+        <a:xfrm>
+          <a:off x="0" y="0"/>
+          <a:ext cx="0" cy="0"/>
+          <a:chOff x="0" y="0"/>
+          <a:chExt cx="0" cy="0"/>
+        </a:xfrm>
+      </p:grpSpPr>
+      <p:sp>
+        <p:nvSpPr>
+          <p:cNvPr id="2" name="タイトル 1">
+            <a:extLst>
+              <a:ext uri="{FF2B5EF4-FFF2-40B4-BE49-F238E27FC236}">
+                <a16:creationId xmlns:a16="http://schemas.microsoft.com/office/drawing/2014/main" id="{6B0580CD-C7AB-3959-E18D-EC6F61D44FBF}"/>
+              </a:ext>
+            </a:extLst>
+          </p:cNvPr>
+          <p:cNvSpPr>
+            <a:spLocks noGrp="1"/>
+          </p:cNvSpPr>
+          <p:nvPr>
+            <p:ph type="title"/>
+          </p:nvPr>
+        </p:nvSpPr>
+        <p:spPr>
+          <a:xfrm>
+            <a:off x="371168" y="390833"/>
+            <a:ext cx="4734232" cy="1056967"/>
+          </a:xfrm>
+        </p:spPr>
+        <p:txBody>
+          <a:bodyPr/>
+          <a:lstStyle/>
+          <a:p>
+            <a:r>
+              <a:rPr kumimoji="1" lang="ja-JP" altLang="en-US" sz="6000" dirty="0"/>
+              <a:t>問題点と今後</a:t>
+            </a:r>
+          </a:p>
+        </p:txBody>
+      </p:sp>
+      <p:sp>
+        <p:nvSpPr>
+          <p:cNvPr id="7" name="テキスト ボックス 6">
+            <a:extLst>
+              <a:ext uri="{FF2B5EF4-FFF2-40B4-BE49-F238E27FC236}">
+                <a16:creationId xmlns:a16="http://schemas.microsoft.com/office/drawing/2014/main" id="{20758716-01D1-1232-4060-9D674FF14503}"/>
+              </a:ext>
+            </a:extLst>
+          </p:cNvPr>
+          <p:cNvSpPr txBox="1"/>
+          <p:nvPr/>
+        </p:nvSpPr>
+        <p:spPr>
+          <a:xfrm>
+            <a:off x="371168" y="1670339"/>
+            <a:ext cx="3591232" cy="584775"/>
+          </a:xfrm>
+          <a:prstGeom prst="rect">
+            <a:avLst/>
+          </a:prstGeom>
+          <a:noFill/>
+          <a:ln w="19050">
+            <a:solidFill>
+              <a:schemeClr val="bg1"/>
+            </a:solidFill>
+          </a:ln>
+        </p:spPr>
+        <p:txBody>
+          <a:bodyPr wrap="square" rtlCol="0">
+            <a:spAutoFit/>
+          </a:bodyPr>
+          <a:lstStyle/>
+          <a:p>
+            <a:pPr algn="l"/>
+            <a:r>
+              <a:rPr kumimoji="1" lang="ja-JP" altLang="en-US" sz="3200" dirty="0">
+                <a:solidFill>
+                  <a:schemeClr val="bg1"/>
+                </a:solidFill>
+              </a:rPr>
+              <a:t>シェーダー問題点</a:t>
+            </a:r>
+          </a:p>
+        </p:txBody>
+      </p:sp>
+      <p:sp>
+        <p:nvSpPr>
+          <p:cNvPr id="9" name="テキスト ボックス 8">
+            <a:extLst>
+              <a:ext uri="{FF2B5EF4-FFF2-40B4-BE49-F238E27FC236}">
+                <a16:creationId xmlns:a16="http://schemas.microsoft.com/office/drawing/2014/main" id="{F6EE1E48-27E7-1956-DA58-D0A2A69F573B}"/>
+              </a:ext>
+            </a:extLst>
+          </p:cNvPr>
+          <p:cNvSpPr txBox="1"/>
+          <p:nvPr/>
+        </p:nvSpPr>
+        <p:spPr>
+          <a:xfrm>
+            <a:off x="371168" y="2255114"/>
+            <a:ext cx="10754032" cy="2597827"/>
+          </a:xfrm>
+          <a:prstGeom prst="rect">
+            <a:avLst/>
+          </a:prstGeom>
+          <a:noFill/>
+          <a:ln>
+            <a:noFill/>
+          </a:ln>
+        </p:spPr>
+        <p:txBody>
+          <a:bodyPr wrap="square" rtlCol="0">
+            <a:spAutoFit/>
+          </a:bodyPr>
+          <a:lstStyle/>
           <a:p>
             <a:pPr marL="0" marR="0" lvl="0" indent="0" algn="l" defTabSz="914400" rtl="0" eaLnBrk="0" fontAlgn="base" latinLnBrk="0" hangingPunct="0">
               <a:lnSpc>
-                <a:spcPct val="100000"/>
+                <a:spcPct val="150000"/>
               </a:lnSpc>
               <a:spcBef>
                 <a:spcPct val="0"/>
@@ -2655,187 +3113,121 @@
               <a:tabLst/>
             </a:pPr>
             <a:r>
-              <a:rPr kumimoji="0" lang="en-US" altLang="ja-JP" sz="2800" b="0" i="0" u="none" strike="noStrike" cap="none" normalizeH="0" baseline="0" dirty="0">
-                <a:ln>
-                  <a:noFill/>
-                </a:ln>
-                <a:solidFill>
-                  <a:schemeClr val="bg1"/>
-                </a:solidFill>
-                <a:effectLst/>
+              <a:rPr kumimoji="0" lang="ja-JP" altLang="en-US" sz="2800" i="0" u="sng" strike="noStrike" cap="none" normalizeH="0" baseline="0" dirty="0">
+                <a:ln>
+                  <a:noFill/>
+                </a:ln>
+                <a:solidFill>
+                  <a:schemeClr val="bg1"/>
+                </a:solidFill>
+                <a:effectLst/>
+                <a:latin typeface="Arial" panose="020B0604020202020204" pitchFamily="34" charset="0"/>
+              </a:rPr>
+              <a:t>今のシェーダーリファレンスは</a:t>
+            </a:r>
+            <a:r>
+              <a:rPr kumimoji="0" lang="en-US" altLang="ja-JP" sz="2800" i="0" u="sng" strike="noStrike" cap="none" normalizeH="0" baseline="0" dirty="0">
+                <a:ln>
+                  <a:noFill/>
+                </a:ln>
+                <a:solidFill>
+                  <a:srgbClr val="FF0000"/>
+                </a:solidFill>
+                <a:effectLst/>
+                <a:latin typeface="Arial" panose="020B0604020202020204" pitchFamily="34" charset="0"/>
+              </a:rPr>
+              <a:t>DirectX</a:t>
+            </a:r>
+            <a:r>
+              <a:rPr lang="en-US" altLang="ja-JP" sz="2800" u="sng" dirty="0">
+                <a:solidFill>
+                  <a:srgbClr val="FF0000"/>
+                </a:solidFill>
+                <a:latin typeface="Arial" panose="020B0604020202020204" pitchFamily="34" charset="0"/>
+              </a:rPr>
+              <a:t>11</a:t>
+            </a:r>
+            <a:r>
+              <a:rPr lang="ja-JP" altLang="en-US" sz="2800" u="sng" dirty="0">
+                <a:solidFill>
+                  <a:srgbClr val="FF0000"/>
+                </a:solidFill>
+                <a:latin typeface="Arial" panose="020B0604020202020204" pitchFamily="34" charset="0"/>
+              </a:rPr>
+              <a:t>に依存</a:t>
+            </a:r>
+            <a:r>
+              <a:rPr lang="ja-JP" altLang="en-US" sz="2800" u="sng" dirty="0">
+                <a:solidFill>
+                  <a:schemeClr val="bg1"/>
+                </a:solidFill>
+                <a:latin typeface="Arial" panose="020B0604020202020204" pitchFamily="34" charset="0"/>
+              </a:rPr>
+              <a:t>してしまって</a:t>
+            </a:r>
+            <a:br>
+              <a:rPr lang="en-US" altLang="ja-JP" sz="2800" u="sng" dirty="0">
+                <a:solidFill>
+                  <a:schemeClr val="bg1"/>
+                </a:solidFill>
+                <a:latin typeface="Arial" panose="020B0604020202020204" pitchFamily="34" charset="0"/>
+              </a:rPr>
+            </a:br>
+            <a:r>
+              <a:rPr lang="en-US" altLang="ja-JP" sz="2800" dirty="0">
+                <a:solidFill>
+                  <a:schemeClr val="bg1"/>
+                </a:solidFill>
                 <a:latin typeface="Arial" panose="020B0604020202020204" pitchFamily="34" charset="0"/>
               </a:rPr>
               <a:t> </a:t>
             </a:r>
             <a:r>
-              <a:rPr kumimoji="0" lang="ja-JP" altLang="ja-JP" sz="2800" b="0" i="0" u="none" strike="noStrike" cap="none" normalizeH="0" baseline="0" dirty="0">
-                <a:ln>
-                  <a:noFill/>
-                </a:ln>
-                <a:solidFill>
-                  <a:schemeClr val="bg1"/>
-                </a:solidFill>
-                <a:effectLst/>
-                <a:latin typeface="Arial" panose="020B0604020202020204" pitchFamily="34" charset="0"/>
-              </a:rPr>
-              <a:t>作成と描画を兼任しており単一責任になっていない</a:t>
-            </a:r>
+              <a:rPr lang="ja-JP" altLang="en-US" sz="2800" u="sng" dirty="0">
+                <a:solidFill>
+                  <a:schemeClr val="bg1"/>
+                </a:solidFill>
+                <a:latin typeface="Arial" panose="020B0604020202020204" pitchFamily="34" charset="0"/>
+              </a:rPr>
+              <a:t>いるので、リファレンス情報を他のプラットフォームで</a:t>
+            </a:r>
+            <a:br>
+              <a:rPr lang="en-US" altLang="ja-JP" sz="2800" u="sng" dirty="0">
+                <a:solidFill>
+                  <a:schemeClr val="bg1"/>
+                </a:solidFill>
+                <a:latin typeface="Arial" panose="020B0604020202020204" pitchFamily="34" charset="0"/>
+              </a:rPr>
+            </a:br>
+            <a:r>
+              <a:rPr lang="en-US" altLang="ja-JP" sz="2800" dirty="0">
+                <a:solidFill>
+                  <a:schemeClr val="bg1"/>
+                </a:solidFill>
+                <a:latin typeface="Arial" panose="020B0604020202020204" pitchFamily="34" charset="0"/>
+              </a:rPr>
+              <a:t> </a:t>
+            </a:r>
+            <a:r>
+              <a:rPr lang="ja-JP" altLang="en-US" sz="2800" u="sng" dirty="0">
+                <a:solidFill>
+                  <a:schemeClr val="bg1"/>
+                </a:solidFill>
+                <a:latin typeface="Arial" panose="020B0604020202020204" pitchFamily="34" charset="0"/>
+              </a:rPr>
+              <a:t>使用できない</a:t>
+            </a:r>
+            <a:endParaRPr lang="en-US" altLang="ja-JP" sz="2800" u="sng" dirty="0">
+              <a:solidFill>
+                <a:schemeClr val="bg1"/>
+              </a:solidFill>
+              <a:latin typeface="Arial" panose="020B0604020202020204" pitchFamily="34" charset="0"/>
+            </a:endParaRPr>
           </a:p>
           <a:p>
             <a:pPr marL="0" marR="0" lvl="0" indent="0" algn="l" defTabSz="914400" rtl="0" eaLnBrk="0" fontAlgn="base" latinLnBrk="0" hangingPunct="0">
               <a:lnSpc>
-                <a:spcPct val="100000"/>
-              </a:lnSpc>
-              <a:spcBef>
-                <a:spcPct val="0"/>
-              </a:spcBef>
-              <a:spcAft>
-                <a:spcPct val="0"/>
-              </a:spcAft>
-              <a:buClrTx/>
-              <a:buSzTx/>
-              <a:tabLst/>
-            </a:pPr>
-            <a:r>
-              <a:rPr lang="ja-JP" altLang="en-US" sz="2800" b="1" dirty="0">
-                <a:solidFill>
-                  <a:schemeClr val="tx1"/>
-                </a:solidFill>
-                <a:latin typeface="Arial" panose="020B0604020202020204" pitchFamily="34" charset="0"/>
-              </a:rPr>
-              <a:t>   </a:t>
-            </a:r>
-            <a:r>
-              <a:rPr kumimoji="0" lang="ja-JP" altLang="ja-JP" sz="2800" b="1" i="0" u="none" strike="noStrike" cap="none" normalizeH="0" baseline="0" dirty="0">
-                <a:ln>
-                  <a:noFill/>
-                </a:ln>
-                <a:solidFill>
-                  <a:srgbClr val="FF0000"/>
-                </a:solidFill>
-                <a:effectLst/>
-                <a:latin typeface="Arial" panose="020B0604020202020204" pitchFamily="34" charset="0"/>
-              </a:rPr>
-              <a:t>→</a:t>
-            </a:r>
-            <a:r>
-              <a:rPr kumimoji="0" lang="ja-JP" altLang="ja-JP" sz="2800" b="1" i="0" u="none" strike="noStrike" cap="none" normalizeH="0" baseline="0" dirty="0">
-                <a:ln>
-                  <a:noFill/>
-                </a:ln>
-                <a:solidFill>
-                  <a:schemeClr val="tx1"/>
-                </a:solidFill>
-                <a:effectLst/>
-                <a:latin typeface="Arial" panose="020B0604020202020204" pitchFamily="34" charset="0"/>
-              </a:rPr>
-              <a:t> </a:t>
-            </a:r>
-            <a:r>
-              <a:rPr kumimoji="0" lang="ja-JP" altLang="ja-JP" sz="2800" b="1" i="0" u="sng" strike="noStrike" cap="none" normalizeH="0" baseline="0" dirty="0">
-                <a:ln>
-                  <a:noFill/>
-                </a:ln>
-                <a:solidFill>
-                  <a:srgbClr val="FF0000"/>
-                </a:solidFill>
-                <a:effectLst/>
-                <a:latin typeface="Arial" panose="020B0604020202020204" pitchFamily="34" charset="0"/>
-              </a:rPr>
-              <a:t>描画コマンドリスト方式で解決予定</a:t>
-            </a:r>
-            <a:endParaRPr kumimoji="0" lang="ja-JP" altLang="ja-JP" sz="2800" b="0" i="0" u="sng" strike="noStrike" cap="none" normalizeH="0" baseline="0" dirty="0">
-              <a:ln>
-                <a:noFill/>
-              </a:ln>
-              <a:solidFill>
-                <a:srgbClr val="FF0000"/>
-              </a:solidFill>
-              <a:effectLst/>
-              <a:latin typeface="Arial" panose="020B0604020202020204" pitchFamily="34" charset="0"/>
-            </a:endParaRPr>
-          </a:p>
-        </p:txBody>
-      </p:sp>
-      <p:sp>
-        <p:nvSpPr>
-          <p:cNvPr id="3" name="テキスト ボックス 2">
-            <a:extLst>
-              <a:ext uri="{FF2B5EF4-FFF2-40B4-BE49-F238E27FC236}">
-                <a16:creationId xmlns:a16="http://schemas.microsoft.com/office/drawing/2014/main" id="{D5E8B5C8-1559-F56D-8159-A0FBF5C99E58}"/>
-              </a:ext>
-            </a:extLst>
-          </p:cNvPr>
-          <p:cNvSpPr txBox="1"/>
-          <p:nvPr/>
-        </p:nvSpPr>
-        <p:spPr>
-          <a:xfrm>
-            <a:off x="371168" y="4629971"/>
-            <a:ext cx="1973826" cy="584775"/>
-          </a:xfrm>
-          <a:prstGeom prst="rect">
-            <a:avLst/>
-          </a:prstGeom>
-          <a:noFill/>
-          <a:ln w="19050">
-            <a:solidFill>
-              <a:schemeClr val="bg1"/>
-            </a:solidFill>
-          </a:ln>
-        </p:spPr>
-        <p:txBody>
-          <a:bodyPr wrap="square" rtlCol="0">
-            <a:spAutoFit/>
-          </a:bodyPr>
-          <a:lstStyle/>
-          <a:p>
-            <a:pPr algn="l"/>
-            <a:r>
-              <a:rPr kumimoji="1" lang="ja-JP" altLang="en-US" sz="3200" dirty="0">
-                <a:solidFill>
-                  <a:schemeClr val="bg1"/>
-                </a:solidFill>
-              </a:rPr>
-              <a:t>入力情報</a:t>
-            </a:r>
-          </a:p>
-        </p:txBody>
-      </p:sp>
-      <p:sp>
-        <p:nvSpPr>
-          <p:cNvPr id="4" name="テキスト ボックス 3">
-            <a:extLst>
-              <a:ext uri="{FF2B5EF4-FFF2-40B4-BE49-F238E27FC236}">
-                <a16:creationId xmlns:a16="http://schemas.microsoft.com/office/drawing/2014/main" id="{96FBA82A-5A07-D216-661B-1270A38C75D8}"/>
-              </a:ext>
-            </a:extLst>
-          </p:cNvPr>
-          <p:cNvSpPr txBox="1"/>
-          <p:nvPr/>
-        </p:nvSpPr>
-        <p:spPr>
-          <a:xfrm>
-            <a:off x="371168" y="5199356"/>
-            <a:ext cx="11135032" cy="954107"/>
-          </a:xfrm>
-          <a:prstGeom prst="rect">
-            <a:avLst/>
-          </a:prstGeom>
-          <a:noFill/>
-          <a:ln>
-            <a:noFill/>
-          </a:ln>
-        </p:spPr>
-        <p:txBody>
-          <a:bodyPr wrap="square" rtlCol="0">
-            <a:spAutoFit/>
-          </a:bodyPr>
-          <a:lstStyle/>
-          <a:p>
-            <a:pPr marL="0" marR="0" lvl="0" indent="0" algn="l" defTabSz="914400" rtl="0" eaLnBrk="0" fontAlgn="base" latinLnBrk="0" hangingPunct="0">
-              <a:lnSpc>
-                <a:spcPct val="100000"/>
+                <a:spcPct val="150000"/>
               </a:lnSpc>
               <a:spcBef>
                 <a:spcPct val="0"/>
@@ -2850,19 +3242,991 @@
               <a:tabLst/>
             </a:pPr>
             <a:r>
-              <a:rPr kumimoji="0" lang="ja-JP" altLang="en-US" sz="2800" b="0" i="0" u="none" strike="noStrike" cap="none" normalizeH="0" baseline="0" dirty="0">
-                <a:ln>
-                  <a:noFill/>
-                </a:ln>
-                <a:solidFill>
-                  <a:schemeClr val="bg1"/>
-                </a:solidFill>
-                <a:effectLst/>
-                <a:latin typeface="Arial" panose="020B0604020202020204" pitchFamily="34" charset="0"/>
-              </a:rPr>
-              <a:t> マウスとキーボードの入力しか今のままでは取れず、拡張性が低い</a:t>
-            </a:r>
-            <a:endParaRPr kumimoji="0" lang="en-US" altLang="ja-JP" sz="2800" b="0" i="0" u="none" strike="noStrike" cap="none" normalizeH="0" baseline="0" dirty="0">
+              <a:rPr lang="en-US" altLang="ja-JP" sz="2800" u="sng" dirty="0">
+                <a:solidFill>
+                  <a:srgbClr val="FF0000"/>
+                </a:solidFill>
+                <a:latin typeface="Arial" panose="020B0604020202020204" pitchFamily="34" charset="0"/>
+              </a:rPr>
+              <a:t>API</a:t>
+            </a:r>
+            <a:r>
+              <a:rPr lang="ja-JP" altLang="en-US" sz="2800" u="sng" dirty="0">
+                <a:solidFill>
+                  <a:srgbClr val="FF0000"/>
+                </a:solidFill>
+                <a:latin typeface="Arial" panose="020B0604020202020204" pitchFamily="34" charset="0"/>
+              </a:rPr>
+              <a:t>ごとに同じ内容のシェーダーを作成しないといけない</a:t>
+            </a:r>
+            <a:endParaRPr lang="en-US" altLang="ja-JP" sz="2800" u="sng" dirty="0">
+              <a:solidFill>
+                <a:srgbClr val="FF0000"/>
+              </a:solidFill>
+              <a:latin typeface="Arial" panose="020B0604020202020204" pitchFamily="34" charset="0"/>
+            </a:endParaRPr>
+          </a:p>
+        </p:txBody>
+      </p:sp>
+    </p:spTree>
+    <p:extLst>
+      <p:ext uri="{BB962C8B-B14F-4D97-AF65-F5344CB8AC3E}">
+        <p14:creationId xmlns:p14="http://schemas.microsoft.com/office/powerpoint/2010/main" val="958970826"/>
+      </p:ext>
+    </p:extLst>
+  </p:cSld>
+  <p:clrMapOvr>
+    <a:masterClrMapping/>
+  </p:clrMapOvr>
+</p:sld>
+</file>
+
+<file path=ppt/slides/slide14.xml><?xml version="1.0" encoding="utf-8"?>
+<p:sld xmlns:a="http://schemas.openxmlformats.org/drawingml/2006/main" xmlns:r="http://schemas.openxmlformats.org/officeDocument/2006/relationships" xmlns:p="http://schemas.openxmlformats.org/presentationml/2006/main">
+  <p:cSld>
+    <p:spTree>
+      <p:nvGrpSpPr>
+        <p:cNvPr id="1" name="">
+          <a:extLst>
+            <a:ext uri="{FF2B5EF4-FFF2-40B4-BE49-F238E27FC236}">
+              <a16:creationId xmlns:a16="http://schemas.microsoft.com/office/drawing/2014/main" id="{415382BE-C156-AC52-37C4-BF1C36192142}"/>
+            </a:ext>
+          </a:extLst>
+        </p:cNvPr>
+        <p:cNvGrpSpPr/>
+        <p:nvPr/>
+      </p:nvGrpSpPr>
+      <p:grpSpPr>
+        <a:xfrm>
+          <a:off x="0" y="0"/>
+          <a:ext cx="0" cy="0"/>
+          <a:chOff x="0" y="0"/>
+          <a:chExt cx="0" cy="0"/>
+        </a:xfrm>
+      </p:grpSpPr>
+      <p:sp>
+        <p:nvSpPr>
+          <p:cNvPr id="2" name="タイトル 1">
+            <a:extLst>
+              <a:ext uri="{FF2B5EF4-FFF2-40B4-BE49-F238E27FC236}">
+                <a16:creationId xmlns:a16="http://schemas.microsoft.com/office/drawing/2014/main" id="{8040CA87-684D-EC1C-ABB9-DD51D34B89FA}"/>
+              </a:ext>
+            </a:extLst>
+          </p:cNvPr>
+          <p:cNvSpPr>
+            <a:spLocks noGrp="1"/>
+          </p:cNvSpPr>
+          <p:nvPr>
+            <p:ph type="title"/>
+          </p:nvPr>
+        </p:nvSpPr>
+        <p:spPr>
+          <a:xfrm>
+            <a:off x="371168" y="390833"/>
+            <a:ext cx="4734232" cy="1056967"/>
+          </a:xfrm>
+        </p:spPr>
+        <p:txBody>
+          <a:bodyPr/>
+          <a:lstStyle/>
+          <a:p>
+            <a:r>
+              <a:rPr kumimoji="1" lang="ja-JP" altLang="en-US" sz="6000" dirty="0"/>
+              <a:t>問題点と今後</a:t>
+            </a:r>
+          </a:p>
+        </p:txBody>
+      </p:sp>
+      <p:sp>
+        <p:nvSpPr>
+          <p:cNvPr id="7" name="テキスト ボックス 6">
+            <a:extLst>
+              <a:ext uri="{FF2B5EF4-FFF2-40B4-BE49-F238E27FC236}">
+                <a16:creationId xmlns:a16="http://schemas.microsoft.com/office/drawing/2014/main" id="{F8E3F42F-CB54-57EA-1943-5CBB098FF232}"/>
+              </a:ext>
+            </a:extLst>
+          </p:cNvPr>
+          <p:cNvSpPr txBox="1"/>
+          <p:nvPr/>
+        </p:nvSpPr>
+        <p:spPr>
+          <a:xfrm>
+            <a:off x="371168" y="1670339"/>
+            <a:ext cx="3134032" cy="584775"/>
+          </a:xfrm>
+          <a:prstGeom prst="rect">
+            <a:avLst/>
+          </a:prstGeom>
+          <a:noFill/>
+          <a:ln w="19050">
+            <a:solidFill>
+              <a:schemeClr val="bg1"/>
+            </a:solidFill>
+          </a:ln>
+        </p:spPr>
+        <p:txBody>
+          <a:bodyPr wrap="square" rtlCol="0">
+            <a:spAutoFit/>
+          </a:bodyPr>
+          <a:lstStyle/>
+          <a:p>
+            <a:pPr algn="l"/>
+            <a:r>
+              <a:rPr kumimoji="1" lang="ja-JP" altLang="en-US" sz="3200" dirty="0">
+                <a:solidFill>
+                  <a:schemeClr val="bg1"/>
+                </a:solidFill>
+              </a:rPr>
+              <a:t>シェーダー今後</a:t>
+            </a:r>
+          </a:p>
+        </p:txBody>
+      </p:sp>
+      <p:sp>
+        <p:nvSpPr>
+          <p:cNvPr id="9" name="テキスト ボックス 8">
+            <a:extLst>
+              <a:ext uri="{FF2B5EF4-FFF2-40B4-BE49-F238E27FC236}">
+                <a16:creationId xmlns:a16="http://schemas.microsoft.com/office/drawing/2014/main" id="{12E9D2F7-6C31-03B4-1CED-58CE789D817D}"/>
+              </a:ext>
+            </a:extLst>
+          </p:cNvPr>
+          <p:cNvSpPr txBox="1"/>
+          <p:nvPr/>
+        </p:nvSpPr>
+        <p:spPr>
+          <a:xfrm>
+            <a:off x="371168" y="2255114"/>
+            <a:ext cx="10754032" cy="3886641"/>
+          </a:xfrm>
+          <a:prstGeom prst="rect">
+            <a:avLst/>
+          </a:prstGeom>
+          <a:noFill/>
+          <a:ln>
+            <a:noFill/>
+          </a:ln>
+        </p:spPr>
+        <p:txBody>
+          <a:bodyPr wrap="square" rtlCol="0">
+            <a:spAutoFit/>
+          </a:bodyPr>
+          <a:lstStyle/>
+          <a:p>
+            <a:pPr marL="0" marR="0" lvl="0" indent="0" algn="l" defTabSz="914400" rtl="0" eaLnBrk="0" fontAlgn="base" latinLnBrk="0" hangingPunct="0">
+              <a:lnSpc>
+                <a:spcPct val="150000"/>
+              </a:lnSpc>
+              <a:spcBef>
+                <a:spcPct val="0"/>
+              </a:spcBef>
+              <a:spcAft>
+                <a:spcPct val="0"/>
+              </a:spcAft>
+              <a:buClrTx/>
+              <a:buSzTx/>
+              <a:buFontTx/>
+              <a:buChar char="•"/>
+              <a:tabLst/>
+            </a:pPr>
+            <a:r>
+              <a:rPr kumimoji="0" lang="en-US" altLang="ja-JP" sz="2800" i="0" u="sng" strike="noStrike" cap="none" normalizeH="0" baseline="0" dirty="0">
+                <a:ln>
+                  <a:noFill/>
+                </a:ln>
+                <a:solidFill>
+                  <a:srgbClr val="FF0000"/>
+                </a:solidFill>
+                <a:effectLst/>
+                <a:latin typeface="Arial" panose="020B0604020202020204" pitchFamily="34" charset="0"/>
+              </a:rPr>
+              <a:t>HLSL</a:t>
+            </a:r>
+            <a:r>
+              <a:rPr kumimoji="0" lang="ja-JP" altLang="en-US" sz="2800" i="0" u="sng" strike="noStrike" cap="none" normalizeH="0" baseline="0" dirty="0">
+                <a:ln>
+                  <a:noFill/>
+                </a:ln>
+                <a:solidFill>
+                  <a:srgbClr val="FF0000"/>
+                </a:solidFill>
+                <a:effectLst/>
+                <a:latin typeface="Arial" panose="020B0604020202020204" pitchFamily="34" charset="0"/>
+              </a:rPr>
+              <a:t>を唯一のソース</a:t>
+            </a:r>
+            <a:r>
+              <a:rPr kumimoji="0" lang="ja-JP" altLang="en-US" sz="2800" i="0" u="sng" strike="noStrike" cap="none" normalizeH="0" baseline="0" dirty="0">
+                <a:ln>
+                  <a:noFill/>
+                </a:ln>
+                <a:solidFill>
+                  <a:schemeClr val="bg1"/>
+                </a:solidFill>
+                <a:effectLst/>
+                <a:latin typeface="Arial" panose="020B0604020202020204" pitchFamily="34" charset="0"/>
+              </a:rPr>
+              <a:t>として扱うため、</a:t>
+            </a:r>
+            <a:r>
+              <a:rPr kumimoji="0" lang="en-US" altLang="ja-JP" sz="2800" i="0" u="sng" strike="noStrike" cap="none" normalizeH="0" baseline="0" dirty="0">
+                <a:ln>
+                  <a:noFill/>
+                </a:ln>
+                <a:solidFill>
+                  <a:srgbClr val="FF0000"/>
+                </a:solidFill>
+                <a:effectLst/>
+                <a:latin typeface="Arial" panose="020B0604020202020204" pitchFamily="34" charset="0"/>
+              </a:rPr>
+              <a:t>DXC</a:t>
+            </a:r>
+            <a:r>
+              <a:rPr kumimoji="0" lang="ja-JP" altLang="en-US" sz="2800" i="0" u="sng" strike="noStrike" cap="none" normalizeH="0" baseline="0" dirty="0">
+                <a:ln>
+                  <a:noFill/>
+                </a:ln>
+                <a:solidFill>
+                  <a:srgbClr val="FF0000"/>
+                </a:solidFill>
+                <a:effectLst/>
+                <a:latin typeface="Arial" panose="020B0604020202020204" pitchFamily="34" charset="0"/>
+              </a:rPr>
+              <a:t>を使用して</a:t>
+            </a:r>
+            <a:br>
+              <a:rPr kumimoji="0" lang="en-US" altLang="ja-JP" sz="2800" i="0" u="sng" strike="noStrike" cap="none" normalizeH="0" baseline="0" dirty="0">
+                <a:ln>
+                  <a:noFill/>
+                </a:ln>
+                <a:solidFill>
+                  <a:srgbClr val="FF0000"/>
+                </a:solidFill>
+                <a:effectLst/>
+                <a:latin typeface="Arial" panose="020B0604020202020204" pitchFamily="34" charset="0"/>
+              </a:rPr>
+            </a:br>
+            <a:r>
+              <a:rPr kumimoji="0" lang="en-US" altLang="ja-JP" sz="2800" i="0" strike="noStrike" cap="none" normalizeH="0" baseline="0" dirty="0">
+                <a:ln>
+                  <a:noFill/>
+                </a:ln>
+                <a:solidFill>
+                  <a:srgbClr val="FF0000"/>
+                </a:solidFill>
+                <a:effectLst/>
+                <a:latin typeface="Arial" panose="020B0604020202020204" pitchFamily="34" charset="0"/>
+              </a:rPr>
+              <a:t> </a:t>
+            </a:r>
+            <a:r>
+              <a:rPr kumimoji="0" lang="en-US" altLang="ja-JP" sz="2800" i="0" u="sng" strike="noStrike" cap="none" normalizeH="0" baseline="0" dirty="0">
+                <a:ln>
+                  <a:noFill/>
+                </a:ln>
+                <a:solidFill>
+                  <a:srgbClr val="FF0000"/>
+                </a:solidFill>
+                <a:effectLst/>
+                <a:latin typeface="Arial" panose="020B0604020202020204" pitchFamily="34" charset="0"/>
+              </a:rPr>
+              <a:t>SPIR-V</a:t>
+            </a:r>
+            <a:r>
+              <a:rPr kumimoji="0" lang="ja-JP" altLang="en-US" sz="2800" i="0" u="sng" strike="noStrike" cap="none" normalizeH="0" baseline="0" dirty="0">
+                <a:ln>
+                  <a:noFill/>
+                </a:ln>
+                <a:solidFill>
+                  <a:srgbClr val="FF0000"/>
+                </a:solidFill>
+                <a:effectLst/>
+                <a:latin typeface="Arial" panose="020B0604020202020204" pitchFamily="34" charset="0"/>
+              </a:rPr>
+              <a:t>の作成</a:t>
+            </a:r>
+            <a:r>
+              <a:rPr kumimoji="0" lang="ja-JP" altLang="en-US" sz="2800" i="0" u="sng" strike="noStrike" cap="none" normalizeH="0" baseline="0" dirty="0">
+                <a:ln>
+                  <a:noFill/>
+                </a:ln>
+                <a:solidFill>
+                  <a:schemeClr val="bg1"/>
+                </a:solidFill>
+                <a:effectLst/>
+                <a:latin typeface="Arial" panose="020B0604020202020204" pitchFamily="34" charset="0"/>
+              </a:rPr>
+              <a:t>を行えるようにし、</a:t>
+            </a:r>
+            <a:r>
+              <a:rPr kumimoji="0" lang="en-US" altLang="ja-JP" sz="2800" i="0" u="sng" strike="noStrike" cap="none" normalizeH="0" baseline="0" dirty="0">
+                <a:ln>
+                  <a:noFill/>
+                </a:ln>
+                <a:solidFill>
+                  <a:schemeClr val="bg1"/>
+                </a:solidFill>
+                <a:effectLst/>
+                <a:latin typeface="Arial" panose="020B0604020202020204" pitchFamily="34" charset="0"/>
+              </a:rPr>
+              <a:t>SPIR-V</a:t>
+            </a:r>
+            <a:r>
+              <a:rPr lang="ja-JP" altLang="en-US" sz="2800" u="sng" dirty="0">
+                <a:solidFill>
+                  <a:schemeClr val="bg1"/>
+                </a:solidFill>
+                <a:latin typeface="Arial" panose="020B0604020202020204" pitchFamily="34" charset="0"/>
+              </a:rPr>
+              <a:t>から</a:t>
+            </a:r>
+            <a:r>
+              <a:rPr lang="en-US" altLang="ja-JP" sz="2800" u="sng" dirty="0">
+                <a:solidFill>
+                  <a:schemeClr val="bg1"/>
+                </a:solidFill>
+                <a:latin typeface="Arial" panose="020B0604020202020204" pitchFamily="34" charset="0"/>
+              </a:rPr>
+              <a:t>GLSL</a:t>
+            </a:r>
+            <a:r>
+              <a:rPr lang="ja-JP" altLang="en-US" sz="2800" u="sng" dirty="0">
+                <a:solidFill>
+                  <a:schemeClr val="bg1"/>
+                </a:solidFill>
+                <a:latin typeface="Arial" panose="020B0604020202020204" pitchFamily="34" charset="0"/>
+              </a:rPr>
+              <a:t>に</a:t>
+            </a:r>
+            <a:br>
+              <a:rPr lang="en-US" altLang="ja-JP" sz="2800" u="sng" dirty="0">
+                <a:solidFill>
+                  <a:schemeClr val="bg1"/>
+                </a:solidFill>
+                <a:latin typeface="Arial" panose="020B0604020202020204" pitchFamily="34" charset="0"/>
+              </a:rPr>
+            </a:br>
+            <a:r>
+              <a:rPr lang="en-US" altLang="ja-JP" sz="2800" dirty="0">
+                <a:solidFill>
+                  <a:schemeClr val="bg1"/>
+                </a:solidFill>
+                <a:latin typeface="Arial" panose="020B0604020202020204" pitchFamily="34" charset="0"/>
+              </a:rPr>
+              <a:t> </a:t>
+            </a:r>
+            <a:r>
+              <a:rPr lang="ja-JP" altLang="en-US" sz="2800" u="sng" dirty="0">
+                <a:solidFill>
+                  <a:schemeClr val="bg1"/>
+                </a:solidFill>
+                <a:latin typeface="Arial" panose="020B0604020202020204" pitchFamily="34" charset="0"/>
+              </a:rPr>
+              <a:t>変換できるようにする。</a:t>
+            </a:r>
+            <a:endParaRPr lang="en-US" altLang="ja-JP" sz="2800" u="sng" dirty="0">
+              <a:solidFill>
+                <a:schemeClr val="bg1"/>
+              </a:solidFill>
+              <a:latin typeface="Arial" panose="020B0604020202020204" pitchFamily="34" charset="0"/>
+            </a:endParaRPr>
+          </a:p>
+          <a:p>
+            <a:pPr marL="0" marR="0" lvl="0" indent="0" algn="l" defTabSz="914400" rtl="0" eaLnBrk="0" fontAlgn="base" latinLnBrk="0" hangingPunct="0">
+              <a:lnSpc>
+                <a:spcPct val="150000"/>
+              </a:lnSpc>
+              <a:spcBef>
+                <a:spcPct val="0"/>
+              </a:spcBef>
+              <a:spcAft>
+                <a:spcPct val="0"/>
+              </a:spcAft>
+              <a:buClrTx/>
+              <a:buSzTx/>
+              <a:buFontTx/>
+              <a:buChar char="•"/>
+              <a:tabLst/>
+            </a:pPr>
+            <a:r>
+              <a:rPr lang="en-US" altLang="ja-JP" sz="2800" u="sng" dirty="0">
+                <a:solidFill>
+                  <a:srgbClr val="FF0000"/>
+                </a:solidFill>
+                <a:latin typeface="Arial" panose="020B0604020202020204" pitchFamily="34" charset="0"/>
+              </a:rPr>
+              <a:t>SPIR-V</a:t>
+            </a:r>
+            <a:r>
+              <a:rPr lang="ja-JP" altLang="en-US" sz="2800" u="sng" dirty="0">
+                <a:solidFill>
+                  <a:srgbClr val="FF0000"/>
+                </a:solidFill>
+                <a:latin typeface="Arial" panose="020B0604020202020204" pitchFamily="34" charset="0"/>
+              </a:rPr>
+              <a:t>を作成してリファレンスを書き出すことで、</a:t>
+            </a:r>
+            <a:br>
+              <a:rPr lang="en-US" altLang="ja-JP" sz="2800" u="sng" dirty="0">
+                <a:solidFill>
+                  <a:srgbClr val="FF0000"/>
+                </a:solidFill>
+                <a:latin typeface="Arial" panose="020B0604020202020204" pitchFamily="34" charset="0"/>
+              </a:rPr>
+            </a:br>
+            <a:r>
+              <a:rPr lang="en-US" altLang="ja-JP" sz="2800" dirty="0">
+                <a:solidFill>
+                  <a:srgbClr val="FF0000"/>
+                </a:solidFill>
+                <a:latin typeface="Arial" panose="020B0604020202020204" pitchFamily="34" charset="0"/>
+              </a:rPr>
+              <a:t> </a:t>
+            </a:r>
+            <a:r>
+              <a:rPr lang="ja-JP" altLang="en-US" sz="2800" u="sng" dirty="0">
+                <a:solidFill>
+                  <a:srgbClr val="FF0000"/>
+                </a:solidFill>
+                <a:latin typeface="Arial" panose="020B0604020202020204" pitchFamily="34" charset="0"/>
+              </a:rPr>
+              <a:t>すべての</a:t>
+            </a:r>
+            <a:r>
+              <a:rPr lang="en-US" altLang="ja-JP" sz="2800" u="sng" dirty="0">
+                <a:solidFill>
+                  <a:srgbClr val="FF0000"/>
+                </a:solidFill>
+                <a:latin typeface="Arial" panose="020B0604020202020204" pitchFamily="34" charset="0"/>
+              </a:rPr>
+              <a:t>API</a:t>
+            </a:r>
+            <a:r>
+              <a:rPr lang="ja-JP" altLang="en-US" sz="2800" u="sng" dirty="0">
+                <a:solidFill>
+                  <a:srgbClr val="FF0000"/>
+                </a:solidFill>
+                <a:latin typeface="Arial" panose="020B0604020202020204" pitchFamily="34" charset="0"/>
+              </a:rPr>
+              <a:t>で共通してリファレンス情報</a:t>
+            </a:r>
+            <a:r>
+              <a:rPr lang="ja-JP" altLang="en-US" sz="2800" u="sng" dirty="0">
+                <a:solidFill>
+                  <a:schemeClr val="bg1"/>
+                </a:solidFill>
+                <a:latin typeface="Arial" panose="020B0604020202020204" pitchFamily="34" charset="0"/>
+              </a:rPr>
+              <a:t>を</a:t>
+            </a:r>
+            <a:br>
+              <a:rPr lang="en-US" altLang="ja-JP" sz="2800" u="sng" dirty="0">
+                <a:solidFill>
+                  <a:schemeClr val="bg1"/>
+                </a:solidFill>
+                <a:latin typeface="Arial" panose="020B0604020202020204" pitchFamily="34" charset="0"/>
+              </a:rPr>
+            </a:br>
+            <a:r>
+              <a:rPr lang="ja-JP" altLang="en-US" sz="2800" dirty="0">
+                <a:solidFill>
+                  <a:schemeClr val="bg1"/>
+                </a:solidFill>
+                <a:latin typeface="Arial" panose="020B0604020202020204" pitchFamily="34" charset="0"/>
+              </a:rPr>
+              <a:t> </a:t>
+            </a:r>
+            <a:r>
+              <a:rPr lang="ja-JP" altLang="en-US" sz="2800" u="sng" dirty="0">
+                <a:solidFill>
+                  <a:schemeClr val="bg1"/>
+                </a:solidFill>
+                <a:latin typeface="Arial" panose="020B0604020202020204" pitchFamily="34" charset="0"/>
+              </a:rPr>
+              <a:t>使用することができるようにする。</a:t>
+            </a:r>
+            <a:endParaRPr lang="en-US" altLang="ja-JP" sz="2800" u="sng" dirty="0">
+              <a:solidFill>
+                <a:schemeClr val="bg1"/>
+              </a:solidFill>
+              <a:latin typeface="Arial" panose="020B0604020202020204" pitchFamily="34" charset="0"/>
+            </a:endParaRPr>
+          </a:p>
+        </p:txBody>
+      </p:sp>
+    </p:spTree>
+    <p:extLst>
+      <p:ext uri="{BB962C8B-B14F-4D97-AF65-F5344CB8AC3E}">
+        <p14:creationId xmlns:p14="http://schemas.microsoft.com/office/powerpoint/2010/main" val="948200797"/>
+      </p:ext>
+    </p:extLst>
+  </p:cSld>
+  <p:clrMapOvr>
+    <a:masterClrMapping/>
+  </p:clrMapOvr>
+</p:sld>
+</file>
+
+<file path=ppt/slides/slide15.xml><?xml version="1.0" encoding="utf-8"?>
+<p:sld xmlns:a="http://schemas.openxmlformats.org/drawingml/2006/main" xmlns:r="http://schemas.openxmlformats.org/officeDocument/2006/relationships" xmlns:p="http://schemas.openxmlformats.org/presentationml/2006/main">
+  <p:cSld>
+    <p:spTree>
+      <p:nvGrpSpPr>
+        <p:cNvPr id="1" name="">
+          <a:extLst>
+            <a:ext uri="{FF2B5EF4-FFF2-40B4-BE49-F238E27FC236}">
+              <a16:creationId xmlns:a16="http://schemas.microsoft.com/office/drawing/2014/main" id="{386F3188-19C8-2FCD-2D2B-EA71A9C908A2}"/>
+            </a:ext>
+          </a:extLst>
+        </p:cNvPr>
+        <p:cNvGrpSpPr/>
+        <p:nvPr/>
+      </p:nvGrpSpPr>
+      <p:grpSpPr>
+        <a:xfrm>
+          <a:off x="0" y="0"/>
+          <a:ext cx="0" cy="0"/>
+          <a:chOff x="0" y="0"/>
+          <a:chExt cx="0" cy="0"/>
+        </a:xfrm>
+      </p:grpSpPr>
+      <p:sp>
+        <p:nvSpPr>
+          <p:cNvPr id="2" name="タイトル 1">
+            <a:extLst>
+              <a:ext uri="{FF2B5EF4-FFF2-40B4-BE49-F238E27FC236}">
+                <a16:creationId xmlns:a16="http://schemas.microsoft.com/office/drawing/2014/main" id="{3E019E04-736B-F0DB-4951-81BAD9B245ED}"/>
+              </a:ext>
+            </a:extLst>
+          </p:cNvPr>
+          <p:cNvSpPr>
+            <a:spLocks noGrp="1"/>
+          </p:cNvSpPr>
+          <p:nvPr>
+            <p:ph type="title"/>
+          </p:nvPr>
+        </p:nvSpPr>
+        <p:spPr>
+          <a:xfrm>
+            <a:off x="371168" y="390833"/>
+            <a:ext cx="4734232" cy="1056967"/>
+          </a:xfrm>
+        </p:spPr>
+        <p:txBody>
+          <a:bodyPr/>
+          <a:lstStyle/>
+          <a:p>
+            <a:r>
+              <a:rPr kumimoji="1" lang="ja-JP" altLang="en-US" sz="6000" dirty="0"/>
+              <a:t>問題点と今後</a:t>
+            </a:r>
+          </a:p>
+        </p:txBody>
+      </p:sp>
+      <p:sp>
+        <p:nvSpPr>
+          <p:cNvPr id="7" name="テキスト ボックス 6">
+            <a:extLst>
+              <a:ext uri="{FF2B5EF4-FFF2-40B4-BE49-F238E27FC236}">
+                <a16:creationId xmlns:a16="http://schemas.microsoft.com/office/drawing/2014/main" id="{72E50B0E-8835-5949-7A23-88FB461DFB55}"/>
+              </a:ext>
+            </a:extLst>
+          </p:cNvPr>
+          <p:cNvSpPr txBox="1"/>
+          <p:nvPr/>
+        </p:nvSpPr>
+        <p:spPr>
+          <a:xfrm>
+            <a:off x="371168" y="1670339"/>
+            <a:ext cx="3057832" cy="584775"/>
+          </a:xfrm>
+          <a:prstGeom prst="rect">
+            <a:avLst/>
+          </a:prstGeom>
+          <a:noFill/>
+          <a:ln w="19050">
+            <a:solidFill>
+              <a:schemeClr val="bg1"/>
+            </a:solidFill>
+          </a:ln>
+        </p:spPr>
+        <p:txBody>
+          <a:bodyPr wrap="square" rtlCol="0">
+            <a:spAutoFit/>
+          </a:bodyPr>
+          <a:lstStyle/>
+          <a:p>
+            <a:pPr algn="l"/>
+            <a:r>
+              <a:rPr kumimoji="1" lang="ja-JP" altLang="en-US" sz="3200" dirty="0">
+                <a:solidFill>
+                  <a:schemeClr val="bg1"/>
+                </a:solidFill>
+              </a:rPr>
+              <a:t>入力情報問題点</a:t>
+            </a:r>
+          </a:p>
+        </p:txBody>
+      </p:sp>
+      <p:sp>
+        <p:nvSpPr>
+          <p:cNvPr id="9" name="テキスト ボックス 8">
+            <a:extLst>
+              <a:ext uri="{FF2B5EF4-FFF2-40B4-BE49-F238E27FC236}">
+                <a16:creationId xmlns:a16="http://schemas.microsoft.com/office/drawing/2014/main" id="{D9285FAB-2352-3DA8-E8D0-6F31733D75B0}"/>
+              </a:ext>
+            </a:extLst>
+          </p:cNvPr>
+          <p:cNvSpPr txBox="1"/>
+          <p:nvPr/>
+        </p:nvSpPr>
+        <p:spPr>
+          <a:xfrm>
+            <a:off x="371168" y="2255114"/>
+            <a:ext cx="10754032" cy="1305165"/>
+          </a:xfrm>
+          <a:prstGeom prst="rect">
+            <a:avLst/>
+          </a:prstGeom>
+          <a:noFill/>
+          <a:ln>
+            <a:noFill/>
+          </a:ln>
+        </p:spPr>
+        <p:txBody>
+          <a:bodyPr wrap="square" rtlCol="0">
+            <a:spAutoFit/>
+          </a:bodyPr>
+          <a:lstStyle/>
+          <a:p>
+            <a:pPr marL="0" marR="0" lvl="0" indent="0" algn="l" defTabSz="914400" rtl="0" eaLnBrk="0" fontAlgn="base" latinLnBrk="0" hangingPunct="0">
+              <a:lnSpc>
+                <a:spcPct val="150000"/>
+              </a:lnSpc>
+              <a:spcBef>
+                <a:spcPct val="0"/>
+              </a:spcBef>
+              <a:spcAft>
+                <a:spcPct val="0"/>
+              </a:spcAft>
+              <a:buClrTx/>
+              <a:buSzTx/>
+              <a:buFontTx/>
+              <a:buChar char="•"/>
+              <a:tabLst/>
+            </a:pPr>
+            <a:r>
+              <a:rPr kumimoji="0" lang="ja-JP" altLang="en-US" sz="2800" i="0" u="sng" strike="noStrike" cap="none" normalizeH="0" baseline="0" dirty="0">
+                <a:ln>
+                  <a:noFill/>
+                </a:ln>
+                <a:solidFill>
+                  <a:schemeClr val="bg1"/>
+                </a:solidFill>
+                <a:effectLst/>
+                <a:latin typeface="Arial" panose="020B0604020202020204" pitchFamily="34" charset="0"/>
+              </a:rPr>
+              <a:t>入力情報をインターフェイスとして渡しているため、</a:t>
+            </a:r>
+            <a:br>
+              <a:rPr kumimoji="0" lang="en-US" altLang="ja-JP" sz="2800" i="0" u="sng" strike="noStrike" cap="none" normalizeH="0" baseline="0" dirty="0">
+                <a:ln>
+                  <a:noFill/>
+                </a:ln>
+                <a:solidFill>
+                  <a:schemeClr val="bg1"/>
+                </a:solidFill>
+                <a:effectLst/>
+                <a:latin typeface="Arial" panose="020B0604020202020204" pitchFamily="34" charset="0"/>
+              </a:rPr>
+            </a:br>
+            <a:r>
+              <a:rPr kumimoji="0" lang="en-US" altLang="ja-JP" sz="2800" i="0" u="sng" strike="noStrike" cap="none" normalizeH="0" baseline="0" dirty="0">
+                <a:ln>
+                  <a:noFill/>
+                </a:ln>
+                <a:solidFill>
+                  <a:schemeClr val="bg1"/>
+                </a:solidFill>
+                <a:effectLst/>
+                <a:latin typeface="Arial" panose="020B0604020202020204" pitchFamily="34" charset="0"/>
+              </a:rPr>
+              <a:t> </a:t>
+            </a:r>
+            <a:r>
+              <a:rPr lang="ja-JP" altLang="en-US" sz="2800" u="sng" dirty="0">
+                <a:solidFill>
+                  <a:srgbClr val="FF0000"/>
+                </a:solidFill>
+                <a:latin typeface="Arial" panose="020B0604020202020204" pitchFamily="34" charset="0"/>
+              </a:rPr>
+              <a:t>マウスやキーボード以外が使用することができない</a:t>
+            </a:r>
+            <a:endParaRPr kumimoji="0" lang="en-US" altLang="ja-JP" sz="2800" i="0" u="sng" strike="noStrike" cap="none" normalizeH="0" baseline="0" dirty="0">
+              <a:ln>
+                <a:noFill/>
+              </a:ln>
+              <a:solidFill>
+                <a:srgbClr val="FF0000"/>
+              </a:solidFill>
+              <a:effectLst/>
+              <a:latin typeface="Arial" panose="020B0604020202020204" pitchFamily="34" charset="0"/>
+            </a:endParaRPr>
+          </a:p>
+        </p:txBody>
+      </p:sp>
+    </p:spTree>
+    <p:extLst>
+      <p:ext uri="{BB962C8B-B14F-4D97-AF65-F5344CB8AC3E}">
+        <p14:creationId xmlns:p14="http://schemas.microsoft.com/office/powerpoint/2010/main" val="1393977988"/>
+      </p:ext>
+    </p:extLst>
+  </p:cSld>
+  <p:clrMapOvr>
+    <a:masterClrMapping/>
+  </p:clrMapOvr>
+</p:sld>
+</file>
+
+<file path=ppt/slides/slide16.xml><?xml version="1.0" encoding="utf-8"?>
+<p:sld xmlns:a="http://schemas.openxmlformats.org/drawingml/2006/main" xmlns:r="http://schemas.openxmlformats.org/officeDocument/2006/relationships" xmlns:p="http://schemas.openxmlformats.org/presentationml/2006/main">
+  <p:cSld>
+    <p:spTree>
+      <p:nvGrpSpPr>
+        <p:cNvPr id="1" name="">
+          <a:extLst>
+            <a:ext uri="{FF2B5EF4-FFF2-40B4-BE49-F238E27FC236}">
+              <a16:creationId xmlns:a16="http://schemas.microsoft.com/office/drawing/2014/main" id="{CED33DFD-41D1-8181-CA94-056E3D11B0DE}"/>
+            </a:ext>
+          </a:extLst>
+        </p:cNvPr>
+        <p:cNvGrpSpPr/>
+        <p:nvPr/>
+      </p:nvGrpSpPr>
+      <p:grpSpPr>
+        <a:xfrm>
+          <a:off x="0" y="0"/>
+          <a:ext cx="0" cy="0"/>
+          <a:chOff x="0" y="0"/>
+          <a:chExt cx="0" cy="0"/>
+        </a:xfrm>
+      </p:grpSpPr>
+      <p:sp>
+        <p:nvSpPr>
+          <p:cNvPr id="2" name="タイトル 1">
+            <a:extLst>
+              <a:ext uri="{FF2B5EF4-FFF2-40B4-BE49-F238E27FC236}">
+                <a16:creationId xmlns:a16="http://schemas.microsoft.com/office/drawing/2014/main" id="{B99DBFAA-44CF-AFB1-1BAA-F94E28FB368E}"/>
+              </a:ext>
+            </a:extLst>
+          </p:cNvPr>
+          <p:cNvSpPr>
+            <a:spLocks noGrp="1"/>
+          </p:cNvSpPr>
+          <p:nvPr>
+            <p:ph type="title"/>
+          </p:nvPr>
+        </p:nvSpPr>
+        <p:spPr>
+          <a:xfrm>
+            <a:off x="371168" y="390833"/>
+            <a:ext cx="4734232" cy="1056967"/>
+          </a:xfrm>
+        </p:spPr>
+        <p:txBody>
+          <a:bodyPr/>
+          <a:lstStyle/>
+          <a:p>
+            <a:r>
+              <a:rPr kumimoji="1" lang="ja-JP" altLang="en-US" sz="6000" dirty="0"/>
+              <a:t>問題点と今後</a:t>
+            </a:r>
+          </a:p>
+        </p:txBody>
+      </p:sp>
+      <p:sp>
+        <p:nvSpPr>
+          <p:cNvPr id="7" name="テキスト ボックス 6">
+            <a:extLst>
+              <a:ext uri="{FF2B5EF4-FFF2-40B4-BE49-F238E27FC236}">
+                <a16:creationId xmlns:a16="http://schemas.microsoft.com/office/drawing/2014/main" id="{17C76505-AD4D-414E-5D42-6E957B3EFE10}"/>
+              </a:ext>
+            </a:extLst>
+          </p:cNvPr>
+          <p:cNvSpPr txBox="1"/>
+          <p:nvPr/>
+        </p:nvSpPr>
+        <p:spPr>
+          <a:xfrm>
+            <a:off x="371168" y="1670339"/>
+            <a:ext cx="3057832" cy="584775"/>
+          </a:xfrm>
+          <a:prstGeom prst="rect">
+            <a:avLst/>
+          </a:prstGeom>
+          <a:noFill/>
+          <a:ln w="19050">
+            <a:solidFill>
+              <a:schemeClr val="bg1"/>
+            </a:solidFill>
+          </a:ln>
+        </p:spPr>
+        <p:txBody>
+          <a:bodyPr wrap="square" rtlCol="0">
+            <a:spAutoFit/>
+          </a:bodyPr>
+          <a:lstStyle/>
+          <a:p>
+            <a:pPr algn="l"/>
+            <a:r>
+              <a:rPr kumimoji="1" lang="ja-JP" altLang="en-US" sz="3200" dirty="0">
+                <a:solidFill>
+                  <a:schemeClr val="bg1"/>
+                </a:solidFill>
+              </a:rPr>
+              <a:t>入力情報今後</a:t>
+            </a:r>
+          </a:p>
+        </p:txBody>
+      </p:sp>
+      <p:sp>
+        <p:nvSpPr>
+          <p:cNvPr id="9" name="テキスト ボックス 8">
+            <a:extLst>
+              <a:ext uri="{FF2B5EF4-FFF2-40B4-BE49-F238E27FC236}">
+                <a16:creationId xmlns:a16="http://schemas.microsoft.com/office/drawing/2014/main" id="{714381DF-FCFE-D97C-698F-2EA59AE767C4}"/>
+              </a:ext>
+            </a:extLst>
+          </p:cNvPr>
+          <p:cNvSpPr txBox="1"/>
+          <p:nvPr/>
+        </p:nvSpPr>
+        <p:spPr>
+          <a:xfrm>
+            <a:off x="371168" y="2255114"/>
+            <a:ext cx="10754032" cy="1301318"/>
+          </a:xfrm>
+          <a:prstGeom prst="rect">
+            <a:avLst/>
+          </a:prstGeom>
+          <a:noFill/>
+          <a:ln>
+            <a:noFill/>
+          </a:ln>
+        </p:spPr>
+        <p:txBody>
+          <a:bodyPr wrap="square" rtlCol="0">
+            <a:spAutoFit/>
+          </a:bodyPr>
+          <a:lstStyle/>
+          <a:p>
+            <a:pPr marL="0" marR="0" lvl="0" indent="0" algn="l" defTabSz="914400" rtl="0" eaLnBrk="0" fontAlgn="base" latinLnBrk="0" hangingPunct="0">
+              <a:lnSpc>
+                <a:spcPct val="150000"/>
+              </a:lnSpc>
+              <a:spcBef>
+                <a:spcPct val="0"/>
+              </a:spcBef>
+              <a:spcAft>
+                <a:spcPct val="0"/>
+              </a:spcAft>
+              <a:buClrTx/>
+              <a:buSzTx/>
+              <a:buFontTx/>
+              <a:buChar char="•"/>
+              <a:tabLst/>
+            </a:pPr>
+            <a:r>
+              <a:rPr kumimoji="0" lang="ja-JP" altLang="en-US" sz="2800" i="0" u="sng" strike="noStrike" cap="none" normalizeH="0" baseline="0" dirty="0">
+                <a:ln>
+                  <a:noFill/>
+                </a:ln>
+                <a:solidFill>
+                  <a:srgbClr val="FF0000"/>
+                </a:solidFill>
+                <a:effectLst/>
+                <a:latin typeface="Arial" panose="020B0604020202020204" pitchFamily="34" charset="0"/>
+              </a:rPr>
+              <a:t>動作（</a:t>
+            </a:r>
+            <a:r>
+              <a:rPr kumimoji="0" lang="en-US" altLang="ja-JP" sz="2800" i="0" u="sng" strike="noStrike" cap="none" normalizeH="0" baseline="0" dirty="0">
+                <a:ln>
+                  <a:noFill/>
+                </a:ln>
+                <a:solidFill>
+                  <a:srgbClr val="FF0000"/>
+                </a:solidFill>
+                <a:effectLst/>
+                <a:latin typeface="Arial" panose="020B0604020202020204" pitchFamily="34" charset="0"/>
+              </a:rPr>
+              <a:t>Action</a:t>
+            </a:r>
+            <a:r>
+              <a:rPr kumimoji="0" lang="ja-JP" altLang="en-US" sz="2800" i="0" u="sng" strike="noStrike" cap="none" normalizeH="0" baseline="0" dirty="0">
+                <a:ln>
+                  <a:noFill/>
+                </a:ln>
+                <a:solidFill>
+                  <a:srgbClr val="FF0000"/>
+                </a:solidFill>
+                <a:effectLst/>
+                <a:latin typeface="Arial" panose="020B0604020202020204" pitchFamily="34" charset="0"/>
+              </a:rPr>
+              <a:t>）を渡す</a:t>
+            </a:r>
+            <a:r>
+              <a:rPr kumimoji="0" lang="ja-JP" altLang="en-US" sz="2800" i="0" u="sng" strike="noStrike" cap="none" normalizeH="0" baseline="0" dirty="0">
+                <a:ln>
+                  <a:noFill/>
+                </a:ln>
+                <a:solidFill>
+                  <a:schemeClr val="bg1"/>
+                </a:solidFill>
+                <a:effectLst/>
+                <a:latin typeface="Arial" panose="020B0604020202020204" pitchFamily="34" charset="0"/>
+              </a:rPr>
+              <a:t>ことで、どの入力情報を使用しているかを</a:t>
+            </a:r>
+            <a:br>
+              <a:rPr kumimoji="0" lang="en-US" altLang="ja-JP" sz="2800" i="0" u="sng" strike="noStrike" cap="none" normalizeH="0" baseline="0" dirty="0">
+                <a:ln>
+                  <a:noFill/>
+                </a:ln>
+                <a:solidFill>
+                  <a:schemeClr val="bg1"/>
+                </a:solidFill>
+                <a:effectLst/>
+                <a:latin typeface="Arial" panose="020B0604020202020204" pitchFamily="34" charset="0"/>
+              </a:rPr>
+            </a:br>
+            <a:r>
+              <a:rPr kumimoji="0" lang="en-US" altLang="ja-JP" sz="2800" i="0" strike="noStrike" cap="none" normalizeH="0" baseline="0" dirty="0">
+                <a:ln>
+                  <a:noFill/>
+                </a:ln>
+                <a:solidFill>
+                  <a:schemeClr val="bg1"/>
+                </a:solidFill>
+                <a:effectLst/>
+                <a:latin typeface="Arial" panose="020B0604020202020204" pitchFamily="34" charset="0"/>
+              </a:rPr>
+              <a:t> </a:t>
+            </a:r>
+            <a:r>
+              <a:rPr kumimoji="0" lang="ja-JP" altLang="en-US" sz="2800" i="0" u="sng" strike="noStrike" cap="none" normalizeH="0" baseline="0" dirty="0">
+                <a:ln>
+                  <a:noFill/>
+                </a:ln>
+                <a:solidFill>
+                  <a:schemeClr val="bg1"/>
+                </a:solidFill>
+                <a:effectLst/>
+                <a:latin typeface="Arial" panose="020B0604020202020204" pitchFamily="34" charset="0"/>
+              </a:rPr>
+              <a:t>ゲーム層から隠す</a:t>
+            </a:r>
+            <a:endParaRPr kumimoji="0" lang="en-US" altLang="ja-JP" sz="2800" i="0" u="sng" strike="noStrike" cap="none" normalizeH="0" baseline="0" dirty="0">
               <a:ln>
                 <a:noFill/>
               </a:ln>
@@ -2873,121 +4237,12 @@
               <a:latin typeface="Arial" panose="020B0604020202020204" pitchFamily="34" charset="0"/>
             </a:endParaRPr>
           </a:p>
-          <a:p>
-            <a:pPr marL="0" marR="0" lvl="0" indent="0" algn="l" defTabSz="914400" rtl="0" eaLnBrk="0" fontAlgn="base" latinLnBrk="0" hangingPunct="0">
-              <a:lnSpc>
-                <a:spcPct val="100000"/>
-              </a:lnSpc>
-              <a:spcBef>
-                <a:spcPct val="0"/>
-              </a:spcBef>
-              <a:spcAft>
-                <a:spcPct val="0"/>
-              </a:spcAft>
-              <a:buClrTx/>
-              <a:buSzTx/>
-              <a:tabLst/>
-            </a:pPr>
-            <a:r>
-              <a:rPr lang="ja-JP" altLang="en-US" sz="2800" dirty="0">
-                <a:solidFill>
-                  <a:schemeClr val="bg1"/>
-                </a:solidFill>
-                <a:latin typeface="Arial" panose="020B0604020202020204" pitchFamily="34" charset="0"/>
-              </a:rPr>
-              <a:t>　</a:t>
-            </a:r>
-            <a:r>
-              <a:rPr lang="ja-JP" altLang="en-US" sz="2800" dirty="0">
-                <a:solidFill>
-                  <a:srgbClr val="FF0000"/>
-                </a:solidFill>
-                <a:latin typeface="Arial" panose="020B0604020202020204" pitchFamily="34" charset="0"/>
-              </a:rPr>
-              <a:t>→ </a:t>
-            </a:r>
-            <a:r>
-              <a:rPr kumimoji="0" lang="ja-JP" altLang="ja-JP" sz="2800" b="0" i="0" u="sng" strike="noStrike" cap="none" normalizeH="0" baseline="0" dirty="0">
-                <a:ln>
-                  <a:noFill/>
-                </a:ln>
-                <a:solidFill>
-                  <a:srgbClr val="FF0000"/>
-                </a:solidFill>
-                <a:effectLst/>
-                <a:latin typeface="Arial" panose="020B0604020202020204" pitchFamily="34" charset="0"/>
-              </a:rPr>
-              <a:t>プラットフォーム層で入力をアクション</a:t>
-            </a:r>
-            <a:r>
-              <a:rPr kumimoji="0" lang="en-US" altLang="ja-JP" sz="2800" b="0" i="0" u="sng" strike="noStrike" cap="none" normalizeH="0" baseline="0" dirty="0">
-                <a:ln>
-                  <a:noFill/>
-                </a:ln>
-                <a:solidFill>
-                  <a:srgbClr val="FF0000"/>
-                </a:solidFill>
-                <a:effectLst/>
-                <a:latin typeface="Arial" panose="020B0604020202020204" pitchFamily="34" charset="0"/>
-              </a:rPr>
-              <a:t>(</a:t>
-            </a:r>
-            <a:r>
-              <a:rPr kumimoji="0" lang="ja-JP" altLang="ja-JP" sz="2800" b="0" i="0" u="sng" strike="noStrike" cap="none" normalizeH="0" baseline="0" dirty="0">
-                <a:ln>
-                  <a:noFill/>
-                </a:ln>
-                <a:solidFill>
-                  <a:srgbClr val="FF0000"/>
-                </a:solidFill>
-                <a:effectLst/>
-                <a:latin typeface="Arial" panose="020B0604020202020204" pitchFamily="34" charset="0"/>
-              </a:rPr>
-              <a:t>意図</a:t>
-            </a:r>
-            <a:r>
-              <a:rPr kumimoji="0" lang="en-US" altLang="ja-JP" sz="2800" b="0" i="0" u="sng" strike="noStrike" cap="none" normalizeH="0" baseline="0" dirty="0">
-                <a:ln>
-                  <a:noFill/>
-                </a:ln>
-                <a:solidFill>
-                  <a:srgbClr val="FF0000"/>
-                </a:solidFill>
-                <a:effectLst/>
-                <a:latin typeface="Arial" panose="020B0604020202020204" pitchFamily="34" charset="0"/>
-              </a:rPr>
-              <a:t>)</a:t>
-            </a:r>
-            <a:r>
-              <a:rPr kumimoji="0" lang="ja-JP" altLang="ja-JP" sz="2800" b="0" i="0" u="sng" strike="noStrike" cap="none" normalizeH="0" baseline="0" dirty="0">
-                <a:ln>
-                  <a:noFill/>
-                </a:ln>
-                <a:solidFill>
-                  <a:srgbClr val="FF0000"/>
-                </a:solidFill>
-                <a:effectLst/>
-                <a:latin typeface="Arial" panose="020B0604020202020204" pitchFamily="34" charset="0"/>
-              </a:rPr>
-              <a:t>へ変換</a:t>
-            </a:r>
-            <a:endParaRPr kumimoji="0" lang="en-US" altLang="ja-JP" sz="2800" b="0" i="0" u="sng" strike="noStrike" cap="none" normalizeH="0" baseline="0" dirty="0">
-              <a:ln>
-                <a:noFill/>
-              </a:ln>
-              <a:solidFill>
-                <a:srgbClr val="FF0000"/>
-              </a:solidFill>
-              <a:effectLst/>
-              <a:latin typeface="Arial" panose="020B0604020202020204" pitchFamily="34" charset="0"/>
-            </a:endParaRPr>
-          </a:p>
         </p:txBody>
       </p:sp>
     </p:spTree>
     <p:extLst>
       <p:ext uri="{BB962C8B-B14F-4D97-AF65-F5344CB8AC3E}">
-        <p14:creationId xmlns:p14="http://schemas.microsoft.com/office/powerpoint/2010/main" val="2142884083"/>
+        <p14:creationId xmlns:p14="http://schemas.microsoft.com/office/powerpoint/2010/main" val="2002499457"/>
       </p:ext>
     </p:extLst>
   </p:cSld>
@@ -3170,7 +4425,7 @@
         <p:spPr>
           <a:xfrm>
             <a:off x="381000" y="3707250"/>
-            <a:ext cx="1752600" cy="584775"/>
+            <a:ext cx="4267200" cy="584775"/>
           </a:xfrm>
           <a:prstGeom prst="rect">
             <a:avLst/>
@@ -3204,7 +4459,7 @@
                 <a:latin typeface="+mj-ea"/>
                 <a:ea typeface="+mj-ea"/>
               </a:rPr>
-              <a:t>今後</a:t>
+              <a:t>問題点と今後</a:t>
             </a:r>
           </a:p>
         </p:txBody>
@@ -4754,7 +6009,7 @@
         <p:spPr>
           <a:xfrm>
             <a:off x="371168" y="2255114"/>
-            <a:ext cx="10754032" cy="1947649"/>
+            <a:ext cx="10982632" cy="1947649"/>
           </a:xfrm>
           <a:prstGeom prst="rect">
             <a:avLst/>
@@ -4946,6 +6201,29 @@
               </a:rPr>
               <a:t>リソースは名前管理とし、自動的に共有される設計</a:t>
             </a:r>
+            <a:r>
+              <a:rPr kumimoji="0" lang="ja-JP" altLang="en-US" sz="2800" b="1" i="0" u="sng" strike="noStrike" cap="none" normalizeH="0" baseline="0" dirty="0">
+                <a:ln>
+                  <a:noFill/>
+                </a:ln>
+                <a:solidFill>
+                  <a:srgbClr val="FF0000"/>
+                </a:solidFill>
+                <a:effectLst/>
+                <a:latin typeface="Arial" panose="020B0604020202020204" pitchFamily="34" charset="0"/>
+              </a:rPr>
+              <a:t>のため疎結合</a:t>
+            </a:r>
+            <a:endParaRPr kumimoji="0" lang="ja-JP" altLang="ja-JP" sz="2800" b="1" i="0" u="sng" strike="noStrike" cap="none" normalizeH="0" baseline="0" dirty="0">
+              <a:ln>
+                <a:noFill/>
+              </a:ln>
+              <a:solidFill>
+                <a:srgbClr val="FF0000"/>
+              </a:solidFill>
+              <a:effectLst/>
+              <a:latin typeface="Arial" panose="020B0604020202020204" pitchFamily="34" charset="0"/>
+            </a:endParaRPr>
           </a:p>
         </p:txBody>
       </p:sp>
@@ -6351,57 +7629,45 @@
               <a:tabLst/>
             </a:pPr>
             <a:r>
-              <a:rPr kumimoji="0" lang="en-US" altLang="ja-JP" sz="2800" b="1" i="0" u="sng" strike="noStrike" cap="none" normalizeH="0" baseline="0" dirty="0">
-                <a:ln>
-                  <a:noFill/>
-                </a:ln>
-                <a:solidFill>
-                  <a:srgbClr val="FF0000"/>
-                </a:solidFill>
-                <a:effectLst/>
-              </a:rPr>
-              <a:t>Visual</a:t>
+              <a:rPr lang="en-US" altLang="ja-JP" sz="2800" b="1" u="sng" dirty="0">
+                <a:solidFill>
+                  <a:srgbClr val="FF0000"/>
+                </a:solidFill>
+                <a:latin typeface="Arial" panose="020B0604020202020204" pitchFamily="34" charset="0"/>
+              </a:rPr>
+              <a:t>OS</a:t>
             </a:r>
             <a:r>
               <a:rPr lang="ja-JP" altLang="en-US" sz="2800" b="1" u="sng" dirty="0">
                 <a:solidFill>
                   <a:srgbClr val="FF0000"/>
                 </a:solidFill>
-              </a:rPr>
-              <a:t> </a:t>
-            </a:r>
-            <a:r>
-              <a:rPr kumimoji="0" lang="en-US" altLang="ja-JP" sz="2800" b="1" i="0" u="sng" strike="noStrike" cap="none" normalizeH="0" baseline="0" dirty="0">
-                <a:ln>
-                  <a:noFill/>
-                </a:ln>
-                <a:solidFill>
-                  <a:srgbClr val="FF0000"/>
-                </a:solidFill>
-                <a:effectLst/>
-              </a:rPr>
-              <a:t>Studio</a:t>
-            </a:r>
-            <a:r>
-              <a:rPr kumimoji="0" lang="ja-JP" altLang="en-US" sz="2800" b="1" i="0" u="sng" strike="noStrike" cap="none" normalizeH="0" baseline="0" dirty="0">
-                <a:ln>
-                  <a:noFill/>
-                </a:ln>
-                <a:solidFill>
-                  <a:srgbClr val="FF0000"/>
-                </a:solidFill>
-                <a:effectLst/>
-              </a:rPr>
-              <a:t>に依存しない</a:t>
-            </a:r>
-            <a:endParaRPr kumimoji="0" lang="ja-JP" altLang="ja-JP" sz="2800" b="1" i="0" u="sng" strike="noStrike" cap="none" normalizeH="0" baseline="0" dirty="0">
-              <a:ln>
-                <a:noFill/>
-              </a:ln>
+                <a:latin typeface="Arial" panose="020B0604020202020204" pitchFamily="34" charset="0"/>
+              </a:rPr>
+              <a:t>や</a:t>
+            </a:r>
+            <a:r>
+              <a:rPr lang="en-US" altLang="ja-JP" sz="2800" b="1" u="sng" dirty="0">
+                <a:solidFill>
+                  <a:srgbClr val="FF0000"/>
+                </a:solidFill>
+                <a:latin typeface="Arial" panose="020B0604020202020204" pitchFamily="34" charset="0"/>
+              </a:rPr>
+              <a:t>IDE</a:t>
+            </a:r>
+            <a:r>
+              <a:rPr lang="ja-JP" altLang="en-US" sz="2800" b="1" u="sng" dirty="0">
+                <a:solidFill>
+                  <a:srgbClr val="FF0000"/>
+                </a:solidFill>
+                <a:latin typeface="Arial" panose="020B0604020202020204" pitchFamily="34" charset="0"/>
+              </a:rPr>
+              <a:t>が異なってもビルドが可能</a:t>
+            </a:r>
+            <a:endParaRPr lang="en-US" altLang="ja-JP" sz="2800" b="1" u="sng" dirty="0">
               <a:solidFill>
                 <a:srgbClr val="FF0000"/>
               </a:solidFill>
-              <a:effectLst/>
               <a:latin typeface="Arial" panose="020B0604020202020204" pitchFamily="34" charset="0"/>
             </a:endParaRPr>
           </a:p>
